--- a/output/wordlabs-deep-3day.pptx
+++ b/output/wordlabs-deep-3day.pptx
@@ -4240,7 +4240,7 @@
                 <a:ea typeface="Calibri" pitchFamily="34" charset="-122"/>
                 <a:cs typeface="Calibri" pitchFamily="34" charset="-120"/>
               </a:rPr>
-              <a:t>"far down, intense, profound"</a:t>
+              <a:t>"far down, profound distance"</a:t>
             </a:r>
             <a:endParaRPr lang="en-US" sz="2200" dirty="0"/>
           </a:p>
@@ -4279,7 +4279,7 @@
                 <a:ea typeface="Calibri" pitchFamily="34" charset="-122"/>
                 <a:cs typeface="Calibri" pitchFamily="34" charset="-120"/>
               </a:rPr>
-              <a:t>Origin: Old English: deop</a:t>
+              <a:t>Origin: Latin: deepaz</a:t>
             </a:r>
             <a:endParaRPr lang="en-US" sz="1300" dirty="0"/>
           </a:p>
@@ -5288,7 +5288,7 @@
                 <a:ea typeface="Calibri" pitchFamily="34" charset="-122"/>
                 <a:cs typeface="Calibri" pitchFamily="34" charset="-120"/>
               </a:rPr>
-              <a:t>Word Labs  •  wordlabs.app  •  Root: 'deep' = far down, intense, profound</a:t>
+              <a:t>Word Labs  •  wordlabs.app  •  Root: 'deep' = far down, profound distance</a:t>
             </a:r>
             <a:endParaRPr lang="en-US" sz="800" dirty="0"/>
           </a:p>
@@ -5622,7 +5622,7 @@
                 <a:ea typeface="Trebuchet MS" pitchFamily="34" charset="-122"/>
                 <a:cs typeface="Trebuchet MS" pitchFamily="34" charset="-120"/>
               </a:rPr>
-              <a:t>0</a:t>
+              <a:t>1</a:t>
             </a:r>
             <a:pPr algn="ctr" indent="0" marL="0">
               <a:buNone/>
@@ -5928,7 +5928,7 @@
                 <a:ea typeface="Calibri" pitchFamily="34" charset="-122"/>
                 <a:cs typeface="Calibri" pitchFamily="34" charset="-120"/>
               </a:rPr>
-              <a:t>Word Labs  •  wordlabs.app  •  Root: 'deep' = far down, intense, profound</a:t>
+              <a:t>Word Labs  •  wordlabs.app  •  Root: 'deep' = far down, profound distance</a:t>
             </a:r>
             <a:endParaRPr lang="en-US" sz="800" dirty="0"/>
           </a:p>
@@ -6040,7 +6040,7 @@
                 <a:ea typeface="Calibri" pitchFamily="34" charset="-122"/>
                 <a:cs typeface="Calibri" pitchFamily="34" charset="-120"/>
               </a:rPr>
-              <a:t>The submarine dived </a:t>
+              <a:t>The scientist studied the </a:t>
             </a:r>
             <a:pPr algn="l" indent="0" marL="0">
               <a:buNone/>
@@ -6057,7 +6057,7 @@
                 <a:ea typeface="Calibri" pitchFamily="34" charset="-122"/>
                 <a:cs typeface="Calibri" pitchFamily="34" charset="-120"/>
               </a:rPr>
-              <a:t>deeply</a:t>
+              <a:t>deepest</a:t>
             </a:r>
             <a:pPr algn="l" indent="0" marL="0">
               <a:buNone/>
@@ -6071,7 +6071,7 @@
                 <a:ea typeface="Calibri" pitchFamily="34" charset="-122"/>
                 <a:cs typeface="Calibri" pitchFamily="34" charset="-120"/>
               </a:rPr>
-              <a:t> into the ocean and discovered the </a:t>
+              <a:t> trench carefully, and her findings helped </a:t>
             </a:r>
             <a:pPr algn="l" indent="0" marL="0">
               <a:buNone/>
@@ -6088,7 +6088,7 @@
                 <a:ea typeface="Calibri" pitchFamily="34" charset="-122"/>
                 <a:cs typeface="Calibri" pitchFamily="34" charset="-120"/>
               </a:rPr>
-              <a:t>deepest</a:t>
+              <a:t>deepen</a:t>
             </a:r>
             <a:pPr algn="l" indent="0" marL="0">
               <a:buNone/>
@@ -6102,7 +6102,7 @@
                 <a:ea typeface="Calibri" pitchFamily="34" charset="-122"/>
                 <a:cs typeface="Calibri" pitchFamily="34" charset="-120"/>
               </a:rPr>
-              <a:t> trench ever explored.</a:t>
+              <a:t> our understanding of the ocean.</a:t>
             </a:r>
             <a:endParaRPr lang="en-US" sz="1800" dirty="0"/>
           </a:p>
@@ -6257,7 +6257,7 @@
                 <a:ea typeface="Trebuchet MS" pitchFamily="34" charset="-122"/>
                 <a:cs typeface="Trebuchet MS" pitchFamily="34" charset="-120"/>
               </a:rPr>
-              <a:t>deeply</a:t>
+              <a:t>deepest</a:t>
             </a:r>
             <a:endParaRPr lang="en-US" sz="1400" dirty="0"/>
           </a:p>
@@ -6385,7 +6385,7 @@
                 <a:ea typeface="Trebuchet MS" pitchFamily="34" charset="-122"/>
                 <a:cs typeface="Trebuchet MS" pitchFamily="34" charset="-120"/>
               </a:rPr>
-              <a:t>deepest</a:t>
+              <a:t>deepen</a:t>
             </a:r>
             <a:endParaRPr lang="en-US" sz="1400" dirty="0"/>
           </a:p>
@@ -6716,7 +6716,7 @@
                 <a:ea typeface="Calibri" pitchFamily="34" charset="-122"/>
                 <a:cs typeface="Calibri" pitchFamily="34" charset="-120"/>
               </a:rPr>
-              <a:t>Word Labs  •  wordlabs.app  •  Root: 'deep' = far down, intense, profound</a:t>
+              <a:t>Word Labs  •  wordlabs.app  •  Root: 'deep' = far down, profound distance</a:t>
             </a:r>
             <a:endParaRPr lang="en-US" sz="800" dirty="0"/>
           </a:p>
@@ -6855,7 +6855,7 @@
                 <a:ea typeface="Trebuchet MS" pitchFamily="34" charset="-122"/>
                 <a:cs typeface="Trebuchet MS" pitchFamily="34" charset="-120"/>
               </a:rPr>
-              <a:t>deeply</a:t>
+              <a:t>deepest</a:t>
             </a:r>
             <a:endParaRPr lang="en-US" sz="2800" dirty="0"/>
           </a:p>
@@ -7543,7 +7543,7 @@
                 <a:ea typeface="Calibri" pitchFamily="34" charset="-122"/>
                 <a:cs typeface="Calibri" pitchFamily="34" charset="-120"/>
               </a:rPr>
-              <a:t>Word Labs  •  wordlabs.app  •  Root: 'deep' = far down, intense, profound</a:t>
+              <a:t>Word Labs  •  wordlabs.app  •  Root: 'deep' = far down, profound distance</a:t>
             </a:r>
             <a:endParaRPr lang="en-US" sz="800" dirty="0"/>
           </a:p>
@@ -7682,7 +7682,7 @@
                 <a:ea typeface="Trebuchet MS" pitchFamily="34" charset="-122"/>
                 <a:cs typeface="Trebuchet MS" pitchFamily="34" charset="-120"/>
               </a:rPr>
-              <a:t>deeply</a:t>
+              <a:t>deepest</a:t>
             </a:r>
             <a:endParaRPr lang="en-US" sz="2800" dirty="0"/>
           </a:p>
@@ -7860,7 +7860,7 @@
                 <a:ea typeface="Calibri" pitchFamily="34" charset="-122"/>
                 <a:cs typeface="Calibri" pitchFamily="34" charset="-120"/>
               </a:rPr>
-              <a:t>far down, intense</a:t>
+              <a:t>far down, profound</a:t>
             </a:r>
             <a:endParaRPr lang="en-US" sz="850" dirty="0"/>
           </a:p>
@@ -7933,7 +7933,7 @@
                 <a:ea typeface="Trebuchet MS" pitchFamily="34" charset="-122"/>
                 <a:cs typeface="Trebuchet MS" pitchFamily="34" charset="-120"/>
               </a:rPr>
-              <a:t>ly</a:t>
+              <a:t>est</a:t>
             </a:r>
             <a:endParaRPr lang="en-US" sz="1300" dirty="0"/>
           </a:p>
@@ -7972,7 +7972,7 @@
                 <a:ea typeface="Calibri" pitchFamily="34" charset="-122"/>
                 <a:cs typeface="Calibri" pitchFamily="34" charset="-120"/>
               </a:rPr>
-              <a:t>in a certain way (adverb)</a:t>
+              <a:t>the most</a:t>
             </a:r>
             <a:endParaRPr lang="en-US" sz="850" dirty="0"/>
           </a:p>
@@ -8528,7 +8528,7 @@
                 <a:ea typeface="Calibri" pitchFamily="34" charset="-122"/>
                 <a:cs typeface="Calibri" pitchFamily="34" charset="-120"/>
               </a:rPr>
-              <a:t>Word Labs  •  wordlabs.app  •  Root: 'deep' = far down, intense, profound</a:t>
+              <a:t>Word Labs  •  wordlabs.app  •  Root: 'deep' = far down, profound distance</a:t>
             </a:r>
             <a:endParaRPr lang="en-US" sz="800" dirty="0"/>
           </a:p>
@@ -8667,7 +8667,7 @@
                 <a:ea typeface="Trebuchet MS" pitchFamily="34" charset="-122"/>
                 <a:cs typeface="Trebuchet MS" pitchFamily="34" charset="-120"/>
               </a:rPr>
-              <a:t>deeply</a:t>
+              <a:t>deepest</a:t>
             </a:r>
             <a:endParaRPr lang="en-US" sz="2800" dirty="0"/>
           </a:p>
@@ -8845,7 +8845,7 @@
                 <a:ea typeface="Calibri" pitchFamily="34" charset="-122"/>
                 <a:cs typeface="Calibri" pitchFamily="34" charset="-120"/>
               </a:rPr>
-              <a:t>far down, intense</a:t>
+              <a:t>far down, profound</a:t>
             </a:r>
             <a:endParaRPr lang="en-US" sz="850" dirty="0"/>
           </a:p>
@@ -8918,7 +8918,7 @@
                 <a:ea typeface="Trebuchet MS" pitchFamily="34" charset="-122"/>
                 <a:cs typeface="Trebuchet MS" pitchFamily="34" charset="-120"/>
               </a:rPr>
-              <a:t>ly</a:t>
+              <a:t>est</a:t>
             </a:r>
             <a:endParaRPr lang="en-US" sz="1300" dirty="0"/>
           </a:p>
@@ -8957,7 +8957,7 @@
                 <a:ea typeface="Calibri" pitchFamily="34" charset="-122"/>
                 <a:cs typeface="Calibri" pitchFamily="34" charset="-120"/>
               </a:rPr>
-              <a:t>in a certain way (adverb)</a:t>
+              <a:t>the most</a:t>
             </a:r>
             <a:endParaRPr lang="en-US" sz="850" dirty="0"/>
           </a:p>
@@ -9221,7 +9221,7 @@
                 <a:ea typeface="Trebuchet MS" pitchFamily="34" charset="-122"/>
                 <a:cs typeface="Trebuchet MS" pitchFamily="34" charset="-120"/>
               </a:rPr>
-              <a:t>ly</a:t>
+              <a:t>est</a:t>
             </a:r>
             <a:endParaRPr lang="en-US" sz="1400" dirty="0"/>
           </a:p>
@@ -9645,7 +9645,7 @@
                 <a:ea typeface="Calibri" pitchFamily="34" charset="-122"/>
                 <a:cs typeface="Calibri" pitchFamily="34" charset="-120"/>
               </a:rPr>
-              <a:t>Word Labs  •  wordlabs.app  •  Root: 'deep' = far down, intense, profound</a:t>
+              <a:t>Word Labs  •  wordlabs.app  •  Root: 'deep' = far down, profound distance</a:t>
             </a:r>
             <a:endParaRPr lang="en-US" sz="800" dirty="0"/>
           </a:p>
@@ -9784,7 +9784,7 @@
                 <a:ea typeface="Trebuchet MS" pitchFamily="34" charset="-122"/>
                 <a:cs typeface="Trebuchet MS" pitchFamily="34" charset="-120"/>
               </a:rPr>
-              <a:t>deeply</a:t>
+              <a:t>deepest</a:t>
             </a:r>
             <a:endParaRPr lang="en-US" sz="2800" dirty="0"/>
           </a:p>
@@ -9962,7 +9962,7 @@
                 <a:ea typeface="Calibri" pitchFamily="34" charset="-122"/>
                 <a:cs typeface="Calibri" pitchFamily="34" charset="-120"/>
               </a:rPr>
-              <a:t>far down, intense</a:t>
+              <a:t>far down, profound</a:t>
             </a:r>
             <a:endParaRPr lang="en-US" sz="850" dirty="0"/>
           </a:p>
@@ -10035,7 +10035,7 @@
                 <a:ea typeface="Trebuchet MS" pitchFamily="34" charset="-122"/>
                 <a:cs typeface="Trebuchet MS" pitchFamily="34" charset="-120"/>
               </a:rPr>
-              <a:t>ly</a:t>
+              <a:t>est</a:t>
             </a:r>
             <a:endParaRPr lang="en-US" sz="1300" dirty="0"/>
           </a:p>
@@ -10074,7 +10074,7 @@
                 <a:ea typeface="Calibri" pitchFamily="34" charset="-122"/>
                 <a:cs typeface="Calibri" pitchFamily="34" charset="-120"/>
               </a:rPr>
-              <a:t>in a certain way (adverb)</a:t>
+              <a:t>the most</a:t>
             </a:r>
             <a:endParaRPr lang="en-US" sz="850" dirty="0"/>
           </a:p>
@@ -10338,7 +10338,7 @@
                 <a:ea typeface="Trebuchet MS" pitchFamily="34" charset="-122"/>
                 <a:cs typeface="Trebuchet MS" pitchFamily="34" charset="-120"/>
               </a:rPr>
-              <a:t>ly</a:t>
+              <a:t>est</a:t>
             </a:r>
             <a:endParaRPr lang="en-US" sz="1400" dirty="0"/>
           </a:p>
@@ -10445,7 +10445,7 @@
         </p:nvSpPr>
         <p:spPr>
           <a:xfrm>
-            <a:off x="2427732" y="4169664"/>
+            <a:off x="2254649" y="4169664"/>
             <a:ext cx="685800" cy="475488"/>
           </a:xfrm>
           <a:prstGeom prst="rect">
@@ -10472,7 +10472,7 @@
         </p:nvSpPr>
         <p:spPr>
           <a:xfrm>
-            <a:off x="2427732" y="4169664"/>
+            <a:off x="2254649" y="4169664"/>
             <a:ext cx="685800" cy="475488"/>
           </a:xfrm>
           <a:prstGeom prst="rect">
@@ -10511,7 +10511,7 @@
         </p:nvSpPr>
         <p:spPr>
           <a:xfrm>
-            <a:off x="3639312" y="4169664"/>
+            <a:off x="3293146" y="4169664"/>
             <a:ext cx="685800" cy="475488"/>
           </a:xfrm>
           <a:prstGeom prst="rect">
@@ -10538,7 +10538,7 @@
         </p:nvSpPr>
         <p:spPr>
           <a:xfrm>
-            <a:off x="3639312" y="4169664"/>
+            <a:off x="3293146" y="4169664"/>
             <a:ext cx="685800" cy="475488"/>
           </a:xfrm>
           <a:prstGeom prst="rect">
@@ -10577,7 +10577,7 @@
         </p:nvSpPr>
         <p:spPr>
           <a:xfrm>
-            <a:off x="4850892" y="4169664"/>
+            <a:off x="4331643" y="4169664"/>
             <a:ext cx="685800" cy="475488"/>
           </a:xfrm>
           <a:prstGeom prst="rect">
@@ -10604,7 +10604,7 @@
         </p:nvSpPr>
         <p:spPr>
           <a:xfrm>
-            <a:off x="4850892" y="4169664"/>
+            <a:off x="4331643" y="4169664"/>
             <a:ext cx="685800" cy="475488"/>
           </a:xfrm>
           <a:prstGeom prst="rect">
@@ -10643,7 +10643,7 @@
         </p:nvSpPr>
         <p:spPr>
           <a:xfrm>
-            <a:off x="6062472" y="4169664"/>
+            <a:off x="5370141" y="4169664"/>
             <a:ext cx="685800" cy="475488"/>
           </a:xfrm>
           <a:prstGeom prst="rect">
@@ -10670,7 +10670,7 @@
         </p:nvSpPr>
         <p:spPr>
           <a:xfrm>
-            <a:off x="6062472" y="4169664"/>
+            <a:off x="5370141" y="4169664"/>
             <a:ext cx="685800" cy="475488"/>
           </a:xfrm>
           <a:prstGeom prst="rect">
@@ -10695,7 +10695,7 @@
                 <a:ea typeface="Trebuchet MS" pitchFamily="34" charset="-122"/>
                 <a:cs typeface="Trebuchet MS" pitchFamily="34" charset="-120"/>
               </a:rPr>
-              <a:t>l</a:t>
+              <a:t>e</a:t>
             </a:r>
             <a:endParaRPr lang="en-US" sz="900" dirty="0"/>
           </a:p>
@@ -10709,7 +10709,7 @@
         </p:nvSpPr>
         <p:spPr>
           <a:xfrm>
-            <a:off x="7274052" y="4169664"/>
+            <a:off x="6408638" y="4169664"/>
             <a:ext cx="685800" cy="475488"/>
           </a:xfrm>
           <a:prstGeom prst="rect">
@@ -10736,7 +10736,7 @@
         </p:nvSpPr>
         <p:spPr>
           <a:xfrm>
-            <a:off x="7274052" y="4169664"/>
+            <a:off x="6408638" y="4169664"/>
             <a:ext cx="685800" cy="475488"/>
           </a:xfrm>
           <a:prstGeom prst="rect">
@@ -10761,7 +10761,73 @@
                 <a:ea typeface="Trebuchet MS" pitchFamily="34" charset="-122"/>
                 <a:cs typeface="Trebuchet MS" pitchFamily="34" charset="-120"/>
               </a:rPr>
-              <a:t>y</a:t>
+              <a:t>s</a:t>
+            </a:r>
+            <a:endParaRPr lang="en-US" sz="900" dirty="0"/>
+          </a:p>
+        </p:txBody>
+      </p:sp>
+      <p:sp>
+        <p:nvSpPr>
+          <p:cNvPr id="43" name="Shape 41"/>
+          <p:cNvSpPr/>
+          <p:nvPr/>
+        </p:nvSpPr>
+        <p:spPr>
+          <a:xfrm>
+            <a:off x="7447135" y="4169664"/>
+            <a:ext cx="685800" cy="475488"/>
+          </a:xfrm>
+          <a:prstGeom prst="rect">
+            <a:avLst>
+              <a:gd name="adj" fmla="val 7692"/>
+            </a:avLst>
+          </a:prstGeom>
+          <a:solidFill>
+            <a:srgbClr val="FFFFFF"/>
+          </a:solidFill>
+          <a:ln w="12700">
+            <a:solidFill>
+              <a:srgbClr val="DB2777"/>
+            </a:solidFill>
+            <a:prstDash val="solid"/>
+          </a:ln>
+        </p:spPr>
+      </p:sp>
+      <p:sp>
+        <p:nvSpPr>
+          <p:cNvPr id="44" name="Text 42"/>
+          <p:cNvSpPr/>
+          <p:nvPr/>
+        </p:nvSpPr>
+        <p:spPr>
+          <a:xfrm>
+            <a:off x="7447135" y="4169664"/>
+            <a:ext cx="685800" cy="475488"/>
+          </a:xfrm>
+          <a:prstGeom prst="rect">
+            <a:avLst/>
+          </a:prstGeom>
+          <a:noFill/>
+          <a:ln/>
+        </p:spPr>
+        <p:txBody>
+          <a:bodyPr wrap="square" lIns="0" tIns="0" rIns="0" bIns="0" rtlCol="0" anchor="ctr"/>
+          <a:lstStyle/>
+          <a:p>
+            <a:pPr algn="ctr" indent="0" marL="0">
+              <a:buNone/>
+            </a:pPr>
+            <a:r>
+              <a:rPr lang="en-US" sz="900" b="1" dirty="0">
+                <a:solidFill>
+                  <a:srgbClr val="9D174D"/>
+                </a:solidFill>
+                <a:latin typeface="Trebuchet MS" pitchFamily="34" charset="0"/>
+                <a:ea typeface="Trebuchet MS" pitchFamily="34" charset="-122"/>
+                <a:cs typeface="Trebuchet MS" pitchFamily="34" charset="-120"/>
+              </a:rPr>
+              <a:t>t</a:t>
             </a:r>
             <a:endParaRPr lang="en-US" sz="900" dirty="0"/>
           </a:p>
@@ -11053,7 +11119,7 @@
                 <a:ea typeface="Calibri" pitchFamily="34" charset="-122"/>
                 <a:cs typeface="Calibri" pitchFamily="34" charset="-120"/>
               </a:rPr>
-              <a:t>Word Labs  •  wordlabs.app  •  Root: 'deep' = far down, intense, profound</a:t>
+              <a:t>Word Labs  •  wordlabs.app  •  Root: 'deep' = far down, profound distance</a:t>
             </a:r>
             <a:endParaRPr lang="en-US" sz="800" dirty="0"/>
           </a:p>
@@ -11192,7 +11258,7 @@
                 <a:ea typeface="Trebuchet MS" pitchFamily="34" charset="-122"/>
                 <a:cs typeface="Trebuchet MS" pitchFamily="34" charset="-120"/>
               </a:rPr>
-              <a:t>deepest</a:t>
+              <a:t>deepen</a:t>
             </a:r>
             <a:endParaRPr lang="en-US" sz="2800" dirty="0"/>
           </a:p>
@@ -11880,7 +11946,7 @@
                 <a:ea typeface="Calibri" pitchFamily="34" charset="-122"/>
                 <a:cs typeface="Calibri" pitchFamily="34" charset="-120"/>
               </a:rPr>
-              <a:t>Word Labs  •  wordlabs.app  •  Root: 'deep' = far down, intense, profound</a:t>
+              <a:t>Word Labs  •  wordlabs.app  •  Root: 'deep' = far down, profound distance</a:t>
             </a:r>
             <a:endParaRPr lang="en-US" sz="800" dirty="0"/>
           </a:p>
@@ -12019,7 +12085,7 @@
                 <a:ea typeface="Trebuchet MS" pitchFamily="34" charset="-122"/>
                 <a:cs typeface="Trebuchet MS" pitchFamily="34" charset="-120"/>
               </a:rPr>
-              <a:t>deepest</a:t>
+              <a:t>deepen</a:t>
             </a:r>
             <a:endParaRPr lang="en-US" sz="2800" dirty="0"/>
           </a:p>
@@ -12197,7 +12263,7 @@
                 <a:ea typeface="Calibri" pitchFamily="34" charset="-122"/>
                 <a:cs typeface="Calibri" pitchFamily="34" charset="-120"/>
               </a:rPr>
-              <a:t>far down, intense</a:t>
+              <a:t>far down, profound</a:t>
             </a:r>
             <a:endParaRPr lang="en-US" sz="850" dirty="0"/>
           </a:p>
@@ -12270,7 +12336,7 @@
                 <a:ea typeface="Trebuchet MS" pitchFamily="34" charset="-122"/>
                 <a:cs typeface="Trebuchet MS" pitchFamily="34" charset="-120"/>
               </a:rPr>
-              <a:t>est</a:t>
+              <a:t>en</a:t>
             </a:r>
             <a:endParaRPr lang="en-US" sz="1300" dirty="0"/>
           </a:p>
@@ -12309,7 +12375,7 @@
                 <a:ea typeface="Calibri" pitchFamily="34" charset="-122"/>
                 <a:cs typeface="Calibri" pitchFamily="34" charset="-120"/>
               </a:rPr>
-              <a:t>the most (superlative)</a:t>
+              <a:t>to make or become</a:t>
             </a:r>
             <a:endParaRPr lang="en-US" sz="850" dirty="0"/>
           </a:p>
@@ -12865,7 +12931,7 @@
                 <a:ea typeface="Calibri" pitchFamily="34" charset="-122"/>
                 <a:cs typeface="Calibri" pitchFamily="34" charset="-120"/>
               </a:rPr>
-              <a:t>Word Labs  •  wordlabs.app  •  Root: 'deep' = far down, intense, profound</a:t>
+              <a:t>Word Labs  •  wordlabs.app  •  Root: 'deep' = far down, profound distance</a:t>
             </a:r>
             <a:endParaRPr lang="en-US" sz="800" dirty="0"/>
           </a:p>
@@ -13004,7 +13070,7 @@
                 <a:ea typeface="Trebuchet MS" pitchFamily="34" charset="-122"/>
                 <a:cs typeface="Trebuchet MS" pitchFamily="34" charset="-120"/>
               </a:rPr>
-              <a:t>deepest</a:t>
+              <a:t>deepen</a:t>
             </a:r>
             <a:endParaRPr lang="en-US" sz="2800" dirty="0"/>
           </a:p>
@@ -13182,7 +13248,7 @@
                 <a:ea typeface="Calibri" pitchFamily="34" charset="-122"/>
                 <a:cs typeface="Calibri" pitchFamily="34" charset="-120"/>
               </a:rPr>
-              <a:t>far down, intense</a:t>
+              <a:t>far down, profound</a:t>
             </a:r>
             <a:endParaRPr lang="en-US" sz="850" dirty="0"/>
           </a:p>
@@ -13255,7 +13321,7 @@
                 <a:ea typeface="Trebuchet MS" pitchFamily="34" charset="-122"/>
                 <a:cs typeface="Trebuchet MS" pitchFamily="34" charset="-120"/>
               </a:rPr>
-              <a:t>est</a:t>
+              <a:t>en</a:t>
             </a:r>
             <a:endParaRPr lang="en-US" sz="1300" dirty="0"/>
           </a:p>
@@ -13294,7 +13360,7 @@
                 <a:ea typeface="Calibri" pitchFamily="34" charset="-122"/>
                 <a:cs typeface="Calibri" pitchFamily="34" charset="-120"/>
               </a:rPr>
-              <a:t>the most (superlative)</a:t>
+              <a:t>to make or become</a:t>
             </a:r>
             <a:endParaRPr lang="en-US" sz="850" dirty="0"/>
           </a:p>
@@ -13558,7 +13624,7 @@
                 <a:ea typeface="Trebuchet MS" pitchFamily="34" charset="-122"/>
                 <a:cs typeface="Trebuchet MS" pitchFamily="34" charset="-120"/>
               </a:rPr>
-              <a:t>est</a:t>
+              <a:t>en</a:t>
             </a:r>
             <a:endParaRPr lang="en-US" sz="1400" dirty="0"/>
           </a:p>
@@ -13891,7 +13957,7 @@
                 <a:ea typeface="Calibri" pitchFamily="34" charset="-122"/>
                 <a:cs typeface="Calibri" pitchFamily="34" charset="-120"/>
               </a:rPr>
-              <a:t>Root 'deep' — far down, intense, profound</a:t>
+              <a:t>Root 'deep' — far down, profound distance</a:t>
             </a:r>
             <a:endParaRPr lang="en-US" sz="1600" dirty="0"/>
           </a:p>
@@ -14247,7 +14313,7 @@
                 <a:ea typeface="Calibri" pitchFamily="34" charset="-122"/>
                 <a:cs typeface="Calibri" pitchFamily="34" charset="-120"/>
               </a:rPr>
-              <a:t>Word Labs  •  wordlabs.app  •  Root: 'deep' = far down, intense, profound</a:t>
+              <a:t>Word Labs  •  wordlabs.app  •  Root: 'deep' = far down, profound distance</a:t>
             </a:r>
             <a:endParaRPr lang="en-US" sz="800" dirty="0"/>
           </a:p>
@@ -14386,7 +14452,7 @@
                 <a:ea typeface="Trebuchet MS" pitchFamily="34" charset="-122"/>
                 <a:cs typeface="Trebuchet MS" pitchFamily="34" charset="-120"/>
               </a:rPr>
-              <a:t>deepest</a:t>
+              <a:t>deepen</a:t>
             </a:r>
             <a:endParaRPr lang="en-US" sz="2800" dirty="0"/>
           </a:p>
@@ -14564,7 +14630,7 @@
                 <a:ea typeface="Calibri" pitchFamily="34" charset="-122"/>
                 <a:cs typeface="Calibri" pitchFamily="34" charset="-120"/>
               </a:rPr>
-              <a:t>far down, intense</a:t>
+              <a:t>far down, profound</a:t>
             </a:r>
             <a:endParaRPr lang="en-US" sz="850" dirty="0"/>
           </a:p>
@@ -14637,7 +14703,7 @@
                 <a:ea typeface="Trebuchet MS" pitchFamily="34" charset="-122"/>
                 <a:cs typeface="Trebuchet MS" pitchFamily="34" charset="-120"/>
               </a:rPr>
-              <a:t>est</a:t>
+              <a:t>en</a:t>
             </a:r>
             <a:endParaRPr lang="en-US" sz="1300" dirty="0"/>
           </a:p>
@@ -14676,7 +14742,7 @@
                 <a:ea typeface="Calibri" pitchFamily="34" charset="-122"/>
                 <a:cs typeface="Calibri" pitchFamily="34" charset="-120"/>
               </a:rPr>
-              <a:t>the most (superlative)</a:t>
+              <a:t>to make or become</a:t>
             </a:r>
             <a:endParaRPr lang="en-US" sz="850" dirty="0"/>
           </a:p>
@@ -14940,7 +15006,7 @@
                 <a:ea typeface="Trebuchet MS" pitchFamily="34" charset="-122"/>
                 <a:cs typeface="Trebuchet MS" pitchFamily="34" charset="-120"/>
               </a:rPr>
-              <a:t>est</a:t>
+              <a:t>en</a:t>
             </a:r>
             <a:endParaRPr lang="en-US" sz="1400" dirty="0"/>
           </a:p>
@@ -15047,7 +15113,7 @@
         </p:nvSpPr>
         <p:spPr>
           <a:xfrm>
-            <a:off x="2254649" y="4169664"/>
+            <a:off x="2427732" y="4169664"/>
             <a:ext cx="685800" cy="475488"/>
           </a:xfrm>
           <a:prstGeom prst="rect">
@@ -15074,7 +15140,7 @@
         </p:nvSpPr>
         <p:spPr>
           <a:xfrm>
-            <a:off x="2254649" y="4169664"/>
+            <a:off x="2427732" y="4169664"/>
             <a:ext cx="685800" cy="475488"/>
           </a:xfrm>
           <a:prstGeom prst="rect">
@@ -15113,7 +15179,7 @@
         </p:nvSpPr>
         <p:spPr>
           <a:xfrm>
-            <a:off x="3293146" y="4169664"/>
+            <a:off x="3639312" y="4169664"/>
             <a:ext cx="685800" cy="475488"/>
           </a:xfrm>
           <a:prstGeom prst="rect">
@@ -15140,7 +15206,7 @@
         </p:nvSpPr>
         <p:spPr>
           <a:xfrm>
-            <a:off x="3293146" y="4169664"/>
+            <a:off x="3639312" y="4169664"/>
             <a:ext cx="685800" cy="475488"/>
           </a:xfrm>
           <a:prstGeom prst="rect">
@@ -15179,7 +15245,7 @@
         </p:nvSpPr>
         <p:spPr>
           <a:xfrm>
-            <a:off x="4331643" y="4169664"/>
+            <a:off x="4850892" y="4169664"/>
             <a:ext cx="685800" cy="475488"/>
           </a:xfrm>
           <a:prstGeom prst="rect">
@@ -15206,7 +15272,7 @@
         </p:nvSpPr>
         <p:spPr>
           <a:xfrm>
-            <a:off x="4331643" y="4169664"/>
+            <a:off x="4850892" y="4169664"/>
             <a:ext cx="685800" cy="475488"/>
           </a:xfrm>
           <a:prstGeom prst="rect">
@@ -15245,7 +15311,7 @@
         </p:nvSpPr>
         <p:spPr>
           <a:xfrm>
-            <a:off x="5370141" y="4169664"/>
+            <a:off x="6062472" y="4169664"/>
             <a:ext cx="685800" cy="475488"/>
           </a:xfrm>
           <a:prstGeom prst="rect">
@@ -15272,7 +15338,7 @@
         </p:nvSpPr>
         <p:spPr>
           <a:xfrm>
-            <a:off x="5370141" y="4169664"/>
+            <a:off x="6062472" y="4169664"/>
             <a:ext cx="685800" cy="475488"/>
           </a:xfrm>
           <a:prstGeom prst="rect">
@@ -15311,7 +15377,7 @@
         </p:nvSpPr>
         <p:spPr>
           <a:xfrm>
-            <a:off x="6408638" y="4169664"/>
+            <a:off x="7274052" y="4169664"/>
             <a:ext cx="685800" cy="475488"/>
           </a:xfrm>
           <a:prstGeom prst="rect">
@@ -15338,7 +15404,7 @@
         </p:nvSpPr>
         <p:spPr>
           <a:xfrm>
-            <a:off x="6408638" y="4169664"/>
+            <a:off x="7274052" y="4169664"/>
             <a:ext cx="685800" cy="475488"/>
           </a:xfrm>
           <a:prstGeom prst="rect">
@@ -15363,73 +15429,7 @@
                 <a:ea typeface="Trebuchet MS" pitchFamily="34" charset="-122"/>
                 <a:cs typeface="Trebuchet MS" pitchFamily="34" charset="-120"/>
               </a:rPr>
-              <a:t>s</a:t>
-            </a:r>
-            <a:endParaRPr lang="en-US" sz="900" dirty="0"/>
-          </a:p>
-        </p:txBody>
-      </p:sp>
-      <p:sp>
-        <p:nvSpPr>
-          <p:cNvPr id="43" name="Shape 41"/>
-          <p:cNvSpPr/>
-          <p:nvPr/>
-        </p:nvSpPr>
-        <p:spPr>
-          <a:xfrm>
-            <a:off x="7447135" y="4169664"/>
-            <a:ext cx="685800" cy="475488"/>
-          </a:xfrm>
-          <a:prstGeom prst="rect">
-            <a:avLst>
-              <a:gd name="adj" fmla="val 7692"/>
-            </a:avLst>
-          </a:prstGeom>
-          <a:solidFill>
-            <a:srgbClr val="FFFFFF"/>
-          </a:solidFill>
-          <a:ln w="12700">
-            <a:solidFill>
-              <a:srgbClr val="DB2777"/>
-            </a:solidFill>
-            <a:prstDash val="solid"/>
-          </a:ln>
-        </p:spPr>
-      </p:sp>
-      <p:sp>
-        <p:nvSpPr>
-          <p:cNvPr id="44" name="Text 42"/>
-          <p:cNvSpPr/>
-          <p:nvPr/>
-        </p:nvSpPr>
-        <p:spPr>
-          <a:xfrm>
-            <a:off x="7447135" y="4169664"/>
-            <a:ext cx="685800" cy="475488"/>
-          </a:xfrm>
-          <a:prstGeom prst="rect">
-            <a:avLst/>
-          </a:prstGeom>
-          <a:noFill/>
-          <a:ln/>
-        </p:spPr>
-        <p:txBody>
-          <a:bodyPr wrap="square" lIns="0" tIns="0" rIns="0" bIns="0" rtlCol="0" anchor="ctr"/>
-          <a:lstStyle/>
-          <a:p>
-            <a:pPr algn="ctr" indent="0" marL="0">
-              <a:buNone/>
-            </a:pPr>
-            <a:r>
-              <a:rPr lang="en-US" sz="900" b="1" dirty="0">
-                <a:solidFill>
-                  <a:srgbClr val="9D174D"/>
-                </a:solidFill>
-                <a:latin typeface="Trebuchet MS" pitchFamily="34" charset="0"/>
-                <a:ea typeface="Trebuchet MS" pitchFamily="34" charset="-122"/>
-                <a:cs typeface="Trebuchet MS" pitchFamily="34" charset="-120"/>
-              </a:rPr>
-              <a:t>t</a:t>
+              <a:t>n</a:t>
             </a:r>
             <a:endParaRPr lang="en-US" sz="900" dirty="0"/>
           </a:p>
@@ -16003,7 +16003,7 @@
                 <a:ea typeface="Calibri" pitchFamily="34" charset="-122"/>
                 <a:cs typeface="Calibri" pitchFamily="34" charset="-120"/>
               </a:rPr>
-              <a:t>Word Labs  •  wordlabs.app  •  Root: 'deep' = far down, intense, profound</a:t>
+              <a:t>Word Labs  •  wordlabs.app  •  Root: 'deep' = far down, profound distance</a:t>
             </a:r>
             <a:endParaRPr lang="en-US" sz="800" dirty="0"/>
           </a:p>
@@ -16643,7 +16643,7 @@
                 <a:ea typeface="Calibri" pitchFamily="34" charset="-122"/>
                 <a:cs typeface="Calibri" pitchFamily="34" charset="-120"/>
               </a:rPr>
-              <a:t>Word Labs  •  wordlabs.app  •  Root: 'deep' = far down, intense, profound</a:t>
+              <a:t>Word Labs  •  wordlabs.app  •  Root: 'deep' = far down, profound distance</a:t>
             </a:r>
             <a:endParaRPr lang="en-US" sz="800" dirty="0"/>
           </a:p>
@@ -16772,7 +16772,7 @@
                 <a:ea typeface="Calibri" pitchFamily="34" charset="-122"/>
                 <a:cs typeface="Calibri" pitchFamily="34" charset="-120"/>
               </a:rPr>
-              <a:t>deepness</a:t>
+              <a:t>deeply</a:t>
             </a:r>
             <a:pPr algn="l" indent="0" marL="0">
               <a:buNone/>
@@ -16786,7 +16786,7 @@
                 <a:ea typeface="Calibri" pitchFamily="34" charset="-122"/>
                 <a:cs typeface="Calibri" pitchFamily="34" charset="-120"/>
               </a:rPr>
-              <a:t> of the cave amazed the explorers, who </a:t>
+              <a:t> rooted tree stood firmly at the edge of the cliff, its branches reaching over the </a:t>
             </a:r>
             <a:pPr algn="l" indent="0" marL="0">
               <a:buNone/>
@@ -16803,7 +16803,7 @@
                 <a:ea typeface="Calibri" pitchFamily="34" charset="-122"/>
                 <a:cs typeface="Calibri" pitchFamily="34" charset="-120"/>
               </a:rPr>
-              <a:t>deepened</a:t>
+              <a:t>deeper</a:t>
             </a:r>
             <a:pPr algn="l" indent="0" marL="0">
               <a:buNone/>
@@ -16817,118 +16817,343 @@
                 <a:ea typeface="Calibri" pitchFamily="34" charset="-122"/>
                 <a:cs typeface="Calibri" pitchFamily="34" charset="-120"/>
               </a:rPr>
-              <a:t> their understanding of geology, and they waded </a:t>
-            </a:r>
+              <a:t>, darker water below.</a:t>
+            </a:r>
+            <a:endParaRPr lang="en-US" sz="1800" dirty="0"/>
+          </a:p>
+        </p:txBody>
+      </p:sp>
+      <p:sp>
+        <p:nvSpPr>
+          <p:cNvPr id="13" name="Shape 11"/>
+          <p:cNvSpPr/>
+          <p:nvPr/>
+        </p:nvSpPr>
+        <p:spPr>
+          <a:xfrm>
+            <a:off x="365760" y="2852928"/>
+            <a:ext cx="8412480" cy="475488"/>
+          </a:xfrm>
+          <a:prstGeom prst="rect">
+            <a:avLst>
+              <a:gd name="adj" fmla="val 15385"/>
+            </a:avLst>
+          </a:prstGeom>
+          <a:solidFill>
+            <a:srgbClr val="CCFBF1"/>
+          </a:solidFill>
+          <a:ln w="12700">
+            <a:solidFill>
+              <a:srgbClr val="0D9488"/>
+            </a:solidFill>
+            <a:prstDash val="solid"/>
+          </a:ln>
+        </p:spPr>
+      </p:sp>
+      <p:sp>
+        <p:nvSpPr>
+          <p:cNvPr id="14" name="Text 12"/>
+          <p:cNvSpPr/>
+          <p:nvPr/>
+        </p:nvSpPr>
+        <p:spPr>
+          <a:xfrm>
+            <a:off x="502920" y="2852928"/>
+            <a:ext cx="8229600" cy="475488"/>
+          </a:xfrm>
+          <a:prstGeom prst="rect">
+            <a:avLst/>
+          </a:prstGeom>
+          <a:noFill/>
+          <a:ln/>
+        </p:spPr>
+        <p:txBody>
+          <a:bodyPr wrap="square" rtlCol="0" anchor="ctr"/>
+          <a:lstStyle/>
+          <a:p>
             <a:pPr algn="l" indent="0" marL="0">
               <a:buNone/>
             </a:pPr>
             <a:r>
-              <a:rPr lang="en-US" sz="1800" b="1" dirty="0">
-                <a:solidFill>
-                  <a:srgbClr val="0D9488"/>
-                </a:solidFill>
-                <a:highlight>
-                  <a:srgbClr val="CCFBF1"/>
-                </a:highlight>
+              <a:rPr lang="en-US" sz="1200" b="1" dirty="0">
+                <a:solidFill>
+                  <a:srgbClr val="0F766E"/>
+                </a:solidFill>
                 <a:latin typeface="Calibri" pitchFamily="34" charset="0"/>
                 <a:ea typeface="Calibri" pitchFamily="34" charset="-122"/>
                 <a:cs typeface="Calibri" pitchFamily="34" charset="-120"/>
               </a:rPr>
-              <a:t>knee-deep</a:t>
-            </a:r>
-            <a:pPr algn="l" indent="0" marL="0">
-              <a:buNone/>
-            </a:pPr>
-            <a:r>
-              <a:rPr lang="en-US" sz="1800" dirty="0">
-                <a:solidFill>
-                  <a:srgbClr val="0F172A"/>
+              <a:t>Now rewrite each focus word below with space between letters — leave room for your breakdown.</a:t>
+            </a:r>
+            <a:endParaRPr lang="en-US" sz="1200" dirty="0"/>
+          </a:p>
+        </p:txBody>
+      </p:sp>
+      <p:sp>
+        <p:nvSpPr>
+          <p:cNvPr id="15" name="Shape 13"/>
+          <p:cNvSpPr/>
+          <p:nvPr/>
+        </p:nvSpPr>
+        <p:spPr>
+          <a:xfrm>
+            <a:off x="411480" y="3456432"/>
+            <a:ext cx="2499360" cy="1005840"/>
+          </a:xfrm>
+          <a:prstGeom prst="rect">
+            <a:avLst>
+              <a:gd name="adj" fmla="val 7273"/>
+            </a:avLst>
+          </a:prstGeom>
+          <a:solidFill>
+            <a:srgbClr val="F8FAFC"/>
+          </a:solidFill>
+          <a:ln w="12700">
+            <a:solidFill>
+              <a:srgbClr val="E2E8F0"/>
+            </a:solidFill>
+            <a:prstDash val="solid"/>
+          </a:ln>
+        </p:spPr>
+      </p:sp>
+      <p:sp>
+        <p:nvSpPr>
+          <p:cNvPr id="16" name="Shape 14"/>
+          <p:cNvSpPr/>
+          <p:nvPr/>
+        </p:nvSpPr>
+        <p:spPr>
+          <a:xfrm>
+            <a:off x="411480" y="3977640"/>
+            <a:ext cx="2499360" cy="0"/>
+          </a:xfrm>
+          <a:prstGeom prst="line">
+            <a:avLst/>
+          </a:prstGeom>
+          <a:noFill/>
+          <a:ln w="12700">
+            <a:solidFill>
+              <a:srgbClr val="E2E8F0"/>
+            </a:solidFill>
+            <a:prstDash val="dash"/>
+          </a:ln>
+        </p:spPr>
+      </p:sp>
+      <p:sp>
+        <p:nvSpPr>
+          <p:cNvPr id="17" name="Text 15"/>
+          <p:cNvSpPr/>
+          <p:nvPr/>
+        </p:nvSpPr>
+        <p:spPr>
+          <a:xfrm>
+            <a:off x="411480" y="3456432"/>
+            <a:ext cx="2499360" cy="502920"/>
+          </a:xfrm>
+          <a:prstGeom prst="rect">
+            <a:avLst/>
+          </a:prstGeom>
+          <a:noFill/>
+          <a:ln/>
+        </p:spPr>
+        <p:txBody>
+          <a:bodyPr wrap="square" lIns="0" tIns="0" rIns="0" bIns="0" rtlCol="0" anchor="ctr"/>
+          <a:lstStyle/>
+          <a:p>
+            <a:pPr algn="ctr" indent="0" marL="0">
+              <a:buNone/>
+            </a:pPr>
+            <a:r>
+              <a:rPr lang="en-US" sz="1400" b="1" dirty="0">
+                <a:solidFill>
+                  <a:srgbClr val="0D9488"/>
+                </a:solidFill>
+                <a:latin typeface="Trebuchet MS" pitchFamily="34" charset="0"/>
+                <a:ea typeface="Trebuchet MS" pitchFamily="34" charset="-122"/>
+                <a:cs typeface="Trebuchet MS" pitchFamily="34" charset="-120"/>
+              </a:rPr>
+              <a:t>deeply</a:t>
+            </a:r>
+            <a:endParaRPr lang="en-US" sz="1400" dirty="0"/>
+          </a:p>
+        </p:txBody>
+      </p:sp>
+      <p:sp>
+        <p:nvSpPr>
+          <p:cNvPr id="18" name="Text 16"/>
+          <p:cNvSpPr/>
+          <p:nvPr/>
+        </p:nvSpPr>
+        <p:spPr>
+          <a:xfrm>
+            <a:off x="411480" y="4005072"/>
+            <a:ext cx="2499360" cy="457200"/>
+          </a:xfrm>
+          <a:prstGeom prst="rect">
+            <a:avLst/>
+          </a:prstGeom>
+          <a:noFill/>
+          <a:ln/>
+        </p:spPr>
+        <p:txBody>
+          <a:bodyPr wrap="square" lIns="0" tIns="0" rIns="0" bIns="0" rtlCol="0" anchor="ctr"/>
+          <a:lstStyle/>
+          <a:p>
+            <a:pPr algn="ctr" indent="0" marL="0">
+              <a:buNone/>
+            </a:pPr>
+            <a:r>
+              <a:rPr lang="en-US" sz="900" i="1" dirty="0">
+                <a:solidFill>
+                  <a:srgbClr val="475569"/>
                 </a:solidFill>
                 <a:latin typeface="Calibri" pitchFamily="34" charset="0"/>
                 <a:ea typeface="Calibri" pitchFamily="34" charset="-122"/>
                 <a:cs typeface="Calibri" pitchFamily="34" charset="-120"/>
               </a:rPr>
-              <a:t> through an underground stream.</a:t>
-            </a:r>
-            <a:endParaRPr lang="en-US" sz="1800" dirty="0"/>
-          </a:p>
-        </p:txBody>
-      </p:sp>
-      <p:sp>
-        <p:nvSpPr>
-          <p:cNvPr id="13" name="Shape 11"/>
-          <p:cNvSpPr/>
-          <p:nvPr/>
-        </p:nvSpPr>
-        <p:spPr>
-          <a:xfrm>
-            <a:off x="365760" y="2852928"/>
-            <a:ext cx="8412480" cy="475488"/>
+              <a:t>write your breakdown below</a:t>
+            </a:r>
+            <a:endParaRPr lang="en-US" sz="900" dirty="0"/>
+          </a:p>
+        </p:txBody>
+      </p:sp>
+      <p:sp>
+        <p:nvSpPr>
+          <p:cNvPr id="19" name="Shape 17"/>
+          <p:cNvSpPr/>
+          <p:nvPr/>
+        </p:nvSpPr>
+        <p:spPr>
+          <a:xfrm>
+            <a:off x="3185160" y="3456432"/>
+            <a:ext cx="2499360" cy="1005840"/>
           </a:xfrm>
           <a:prstGeom prst="rect">
             <a:avLst>
-              <a:gd name="adj" fmla="val 15385"/>
+              <a:gd name="adj" fmla="val 7273"/>
             </a:avLst>
           </a:prstGeom>
           <a:solidFill>
-            <a:srgbClr val="CCFBF1"/>
-          </a:solidFill>
-          <a:ln w="12700">
-            <a:solidFill>
-              <a:srgbClr val="0D9488"/>
-            </a:solidFill>
-            <a:prstDash val="solid"/>
-          </a:ln>
-        </p:spPr>
-      </p:sp>
-      <p:sp>
-        <p:nvSpPr>
-          <p:cNvPr id="14" name="Text 12"/>
-          <p:cNvSpPr/>
-          <p:nvPr/>
-        </p:nvSpPr>
-        <p:spPr>
-          <a:xfrm>
-            <a:off x="502920" y="2852928"/>
-            <a:ext cx="8229600" cy="475488"/>
-          </a:xfrm>
-          <a:prstGeom prst="rect">
-            <a:avLst/>
-          </a:prstGeom>
-          <a:noFill/>
-          <a:ln/>
-        </p:spPr>
-        <p:txBody>
-          <a:bodyPr wrap="square" rtlCol="0" anchor="ctr"/>
-          <a:lstStyle/>
-          <a:p>
-            <a:pPr algn="l" indent="0" marL="0">
-              <a:buNone/>
-            </a:pPr>
-            <a:r>
-              <a:rPr lang="en-US" sz="1200" b="1" dirty="0">
-                <a:solidFill>
-                  <a:srgbClr val="0F766E"/>
+            <a:srgbClr val="F8FAFC"/>
+          </a:solidFill>
+          <a:ln w="12700">
+            <a:solidFill>
+              <a:srgbClr val="E2E8F0"/>
+            </a:solidFill>
+            <a:prstDash val="solid"/>
+          </a:ln>
+        </p:spPr>
+      </p:sp>
+      <p:sp>
+        <p:nvSpPr>
+          <p:cNvPr id="20" name="Shape 18"/>
+          <p:cNvSpPr/>
+          <p:nvPr/>
+        </p:nvSpPr>
+        <p:spPr>
+          <a:xfrm>
+            <a:off x="3185160" y="3977640"/>
+            <a:ext cx="2499360" cy="0"/>
+          </a:xfrm>
+          <a:prstGeom prst="line">
+            <a:avLst/>
+          </a:prstGeom>
+          <a:noFill/>
+          <a:ln w="12700">
+            <a:solidFill>
+              <a:srgbClr val="E2E8F0"/>
+            </a:solidFill>
+            <a:prstDash val="dash"/>
+          </a:ln>
+        </p:spPr>
+      </p:sp>
+      <p:sp>
+        <p:nvSpPr>
+          <p:cNvPr id="21" name="Text 19"/>
+          <p:cNvSpPr/>
+          <p:nvPr/>
+        </p:nvSpPr>
+        <p:spPr>
+          <a:xfrm>
+            <a:off x="3185160" y="3456432"/>
+            <a:ext cx="2499360" cy="502920"/>
+          </a:xfrm>
+          <a:prstGeom prst="rect">
+            <a:avLst/>
+          </a:prstGeom>
+          <a:noFill/>
+          <a:ln/>
+        </p:spPr>
+        <p:txBody>
+          <a:bodyPr wrap="square" lIns="0" tIns="0" rIns="0" bIns="0" rtlCol="0" anchor="ctr"/>
+          <a:lstStyle/>
+          <a:p>
+            <a:pPr algn="ctr" indent="0" marL="0">
+              <a:buNone/>
+            </a:pPr>
+            <a:r>
+              <a:rPr lang="en-US" sz="1400" b="1" dirty="0">
+                <a:solidFill>
+                  <a:srgbClr val="0D9488"/>
+                </a:solidFill>
+                <a:latin typeface="Trebuchet MS" pitchFamily="34" charset="0"/>
+                <a:ea typeface="Trebuchet MS" pitchFamily="34" charset="-122"/>
+                <a:cs typeface="Trebuchet MS" pitchFamily="34" charset="-120"/>
+              </a:rPr>
+              <a:t>deeper</a:t>
+            </a:r>
+            <a:endParaRPr lang="en-US" sz="1400" dirty="0"/>
+          </a:p>
+        </p:txBody>
+      </p:sp>
+      <p:sp>
+        <p:nvSpPr>
+          <p:cNvPr id="22" name="Text 20"/>
+          <p:cNvSpPr/>
+          <p:nvPr/>
+        </p:nvSpPr>
+        <p:spPr>
+          <a:xfrm>
+            <a:off x="3185160" y="4005072"/>
+            <a:ext cx="2499360" cy="457200"/>
+          </a:xfrm>
+          <a:prstGeom prst="rect">
+            <a:avLst/>
+          </a:prstGeom>
+          <a:noFill/>
+          <a:ln/>
+        </p:spPr>
+        <p:txBody>
+          <a:bodyPr wrap="square" lIns="0" tIns="0" rIns="0" bIns="0" rtlCol="0" anchor="ctr"/>
+          <a:lstStyle/>
+          <a:p>
+            <a:pPr algn="ctr" indent="0" marL="0">
+              <a:buNone/>
+            </a:pPr>
+            <a:r>
+              <a:rPr lang="en-US" sz="900" i="1" dirty="0">
+                <a:solidFill>
+                  <a:srgbClr val="475569"/>
                 </a:solidFill>
                 <a:latin typeface="Calibri" pitchFamily="34" charset="0"/>
                 <a:ea typeface="Calibri" pitchFamily="34" charset="-122"/>
                 <a:cs typeface="Calibri" pitchFamily="34" charset="-120"/>
               </a:rPr>
-              <a:t>Now rewrite each focus word below with space between letters — leave room for your breakdown.</a:t>
-            </a:r>
-            <a:endParaRPr lang="en-US" sz="1200" dirty="0"/>
-          </a:p>
-        </p:txBody>
-      </p:sp>
-      <p:sp>
-        <p:nvSpPr>
-          <p:cNvPr id="15" name="Shape 13"/>
-          <p:cNvSpPr/>
-          <p:nvPr/>
-        </p:nvSpPr>
-        <p:spPr>
-          <a:xfrm>
-            <a:off x="411480" y="3456432"/>
+              <a:t>write your breakdown below</a:t>
+            </a:r>
+            <a:endParaRPr lang="en-US" sz="900" dirty="0"/>
+          </a:p>
+        </p:txBody>
+      </p:sp>
+      <p:sp>
+        <p:nvSpPr>
+          <p:cNvPr id="23" name="Shape 21"/>
+          <p:cNvSpPr/>
+          <p:nvPr/>
+        </p:nvSpPr>
+        <p:spPr>
+          <a:xfrm>
+            <a:off x="5958840" y="3456432"/>
             <a:ext cx="2499360" cy="1005840"/>
           </a:xfrm>
           <a:prstGeom prst="rect">
@@ -16949,13 +17174,13 @@
       </p:sp>
       <p:sp>
         <p:nvSpPr>
-          <p:cNvPr id="16" name="Shape 14"/>
-          <p:cNvSpPr/>
-          <p:nvPr/>
-        </p:nvSpPr>
-        <p:spPr>
-          <a:xfrm>
-            <a:off x="411480" y="3977640"/>
+          <p:cNvPr id="24" name="Shape 22"/>
+          <p:cNvSpPr/>
+          <p:nvPr/>
+        </p:nvSpPr>
+        <p:spPr>
+          <a:xfrm>
+            <a:off x="5958840" y="3977640"/>
             <a:ext cx="2499360" cy="0"/>
           </a:xfrm>
           <a:prstGeom prst="line">
@@ -16972,13 +17197,13 @@
       </p:sp>
       <p:sp>
         <p:nvSpPr>
-          <p:cNvPr id="17" name="Text 15"/>
-          <p:cNvSpPr/>
-          <p:nvPr/>
-        </p:nvSpPr>
-        <p:spPr>
-          <a:xfrm>
-            <a:off x="411480" y="3456432"/>
+          <p:cNvPr id="25" name="Text 23"/>
+          <p:cNvSpPr/>
+          <p:nvPr/>
+        </p:nvSpPr>
+        <p:spPr>
+          <a:xfrm>
+            <a:off x="5958840" y="3456432"/>
             <a:ext cx="2499360" cy="502920"/>
           </a:xfrm>
           <a:prstGeom prst="rect">
@@ -17004,262 +17229,6 @@
                 <a:cs typeface="Trebuchet MS" pitchFamily="34" charset="-120"/>
               </a:rPr>
               <a:t>deepness</a:t>
-            </a:r>
-            <a:endParaRPr lang="en-US" sz="1400" dirty="0"/>
-          </a:p>
-        </p:txBody>
-      </p:sp>
-      <p:sp>
-        <p:nvSpPr>
-          <p:cNvPr id="18" name="Text 16"/>
-          <p:cNvSpPr/>
-          <p:nvPr/>
-        </p:nvSpPr>
-        <p:spPr>
-          <a:xfrm>
-            <a:off x="411480" y="4005072"/>
-            <a:ext cx="2499360" cy="457200"/>
-          </a:xfrm>
-          <a:prstGeom prst="rect">
-            <a:avLst/>
-          </a:prstGeom>
-          <a:noFill/>
-          <a:ln/>
-        </p:spPr>
-        <p:txBody>
-          <a:bodyPr wrap="square" lIns="0" tIns="0" rIns="0" bIns="0" rtlCol="0" anchor="ctr"/>
-          <a:lstStyle/>
-          <a:p>
-            <a:pPr algn="ctr" indent="0" marL="0">
-              <a:buNone/>
-            </a:pPr>
-            <a:r>
-              <a:rPr lang="en-US" sz="900" i="1" dirty="0">
-                <a:solidFill>
-                  <a:srgbClr val="475569"/>
-                </a:solidFill>
-                <a:latin typeface="Calibri" pitchFamily="34" charset="0"/>
-                <a:ea typeface="Calibri" pitchFamily="34" charset="-122"/>
-                <a:cs typeface="Calibri" pitchFamily="34" charset="-120"/>
-              </a:rPr>
-              <a:t>write your breakdown below</a:t>
-            </a:r>
-            <a:endParaRPr lang="en-US" sz="900" dirty="0"/>
-          </a:p>
-        </p:txBody>
-      </p:sp>
-      <p:sp>
-        <p:nvSpPr>
-          <p:cNvPr id="19" name="Shape 17"/>
-          <p:cNvSpPr/>
-          <p:nvPr/>
-        </p:nvSpPr>
-        <p:spPr>
-          <a:xfrm>
-            <a:off x="3185160" y="3456432"/>
-            <a:ext cx="2499360" cy="1005840"/>
-          </a:xfrm>
-          <a:prstGeom prst="rect">
-            <a:avLst>
-              <a:gd name="adj" fmla="val 7273"/>
-            </a:avLst>
-          </a:prstGeom>
-          <a:solidFill>
-            <a:srgbClr val="F8FAFC"/>
-          </a:solidFill>
-          <a:ln w="12700">
-            <a:solidFill>
-              <a:srgbClr val="E2E8F0"/>
-            </a:solidFill>
-            <a:prstDash val="solid"/>
-          </a:ln>
-        </p:spPr>
-      </p:sp>
-      <p:sp>
-        <p:nvSpPr>
-          <p:cNvPr id="20" name="Shape 18"/>
-          <p:cNvSpPr/>
-          <p:nvPr/>
-        </p:nvSpPr>
-        <p:spPr>
-          <a:xfrm>
-            <a:off x="3185160" y="3977640"/>
-            <a:ext cx="2499360" cy="0"/>
-          </a:xfrm>
-          <a:prstGeom prst="line">
-            <a:avLst/>
-          </a:prstGeom>
-          <a:noFill/>
-          <a:ln w="12700">
-            <a:solidFill>
-              <a:srgbClr val="E2E8F0"/>
-            </a:solidFill>
-            <a:prstDash val="dash"/>
-          </a:ln>
-        </p:spPr>
-      </p:sp>
-      <p:sp>
-        <p:nvSpPr>
-          <p:cNvPr id="21" name="Text 19"/>
-          <p:cNvSpPr/>
-          <p:nvPr/>
-        </p:nvSpPr>
-        <p:spPr>
-          <a:xfrm>
-            <a:off x="3185160" y="3456432"/>
-            <a:ext cx="2499360" cy="502920"/>
-          </a:xfrm>
-          <a:prstGeom prst="rect">
-            <a:avLst/>
-          </a:prstGeom>
-          <a:noFill/>
-          <a:ln/>
-        </p:spPr>
-        <p:txBody>
-          <a:bodyPr wrap="square" lIns="0" tIns="0" rIns="0" bIns="0" rtlCol="0" anchor="ctr"/>
-          <a:lstStyle/>
-          <a:p>
-            <a:pPr algn="ctr" indent="0" marL="0">
-              <a:buNone/>
-            </a:pPr>
-            <a:r>
-              <a:rPr lang="en-US" sz="1400" b="1" dirty="0">
-                <a:solidFill>
-                  <a:srgbClr val="0D9488"/>
-                </a:solidFill>
-                <a:latin typeface="Trebuchet MS" pitchFamily="34" charset="0"/>
-                <a:ea typeface="Trebuchet MS" pitchFamily="34" charset="-122"/>
-                <a:cs typeface="Trebuchet MS" pitchFamily="34" charset="-120"/>
-              </a:rPr>
-              <a:t>deepened</a:t>
-            </a:r>
-            <a:endParaRPr lang="en-US" sz="1400" dirty="0"/>
-          </a:p>
-        </p:txBody>
-      </p:sp>
-      <p:sp>
-        <p:nvSpPr>
-          <p:cNvPr id="22" name="Text 20"/>
-          <p:cNvSpPr/>
-          <p:nvPr/>
-        </p:nvSpPr>
-        <p:spPr>
-          <a:xfrm>
-            <a:off x="3185160" y="4005072"/>
-            <a:ext cx="2499360" cy="457200"/>
-          </a:xfrm>
-          <a:prstGeom prst="rect">
-            <a:avLst/>
-          </a:prstGeom>
-          <a:noFill/>
-          <a:ln/>
-        </p:spPr>
-        <p:txBody>
-          <a:bodyPr wrap="square" lIns="0" tIns="0" rIns="0" bIns="0" rtlCol="0" anchor="ctr"/>
-          <a:lstStyle/>
-          <a:p>
-            <a:pPr algn="ctr" indent="0" marL="0">
-              <a:buNone/>
-            </a:pPr>
-            <a:r>
-              <a:rPr lang="en-US" sz="900" i="1" dirty="0">
-                <a:solidFill>
-                  <a:srgbClr val="475569"/>
-                </a:solidFill>
-                <a:latin typeface="Calibri" pitchFamily="34" charset="0"/>
-                <a:ea typeface="Calibri" pitchFamily="34" charset="-122"/>
-                <a:cs typeface="Calibri" pitchFamily="34" charset="-120"/>
-              </a:rPr>
-              <a:t>write your breakdown below</a:t>
-            </a:r>
-            <a:endParaRPr lang="en-US" sz="900" dirty="0"/>
-          </a:p>
-        </p:txBody>
-      </p:sp>
-      <p:sp>
-        <p:nvSpPr>
-          <p:cNvPr id="23" name="Shape 21"/>
-          <p:cNvSpPr/>
-          <p:nvPr/>
-        </p:nvSpPr>
-        <p:spPr>
-          <a:xfrm>
-            <a:off x="5958840" y="3456432"/>
-            <a:ext cx="2499360" cy="1005840"/>
-          </a:xfrm>
-          <a:prstGeom prst="rect">
-            <a:avLst>
-              <a:gd name="adj" fmla="val 7273"/>
-            </a:avLst>
-          </a:prstGeom>
-          <a:solidFill>
-            <a:srgbClr val="F8FAFC"/>
-          </a:solidFill>
-          <a:ln w="12700">
-            <a:solidFill>
-              <a:srgbClr val="E2E8F0"/>
-            </a:solidFill>
-            <a:prstDash val="solid"/>
-          </a:ln>
-        </p:spPr>
-      </p:sp>
-      <p:sp>
-        <p:nvSpPr>
-          <p:cNvPr id="24" name="Shape 22"/>
-          <p:cNvSpPr/>
-          <p:nvPr/>
-        </p:nvSpPr>
-        <p:spPr>
-          <a:xfrm>
-            <a:off x="5958840" y="3977640"/>
-            <a:ext cx="2499360" cy="0"/>
-          </a:xfrm>
-          <a:prstGeom prst="line">
-            <a:avLst/>
-          </a:prstGeom>
-          <a:noFill/>
-          <a:ln w="12700">
-            <a:solidFill>
-              <a:srgbClr val="E2E8F0"/>
-            </a:solidFill>
-            <a:prstDash val="dash"/>
-          </a:ln>
-        </p:spPr>
-      </p:sp>
-      <p:sp>
-        <p:nvSpPr>
-          <p:cNvPr id="25" name="Text 23"/>
-          <p:cNvSpPr/>
-          <p:nvPr/>
-        </p:nvSpPr>
-        <p:spPr>
-          <a:xfrm>
-            <a:off x="5958840" y="3456432"/>
-            <a:ext cx="2499360" cy="502920"/>
-          </a:xfrm>
-          <a:prstGeom prst="rect">
-            <a:avLst/>
-          </a:prstGeom>
-          <a:noFill/>
-          <a:ln/>
-        </p:spPr>
-        <p:txBody>
-          <a:bodyPr wrap="square" lIns="0" tIns="0" rIns="0" bIns="0" rtlCol="0" anchor="ctr"/>
-          <a:lstStyle/>
-          <a:p>
-            <a:pPr algn="ctr" indent="0" marL="0">
-              <a:buNone/>
-            </a:pPr>
-            <a:r>
-              <a:rPr lang="en-US" sz="1400" b="1" dirty="0">
-                <a:solidFill>
-                  <a:srgbClr val="0D9488"/>
-                </a:solidFill>
-                <a:latin typeface="Trebuchet MS" pitchFamily="34" charset="0"/>
-                <a:ea typeface="Trebuchet MS" pitchFamily="34" charset="-122"/>
-                <a:cs typeface="Trebuchet MS" pitchFamily="34" charset="-120"/>
-              </a:rPr>
-              <a:t>knee-deep</a:t>
             </a:r>
             <a:endParaRPr lang="en-US" sz="1400" dirty="0"/>
           </a:p>
@@ -17590,7 +17559,7 @@
                 <a:ea typeface="Calibri" pitchFamily="34" charset="-122"/>
                 <a:cs typeface="Calibri" pitchFamily="34" charset="-120"/>
               </a:rPr>
-              <a:t>Word Labs  •  wordlabs.app  •  Root: 'deep' = far down, intense, profound</a:t>
+              <a:t>Word Labs  •  wordlabs.app  •  Root: 'deep' = far down, profound distance</a:t>
             </a:r>
             <a:endParaRPr lang="en-US" sz="800" dirty="0"/>
           </a:p>
@@ -17729,7 +17698,7 @@
                 <a:ea typeface="Trebuchet MS" pitchFamily="34" charset="-122"/>
                 <a:cs typeface="Trebuchet MS" pitchFamily="34" charset="-120"/>
               </a:rPr>
-              <a:t>deepness</a:t>
+              <a:t>deeply</a:t>
             </a:r>
             <a:endParaRPr lang="en-US" sz="2800" dirty="0"/>
           </a:p>
@@ -18417,7 +18386,7 @@
                 <a:ea typeface="Calibri" pitchFamily="34" charset="-122"/>
                 <a:cs typeface="Calibri" pitchFamily="34" charset="-120"/>
               </a:rPr>
-              <a:t>Word Labs  •  wordlabs.app  •  Root: 'deep' = far down, intense, profound</a:t>
+              <a:t>Word Labs  •  wordlabs.app  •  Root: 'deep' = far down, profound distance</a:t>
             </a:r>
             <a:endParaRPr lang="en-US" sz="800" dirty="0"/>
           </a:p>
@@ -18556,7 +18525,7 @@
                 <a:ea typeface="Trebuchet MS" pitchFamily="34" charset="-122"/>
                 <a:cs typeface="Trebuchet MS" pitchFamily="34" charset="-120"/>
               </a:rPr>
-              <a:t>deepness</a:t>
+              <a:t>deeply</a:t>
             </a:r>
             <a:endParaRPr lang="en-US" sz="2800" dirty="0"/>
           </a:p>
@@ -18734,7 +18703,7 @@
                 <a:ea typeface="Calibri" pitchFamily="34" charset="-122"/>
                 <a:cs typeface="Calibri" pitchFamily="34" charset="-120"/>
               </a:rPr>
-              <a:t>far down, intense</a:t>
+              <a:t>far down, profound</a:t>
             </a:r>
             <a:endParaRPr lang="en-US" sz="850" dirty="0"/>
           </a:p>
@@ -18807,7 +18776,7 @@
                 <a:ea typeface="Trebuchet MS" pitchFamily="34" charset="-122"/>
                 <a:cs typeface="Trebuchet MS" pitchFamily="34" charset="-120"/>
               </a:rPr>
-              <a:t>ness</a:t>
+              <a:t>ly</a:t>
             </a:r>
             <a:endParaRPr lang="en-US" sz="1300" dirty="0"/>
           </a:p>
@@ -18846,7 +18815,7 @@
                 <a:ea typeface="Calibri" pitchFamily="34" charset="-122"/>
                 <a:cs typeface="Calibri" pitchFamily="34" charset="-120"/>
               </a:rPr>
-              <a:t>the quality or state of being</a:t>
+              <a:t>in a way that is</a:t>
             </a:r>
             <a:endParaRPr lang="en-US" sz="850" dirty="0"/>
           </a:p>
@@ -19402,7 +19371,7 @@
                 <a:ea typeface="Calibri" pitchFamily="34" charset="-122"/>
                 <a:cs typeface="Calibri" pitchFamily="34" charset="-120"/>
               </a:rPr>
-              <a:t>Word Labs  •  wordlabs.app  •  Root: 'deep' = far down, intense, profound</a:t>
+              <a:t>Word Labs  •  wordlabs.app  •  Root: 'deep' = far down, profound distance</a:t>
             </a:r>
             <a:endParaRPr lang="en-US" sz="800" dirty="0"/>
           </a:p>
@@ -19541,7 +19510,7 @@
                 <a:ea typeface="Trebuchet MS" pitchFamily="34" charset="-122"/>
                 <a:cs typeface="Trebuchet MS" pitchFamily="34" charset="-120"/>
               </a:rPr>
-              <a:t>deepness</a:t>
+              <a:t>deeply</a:t>
             </a:r>
             <a:endParaRPr lang="en-US" sz="2800" dirty="0"/>
           </a:p>
@@ -19719,7 +19688,7 @@
                 <a:ea typeface="Calibri" pitchFamily="34" charset="-122"/>
                 <a:cs typeface="Calibri" pitchFamily="34" charset="-120"/>
               </a:rPr>
-              <a:t>far down, intense</a:t>
+              <a:t>far down, profound</a:t>
             </a:r>
             <a:endParaRPr lang="en-US" sz="850" dirty="0"/>
           </a:p>
@@ -19792,7 +19761,7 @@
                 <a:ea typeface="Trebuchet MS" pitchFamily="34" charset="-122"/>
                 <a:cs typeface="Trebuchet MS" pitchFamily="34" charset="-120"/>
               </a:rPr>
-              <a:t>ness</a:t>
+              <a:t>ly</a:t>
             </a:r>
             <a:endParaRPr lang="en-US" sz="1300" dirty="0"/>
           </a:p>
@@ -19831,7 +19800,7 @@
                 <a:ea typeface="Calibri" pitchFamily="34" charset="-122"/>
                 <a:cs typeface="Calibri" pitchFamily="34" charset="-120"/>
               </a:rPr>
-              <a:t>the quality or state of being</a:t>
+              <a:t>in a way that is</a:t>
             </a:r>
             <a:endParaRPr lang="en-US" sz="850" dirty="0"/>
           </a:p>
@@ -20095,7 +20064,7 @@
                 <a:ea typeface="Trebuchet MS" pitchFamily="34" charset="-122"/>
                 <a:cs typeface="Trebuchet MS" pitchFamily="34" charset="-120"/>
               </a:rPr>
-              <a:t>ness</a:t>
+              <a:t>ly</a:t>
             </a:r>
             <a:endParaRPr lang="en-US" sz="1400" dirty="0"/>
           </a:p>
@@ -20519,7 +20488,7 @@
                 <a:ea typeface="Calibri" pitchFamily="34" charset="-122"/>
                 <a:cs typeface="Calibri" pitchFamily="34" charset="-120"/>
               </a:rPr>
-              <a:t>Word Labs  •  wordlabs.app  •  Root: 'deep' = far down, intense, profound</a:t>
+              <a:t>Word Labs  •  wordlabs.app  •  Root: 'deep' = far down, profound distance</a:t>
             </a:r>
             <a:endParaRPr lang="en-US" sz="800" dirty="0"/>
           </a:p>
@@ -20658,7 +20627,7 @@
                 <a:ea typeface="Trebuchet MS" pitchFamily="34" charset="-122"/>
                 <a:cs typeface="Trebuchet MS" pitchFamily="34" charset="-120"/>
               </a:rPr>
-              <a:t>deepness</a:t>
+              <a:t>deeply</a:t>
             </a:r>
             <a:endParaRPr lang="en-US" sz="2800" dirty="0"/>
           </a:p>
@@ -20836,7 +20805,7 @@
                 <a:ea typeface="Calibri" pitchFamily="34" charset="-122"/>
                 <a:cs typeface="Calibri" pitchFamily="34" charset="-120"/>
               </a:rPr>
-              <a:t>far down, intense</a:t>
+              <a:t>far down, profound</a:t>
             </a:r>
             <a:endParaRPr lang="en-US" sz="850" dirty="0"/>
           </a:p>
@@ -20909,7 +20878,7 @@
                 <a:ea typeface="Trebuchet MS" pitchFamily="34" charset="-122"/>
                 <a:cs typeface="Trebuchet MS" pitchFamily="34" charset="-120"/>
               </a:rPr>
-              <a:t>ness</a:t>
+              <a:t>ly</a:t>
             </a:r>
             <a:endParaRPr lang="en-US" sz="1300" dirty="0"/>
           </a:p>
@@ -20948,7 +20917,7 @@
                 <a:ea typeface="Calibri" pitchFamily="34" charset="-122"/>
                 <a:cs typeface="Calibri" pitchFamily="34" charset="-120"/>
               </a:rPr>
-              <a:t>the quality or state of being</a:t>
+              <a:t>in a way that is</a:t>
             </a:r>
             <a:endParaRPr lang="en-US" sz="850" dirty="0"/>
           </a:p>
@@ -21212,7 +21181,7 @@
                 <a:ea typeface="Trebuchet MS" pitchFamily="34" charset="-122"/>
                 <a:cs typeface="Trebuchet MS" pitchFamily="34" charset="-120"/>
               </a:rPr>
-              <a:t>ness</a:t>
+              <a:t>ly</a:t>
             </a:r>
             <a:endParaRPr lang="en-US" sz="1400" dirty="0"/>
           </a:p>
@@ -21319,7 +21288,7 @@
         </p:nvSpPr>
         <p:spPr>
           <a:xfrm>
-            <a:off x="2254649" y="4169664"/>
+            <a:off x="2427732" y="4169664"/>
             <a:ext cx="685800" cy="475488"/>
           </a:xfrm>
           <a:prstGeom prst="rect">
@@ -21346,7 +21315,7 @@
         </p:nvSpPr>
         <p:spPr>
           <a:xfrm>
-            <a:off x="2254649" y="4169664"/>
+            <a:off x="2427732" y="4169664"/>
             <a:ext cx="685800" cy="475488"/>
           </a:xfrm>
           <a:prstGeom prst="rect">
@@ -21385,7 +21354,7 @@
         </p:nvSpPr>
         <p:spPr>
           <a:xfrm>
-            <a:off x="3293146" y="4169664"/>
+            <a:off x="3639312" y="4169664"/>
             <a:ext cx="685800" cy="475488"/>
           </a:xfrm>
           <a:prstGeom prst="rect">
@@ -21412,7 +21381,7 @@
         </p:nvSpPr>
         <p:spPr>
           <a:xfrm>
-            <a:off x="3293146" y="4169664"/>
+            <a:off x="3639312" y="4169664"/>
             <a:ext cx="685800" cy="475488"/>
           </a:xfrm>
           <a:prstGeom prst="rect">
@@ -21451,7 +21420,7 @@
         </p:nvSpPr>
         <p:spPr>
           <a:xfrm>
-            <a:off x="4331643" y="4169664"/>
+            <a:off x="4850892" y="4169664"/>
             <a:ext cx="685800" cy="475488"/>
           </a:xfrm>
           <a:prstGeom prst="rect">
@@ -21478,7 +21447,7 @@
         </p:nvSpPr>
         <p:spPr>
           <a:xfrm>
-            <a:off x="4331643" y="4169664"/>
+            <a:off x="4850892" y="4169664"/>
             <a:ext cx="685800" cy="475488"/>
           </a:xfrm>
           <a:prstGeom prst="rect">
@@ -21517,7 +21486,7 @@
         </p:nvSpPr>
         <p:spPr>
           <a:xfrm>
-            <a:off x="5370141" y="4169664"/>
+            <a:off x="6062472" y="4169664"/>
             <a:ext cx="685800" cy="475488"/>
           </a:xfrm>
           <a:prstGeom prst="rect">
@@ -21544,7 +21513,7 @@
         </p:nvSpPr>
         <p:spPr>
           <a:xfrm>
-            <a:off x="5370141" y="4169664"/>
+            <a:off x="6062472" y="4169664"/>
             <a:ext cx="685800" cy="475488"/>
           </a:xfrm>
           <a:prstGeom prst="rect">
@@ -21569,7 +21538,7 @@
                 <a:ea typeface="Trebuchet MS" pitchFamily="34" charset="-122"/>
                 <a:cs typeface="Trebuchet MS" pitchFamily="34" charset="-120"/>
               </a:rPr>
-              <a:t>n</a:t>
+              <a:t>l</a:t>
             </a:r>
             <a:endParaRPr lang="en-US" sz="900" dirty="0"/>
           </a:p>
@@ -21583,7 +21552,7 @@
         </p:nvSpPr>
         <p:spPr>
           <a:xfrm>
-            <a:off x="6408638" y="4169664"/>
+            <a:off x="7274052" y="4169664"/>
             <a:ext cx="685800" cy="475488"/>
           </a:xfrm>
           <a:prstGeom prst="rect">
@@ -21610,7 +21579,7 @@
         </p:nvSpPr>
         <p:spPr>
           <a:xfrm>
-            <a:off x="6408638" y="4169664"/>
+            <a:off x="7274052" y="4169664"/>
             <a:ext cx="685800" cy="475488"/>
           </a:xfrm>
           <a:prstGeom prst="rect">
@@ -21635,73 +21604,7 @@
                 <a:ea typeface="Trebuchet MS" pitchFamily="34" charset="-122"/>
                 <a:cs typeface="Trebuchet MS" pitchFamily="34" charset="-120"/>
               </a:rPr>
-              <a:t>e</a:t>
-            </a:r>
-            <a:endParaRPr lang="en-US" sz="900" dirty="0"/>
-          </a:p>
-        </p:txBody>
-      </p:sp>
-      <p:sp>
-        <p:nvSpPr>
-          <p:cNvPr id="43" name="Shape 41"/>
-          <p:cNvSpPr/>
-          <p:nvPr/>
-        </p:nvSpPr>
-        <p:spPr>
-          <a:xfrm>
-            <a:off x="7447135" y="4169664"/>
-            <a:ext cx="685800" cy="475488"/>
-          </a:xfrm>
-          <a:prstGeom prst="rect">
-            <a:avLst>
-              <a:gd name="adj" fmla="val 7692"/>
-            </a:avLst>
-          </a:prstGeom>
-          <a:solidFill>
-            <a:srgbClr val="FFFFFF"/>
-          </a:solidFill>
-          <a:ln w="12700">
-            <a:solidFill>
-              <a:srgbClr val="DB2777"/>
-            </a:solidFill>
-            <a:prstDash val="solid"/>
-          </a:ln>
-        </p:spPr>
-      </p:sp>
-      <p:sp>
-        <p:nvSpPr>
-          <p:cNvPr id="44" name="Text 42"/>
-          <p:cNvSpPr/>
-          <p:nvPr/>
-        </p:nvSpPr>
-        <p:spPr>
-          <a:xfrm>
-            <a:off x="7447135" y="4169664"/>
-            <a:ext cx="685800" cy="475488"/>
-          </a:xfrm>
-          <a:prstGeom prst="rect">
-            <a:avLst/>
-          </a:prstGeom>
-          <a:noFill/>
-          <a:ln/>
-        </p:spPr>
-        <p:txBody>
-          <a:bodyPr wrap="square" lIns="0" tIns="0" rIns="0" bIns="0" rtlCol="0" anchor="ctr"/>
-          <a:lstStyle/>
-          <a:p>
-            <a:pPr algn="ctr" indent="0" marL="0">
-              <a:buNone/>
-            </a:pPr>
-            <a:r>
-              <a:rPr lang="en-US" sz="900" b="1" dirty="0">
-                <a:solidFill>
-                  <a:srgbClr val="9D174D"/>
-                </a:solidFill>
-                <a:latin typeface="Trebuchet MS" pitchFamily="34" charset="0"/>
-                <a:ea typeface="Trebuchet MS" pitchFamily="34" charset="-122"/>
-                <a:cs typeface="Trebuchet MS" pitchFamily="34" charset="-120"/>
-              </a:rPr>
-              <a:t>ss</a:t>
+              <a:t>y</a:t>
             </a:r>
             <a:endParaRPr lang="en-US" sz="900" dirty="0"/>
           </a:p>
@@ -21993,7 +21896,7 @@
                 <a:ea typeface="Calibri" pitchFamily="34" charset="-122"/>
                 <a:cs typeface="Calibri" pitchFamily="34" charset="-120"/>
               </a:rPr>
-              <a:t>Word Labs  •  wordlabs.app  •  Root: 'deep' = far down, intense, profound</a:t>
+              <a:t>Word Labs  •  wordlabs.app  •  Root: 'deep' = far down, profound distance</a:t>
             </a:r>
             <a:endParaRPr lang="en-US" sz="800" dirty="0"/>
           </a:p>
@@ -22132,7 +22035,7 @@
                 <a:ea typeface="Trebuchet MS" pitchFamily="34" charset="-122"/>
                 <a:cs typeface="Trebuchet MS" pitchFamily="34" charset="-120"/>
               </a:rPr>
-              <a:t>deepened</a:t>
+              <a:t>deeper</a:t>
             </a:r>
             <a:endParaRPr lang="en-US" sz="2800" dirty="0"/>
           </a:p>
@@ -22820,7 +22723,7 @@
                 <a:ea typeface="Calibri" pitchFamily="34" charset="-122"/>
                 <a:cs typeface="Calibri" pitchFamily="34" charset="-120"/>
               </a:rPr>
-              <a:t>Word Labs  •  wordlabs.app  •  Root: 'deep' = far down, intense, profound</a:t>
+              <a:t>Word Labs  •  wordlabs.app  •  Root: 'deep' = far down, profound distance</a:t>
             </a:r>
             <a:endParaRPr lang="en-US" sz="800" dirty="0"/>
           </a:p>
@@ -22959,7 +22862,7 @@
                 <a:ea typeface="Trebuchet MS" pitchFamily="34" charset="-122"/>
                 <a:cs typeface="Trebuchet MS" pitchFamily="34" charset="-120"/>
               </a:rPr>
-              <a:t>deepened</a:t>
+              <a:t>deeper</a:t>
             </a:r>
             <a:endParaRPr lang="en-US" sz="2800" dirty="0"/>
           </a:p>
@@ -23039,7 +22942,7 @@
         </p:nvSpPr>
         <p:spPr>
           <a:xfrm>
-            <a:off x="2221992" y="2258568"/>
+            <a:off x="2938272" y="2258568"/>
             <a:ext cx="1828800" cy="292608"/>
           </a:xfrm>
           <a:prstGeom prst="rect">
@@ -23073,7 +22976,7 @@
         </p:nvSpPr>
         <p:spPr>
           <a:xfrm>
-            <a:off x="2221992" y="2258568"/>
+            <a:off x="2938272" y="2258568"/>
             <a:ext cx="1828800" cy="292608"/>
           </a:xfrm>
           <a:prstGeom prst="rect">
@@ -23112,7 +23015,7 @@
         </p:nvSpPr>
         <p:spPr>
           <a:xfrm>
-            <a:off x="2221992" y="2569464"/>
+            <a:off x="2938272" y="2569464"/>
             <a:ext cx="1828800" cy="201168"/>
           </a:xfrm>
           <a:prstGeom prst="rect">
@@ -23137,7 +23040,7 @@
                 <a:ea typeface="Calibri" pitchFamily="34" charset="-122"/>
                 <a:cs typeface="Calibri" pitchFamily="34" charset="-120"/>
               </a:rPr>
-              <a:t>far down, intense</a:t>
+              <a:t>far down, profound</a:t>
             </a:r>
             <a:endParaRPr lang="en-US" sz="850" dirty="0"/>
           </a:p>
@@ -23151,7 +23054,7 @@
         </p:nvSpPr>
         <p:spPr>
           <a:xfrm>
-            <a:off x="4370832" y="2258568"/>
+            <a:off x="5803392" y="2258568"/>
             <a:ext cx="1828800" cy="292608"/>
           </a:xfrm>
           <a:prstGeom prst="rect">
@@ -23185,7 +23088,7 @@
         </p:nvSpPr>
         <p:spPr>
           <a:xfrm>
-            <a:off x="4370832" y="2258568"/>
+            <a:off x="5803392" y="2258568"/>
             <a:ext cx="1828800" cy="292608"/>
           </a:xfrm>
           <a:prstGeom prst="rect">
@@ -23210,7 +23113,7 @@
                 <a:ea typeface="Trebuchet MS" pitchFamily="34" charset="-122"/>
                 <a:cs typeface="Trebuchet MS" pitchFamily="34" charset="-120"/>
               </a:rPr>
-              <a:t>en</a:t>
+              <a:t>er</a:t>
             </a:r>
             <a:endParaRPr lang="en-US" sz="1300" dirty="0"/>
           </a:p>
@@ -23224,7 +23127,7 @@
         </p:nvSpPr>
         <p:spPr>
           <a:xfrm>
-            <a:off x="4370832" y="2569464"/>
+            <a:off x="5803392" y="2569464"/>
             <a:ext cx="1828800" cy="201168"/>
           </a:xfrm>
           <a:prstGeom prst="rect">
@@ -23249,7 +23152,7 @@
                 <a:ea typeface="Calibri" pitchFamily="34" charset="-122"/>
                 <a:cs typeface="Calibri" pitchFamily="34" charset="-120"/>
               </a:rPr>
-              <a:t>to make or become</a:t>
+              <a:t>more than</a:t>
             </a:r>
             <a:endParaRPr lang="en-US" sz="850" dirty="0"/>
           </a:p>
@@ -23263,30 +23166,23 @@
         </p:nvSpPr>
         <p:spPr>
           <a:xfrm>
-            <a:off x="6519672" y="2258568"/>
-            <a:ext cx="1828800" cy="292608"/>
+            <a:off x="365760" y="3273552"/>
+            <a:ext cx="1371600" cy="658368"/>
           </a:xfrm>
           <a:prstGeom prst="rect">
             <a:avLst>
-              <a:gd name="adj" fmla="val 25000"/>
+              <a:gd name="adj" fmla="val 8333"/>
             </a:avLst>
           </a:prstGeom>
           <a:solidFill>
-            <a:srgbClr val="FCE7F3"/>
-          </a:solidFill>
-          <a:ln w="19050">
-            <a:solidFill>
-              <a:srgbClr val="DB2777"/>
-            </a:solidFill>
-            <a:prstDash val="solid"/>
-          </a:ln>
-          <a:effectLst>
-            <a:outerShdw sx="100000" sy="100000" kx="0" ky="0" algn="bl" rotWithShape="0" blurRad="101600" dist="38100" dir="8100000">
-              <a:srgbClr val="000000">
-                <a:alpha val="12000"/>
-              </a:srgbClr>
-            </a:outerShdw>
-          </a:effectLst>
+            <a:srgbClr val="E2E8F0"/>
+          </a:solidFill>
+          <a:ln w="12700">
+            <a:solidFill>
+              <a:srgbClr val="E2E8F0"/>
+            </a:solidFill>
+            <a:prstDash val="solid"/>
+          </a:ln>
         </p:spPr>
       </p:sp>
       <p:sp>
@@ -23297,8 +23193,8 @@
         </p:nvSpPr>
         <p:spPr>
           <a:xfrm>
-            <a:off x="6519672" y="2258568"/>
-            <a:ext cx="1828800" cy="292608"/>
+            <a:off x="365760" y="3273552"/>
+            <a:ext cx="1371600" cy="658368"/>
           </a:xfrm>
           <a:prstGeom prst="rect">
             <a:avLst/>
@@ -23314,73 +23210,100 @@
               <a:buNone/>
             </a:pPr>
             <a:r>
-              <a:rPr lang="en-US" sz="1300" b="1" dirty="0">
-                <a:solidFill>
-                  <a:srgbClr val="9D174D"/>
+              <a:rPr lang="en-US" sz="1100" b="1" dirty="0">
+                <a:solidFill>
+                  <a:srgbClr val="475569"/>
                 </a:solidFill>
                 <a:latin typeface="Trebuchet MS" pitchFamily="34" charset="0"/>
                 <a:ea typeface="Trebuchet MS" pitchFamily="34" charset="-122"/>
                 <a:cs typeface="Trebuchet MS" pitchFamily="34" charset="-120"/>
               </a:rPr>
-              <a:t>ed</a:t>
-            </a:r>
-            <a:endParaRPr lang="en-US" sz="1300" dirty="0"/>
-          </a:p>
-        </p:txBody>
-      </p:sp>
-      <p:sp>
-        <p:nvSpPr>
-          <p:cNvPr id="24" name="Text 22"/>
-          <p:cNvSpPr/>
-          <p:nvPr/>
-        </p:nvSpPr>
-        <p:spPr>
-          <a:xfrm>
-            <a:off x="6519672" y="2569464"/>
-            <a:ext cx="1828800" cy="201168"/>
-          </a:xfrm>
-          <a:prstGeom prst="rect">
-            <a:avLst/>
-          </a:prstGeom>
-          <a:noFill/>
-          <a:ln/>
-        </p:spPr>
-        <p:txBody>
-          <a:bodyPr wrap="square" lIns="0" tIns="0" rIns="0" bIns="0" rtlCol="0" anchor="t"/>
-          <a:lstStyle/>
-          <a:p>
-            <a:pPr algn="ctr" indent="0" marL="0">
-              <a:buNone/>
-            </a:pPr>
-            <a:r>
-              <a:rPr lang="en-US" sz="850" dirty="0">
-                <a:solidFill>
-                  <a:srgbClr val="475569"/>
+              <a:t>Syllables</a:t>
+            </a:r>
+            <a:endParaRPr lang="en-US" sz="1100" dirty="0"/>
+          </a:p>
+        </p:txBody>
+      </p:sp>
+      <p:sp>
+        <p:nvSpPr>
+          <p:cNvPr id="24" name="Shape 22"/>
+          <p:cNvSpPr/>
+          <p:nvPr/>
+        </p:nvSpPr>
+        <p:spPr>
+          <a:xfrm>
+            <a:off x="1874520" y="3273552"/>
+            <a:ext cx="6903720" cy="658368"/>
+          </a:xfrm>
+          <a:prstGeom prst="rect">
+            <a:avLst>
+              <a:gd name="adj" fmla="val 8333"/>
+            </a:avLst>
+          </a:prstGeom>
+          <a:solidFill>
+            <a:srgbClr val="F8FAFC"/>
+          </a:solidFill>
+          <a:ln w="12700">
+            <a:solidFill>
+              <a:srgbClr val="E2E8F0"/>
+            </a:solidFill>
+            <a:prstDash val="dash"/>
+          </a:ln>
+        </p:spPr>
+      </p:sp>
+      <p:sp>
+        <p:nvSpPr>
+          <p:cNvPr id="25" name="Text 23"/>
+          <p:cNvSpPr/>
+          <p:nvPr/>
+        </p:nvSpPr>
+        <p:spPr>
+          <a:xfrm>
+            <a:off x="1874520" y="3273552"/>
+            <a:ext cx="6903720" cy="658368"/>
+          </a:xfrm>
+          <a:prstGeom prst="rect">
+            <a:avLst/>
+          </a:prstGeom>
+          <a:noFill/>
+          <a:ln/>
+        </p:spPr>
+        <p:txBody>
+          <a:bodyPr wrap="square" rtlCol="0" anchor="ctr"/>
+          <a:lstStyle/>
+          <a:p>
+            <a:pPr algn="ctr" indent="0" marL="0">
+              <a:buNone/>
+            </a:pPr>
+            <a:r>
+              <a:rPr lang="en-US" sz="1100" i="1" dirty="0">
+                <a:solidFill>
+                  <a:srgbClr val="CBD5E1"/>
                 </a:solidFill>
                 <a:latin typeface="Calibri" pitchFamily="34" charset="0"/>
                 <a:ea typeface="Calibri" pitchFamily="34" charset="-122"/>
                 <a:cs typeface="Calibri" pitchFamily="34" charset="-120"/>
               </a:rPr>
-              <a:t>past tense</a:t>
-            </a:r>
-            <a:endParaRPr lang="en-US" sz="850" dirty="0"/>
-          </a:p>
-        </p:txBody>
-      </p:sp>
-      <p:sp>
-        <p:nvSpPr>
-          <p:cNvPr id="25" name="Shape 23"/>
-          <p:cNvSpPr/>
-          <p:nvPr/>
-        </p:nvSpPr>
-        <p:spPr>
-          <a:xfrm>
-            <a:off x="365760" y="3273552"/>
-            <a:ext cx="1371600" cy="658368"/>
+              <a:t>Write here...</a:t>
+            </a:r>
+            <a:endParaRPr lang="en-US" sz="1100" dirty="0"/>
+          </a:p>
+        </p:txBody>
+      </p:sp>
+      <p:sp>
+        <p:nvSpPr>
+          <p:cNvPr id="26" name="Shape 24"/>
+          <p:cNvSpPr/>
+          <p:nvPr/>
+        </p:nvSpPr>
+        <p:spPr>
+          <a:xfrm>
+            <a:off x="365760" y="4096512"/>
+            <a:ext cx="1371600" cy="804672"/>
           </a:xfrm>
           <a:prstGeom prst="rect">
             <a:avLst>
-              <a:gd name="adj" fmla="val 8333"/>
+              <a:gd name="adj" fmla="val 6818"/>
             </a:avLst>
           </a:prstGeom>
           <a:solidFill>
@@ -23396,14 +23319,14 @@
       </p:sp>
       <p:sp>
         <p:nvSpPr>
-          <p:cNvPr id="26" name="Text 24"/>
-          <p:cNvSpPr/>
-          <p:nvPr/>
-        </p:nvSpPr>
-        <p:spPr>
-          <a:xfrm>
-            <a:off x="365760" y="3273552"/>
-            <a:ext cx="1371600" cy="658368"/>
+          <p:cNvPr id="27" name="Text 25"/>
+          <p:cNvSpPr/>
+          <p:nvPr/>
+        </p:nvSpPr>
+        <p:spPr>
+          <a:xfrm>
+            <a:off x="365760" y="4096512"/>
+            <a:ext cx="1371600" cy="804672"/>
           </a:xfrm>
           <a:prstGeom prst="rect">
             <a:avLst/>
@@ -23427,7 +23350,7 @@
                 <a:ea typeface="Trebuchet MS" pitchFamily="34" charset="-122"/>
                 <a:cs typeface="Trebuchet MS" pitchFamily="34" charset="-120"/>
               </a:rPr>
-              <a:t>Syllables</a:t>
+              <a:t>Phonemes</a:t>
             </a:r>
             <a:endParaRPr lang="en-US" sz="1100" dirty="0"/>
           </a:p>
@@ -23435,80 +23358,14 @@
       </p:sp>
       <p:sp>
         <p:nvSpPr>
-          <p:cNvPr id="27" name="Shape 25"/>
-          <p:cNvSpPr/>
-          <p:nvPr/>
-        </p:nvSpPr>
-        <p:spPr>
-          <a:xfrm>
-            <a:off x="1874520" y="3273552"/>
-            <a:ext cx="6903720" cy="658368"/>
-          </a:xfrm>
-          <a:prstGeom prst="rect">
-            <a:avLst>
-              <a:gd name="adj" fmla="val 8333"/>
-            </a:avLst>
-          </a:prstGeom>
-          <a:solidFill>
-            <a:srgbClr val="F8FAFC"/>
-          </a:solidFill>
-          <a:ln w="12700">
-            <a:solidFill>
-              <a:srgbClr val="E2E8F0"/>
-            </a:solidFill>
-            <a:prstDash val="dash"/>
-          </a:ln>
-        </p:spPr>
-      </p:sp>
-      <p:sp>
-        <p:nvSpPr>
-          <p:cNvPr id="28" name="Text 26"/>
-          <p:cNvSpPr/>
-          <p:nvPr/>
-        </p:nvSpPr>
-        <p:spPr>
-          <a:xfrm>
-            <a:off x="1874520" y="3273552"/>
-            <a:ext cx="6903720" cy="658368"/>
-          </a:xfrm>
-          <a:prstGeom prst="rect">
-            <a:avLst/>
-          </a:prstGeom>
-          <a:noFill/>
-          <a:ln/>
-        </p:spPr>
-        <p:txBody>
-          <a:bodyPr wrap="square" rtlCol="0" anchor="ctr"/>
-          <a:lstStyle/>
-          <a:p>
-            <a:pPr algn="ctr" indent="0" marL="0">
-              <a:buNone/>
-            </a:pPr>
-            <a:r>
-              <a:rPr lang="en-US" sz="1100" i="1" dirty="0">
-                <a:solidFill>
-                  <a:srgbClr val="CBD5E1"/>
-                </a:solidFill>
-                <a:latin typeface="Calibri" pitchFamily="34" charset="0"/>
-                <a:ea typeface="Calibri" pitchFamily="34" charset="-122"/>
-                <a:cs typeface="Calibri" pitchFamily="34" charset="-120"/>
-              </a:rPr>
-              <a:t>Write here...</a:t>
-            </a:r>
-            <a:endParaRPr lang="en-US" sz="1100" dirty="0"/>
-          </a:p>
-        </p:txBody>
-      </p:sp>
-      <p:sp>
-        <p:nvSpPr>
-          <p:cNvPr id="29" name="Shape 27"/>
-          <p:cNvSpPr/>
-          <p:nvPr/>
-        </p:nvSpPr>
-        <p:spPr>
-          <a:xfrm>
-            <a:off x="365760" y="4096512"/>
-            <a:ext cx="1371600" cy="804672"/>
+          <p:cNvPr id="28" name="Shape 26"/>
+          <p:cNvSpPr/>
+          <p:nvPr/>
+        </p:nvSpPr>
+        <p:spPr>
+          <a:xfrm>
+            <a:off x="1874520" y="4096512"/>
+            <a:ext cx="6903720" cy="804672"/>
           </a:xfrm>
           <a:prstGeom prst="rect">
             <a:avLst>
@@ -23516,85 +23373,19 @@
             </a:avLst>
           </a:prstGeom>
           <a:solidFill>
-            <a:srgbClr val="E2E8F0"/>
+            <a:srgbClr val="F8FAFC"/>
           </a:solidFill>
           <a:ln w="12700">
             <a:solidFill>
               <a:srgbClr val="E2E8F0"/>
             </a:solidFill>
-            <a:prstDash val="solid"/>
-          </a:ln>
-        </p:spPr>
-      </p:sp>
-      <p:sp>
-        <p:nvSpPr>
-          <p:cNvPr id="30" name="Text 28"/>
-          <p:cNvSpPr/>
-          <p:nvPr/>
-        </p:nvSpPr>
-        <p:spPr>
-          <a:xfrm>
-            <a:off x="365760" y="4096512"/>
-            <a:ext cx="1371600" cy="804672"/>
-          </a:xfrm>
-          <a:prstGeom prst="rect">
-            <a:avLst/>
-          </a:prstGeom>
-          <a:noFill/>
-          <a:ln/>
-        </p:spPr>
-        <p:txBody>
-          <a:bodyPr wrap="square" lIns="0" tIns="0" rIns="0" bIns="0" rtlCol="0" anchor="ctr"/>
-          <a:lstStyle/>
-          <a:p>
-            <a:pPr algn="ctr" indent="0" marL="0">
-              <a:buNone/>
-            </a:pPr>
-            <a:r>
-              <a:rPr lang="en-US" sz="1100" b="1" dirty="0">
-                <a:solidFill>
-                  <a:srgbClr val="475569"/>
-                </a:solidFill>
-                <a:latin typeface="Trebuchet MS" pitchFamily="34" charset="0"/>
-                <a:ea typeface="Trebuchet MS" pitchFamily="34" charset="-122"/>
-                <a:cs typeface="Trebuchet MS" pitchFamily="34" charset="-120"/>
-              </a:rPr>
-              <a:t>Phonemes</a:t>
-            </a:r>
-            <a:endParaRPr lang="en-US" sz="1100" dirty="0"/>
-          </a:p>
-        </p:txBody>
-      </p:sp>
-      <p:sp>
-        <p:nvSpPr>
-          <p:cNvPr id="31" name="Shape 29"/>
-          <p:cNvSpPr/>
-          <p:nvPr/>
-        </p:nvSpPr>
-        <p:spPr>
-          <a:xfrm>
-            <a:off x="1874520" y="4096512"/>
-            <a:ext cx="6903720" cy="804672"/>
-          </a:xfrm>
-          <a:prstGeom prst="rect">
-            <a:avLst>
-              <a:gd name="adj" fmla="val 6818"/>
-            </a:avLst>
-          </a:prstGeom>
-          <a:solidFill>
-            <a:srgbClr val="F8FAFC"/>
-          </a:solidFill>
-          <a:ln w="12700">
-            <a:solidFill>
-              <a:srgbClr val="E2E8F0"/>
-            </a:solidFill>
             <a:prstDash val="dash"/>
           </a:ln>
         </p:spPr>
       </p:sp>
       <p:sp>
         <p:nvSpPr>
-          <p:cNvPr id="32" name="Text 30"/>
+          <p:cNvPr id="29" name="Text 27"/>
           <p:cNvSpPr/>
           <p:nvPr/>
         </p:nvSpPr>
@@ -23917,7 +23708,7 @@
                 <a:ea typeface="Calibri" pitchFamily="34" charset="-122"/>
                 <a:cs typeface="Calibri" pitchFamily="34" charset="-120"/>
               </a:rPr>
-              <a:t>Word Labs  •  wordlabs.app  •  Root: 'deep' = far down, intense, profound</a:t>
+              <a:t>Word Labs  •  wordlabs.app  •  Root: 'deep' = far down, profound distance</a:t>
             </a:r>
             <a:endParaRPr lang="en-US" sz="800" dirty="0"/>
           </a:p>
@@ -23990,7 +23781,7 @@
                 <a:ea typeface="Trebuchet MS" pitchFamily="34" charset="-122"/>
                 <a:cs typeface="Trebuchet MS" pitchFamily="34" charset="-120"/>
               </a:rPr>
-              <a:t>We are learning that the root 'deep' means 'far down, intense, profound'.</a:t>
+              <a:t>We are learning that the root 'deep' means 'far down, profound distance'.</a:t>
             </a:r>
             <a:endParaRPr lang="en-US" sz="2000" dirty="0"/>
           </a:p>
@@ -24636,7 +24427,7 @@
                 <a:ea typeface="Calibri" pitchFamily="34" charset="-122"/>
                 <a:cs typeface="Calibri" pitchFamily="34" charset="-120"/>
               </a:rPr>
-              <a:t>Word Labs  •  wordlabs.app  •  Root: 'deep' = far down, intense, profound</a:t>
+              <a:t>Word Labs  •  wordlabs.app  •  Root: 'deep' = far down, profound distance</a:t>
             </a:r>
             <a:endParaRPr lang="en-US" sz="800" dirty="0"/>
           </a:p>
@@ -24775,7 +24566,7 @@
                 <a:ea typeface="Trebuchet MS" pitchFamily="34" charset="-122"/>
                 <a:cs typeface="Trebuchet MS" pitchFamily="34" charset="-120"/>
               </a:rPr>
-              <a:t>deepened</a:t>
+              <a:t>deeper</a:t>
             </a:r>
             <a:endParaRPr lang="en-US" sz="2800" dirty="0"/>
           </a:p>
@@ -24855,7 +24646,7 @@
         </p:nvSpPr>
         <p:spPr>
           <a:xfrm>
-            <a:off x="2221992" y="2258568"/>
+            <a:off x="2938272" y="2258568"/>
             <a:ext cx="1828800" cy="292608"/>
           </a:xfrm>
           <a:prstGeom prst="rect">
@@ -24889,7 +24680,7 @@
         </p:nvSpPr>
         <p:spPr>
           <a:xfrm>
-            <a:off x="2221992" y="2258568"/>
+            <a:off x="2938272" y="2258568"/>
             <a:ext cx="1828800" cy="292608"/>
           </a:xfrm>
           <a:prstGeom prst="rect">
@@ -24928,7 +24719,7 @@
         </p:nvSpPr>
         <p:spPr>
           <a:xfrm>
-            <a:off x="2221992" y="2569464"/>
+            <a:off x="2938272" y="2569464"/>
             <a:ext cx="1828800" cy="201168"/>
           </a:xfrm>
           <a:prstGeom prst="rect">
@@ -24953,7 +24744,7 @@
                 <a:ea typeface="Calibri" pitchFamily="34" charset="-122"/>
                 <a:cs typeface="Calibri" pitchFamily="34" charset="-120"/>
               </a:rPr>
-              <a:t>far down, intense</a:t>
+              <a:t>far down, profound</a:t>
             </a:r>
             <a:endParaRPr lang="en-US" sz="850" dirty="0"/>
           </a:p>
@@ -24967,7 +24758,7 @@
         </p:nvSpPr>
         <p:spPr>
           <a:xfrm>
-            <a:off x="4370832" y="2258568"/>
+            <a:off x="5803392" y="2258568"/>
             <a:ext cx="1828800" cy="292608"/>
           </a:xfrm>
           <a:prstGeom prst="rect">
@@ -25001,7 +24792,7 @@
         </p:nvSpPr>
         <p:spPr>
           <a:xfrm>
-            <a:off x="4370832" y="2258568"/>
+            <a:off x="5803392" y="2258568"/>
             <a:ext cx="1828800" cy="292608"/>
           </a:xfrm>
           <a:prstGeom prst="rect">
@@ -25026,7 +24817,7 @@
                 <a:ea typeface="Trebuchet MS" pitchFamily="34" charset="-122"/>
                 <a:cs typeface="Trebuchet MS" pitchFamily="34" charset="-120"/>
               </a:rPr>
-              <a:t>en</a:t>
+              <a:t>er</a:t>
             </a:r>
             <a:endParaRPr lang="en-US" sz="1300" dirty="0"/>
           </a:p>
@@ -25040,7 +24831,7 @@
         </p:nvSpPr>
         <p:spPr>
           <a:xfrm>
-            <a:off x="4370832" y="2569464"/>
+            <a:off x="5803392" y="2569464"/>
             <a:ext cx="1828800" cy="201168"/>
           </a:xfrm>
           <a:prstGeom prst="rect">
@@ -25065,7 +24856,7 @@
                 <a:ea typeface="Calibri" pitchFamily="34" charset="-122"/>
                 <a:cs typeface="Calibri" pitchFamily="34" charset="-120"/>
               </a:rPr>
-              <a:t>to make or become</a:t>
+              <a:t>more than</a:t>
             </a:r>
             <a:endParaRPr lang="en-US" sz="850" dirty="0"/>
           </a:p>
@@ -25079,30 +24870,23 @@
         </p:nvSpPr>
         <p:spPr>
           <a:xfrm>
-            <a:off x="6519672" y="2258568"/>
-            <a:ext cx="1828800" cy="292608"/>
+            <a:off x="365760" y="3273552"/>
+            <a:ext cx="1371600" cy="658368"/>
           </a:xfrm>
           <a:prstGeom prst="rect">
             <a:avLst>
-              <a:gd name="adj" fmla="val 25000"/>
+              <a:gd name="adj" fmla="val 8333"/>
             </a:avLst>
           </a:prstGeom>
           <a:solidFill>
-            <a:srgbClr val="FCE7F3"/>
-          </a:solidFill>
-          <a:ln w="19050">
-            <a:solidFill>
-              <a:srgbClr val="DB2777"/>
-            </a:solidFill>
-            <a:prstDash val="solid"/>
-          </a:ln>
-          <a:effectLst>
-            <a:outerShdw sx="100000" sy="100000" kx="0" ky="0" algn="bl" rotWithShape="0" blurRad="101600" dist="38100" dir="8100000">
-              <a:srgbClr val="000000">
-                <a:alpha val="12000"/>
-              </a:srgbClr>
-            </a:outerShdw>
-          </a:effectLst>
+            <a:srgbClr val="E2E8F0"/>
+          </a:solidFill>
+          <a:ln w="12700">
+            <a:solidFill>
+              <a:srgbClr val="E2E8F0"/>
+            </a:solidFill>
+            <a:prstDash val="solid"/>
+          </a:ln>
         </p:spPr>
       </p:sp>
       <p:sp>
@@ -25113,8 +24897,8 @@
         </p:nvSpPr>
         <p:spPr>
           <a:xfrm>
-            <a:off x="6519672" y="2258568"/>
-            <a:ext cx="1828800" cy="292608"/>
+            <a:off x="365760" y="3273552"/>
+            <a:ext cx="1371600" cy="658368"/>
           </a:xfrm>
           <a:prstGeom prst="rect">
             <a:avLst/>
@@ -25130,69 +24914,30 @@
               <a:buNone/>
             </a:pPr>
             <a:r>
-              <a:rPr lang="en-US" sz="1300" b="1" dirty="0">
-                <a:solidFill>
-                  <a:srgbClr val="9D174D"/>
+              <a:rPr lang="en-US" sz="1100" b="1" dirty="0">
+                <a:solidFill>
+                  <a:srgbClr val="475569"/>
                 </a:solidFill>
                 <a:latin typeface="Trebuchet MS" pitchFamily="34" charset="0"/>
                 <a:ea typeface="Trebuchet MS" pitchFamily="34" charset="-122"/>
                 <a:cs typeface="Trebuchet MS" pitchFamily="34" charset="-120"/>
               </a:rPr>
-              <a:t>ed</a:t>
-            </a:r>
-            <a:endParaRPr lang="en-US" sz="1300" dirty="0"/>
-          </a:p>
-        </p:txBody>
-      </p:sp>
-      <p:sp>
-        <p:nvSpPr>
-          <p:cNvPr id="24" name="Text 22"/>
-          <p:cNvSpPr/>
-          <p:nvPr/>
-        </p:nvSpPr>
-        <p:spPr>
-          <a:xfrm>
-            <a:off x="6519672" y="2569464"/>
-            <a:ext cx="1828800" cy="201168"/>
-          </a:xfrm>
-          <a:prstGeom prst="rect">
-            <a:avLst/>
-          </a:prstGeom>
-          <a:noFill/>
-          <a:ln/>
-        </p:spPr>
-        <p:txBody>
-          <a:bodyPr wrap="square" lIns="0" tIns="0" rIns="0" bIns="0" rtlCol="0" anchor="t"/>
-          <a:lstStyle/>
-          <a:p>
-            <a:pPr algn="ctr" indent="0" marL="0">
-              <a:buNone/>
-            </a:pPr>
-            <a:r>
-              <a:rPr lang="en-US" sz="850" dirty="0">
-                <a:solidFill>
-                  <a:srgbClr val="475569"/>
-                </a:solidFill>
-                <a:latin typeface="Calibri" pitchFamily="34" charset="0"/>
-                <a:ea typeface="Calibri" pitchFamily="34" charset="-122"/>
-                <a:cs typeface="Calibri" pitchFamily="34" charset="-120"/>
-              </a:rPr>
-              <a:t>past tense</a:t>
-            </a:r>
-            <a:endParaRPr lang="en-US" sz="850" dirty="0"/>
-          </a:p>
-        </p:txBody>
-      </p:sp>
-      <p:sp>
-        <p:nvSpPr>
-          <p:cNvPr id="25" name="Shape 23"/>
-          <p:cNvSpPr/>
-          <p:nvPr/>
-        </p:nvSpPr>
-        <p:spPr>
-          <a:xfrm>
-            <a:off x="365760" y="3273552"/>
-            <a:ext cx="1371600" cy="658368"/>
+              <a:t>Syllables</a:t>
+            </a:r>
+            <a:endParaRPr lang="en-US" sz="1100" dirty="0"/>
+          </a:p>
+        </p:txBody>
+      </p:sp>
+      <p:sp>
+        <p:nvSpPr>
+          <p:cNvPr id="24" name="Shape 22"/>
+          <p:cNvSpPr/>
+          <p:nvPr/>
+        </p:nvSpPr>
+        <p:spPr>
+          <a:xfrm>
+            <a:off x="1874520" y="3273552"/>
+            <a:ext cx="6903720" cy="658368"/>
           </a:xfrm>
           <a:prstGeom prst="rect">
             <a:avLst>
@@ -25200,11 +24945,38 @@
             </a:avLst>
           </a:prstGeom>
           <a:solidFill>
-            <a:srgbClr val="E2E8F0"/>
-          </a:solidFill>
-          <a:ln w="12700">
-            <a:solidFill>
-              <a:srgbClr val="E2E8F0"/>
+            <a:srgbClr val="CCFBF1"/>
+          </a:solidFill>
+          <a:ln w="12700">
+            <a:solidFill>
+              <a:srgbClr val="0D9488"/>
+            </a:solidFill>
+            <a:prstDash val="solid"/>
+          </a:ln>
+        </p:spPr>
+      </p:sp>
+      <p:sp>
+        <p:nvSpPr>
+          <p:cNvPr id="25" name="Shape 23"/>
+          <p:cNvSpPr/>
+          <p:nvPr/>
+        </p:nvSpPr>
+        <p:spPr>
+          <a:xfrm>
+            <a:off x="2999232" y="3364992"/>
+            <a:ext cx="1645920" cy="475488"/>
+          </a:xfrm>
+          <a:prstGeom prst="rect">
+            <a:avLst>
+              <a:gd name="adj" fmla="val 9615"/>
+            </a:avLst>
+          </a:prstGeom>
+          <a:solidFill>
+            <a:srgbClr val="FFFFFF"/>
+          </a:solidFill>
+          <a:ln w="12700">
+            <a:solidFill>
+              <a:srgbClr val="0D9488"/>
             </a:solidFill>
             <a:prstDash val="solid"/>
           </a:ln>
@@ -25218,8 +24990,8 @@
         </p:nvSpPr>
         <p:spPr>
           <a:xfrm>
-            <a:off x="365760" y="3273552"/>
-            <a:ext cx="1371600" cy="658368"/>
+            <a:off x="2999232" y="3364992"/>
+            <a:ext cx="1645920" cy="475488"/>
           </a:xfrm>
           <a:prstGeom prst="rect">
             <a:avLst/>
@@ -25235,46 +25007,58 @@
               <a:buNone/>
             </a:pPr>
             <a:r>
-              <a:rPr lang="en-US" sz="1100" b="1" dirty="0">
-                <a:solidFill>
-                  <a:srgbClr val="475569"/>
+              <a:rPr lang="en-US" sz="1400" b="1" dirty="0">
+                <a:solidFill>
+                  <a:srgbClr val="0D9488"/>
                 </a:solidFill>
                 <a:latin typeface="Trebuchet MS" pitchFamily="34" charset="0"/>
                 <a:ea typeface="Trebuchet MS" pitchFamily="34" charset="-122"/>
                 <a:cs typeface="Trebuchet MS" pitchFamily="34" charset="-120"/>
               </a:rPr>
-              <a:t>Syllables</a:t>
-            </a:r>
-            <a:endParaRPr lang="en-US" sz="1100" dirty="0"/>
-          </a:p>
-        </p:txBody>
-      </p:sp>
-      <p:sp>
-        <p:nvSpPr>
-          <p:cNvPr id="27" name="Shape 25"/>
-          <p:cNvSpPr/>
-          <p:nvPr/>
-        </p:nvSpPr>
-        <p:spPr>
-          <a:xfrm>
-            <a:off x="1874520" y="3273552"/>
-            <a:ext cx="6903720" cy="658368"/>
-          </a:xfrm>
-          <a:prstGeom prst="rect">
-            <a:avLst>
-              <a:gd name="adj" fmla="val 8333"/>
-            </a:avLst>
-          </a:prstGeom>
-          <a:solidFill>
-            <a:srgbClr val="CCFBF1"/>
-          </a:solidFill>
-          <a:ln w="12700">
-            <a:solidFill>
-              <a:srgbClr val="0D9488"/>
-            </a:solidFill>
-            <a:prstDash val="solid"/>
-          </a:ln>
-        </p:spPr>
+              <a:t>deep</a:t>
+            </a:r>
+            <a:endParaRPr lang="en-US" sz="1400" dirty="0"/>
+          </a:p>
+        </p:txBody>
+      </p:sp>
+      <p:sp>
+        <p:nvSpPr>
+          <p:cNvPr id="27" name="Text 25"/>
+          <p:cNvSpPr/>
+          <p:nvPr/>
+        </p:nvSpPr>
+        <p:spPr>
+          <a:xfrm>
+            <a:off x="4645152" y="3364992"/>
+            <a:ext cx="1097280" cy="475488"/>
+          </a:xfrm>
+          <a:prstGeom prst="rect">
+            <a:avLst/>
+          </a:prstGeom>
+          <a:noFill/>
+          <a:ln/>
+        </p:spPr>
+        <p:txBody>
+          <a:bodyPr wrap="square" lIns="0" tIns="0" rIns="0" bIns="0" rtlCol="0" anchor="ctr"/>
+          <a:lstStyle/>
+          <a:p>
+            <a:pPr algn="ctr" indent="0" marL="0">
+              <a:buNone/>
+            </a:pPr>
+            <a:r>
+              <a:rPr lang="en-US" sz="1600" b="1" dirty="0">
+                <a:solidFill>
+                  <a:srgbClr val="0D9488"/>
+                </a:solidFill>
+                <a:latin typeface="Trebuchet MS" pitchFamily="34" charset="0"/>
+                <a:ea typeface="Trebuchet MS" pitchFamily="34" charset="-122"/>
+                <a:cs typeface="Trebuchet MS" pitchFamily="34" charset="-120"/>
+              </a:rPr>
+              <a:t>·</a:t>
+            </a:r>
+            <a:endParaRPr lang="en-US" sz="1600" dirty="0"/>
+          </a:p>
+        </p:txBody>
       </p:sp>
       <p:sp>
         <p:nvSpPr>
@@ -25284,7 +25068,7 @@
         </p:nvSpPr>
         <p:spPr>
           <a:xfrm>
-            <a:off x="2999232" y="3364992"/>
+            <a:off x="5742432" y="3364992"/>
             <a:ext cx="1645920" cy="475488"/>
           </a:xfrm>
           <a:prstGeom prst="rect">
@@ -25311,7 +25095,7 @@
         </p:nvSpPr>
         <p:spPr>
           <a:xfrm>
-            <a:off x="2999232" y="3364992"/>
+            <a:off x="5742432" y="3364992"/>
             <a:ext cx="1645920" cy="475488"/>
           </a:xfrm>
           <a:prstGeom prst="rect">
@@ -25336,7 +25120,7 @@
                 <a:ea typeface="Trebuchet MS" pitchFamily="34" charset="-122"/>
                 <a:cs typeface="Trebuchet MS" pitchFamily="34" charset="-120"/>
               </a:rPr>
-              <a:t>deep</a:t>
+              <a:t>er</a:t>
             </a:r>
             <a:endParaRPr lang="en-US" sz="1400" dirty="0"/>
           </a:p>
@@ -25344,14 +25128,41 @@
       </p:sp>
       <p:sp>
         <p:nvSpPr>
-          <p:cNvPr id="30" name="Text 28"/>
-          <p:cNvSpPr/>
-          <p:nvPr/>
-        </p:nvSpPr>
-        <p:spPr>
-          <a:xfrm>
-            <a:off x="4645152" y="3364992"/>
-            <a:ext cx="1097280" cy="475488"/>
+          <p:cNvPr id="30" name="Shape 28"/>
+          <p:cNvSpPr/>
+          <p:nvPr/>
+        </p:nvSpPr>
+        <p:spPr>
+          <a:xfrm>
+            <a:off x="365760" y="4096512"/>
+            <a:ext cx="1371600" cy="804672"/>
+          </a:xfrm>
+          <a:prstGeom prst="rect">
+            <a:avLst>
+              <a:gd name="adj" fmla="val 6818"/>
+            </a:avLst>
+          </a:prstGeom>
+          <a:solidFill>
+            <a:srgbClr val="E2E8F0"/>
+          </a:solidFill>
+          <a:ln w="12700">
+            <a:solidFill>
+              <a:srgbClr val="E2E8F0"/>
+            </a:solidFill>
+            <a:prstDash val="solid"/>
+          </a:ln>
+        </p:spPr>
+      </p:sp>
+      <p:sp>
+        <p:nvSpPr>
+          <p:cNvPr id="31" name="Text 29"/>
+          <p:cNvSpPr/>
+          <p:nvPr/>
+        </p:nvSpPr>
+        <p:spPr>
+          <a:xfrm>
+            <a:off x="365760" y="4096512"/>
+            <a:ext cx="1371600" cy="804672"/>
           </a:xfrm>
           <a:prstGeom prst="rect">
             <a:avLst/>
@@ -25367,96 +25178,30 @@
               <a:buNone/>
             </a:pPr>
             <a:r>
-              <a:rPr lang="en-US" sz="1600" b="1" dirty="0">
-                <a:solidFill>
-                  <a:srgbClr val="0D9488"/>
+              <a:rPr lang="en-US" sz="1100" b="1" dirty="0">
+                <a:solidFill>
+                  <a:srgbClr val="475569"/>
                 </a:solidFill>
                 <a:latin typeface="Trebuchet MS" pitchFamily="34" charset="0"/>
                 <a:ea typeface="Trebuchet MS" pitchFamily="34" charset="-122"/>
                 <a:cs typeface="Trebuchet MS" pitchFamily="34" charset="-120"/>
               </a:rPr>
-              <a:t>·</a:t>
-            </a:r>
-            <a:endParaRPr lang="en-US" sz="1600" dirty="0"/>
-          </a:p>
-        </p:txBody>
-      </p:sp>
-      <p:sp>
-        <p:nvSpPr>
-          <p:cNvPr id="31" name="Shape 29"/>
-          <p:cNvSpPr/>
-          <p:nvPr/>
-        </p:nvSpPr>
-        <p:spPr>
-          <a:xfrm>
-            <a:off x="5742432" y="3364992"/>
-            <a:ext cx="1645920" cy="475488"/>
-          </a:xfrm>
-          <a:prstGeom prst="rect">
-            <a:avLst>
-              <a:gd name="adj" fmla="val 9615"/>
-            </a:avLst>
-          </a:prstGeom>
-          <a:solidFill>
-            <a:srgbClr val="FFFFFF"/>
-          </a:solidFill>
-          <a:ln w="12700">
-            <a:solidFill>
-              <a:srgbClr val="0D9488"/>
-            </a:solidFill>
-            <a:prstDash val="solid"/>
-          </a:ln>
-        </p:spPr>
-      </p:sp>
-      <p:sp>
-        <p:nvSpPr>
-          <p:cNvPr id="32" name="Text 30"/>
-          <p:cNvSpPr/>
-          <p:nvPr/>
-        </p:nvSpPr>
-        <p:spPr>
-          <a:xfrm>
-            <a:off x="5742432" y="3364992"/>
-            <a:ext cx="1645920" cy="475488"/>
-          </a:xfrm>
-          <a:prstGeom prst="rect">
-            <a:avLst/>
-          </a:prstGeom>
-          <a:noFill/>
-          <a:ln/>
-        </p:spPr>
-        <p:txBody>
-          <a:bodyPr wrap="square" lIns="0" tIns="0" rIns="0" bIns="0" rtlCol="0" anchor="ctr"/>
-          <a:lstStyle/>
-          <a:p>
-            <a:pPr algn="ctr" indent="0" marL="0">
-              <a:buNone/>
-            </a:pPr>
-            <a:r>
-              <a:rPr lang="en-US" sz="1400" b="1" dirty="0">
-                <a:solidFill>
-                  <a:srgbClr val="0D9488"/>
-                </a:solidFill>
-                <a:latin typeface="Trebuchet MS" pitchFamily="34" charset="0"/>
-                <a:ea typeface="Trebuchet MS" pitchFamily="34" charset="-122"/>
-                <a:cs typeface="Trebuchet MS" pitchFamily="34" charset="-120"/>
-              </a:rPr>
-              <a:t>ened</a:t>
-            </a:r>
-            <a:endParaRPr lang="en-US" sz="1400" dirty="0"/>
-          </a:p>
-        </p:txBody>
-      </p:sp>
-      <p:sp>
-        <p:nvSpPr>
-          <p:cNvPr id="33" name="Shape 31"/>
-          <p:cNvSpPr/>
-          <p:nvPr/>
-        </p:nvSpPr>
-        <p:spPr>
-          <a:xfrm>
-            <a:off x="365760" y="4096512"/>
-            <a:ext cx="1371600" cy="804672"/>
+              <a:t>Phonemes</a:t>
+            </a:r>
+            <a:endParaRPr lang="en-US" sz="1100" dirty="0"/>
+          </a:p>
+        </p:txBody>
+      </p:sp>
+      <p:sp>
+        <p:nvSpPr>
+          <p:cNvPr id="32" name="Shape 30"/>
+          <p:cNvSpPr/>
+          <p:nvPr/>
+        </p:nvSpPr>
+        <p:spPr>
+          <a:xfrm>
+            <a:off x="1874520" y="4096512"/>
+            <a:ext cx="6903720" cy="804672"/>
           </a:xfrm>
           <a:prstGeom prst="rect">
             <a:avLst>
@@ -25464,85 +25209,19 @@
             </a:avLst>
           </a:prstGeom>
           <a:solidFill>
-            <a:srgbClr val="E2E8F0"/>
+            <a:srgbClr val="F8FAFC"/>
           </a:solidFill>
           <a:ln w="12700">
             <a:solidFill>
               <a:srgbClr val="E2E8F0"/>
             </a:solidFill>
-            <a:prstDash val="solid"/>
-          </a:ln>
-        </p:spPr>
-      </p:sp>
-      <p:sp>
-        <p:nvSpPr>
-          <p:cNvPr id="34" name="Text 32"/>
-          <p:cNvSpPr/>
-          <p:nvPr/>
-        </p:nvSpPr>
-        <p:spPr>
-          <a:xfrm>
-            <a:off x="365760" y="4096512"/>
-            <a:ext cx="1371600" cy="804672"/>
-          </a:xfrm>
-          <a:prstGeom prst="rect">
-            <a:avLst/>
-          </a:prstGeom>
-          <a:noFill/>
-          <a:ln/>
-        </p:spPr>
-        <p:txBody>
-          <a:bodyPr wrap="square" lIns="0" tIns="0" rIns="0" bIns="0" rtlCol="0" anchor="ctr"/>
-          <a:lstStyle/>
-          <a:p>
-            <a:pPr algn="ctr" indent="0" marL="0">
-              <a:buNone/>
-            </a:pPr>
-            <a:r>
-              <a:rPr lang="en-US" sz="1100" b="1" dirty="0">
-                <a:solidFill>
-                  <a:srgbClr val="475569"/>
-                </a:solidFill>
-                <a:latin typeface="Trebuchet MS" pitchFamily="34" charset="0"/>
-                <a:ea typeface="Trebuchet MS" pitchFamily="34" charset="-122"/>
-                <a:cs typeface="Trebuchet MS" pitchFamily="34" charset="-120"/>
-              </a:rPr>
-              <a:t>Phonemes</a:t>
-            </a:r>
-            <a:endParaRPr lang="en-US" sz="1100" dirty="0"/>
-          </a:p>
-        </p:txBody>
-      </p:sp>
-      <p:sp>
-        <p:nvSpPr>
-          <p:cNvPr id="35" name="Shape 33"/>
-          <p:cNvSpPr/>
-          <p:nvPr/>
-        </p:nvSpPr>
-        <p:spPr>
-          <a:xfrm>
-            <a:off x="1874520" y="4096512"/>
-            <a:ext cx="6903720" cy="804672"/>
-          </a:xfrm>
-          <a:prstGeom prst="rect">
-            <a:avLst>
-              <a:gd name="adj" fmla="val 6818"/>
-            </a:avLst>
-          </a:prstGeom>
-          <a:solidFill>
-            <a:srgbClr val="F8FAFC"/>
-          </a:solidFill>
-          <a:ln w="12700">
-            <a:solidFill>
-              <a:srgbClr val="E2E8F0"/>
-            </a:solidFill>
             <a:prstDash val="dash"/>
           </a:ln>
         </p:spPr>
       </p:sp>
       <p:sp>
         <p:nvSpPr>
-          <p:cNvPr id="36" name="Text 34"/>
+          <p:cNvPr id="33" name="Text 31"/>
           <p:cNvSpPr/>
           <p:nvPr/>
         </p:nvSpPr>
@@ -25865,7 +25544,7 @@
                 <a:ea typeface="Calibri" pitchFamily="34" charset="-122"/>
                 <a:cs typeface="Calibri" pitchFamily="34" charset="-120"/>
               </a:rPr>
-              <a:t>Word Labs  •  wordlabs.app  •  Root: 'deep' = far down, intense, profound</a:t>
+              <a:t>Word Labs  •  wordlabs.app  •  Root: 'deep' = far down, profound distance</a:t>
             </a:r>
             <a:endParaRPr lang="en-US" sz="800" dirty="0"/>
           </a:p>
@@ -26004,7 +25683,7 @@
                 <a:ea typeface="Trebuchet MS" pitchFamily="34" charset="-122"/>
                 <a:cs typeface="Trebuchet MS" pitchFamily="34" charset="-120"/>
               </a:rPr>
-              <a:t>deepened</a:t>
+              <a:t>deeper</a:t>
             </a:r>
             <a:endParaRPr lang="en-US" sz="2800" dirty="0"/>
           </a:p>
@@ -26084,7 +25763,7 @@
         </p:nvSpPr>
         <p:spPr>
           <a:xfrm>
-            <a:off x="2221992" y="2258568"/>
+            <a:off x="2938272" y="2258568"/>
             <a:ext cx="1828800" cy="292608"/>
           </a:xfrm>
           <a:prstGeom prst="rect">
@@ -26118,7 +25797,7 @@
         </p:nvSpPr>
         <p:spPr>
           <a:xfrm>
-            <a:off x="2221992" y="2258568"/>
+            <a:off x="2938272" y="2258568"/>
             <a:ext cx="1828800" cy="292608"/>
           </a:xfrm>
           <a:prstGeom prst="rect">
@@ -26157,7 +25836,7 @@
         </p:nvSpPr>
         <p:spPr>
           <a:xfrm>
-            <a:off x="2221992" y="2569464"/>
+            <a:off x="2938272" y="2569464"/>
             <a:ext cx="1828800" cy="201168"/>
           </a:xfrm>
           <a:prstGeom prst="rect">
@@ -26182,7 +25861,7 @@
                 <a:ea typeface="Calibri" pitchFamily="34" charset="-122"/>
                 <a:cs typeface="Calibri" pitchFamily="34" charset="-120"/>
               </a:rPr>
-              <a:t>far down, intense</a:t>
+              <a:t>far down, profound</a:t>
             </a:r>
             <a:endParaRPr lang="en-US" sz="850" dirty="0"/>
           </a:p>
@@ -26196,7 +25875,7 @@
         </p:nvSpPr>
         <p:spPr>
           <a:xfrm>
-            <a:off x="4370832" y="2258568"/>
+            <a:off x="5803392" y="2258568"/>
             <a:ext cx="1828800" cy="292608"/>
           </a:xfrm>
           <a:prstGeom prst="rect">
@@ -26230,7 +25909,7 @@
         </p:nvSpPr>
         <p:spPr>
           <a:xfrm>
-            <a:off x="4370832" y="2258568"/>
+            <a:off x="5803392" y="2258568"/>
             <a:ext cx="1828800" cy="292608"/>
           </a:xfrm>
           <a:prstGeom prst="rect">
@@ -26255,7 +25934,7 @@
                 <a:ea typeface="Trebuchet MS" pitchFamily="34" charset="-122"/>
                 <a:cs typeface="Trebuchet MS" pitchFamily="34" charset="-120"/>
               </a:rPr>
-              <a:t>en</a:t>
+              <a:t>er</a:t>
             </a:r>
             <a:endParaRPr lang="en-US" sz="1300" dirty="0"/>
           </a:p>
@@ -26269,7 +25948,7 @@
         </p:nvSpPr>
         <p:spPr>
           <a:xfrm>
-            <a:off x="4370832" y="2569464"/>
+            <a:off x="5803392" y="2569464"/>
             <a:ext cx="1828800" cy="201168"/>
           </a:xfrm>
           <a:prstGeom prst="rect">
@@ -26294,7 +25973,7 @@
                 <a:ea typeface="Calibri" pitchFamily="34" charset="-122"/>
                 <a:cs typeface="Calibri" pitchFamily="34" charset="-120"/>
               </a:rPr>
-              <a:t>to make or become</a:t>
+              <a:t>more than</a:t>
             </a:r>
             <a:endParaRPr lang="en-US" sz="850" dirty="0"/>
           </a:p>
@@ -26308,30 +25987,23 @@
         </p:nvSpPr>
         <p:spPr>
           <a:xfrm>
-            <a:off x="6519672" y="2258568"/>
-            <a:ext cx="1828800" cy="292608"/>
+            <a:off x="365760" y="3273552"/>
+            <a:ext cx="1371600" cy="658368"/>
           </a:xfrm>
           <a:prstGeom prst="rect">
             <a:avLst>
-              <a:gd name="adj" fmla="val 25000"/>
+              <a:gd name="adj" fmla="val 8333"/>
             </a:avLst>
           </a:prstGeom>
           <a:solidFill>
-            <a:srgbClr val="FCE7F3"/>
-          </a:solidFill>
-          <a:ln w="19050">
-            <a:solidFill>
-              <a:srgbClr val="DB2777"/>
-            </a:solidFill>
-            <a:prstDash val="solid"/>
-          </a:ln>
-          <a:effectLst>
-            <a:outerShdw sx="100000" sy="100000" kx="0" ky="0" algn="bl" rotWithShape="0" blurRad="101600" dist="38100" dir="8100000">
-              <a:srgbClr val="000000">
-                <a:alpha val="12000"/>
-              </a:srgbClr>
-            </a:outerShdw>
-          </a:effectLst>
+            <a:srgbClr val="E2E8F0"/>
+          </a:solidFill>
+          <a:ln w="12700">
+            <a:solidFill>
+              <a:srgbClr val="E2E8F0"/>
+            </a:solidFill>
+            <a:prstDash val="solid"/>
+          </a:ln>
         </p:spPr>
       </p:sp>
       <p:sp>
@@ -26342,8 +26014,8 @@
         </p:nvSpPr>
         <p:spPr>
           <a:xfrm>
-            <a:off x="6519672" y="2258568"/>
-            <a:ext cx="1828800" cy="292608"/>
+            <a:off x="365760" y="3273552"/>
+            <a:ext cx="1371600" cy="658368"/>
           </a:xfrm>
           <a:prstGeom prst="rect">
             <a:avLst/>
@@ -26359,69 +26031,30 @@
               <a:buNone/>
             </a:pPr>
             <a:r>
-              <a:rPr lang="en-US" sz="1300" b="1" dirty="0">
-                <a:solidFill>
-                  <a:srgbClr val="9D174D"/>
+              <a:rPr lang="en-US" sz="1100" b="1" dirty="0">
+                <a:solidFill>
+                  <a:srgbClr val="475569"/>
                 </a:solidFill>
                 <a:latin typeface="Trebuchet MS" pitchFamily="34" charset="0"/>
                 <a:ea typeface="Trebuchet MS" pitchFamily="34" charset="-122"/>
                 <a:cs typeface="Trebuchet MS" pitchFamily="34" charset="-120"/>
               </a:rPr>
-              <a:t>ed</a:t>
-            </a:r>
-            <a:endParaRPr lang="en-US" sz="1300" dirty="0"/>
-          </a:p>
-        </p:txBody>
-      </p:sp>
-      <p:sp>
-        <p:nvSpPr>
-          <p:cNvPr id="24" name="Text 22"/>
-          <p:cNvSpPr/>
-          <p:nvPr/>
-        </p:nvSpPr>
-        <p:spPr>
-          <a:xfrm>
-            <a:off x="6519672" y="2569464"/>
-            <a:ext cx="1828800" cy="201168"/>
-          </a:xfrm>
-          <a:prstGeom prst="rect">
-            <a:avLst/>
-          </a:prstGeom>
-          <a:noFill/>
-          <a:ln/>
-        </p:spPr>
-        <p:txBody>
-          <a:bodyPr wrap="square" lIns="0" tIns="0" rIns="0" bIns="0" rtlCol="0" anchor="t"/>
-          <a:lstStyle/>
-          <a:p>
-            <a:pPr algn="ctr" indent="0" marL="0">
-              <a:buNone/>
-            </a:pPr>
-            <a:r>
-              <a:rPr lang="en-US" sz="850" dirty="0">
-                <a:solidFill>
-                  <a:srgbClr val="475569"/>
-                </a:solidFill>
-                <a:latin typeface="Calibri" pitchFamily="34" charset="0"/>
-                <a:ea typeface="Calibri" pitchFamily="34" charset="-122"/>
-                <a:cs typeface="Calibri" pitchFamily="34" charset="-120"/>
-              </a:rPr>
-              <a:t>past tense</a:t>
-            </a:r>
-            <a:endParaRPr lang="en-US" sz="850" dirty="0"/>
-          </a:p>
-        </p:txBody>
-      </p:sp>
-      <p:sp>
-        <p:nvSpPr>
-          <p:cNvPr id="25" name="Shape 23"/>
-          <p:cNvSpPr/>
-          <p:nvPr/>
-        </p:nvSpPr>
-        <p:spPr>
-          <a:xfrm>
-            <a:off x="365760" y="3273552"/>
-            <a:ext cx="1371600" cy="658368"/>
+              <a:t>Syllables</a:t>
+            </a:r>
+            <a:endParaRPr lang="en-US" sz="1100" dirty="0"/>
+          </a:p>
+        </p:txBody>
+      </p:sp>
+      <p:sp>
+        <p:nvSpPr>
+          <p:cNvPr id="24" name="Shape 22"/>
+          <p:cNvSpPr/>
+          <p:nvPr/>
+        </p:nvSpPr>
+        <p:spPr>
+          <a:xfrm>
+            <a:off x="1874520" y="3273552"/>
+            <a:ext cx="6903720" cy="658368"/>
           </a:xfrm>
           <a:prstGeom prst="rect">
             <a:avLst>
@@ -26429,11 +26062,38 @@
             </a:avLst>
           </a:prstGeom>
           <a:solidFill>
-            <a:srgbClr val="E2E8F0"/>
-          </a:solidFill>
-          <a:ln w="12700">
-            <a:solidFill>
-              <a:srgbClr val="E2E8F0"/>
+            <a:srgbClr val="CCFBF1"/>
+          </a:solidFill>
+          <a:ln w="12700">
+            <a:solidFill>
+              <a:srgbClr val="0D9488"/>
+            </a:solidFill>
+            <a:prstDash val="solid"/>
+          </a:ln>
+        </p:spPr>
+      </p:sp>
+      <p:sp>
+        <p:nvSpPr>
+          <p:cNvPr id="25" name="Shape 23"/>
+          <p:cNvSpPr/>
+          <p:nvPr/>
+        </p:nvSpPr>
+        <p:spPr>
+          <a:xfrm>
+            <a:off x="2999232" y="3364992"/>
+            <a:ext cx="1645920" cy="475488"/>
+          </a:xfrm>
+          <a:prstGeom prst="rect">
+            <a:avLst>
+              <a:gd name="adj" fmla="val 9615"/>
+            </a:avLst>
+          </a:prstGeom>
+          <a:solidFill>
+            <a:srgbClr val="FFFFFF"/>
+          </a:solidFill>
+          <a:ln w="12700">
+            <a:solidFill>
+              <a:srgbClr val="0D9488"/>
             </a:solidFill>
             <a:prstDash val="solid"/>
           </a:ln>
@@ -26447,8 +26107,8 @@
         </p:nvSpPr>
         <p:spPr>
           <a:xfrm>
-            <a:off x="365760" y="3273552"/>
-            <a:ext cx="1371600" cy="658368"/>
+            <a:off x="2999232" y="3364992"/>
+            <a:ext cx="1645920" cy="475488"/>
           </a:xfrm>
           <a:prstGeom prst="rect">
             <a:avLst/>
@@ -26464,15 +26124,186 @@
               <a:buNone/>
             </a:pPr>
             <a:r>
-              <a:rPr lang="en-US" sz="1100" b="1" dirty="0">
-                <a:solidFill>
-                  <a:srgbClr val="475569"/>
+              <a:rPr lang="en-US" sz="1400" b="1" dirty="0">
+                <a:solidFill>
+                  <a:srgbClr val="0D9488"/>
                 </a:solidFill>
                 <a:latin typeface="Trebuchet MS" pitchFamily="34" charset="0"/>
                 <a:ea typeface="Trebuchet MS" pitchFamily="34" charset="-122"/>
                 <a:cs typeface="Trebuchet MS" pitchFamily="34" charset="-120"/>
               </a:rPr>
-              <a:t>Syllables</a:t>
+              <a:t>deep</a:t>
+            </a:r>
+            <a:endParaRPr lang="en-US" sz="1400" dirty="0"/>
+          </a:p>
+        </p:txBody>
+      </p:sp>
+      <p:sp>
+        <p:nvSpPr>
+          <p:cNvPr id="27" name="Text 25"/>
+          <p:cNvSpPr/>
+          <p:nvPr/>
+        </p:nvSpPr>
+        <p:spPr>
+          <a:xfrm>
+            <a:off x="4645152" y="3364992"/>
+            <a:ext cx="1097280" cy="475488"/>
+          </a:xfrm>
+          <a:prstGeom prst="rect">
+            <a:avLst/>
+          </a:prstGeom>
+          <a:noFill/>
+          <a:ln/>
+        </p:spPr>
+        <p:txBody>
+          <a:bodyPr wrap="square" lIns="0" tIns="0" rIns="0" bIns="0" rtlCol="0" anchor="ctr"/>
+          <a:lstStyle/>
+          <a:p>
+            <a:pPr algn="ctr" indent="0" marL="0">
+              <a:buNone/>
+            </a:pPr>
+            <a:r>
+              <a:rPr lang="en-US" sz="1600" b="1" dirty="0">
+                <a:solidFill>
+                  <a:srgbClr val="0D9488"/>
+                </a:solidFill>
+                <a:latin typeface="Trebuchet MS" pitchFamily="34" charset="0"/>
+                <a:ea typeface="Trebuchet MS" pitchFamily="34" charset="-122"/>
+                <a:cs typeface="Trebuchet MS" pitchFamily="34" charset="-120"/>
+              </a:rPr>
+              <a:t>·</a:t>
+            </a:r>
+            <a:endParaRPr lang="en-US" sz="1600" dirty="0"/>
+          </a:p>
+        </p:txBody>
+      </p:sp>
+      <p:sp>
+        <p:nvSpPr>
+          <p:cNvPr id="28" name="Shape 26"/>
+          <p:cNvSpPr/>
+          <p:nvPr/>
+        </p:nvSpPr>
+        <p:spPr>
+          <a:xfrm>
+            <a:off x="5742432" y="3364992"/>
+            <a:ext cx="1645920" cy="475488"/>
+          </a:xfrm>
+          <a:prstGeom prst="rect">
+            <a:avLst>
+              <a:gd name="adj" fmla="val 9615"/>
+            </a:avLst>
+          </a:prstGeom>
+          <a:solidFill>
+            <a:srgbClr val="FFFFFF"/>
+          </a:solidFill>
+          <a:ln w="12700">
+            <a:solidFill>
+              <a:srgbClr val="0D9488"/>
+            </a:solidFill>
+            <a:prstDash val="solid"/>
+          </a:ln>
+        </p:spPr>
+      </p:sp>
+      <p:sp>
+        <p:nvSpPr>
+          <p:cNvPr id="29" name="Text 27"/>
+          <p:cNvSpPr/>
+          <p:nvPr/>
+        </p:nvSpPr>
+        <p:spPr>
+          <a:xfrm>
+            <a:off x="5742432" y="3364992"/>
+            <a:ext cx="1645920" cy="475488"/>
+          </a:xfrm>
+          <a:prstGeom prst="rect">
+            <a:avLst/>
+          </a:prstGeom>
+          <a:noFill/>
+          <a:ln/>
+        </p:spPr>
+        <p:txBody>
+          <a:bodyPr wrap="square" lIns="0" tIns="0" rIns="0" bIns="0" rtlCol="0" anchor="ctr"/>
+          <a:lstStyle/>
+          <a:p>
+            <a:pPr algn="ctr" indent="0" marL="0">
+              <a:buNone/>
+            </a:pPr>
+            <a:r>
+              <a:rPr lang="en-US" sz="1400" b="1" dirty="0">
+                <a:solidFill>
+                  <a:srgbClr val="0D9488"/>
+                </a:solidFill>
+                <a:latin typeface="Trebuchet MS" pitchFamily="34" charset="0"/>
+                <a:ea typeface="Trebuchet MS" pitchFamily="34" charset="-122"/>
+                <a:cs typeface="Trebuchet MS" pitchFamily="34" charset="-120"/>
+              </a:rPr>
+              <a:t>er</a:t>
+            </a:r>
+            <a:endParaRPr lang="en-US" sz="1400" dirty="0"/>
+          </a:p>
+        </p:txBody>
+      </p:sp>
+      <p:sp>
+        <p:nvSpPr>
+          <p:cNvPr id="30" name="Shape 28"/>
+          <p:cNvSpPr/>
+          <p:nvPr/>
+        </p:nvSpPr>
+        <p:spPr>
+          <a:xfrm>
+            <a:off x="365760" y="4096512"/>
+            <a:ext cx="1371600" cy="804672"/>
+          </a:xfrm>
+          <a:prstGeom prst="rect">
+            <a:avLst>
+              <a:gd name="adj" fmla="val 6818"/>
+            </a:avLst>
+          </a:prstGeom>
+          <a:solidFill>
+            <a:srgbClr val="E2E8F0"/>
+          </a:solidFill>
+          <a:ln w="12700">
+            <a:solidFill>
+              <a:srgbClr val="E2E8F0"/>
+            </a:solidFill>
+            <a:prstDash val="solid"/>
+          </a:ln>
+        </p:spPr>
+      </p:sp>
+      <p:sp>
+        <p:nvSpPr>
+          <p:cNvPr id="31" name="Text 29"/>
+          <p:cNvSpPr/>
+          <p:nvPr/>
+        </p:nvSpPr>
+        <p:spPr>
+          <a:xfrm>
+            <a:off x="365760" y="4096512"/>
+            <a:ext cx="1371600" cy="804672"/>
+          </a:xfrm>
+          <a:prstGeom prst="rect">
+            <a:avLst/>
+          </a:prstGeom>
+          <a:noFill/>
+          <a:ln/>
+        </p:spPr>
+        <p:txBody>
+          <a:bodyPr wrap="square" lIns="0" tIns="0" rIns="0" bIns="0" rtlCol="0" anchor="ctr"/>
+          <a:lstStyle/>
+          <a:p>
+            <a:pPr algn="ctr" indent="0" marL="0">
+              <a:buNone/>
+            </a:pPr>
+            <a:r>
+              <a:rPr lang="en-US" sz="1100" b="1" dirty="0">
+                <a:solidFill>
+                  <a:srgbClr val="475569"/>
+                </a:solidFill>
+                <a:latin typeface="Trebuchet MS" pitchFamily="34" charset="0"/>
+                <a:ea typeface="Trebuchet MS" pitchFamily="34" charset="-122"/>
+                <a:cs typeface="Trebuchet MS" pitchFamily="34" charset="-120"/>
+              </a:rPr>
+              <a:t>Phonemes</a:t>
             </a:r>
             <a:endParaRPr lang="en-US" sz="1100" dirty="0"/>
           </a:p>
@@ -26480,13 +26311,13 @@
       </p:sp>
       <p:sp>
         <p:nvSpPr>
-          <p:cNvPr id="27" name="Shape 25"/>
-          <p:cNvSpPr/>
-          <p:nvPr/>
-        </p:nvSpPr>
-        <p:spPr>
-          <a:xfrm>
-            <a:off x="1874520" y="3273552"/>
+          <p:cNvPr id="32" name="Shape 30"/>
+          <p:cNvSpPr/>
+          <p:nvPr/>
+        </p:nvSpPr>
+        <p:spPr>
+          <a:xfrm>
+            <a:off x="1874520" y="4096512"/>
             <a:ext cx="6903720" cy="658368"/>
           </a:xfrm>
           <a:prstGeom prst="rect">
@@ -26495,30 +26326,30 @@
             </a:avLst>
           </a:prstGeom>
           <a:solidFill>
-            <a:srgbClr val="CCFBF1"/>
-          </a:solidFill>
-          <a:ln w="12700">
-            <a:solidFill>
-              <a:srgbClr val="0D9488"/>
-            </a:solidFill>
-            <a:prstDash val="solid"/>
-          </a:ln>
-        </p:spPr>
-      </p:sp>
-      <p:sp>
-        <p:nvSpPr>
-          <p:cNvPr id="28" name="Shape 26"/>
-          <p:cNvSpPr/>
-          <p:nvPr/>
-        </p:nvSpPr>
-        <p:spPr>
-          <a:xfrm>
-            <a:off x="2999232" y="3364992"/>
-            <a:ext cx="1645920" cy="475488"/>
+            <a:srgbClr val="FCE7F3"/>
+          </a:solidFill>
+          <a:ln w="12700">
+            <a:solidFill>
+              <a:srgbClr val="DB2777"/>
+            </a:solidFill>
+            <a:prstDash val="solid"/>
+          </a:ln>
+        </p:spPr>
+      </p:sp>
+      <p:sp>
+        <p:nvSpPr>
+          <p:cNvPr id="33" name="Shape 31"/>
+          <p:cNvSpPr/>
+          <p:nvPr/>
+        </p:nvSpPr>
+        <p:spPr>
+          <a:xfrm>
+            <a:off x="2670048" y="4169664"/>
+            <a:ext cx="685800" cy="475488"/>
           </a:xfrm>
           <a:prstGeom prst="rect">
             <a:avLst>
-              <a:gd name="adj" fmla="val 9615"/>
+              <a:gd name="adj" fmla="val 7692"/>
             </a:avLst>
           </a:prstGeom>
           <a:solidFill>
@@ -26526,22 +26357,22 @@
           </a:solidFill>
           <a:ln w="12700">
             <a:solidFill>
-              <a:srgbClr val="0D9488"/>
-            </a:solidFill>
-            <a:prstDash val="solid"/>
-          </a:ln>
-        </p:spPr>
-      </p:sp>
-      <p:sp>
-        <p:nvSpPr>
-          <p:cNvPr id="29" name="Text 27"/>
-          <p:cNvSpPr/>
-          <p:nvPr/>
-        </p:nvSpPr>
-        <p:spPr>
-          <a:xfrm>
-            <a:off x="2999232" y="3364992"/>
-            <a:ext cx="1645920" cy="475488"/>
+              <a:srgbClr val="DB2777"/>
+            </a:solidFill>
+            <a:prstDash val="solid"/>
+          </a:ln>
+        </p:spPr>
+      </p:sp>
+      <p:sp>
+        <p:nvSpPr>
+          <p:cNvPr id="34" name="Text 32"/>
+          <p:cNvSpPr/>
+          <p:nvPr/>
+        </p:nvSpPr>
+        <p:spPr>
+          <a:xfrm>
+            <a:off x="2670048" y="4169664"/>
+            <a:ext cx="685800" cy="475488"/>
           </a:xfrm>
           <a:prstGeom prst="rect">
             <a:avLst/>
@@ -26557,30 +26388,57 @@
               <a:buNone/>
             </a:pPr>
             <a:r>
-              <a:rPr lang="en-US" sz="1400" b="1" dirty="0">
-                <a:solidFill>
-                  <a:srgbClr val="0D9488"/>
+              <a:rPr lang="en-US" sz="900" b="1" dirty="0">
+                <a:solidFill>
+                  <a:srgbClr val="9D174D"/>
                 </a:solidFill>
                 <a:latin typeface="Trebuchet MS" pitchFamily="34" charset="0"/>
                 <a:ea typeface="Trebuchet MS" pitchFamily="34" charset="-122"/>
                 <a:cs typeface="Trebuchet MS" pitchFamily="34" charset="-120"/>
               </a:rPr>
-              <a:t>deep</a:t>
-            </a:r>
-            <a:endParaRPr lang="en-US" sz="1400" dirty="0"/>
-          </a:p>
-        </p:txBody>
-      </p:sp>
-      <p:sp>
-        <p:nvSpPr>
-          <p:cNvPr id="30" name="Text 28"/>
-          <p:cNvSpPr/>
-          <p:nvPr/>
-        </p:nvSpPr>
-        <p:spPr>
-          <a:xfrm>
-            <a:off x="4645152" y="3364992"/>
-            <a:ext cx="1097280" cy="475488"/>
+              <a:t>d</a:t>
+            </a:r>
+            <a:endParaRPr lang="en-US" sz="900" dirty="0"/>
+          </a:p>
+        </p:txBody>
+      </p:sp>
+      <p:sp>
+        <p:nvSpPr>
+          <p:cNvPr id="35" name="Shape 33"/>
+          <p:cNvSpPr/>
+          <p:nvPr/>
+        </p:nvSpPr>
+        <p:spPr>
+          <a:xfrm>
+            <a:off x="4123944" y="4169664"/>
+            <a:ext cx="685800" cy="475488"/>
+          </a:xfrm>
+          <a:prstGeom prst="rect">
+            <a:avLst>
+              <a:gd name="adj" fmla="val 7692"/>
+            </a:avLst>
+          </a:prstGeom>
+          <a:solidFill>
+            <a:srgbClr val="FFFFFF"/>
+          </a:solidFill>
+          <a:ln w="12700">
+            <a:solidFill>
+              <a:srgbClr val="DB2777"/>
+            </a:solidFill>
+            <a:prstDash val="solid"/>
+          </a:ln>
+        </p:spPr>
+      </p:sp>
+      <p:sp>
+        <p:nvSpPr>
+          <p:cNvPr id="36" name="Text 34"/>
+          <p:cNvSpPr/>
+          <p:nvPr/>
+        </p:nvSpPr>
+        <p:spPr>
+          <a:xfrm>
+            <a:off x="4123944" y="4169664"/>
+            <a:ext cx="685800" cy="475488"/>
           </a:xfrm>
           <a:prstGeom prst="rect">
             <a:avLst/>
@@ -26596,34 +26454,34 @@
               <a:buNone/>
             </a:pPr>
             <a:r>
-              <a:rPr lang="en-US" sz="1600" b="1" dirty="0">
-                <a:solidFill>
-                  <a:srgbClr val="0D9488"/>
+              <a:rPr lang="en-US" sz="900" b="1" dirty="0">
+                <a:solidFill>
+                  <a:srgbClr val="9D174D"/>
                 </a:solidFill>
                 <a:latin typeface="Trebuchet MS" pitchFamily="34" charset="0"/>
                 <a:ea typeface="Trebuchet MS" pitchFamily="34" charset="-122"/>
                 <a:cs typeface="Trebuchet MS" pitchFamily="34" charset="-120"/>
               </a:rPr>
-              <a:t>·</a:t>
-            </a:r>
-            <a:endParaRPr lang="en-US" sz="1600" dirty="0"/>
-          </a:p>
-        </p:txBody>
-      </p:sp>
-      <p:sp>
-        <p:nvSpPr>
-          <p:cNvPr id="31" name="Shape 29"/>
-          <p:cNvSpPr/>
-          <p:nvPr/>
-        </p:nvSpPr>
-        <p:spPr>
-          <a:xfrm>
-            <a:off x="5742432" y="3364992"/>
-            <a:ext cx="1645920" cy="475488"/>
+              <a:t>ee</a:t>
+            </a:r>
+            <a:endParaRPr lang="en-US" sz="900" dirty="0"/>
+          </a:p>
+        </p:txBody>
+      </p:sp>
+      <p:sp>
+        <p:nvSpPr>
+          <p:cNvPr id="37" name="Shape 35"/>
+          <p:cNvSpPr/>
+          <p:nvPr/>
+        </p:nvSpPr>
+        <p:spPr>
+          <a:xfrm>
+            <a:off x="5577840" y="4169664"/>
+            <a:ext cx="685800" cy="475488"/>
           </a:xfrm>
           <a:prstGeom prst="rect">
             <a:avLst>
-              <a:gd name="adj" fmla="val 9615"/>
+              <a:gd name="adj" fmla="val 7692"/>
             </a:avLst>
           </a:prstGeom>
           <a:solidFill>
@@ -26631,22 +26489,22 @@
           </a:solidFill>
           <a:ln w="12700">
             <a:solidFill>
-              <a:srgbClr val="0D9488"/>
-            </a:solidFill>
-            <a:prstDash val="solid"/>
-          </a:ln>
-        </p:spPr>
-      </p:sp>
-      <p:sp>
-        <p:nvSpPr>
-          <p:cNvPr id="32" name="Text 30"/>
-          <p:cNvSpPr/>
-          <p:nvPr/>
-        </p:nvSpPr>
-        <p:spPr>
-          <a:xfrm>
-            <a:off x="5742432" y="3364992"/>
-            <a:ext cx="1645920" cy="475488"/>
+              <a:srgbClr val="DB2777"/>
+            </a:solidFill>
+            <a:prstDash val="solid"/>
+          </a:ln>
+        </p:spPr>
+      </p:sp>
+      <p:sp>
+        <p:nvSpPr>
+          <p:cNvPr id="38" name="Text 36"/>
+          <p:cNvSpPr/>
+          <p:nvPr/>
+        </p:nvSpPr>
+        <p:spPr>
+          <a:xfrm>
+            <a:off x="5577840" y="4169664"/>
+            <a:ext cx="685800" cy="475488"/>
           </a:xfrm>
           <a:prstGeom prst="rect">
             <a:avLst/>
@@ -26662,57 +26520,57 @@
               <a:buNone/>
             </a:pPr>
             <a:r>
-              <a:rPr lang="en-US" sz="1400" b="1" dirty="0">
-                <a:solidFill>
-                  <a:srgbClr val="0D9488"/>
+              <a:rPr lang="en-US" sz="900" b="1" dirty="0">
+                <a:solidFill>
+                  <a:srgbClr val="9D174D"/>
                 </a:solidFill>
                 <a:latin typeface="Trebuchet MS" pitchFamily="34" charset="0"/>
                 <a:ea typeface="Trebuchet MS" pitchFamily="34" charset="-122"/>
                 <a:cs typeface="Trebuchet MS" pitchFamily="34" charset="-120"/>
               </a:rPr>
-              <a:t>ened</a:t>
-            </a:r>
-            <a:endParaRPr lang="en-US" sz="1400" dirty="0"/>
-          </a:p>
-        </p:txBody>
-      </p:sp>
-      <p:sp>
-        <p:nvSpPr>
-          <p:cNvPr id="33" name="Shape 31"/>
-          <p:cNvSpPr/>
-          <p:nvPr/>
-        </p:nvSpPr>
-        <p:spPr>
-          <a:xfrm>
-            <a:off x="365760" y="4096512"/>
-            <a:ext cx="1371600" cy="804672"/>
+              <a:t>p</a:t>
+            </a:r>
+            <a:endParaRPr lang="en-US" sz="900" dirty="0"/>
+          </a:p>
+        </p:txBody>
+      </p:sp>
+      <p:sp>
+        <p:nvSpPr>
+          <p:cNvPr id="39" name="Shape 37"/>
+          <p:cNvSpPr/>
+          <p:nvPr/>
+        </p:nvSpPr>
+        <p:spPr>
+          <a:xfrm>
+            <a:off x="7031736" y="4169664"/>
+            <a:ext cx="685800" cy="475488"/>
           </a:xfrm>
           <a:prstGeom prst="rect">
             <a:avLst>
-              <a:gd name="adj" fmla="val 6818"/>
+              <a:gd name="adj" fmla="val 7692"/>
             </a:avLst>
           </a:prstGeom>
           <a:solidFill>
-            <a:srgbClr val="E2E8F0"/>
-          </a:solidFill>
-          <a:ln w="12700">
-            <a:solidFill>
-              <a:srgbClr val="E2E8F0"/>
-            </a:solidFill>
-            <a:prstDash val="solid"/>
-          </a:ln>
-        </p:spPr>
-      </p:sp>
-      <p:sp>
-        <p:nvSpPr>
-          <p:cNvPr id="34" name="Text 32"/>
-          <p:cNvSpPr/>
-          <p:nvPr/>
-        </p:nvSpPr>
-        <p:spPr>
-          <a:xfrm>
-            <a:off x="365760" y="4096512"/>
-            <a:ext cx="1371600" cy="804672"/>
+            <a:srgbClr val="FFFFFF"/>
+          </a:solidFill>
+          <a:ln w="12700">
+            <a:solidFill>
+              <a:srgbClr val="DB2777"/>
+            </a:solidFill>
+            <a:prstDash val="solid"/>
+          </a:ln>
+        </p:spPr>
+      </p:sp>
+      <p:sp>
+        <p:nvSpPr>
+          <p:cNvPr id="40" name="Text 38"/>
+          <p:cNvSpPr/>
+          <p:nvPr/>
+        </p:nvSpPr>
+        <p:spPr>
+          <a:xfrm>
+            <a:off x="7031736" y="4169664"/>
+            <a:ext cx="685800" cy="475488"/>
           </a:xfrm>
           <a:prstGeom prst="rect">
             <a:avLst/>
@@ -26728,438 +26586,15 @@
               <a:buNone/>
             </a:pPr>
             <a:r>
-              <a:rPr lang="en-US" sz="1100" b="1" dirty="0">
-                <a:solidFill>
-                  <a:srgbClr val="475569"/>
+              <a:rPr lang="en-US" sz="900" b="1" dirty="0">
+                <a:solidFill>
+                  <a:srgbClr val="9D174D"/>
                 </a:solidFill>
                 <a:latin typeface="Trebuchet MS" pitchFamily="34" charset="0"/>
                 <a:ea typeface="Trebuchet MS" pitchFamily="34" charset="-122"/>
                 <a:cs typeface="Trebuchet MS" pitchFamily="34" charset="-120"/>
               </a:rPr>
-              <a:t>Phonemes</a:t>
-            </a:r>
-            <a:endParaRPr lang="en-US" sz="1100" dirty="0"/>
-          </a:p>
-        </p:txBody>
-      </p:sp>
-      <p:sp>
-        <p:nvSpPr>
-          <p:cNvPr id="35" name="Shape 33"/>
-          <p:cNvSpPr/>
-          <p:nvPr/>
-        </p:nvSpPr>
-        <p:spPr>
-          <a:xfrm>
-            <a:off x="1874520" y="4096512"/>
-            <a:ext cx="6903720" cy="658368"/>
-          </a:xfrm>
-          <a:prstGeom prst="rect">
-            <a:avLst>
-              <a:gd name="adj" fmla="val 8333"/>
-            </a:avLst>
-          </a:prstGeom>
-          <a:solidFill>
-            <a:srgbClr val="FCE7F3"/>
-          </a:solidFill>
-          <a:ln w="12700">
-            <a:solidFill>
-              <a:srgbClr val="DB2777"/>
-            </a:solidFill>
-            <a:prstDash val="solid"/>
-          </a:ln>
-        </p:spPr>
-      </p:sp>
-      <p:sp>
-        <p:nvSpPr>
-          <p:cNvPr id="36" name="Shape 34"/>
-          <p:cNvSpPr/>
-          <p:nvPr/>
-        </p:nvSpPr>
-        <p:spPr>
-          <a:xfrm>
-            <a:off x="2254649" y="4169664"/>
-            <a:ext cx="685800" cy="475488"/>
-          </a:xfrm>
-          <a:prstGeom prst="rect">
-            <a:avLst>
-              <a:gd name="adj" fmla="val 7692"/>
-            </a:avLst>
-          </a:prstGeom>
-          <a:solidFill>
-            <a:srgbClr val="FFFFFF"/>
-          </a:solidFill>
-          <a:ln w="12700">
-            <a:solidFill>
-              <a:srgbClr val="DB2777"/>
-            </a:solidFill>
-            <a:prstDash val="solid"/>
-          </a:ln>
-        </p:spPr>
-      </p:sp>
-      <p:sp>
-        <p:nvSpPr>
-          <p:cNvPr id="37" name="Text 35"/>
-          <p:cNvSpPr/>
-          <p:nvPr/>
-        </p:nvSpPr>
-        <p:spPr>
-          <a:xfrm>
-            <a:off x="2254649" y="4169664"/>
-            <a:ext cx="685800" cy="475488"/>
-          </a:xfrm>
-          <a:prstGeom prst="rect">
-            <a:avLst/>
-          </a:prstGeom>
-          <a:noFill/>
-          <a:ln/>
-        </p:spPr>
-        <p:txBody>
-          <a:bodyPr wrap="square" lIns="0" tIns="0" rIns="0" bIns="0" rtlCol="0" anchor="ctr"/>
-          <a:lstStyle/>
-          <a:p>
-            <a:pPr algn="ctr" indent="0" marL="0">
-              <a:buNone/>
-            </a:pPr>
-            <a:r>
-              <a:rPr lang="en-US" sz="900" b="1" dirty="0">
-                <a:solidFill>
-                  <a:srgbClr val="9D174D"/>
-                </a:solidFill>
-                <a:latin typeface="Trebuchet MS" pitchFamily="34" charset="0"/>
-                <a:ea typeface="Trebuchet MS" pitchFamily="34" charset="-122"/>
-                <a:cs typeface="Trebuchet MS" pitchFamily="34" charset="-120"/>
-              </a:rPr>
-              <a:t>d</a:t>
-            </a:r>
-            <a:endParaRPr lang="en-US" sz="900" dirty="0"/>
-          </a:p>
-        </p:txBody>
-      </p:sp>
-      <p:sp>
-        <p:nvSpPr>
-          <p:cNvPr id="38" name="Shape 36"/>
-          <p:cNvSpPr/>
-          <p:nvPr/>
-        </p:nvSpPr>
-        <p:spPr>
-          <a:xfrm>
-            <a:off x="3293146" y="4169664"/>
-            <a:ext cx="685800" cy="475488"/>
-          </a:xfrm>
-          <a:prstGeom prst="rect">
-            <a:avLst>
-              <a:gd name="adj" fmla="val 7692"/>
-            </a:avLst>
-          </a:prstGeom>
-          <a:solidFill>
-            <a:srgbClr val="FFFFFF"/>
-          </a:solidFill>
-          <a:ln w="12700">
-            <a:solidFill>
-              <a:srgbClr val="DB2777"/>
-            </a:solidFill>
-            <a:prstDash val="solid"/>
-          </a:ln>
-        </p:spPr>
-      </p:sp>
-      <p:sp>
-        <p:nvSpPr>
-          <p:cNvPr id="39" name="Text 37"/>
-          <p:cNvSpPr/>
-          <p:nvPr/>
-        </p:nvSpPr>
-        <p:spPr>
-          <a:xfrm>
-            <a:off x="3293146" y="4169664"/>
-            <a:ext cx="685800" cy="475488"/>
-          </a:xfrm>
-          <a:prstGeom prst="rect">
-            <a:avLst/>
-          </a:prstGeom>
-          <a:noFill/>
-          <a:ln/>
-        </p:spPr>
-        <p:txBody>
-          <a:bodyPr wrap="square" lIns="0" tIns="0" rIns="0" bIns="0" rtlCol="0" anchor="ctr"/>
-          <a:lstStyle/>
-          <a:p>
-            <a:pPr algn="ctr" indent="0" marL="0">
-              <a:buNone/>
-            </a:pPr>
-            <a:r>
-              <a:rPr lang="en-US" sz="900" b="1" dirty="0">
-                <a:solidFill>
-                  <a:srgbClr val="9D174D"/>
-                </a:solidFill>
-                <a:latin typeface="Trebuchet MS" pitchFamily="34" charset="0"/>
-                <a:ea typeface="Trebuchet MS" pitchFamily="34" charset="-122"/>
-                <a:cs typeface="Trebuchet MS" pitchFamily="34" charset="-120"/>
-              </a:rPr>
-              <a:t>ee</a:t>
-            </a:r>
-            <a:endParaRPr lang="en-US" sz="900" dirty="0"/>
-          </a:p>
-        </p:txBody>
-      </p:sp>
-      <p:sp>
-        <p:nvSpPr>
-          <p:cNvPr id="40" name="Shape 38"/>
-          <p:cNvSpPr/>
-          <p:nvPr/>
-        </p:nvSpPr>
-        <p:spPr>
-          <a:xfrm>
-            <a:off x="4331643" y="4169664"/>
-            <a:ext cx="685800" cy="475488"/>
-          </a:xfrm>
-          <a:prstGeom prst="rect">
-            <a:avLst>
-              <a:gd name="adj" fmla="val 7692"/>
-            </a:avLst>
-          </a:prstGeom>
-          <a:solidFill>
-            <a:srgbClr val="FFFFFF"/>
-          </a:solidFill>
-          <a:ln w="12700">
-            <a:solidFill>
-              <a:srgbClr val="DB2777"/>
-            </a:solidFill>
-            <a:prstDash val="solid"/>
-          </a:ln>
-        </p:spPr>
-      </p:sp>
-      <p:sp>
-        <p:nvSpPr>
-          <p:cNvPr id="41" name="Text 39"/>
-          <p:cNvSpPr/>
-          <p:nvPr/>
-        </p:nvSpPr>
-        <p:spPr>
-          <a:xfrm>
-            <a:off x="4331643" y="4169664"/>
-            <a:ext cx="685800" cy="475488"/>
-          </a:xfrm>
-          <a:prstGeom prst="rect">
-            <a:avLst/>
-          </a:prstGeom>
-          <a:noFill/>
-          <a:ln/>
-        </p:spPr>
-        <p:txBody>
-          <a:bodyPr wrap="square" lIns="0" tIns="0" rIns="0" bIns="0" rtlCol="0" anchor="ctr"/>
-          <a:lstStyle/>
-          <a:p>
-            <a:pPr algn="ctr" indent="0" marL="0">
-              <a:buNone/>
-            </a:pPr>
-            <a:r>
-              <a:rPr lang="en-US" sz="900" b="1" dirty="0">
-                <a:solidFill>
-                  <a:srgbClr val="9D174D"/>
-                </a:solidFill>
-                <a:latin typeface="Trebuchet MS" pitchFamily="34" charset="0"/>
-                <a:ea typeface="Trebuchet MS" pitchFamily="34" charset="-122"/>
-                <a:cs typeface="Trebuchet MS" pitchFamily="34" charset="-120"/>
-              </a:rPr>
-              <a:t>p</a:t>
-            </a:r>
-            <a:endParaRPr lang="en-US" sz="900" dirty="0"/>
-          </a:p>
-        </p:txBody>
-      </p:sp>
-      <p:sp>
-        <p:nvSpPr>
-          <p:cNvPr id="42" name="Shape 40"/>
-          <p:cNvSpPr/>
-          <p:nvPr/>
-        </p:nvSpPr>
-        <p:spPr>
-          <a:xfrm>
-            <a:off x="5370141" y="4169664"/>
-            <a:ext cx="685800" cy="475488"/>
-          </a:xfrm>
-          <a:prstGeom prst="rect">
-            <a:avLst>
-              <a:gd name="adj" fmla="val 7692"/>
-            </a:avLst>
-          </a:prstGeom>
-          <a:solidFill>
-            <a:srgbClr val="FFFFFF"/>
-          </a:solidFill>
-          <a:ln w="12700">
-            <a:solidFill>
-              <a:srgbClr val="DB2777"/>
-            </a:solidFill>
-            <a:prstDash val="solid"/>
-          </a:ln>
-        </p:spPr>
-      </p:sp>
-      <p:sp>
-        <p:nvSpPr>
-          <p:cNvPr id="43" name="Text 41"/>
-          <p:cNvSpPr/>
-          <p:nvPr/>
-        </p:nvSpPr>
-        <p:spPr>
-          <a:xfrm>
-            <a:off x="5370141" y="4169664"/>
-            <a:ext cx="685800" cy="475488"/>
-          </a:xfrm>
-          <a:prstGeom prst="rect">
-            <a:avLst/>
-          </a:prstGeom>
-          <a:noFill/>
-          <a:ln/>
-        </p:spPr>
-        <p:txBody>
-          <a:bodyPr wrap="square" lIns="0" tIns="0" rIns="0" bIns="0" rtlCol="0" anchor="ctr"/>
-          <a:lstStyle/>
-          <a:p>
-            <a:pPr algn="ctr" indent="0" marL="0">
-              <a:buNone/>
-            </a:pPr>
-            <a:r>
-              <a:rPr lang="en-US" sz="900" b="1" dirty="0">
-                <a:solidFill>
-                  <a:srgbClr val="9D174D"/>
-                </a:solidFill>
-                <a:latin typeface="Trebuchet MS" pitchFamily="34" charset="0"/>
-                <a:ea typeface="Trebuchet MS" pitchFamily="34" charset="-122"/>
-                <a:cs typeface="Trebuchet MS" pitchFamily="34" charset="-120"/>
-              </a:rPr>
-              <a:t>e</a:t>
-            </a:r>
-            <a:endParaRPr lang="en-US" sz="900" dirty="0"/>
-          </a:p>
-        </p:txBody>
-      </p:sp>
-      <p:sp>
-        <p:nvSpPr>
-          <p:cNvPr id="44" name="Shape 42"/>
-          <p:cNvSpPr/>
-          <p:nvPr/>
-        </p:nvSpPr>
-        <p:spPr>
-          <a:xfrm>
-            <a:off x="6408638" y="4169664"/>
-            <a:ext cx="685800" cy="475488"/>
-          </a:xfrm>
-          <a:prstGeom prst="rect">
-            <a:avLst>
-              <a:gd name="adj" fmla="val 7692"/>
-            </a:avLst>
-          </a:prstGeom>
-          <a:solidFill>
-            <a:srgbClr val="FFFFFF"/>
-          </a:solidFill>
-          <a:ln w="12700">
-            <a:solidFill>
-              <a:srgbClr val="DB2777"/>
-            </a:solidFill>
-            <a:prstDash val="solid"/>
-          </a:ln>
-        </p:spPr>
-      </p:sp>
-      <p:sp>
-        <p:nvSpPr>
-          <p:cNvPr id="45" name="Text 43"/>
-          <p:cNvSpPr/>
-          <p:nvPr/>
-        </p:nvSpPr>
-        <p:spPr>
-          <a:xfrm>
-            <a:off x="6408638" y="4169664"/>
-            <a:ext cx="685800" cy="475488"/>
-          </a:xfrm>
-          <a:prstGeom prst="rect">
-            <a:avLst/>
-          </a:prstGeom>
-          <a:noFill/>
-          <a:ln/>
-        </p:spPr>
-        <p:txBody>
-          <a:bodyPr wrap="square" lIns="0" tIns="0" rIns="0" bIns="0" rtlCol="0" anchor="ctr"/>
-          <a:lstStyle/>
-          <a:p>
-            <a:pPr algn="ctr" indent="0" marL="0">
-              <a:buNone/>
-            </a:pPr>
-            <a:r>
-              <a:rPr lang="en-US" sz="900" b="1" dirty="0">
-                <a:solidFill>
-                  <a:srgbClr val="9D174D"/>
-                </a:solidFill>
-                <a:latin typeface="Trebuchet MS" pitchFamily="34" charset="0"/>
-                <a:ea typeface="Trebuchet MS" pitchFamily="34" charset="-122"/>
-                <a:cs typeface="Trebuchet MS" pitchFamily="34" charset="-120"/>
-              </a:rPr>
-              <a:t>n</a:t>
-            </a:r>
-            <a:endParaRPr lang="en-US" sz="900" dirty="0"/>
-          </a:p>
-        </p:txBody>
-      </p:sp>
-      <p:sp>
-        <p:nvSpPr>
-          <p:cNvPr id="46" name="Shape 44"/>
-          <p:cNvSpPr/>
-          <p:nvPr/>
-        </p:nvSpPr>
-        <p:spPr>
-          <a:xfrm>
-            <a:off x="7447135" y="4169664"/>
-            <a:ext cx="685800" cy="475488"/>
-          </a:xfrm>
-          <a:prstGeom prst="rect">
-            <a:avLst>
-              <a:gd name="adj" fmla="val 7692"/>
-            </a:avLst>
-          </a:prstGeom>
-          <a:solidFill>
-            <a:srgbClr val="FFFFFF"/>
-          </a:solidFill>
-          <a:ln w="12700">
-            <a:solidFill>
-              <a:srgbClr val="DB2777"/>
-            </a:solidFill>
-            <a:prstDash val="solid"/>
-          </a:ln>
-        </p:spPr>
-      </p:sp>
-      <p:sp>
-        <p:nvSpPr>
-          <p:cNvPr id="47" name="Text 45"/>
-          <p:cNvSpPr/>
-          <p:nvPr/>
-        </p:nvSpPr>
-        <p:spPr>
-          <a:xfrm>
-            <a:off x="7447135" y="4169664"/>
-            <a:ext cx="685800" cy="475488"/>
-          </a:xfrm>
-          <a:prstGeom prst="rect">
-            <a:avLst/>
-          </a:prstGeom>
-          <a:noFill/>
-          <a:ln/>
-        </p:spPr>
-        <p:txBody>
-          <a:bodyPr wrap="square" lIns="0" tIns="0" rIns="0" bIns="0" rtlCol="0" anchor="ctr"/>
-          <a:lstStyle/>
-          <a:p>
-            <a:pPr algn="ctr" indent="0" marL="0">
-              <a:buNone/>
-            </a:pPr>
-            <a:r>
-              <a:rPr lang="en-US" sz="900" b="1" dirty="0">
-                <a:solidFill>
-                  <a:srgbClr val="9D174D"/>
-                </a:solidFill>
-                <a:latin typeface="Trebuchet MS" pitchFamily="34" charset="0"/>
-                <a:ea typeface="Trebuchet MS" pitchFamily="34" charset="-122"/>
-                <a:cs typeface="Trebuchet MS" pitchFamily="34" charset="-120"/>
-              </a:rPr>
-              <a:t>d</a:t>
+              <a:t>er</a:t>
             </a:r>
             <a:endParaRPr lang="en-US" sz="900" dirty="0"/>
           </a:p>
@@ -27451,7 +26886,7 @@
                 <a:ea typeface="Calibri" pitchFamily="34" charset="-122"/>
                 <a:cs typeface="Calibri" pitchFamily="34" charset="-120"/>
               </a:rPr>
-              <a:t>Word Labs  •  wordlabs.app  •  Root: 'deep' = far down, intense, profound</a:t>
+              <a:t>Word Labs  •  wordlabs.app  •  Root: 'deep' = far down, profound distance</a:t>
             </a:r>
             <a:endParaRPr lang="en-US" sz="800" dirty="0"/>
           </a:p>
@@ -27590,7 +27025,7 @@
                 <a:ea typeface="Trebuchet MS" pitchFamily="34" charset="-122"/>
                 <a:cs typeface="Trebuchet MS" pitchFamily="34" charset="-120"/>
               </a:rPr>
-              <a:t>knee-deep</a:t>
+              <a:t>deepness</a:t>
             </a:r>
             <a:endParaRPr lang="en-US" sz="2800" dirty="0"/>
           </a:p>
@@ -28278,7 +27713,7 @@
                 <a:ea typeface="Calibri" pitchFamily="34" charset="-122"/>
                 <a:cs typeface="Calibri" pitchFamily="34" charset="-120"/>
               </a:rPr>
-              <a:t>Word Labs  •  wordlabs.app  •  Root: 'deep' = far down, intense, profound</a:t>
+              <a:t>Word Labs  •  wordlabs.app  •  Root: 'deep' = far down, profound distance</a:t>
             </a:r>
             <a:endParaRPr lang="en-US" sz="800" dirty="0"/>
           </a:p>
@@ -28417,7 +27852,7 @@
                 <a:ea typeface="Trebuchet MS" pitchFamily="34" charset="-122"/>
                 <a:cs typeface="Trebuchet MS" pitchFamily="34" charset="-120"/>
               </a:rPr>
-              <a:t>knee-deep</a:t>
+              <a:t>deepness</a:t>
             </a:r>
             <a:endParaRPr lang="en-US" sz="2800" dirty="0"/>
           </a:p>
@@ -28506,11 +27941,11 @@
             </a:avLst>
           </a:prstGeom>
           <a:solidFill>
-            <a:srgbClr val="DDD6FE"/>
+            <a:srgbClr val="CCFBF1"/>
           </a:solidFill>
           <a:ln w="19050">
             <a:solidFill>
-              <a:srgbClr val="7C3AED"/>
+              <a:srgbClr val="0D9488"/>
             </a:solidFill>
             <a:prstDash val="solid"/>
           </a:ln>
@@ -28550,13 +27985,13 @@
             <a:r>
               <a:rPr lang="en-US" sz="1300" b="1" dirty="0">
                 <a:solidFill>
-                  <a:srgbClr val="4C1D95"/>
+                  <a:srgbClr val="0F766E"/>
                 </a:solidFill>
                 <a:latin typeface="Trebuchet MS" pitchFamily="34" charset="0"/>
                 <a:ea typeface="Trebuchet MS" pitchFamily="34" charset="-122"/>
                 <a:cs typeface="Trebuchet MS" pitchFamily="34" charset="-120"/>
               </a:rPr>
-              <a:t>knee</a:t>
+              <a:t>deep</a:t>
             </a:r>
             <a:endParaRPr lang="en-US" sz="1300" dirty="0"/>
           </a:p>
@@ -28595,7 +28030,7 @@
                 <a:ea typeface="Calibri" pitchFamily="34" charset="-122"/>
                 <a:cs typeface="Calibri" pitchFamily="34" charset="-120"/>
               </a:rPr>
-              <a:t>the joint in the middle of your leg</a:t>
+              <a:t>far down, profound</a:t>
             </a:r>
             <a:endParaRPr lang="en-US" sz="850" dirty="0"/>
           </a:p>
@@ -28618,11 +28053,11 @@
             </a:avLst>
           </a:prstGeom>
           <a:solidFill>
-            <a:srgbClr val="CCFBF1"/>
+            <a:srgbClr val="FCE7F3"/>
           </a:solidFill>
           <a:ln w="19050">
             <a:solidFill>
-              <a:srgbClr val="0D9488"/>
+              <a:srgbClr val="DB2777"/>
             </a:solidFill>
             <a:prstDash val="solid"/>
           </a:ln>
@@ -28662,13 +28097,13 @@
             <a:r>
               <a:rPr lang="en-US" sz="1300" b="1" dirty="0">
                 <a:solidFill>
-                  <a:srgbClr val="0F766E"/>
+                  <a:srgbClr val="9D174D"/>
                 </a:solidFill>
                 <a:latin typeface="Trebuchet MS" pitchFamily="34" charset="0"/>
                 <a:ea typeface="Trebuchet MS" pitchFamily="34" charset="-122"/>
                 <a:cs typeface="Trebuchet MS" pitchFamily="34" charset="-120"/>
               </a:rPr>
-              <a:t>deep</a:t>
+              <a:t>ness</a:t>
             </a:r>
             <a:endParaRPr lang="en-US" sz="1300" dirty="0"/>
           </a:p>
@@ -28707,7 +28142,7 @@
                 <a:ea typeface="Calibri" pitchFamily="34" charset="-122"/>
                 <a:cs typeface="Calibri" pitchFamily="34" charset="-120"/>
               </a:rPr>
-              <a:t>far down, intense</a:t>
+              <a:t>the quality or state of</a:t>
             </a:r>
             <a:endParaRPr lang="en-US" sz="850" dirty="0"/>
           </a:p>
@@ -29263,7 +28698,7 @@
                 <a:ea typeface="Calibri" pitchFamily="34" charset="-122"/>
                 <a:cs typeface="Calibri" pitchFamily="34" charset="-120"/>
               </a:rPr>
-              <a:t>Word Labs  •  wordlabs.app  •  Root: 'deep' = far down, intense, profound</a:t>
+              <a:t>Word Labs  •  wordlabs.app  •  Root: 'deep' = far down, profound distance</a:t>
             </a:r>
             <a:endParaRPr lang="en-US" sz="800" dirty="0"/>
           </a:p>
@@ -29402,7 +28837,7 @@
                 <a:ea typeface="Trebuchet MS" pitchFamily="34" charset="-122"/>
                 <a:cs typeface="Trebuchet MS" pitchFamily="34" charset="-120"/>
               </a:rPr>
-              <a:t>knee-deep</a:t>
+              <a:t>deepness</a:t>
             </a:r>
             <a:endParaRPr lang="en-US" sz="2800" dirty="0"/>
           </a:p>
@@ -29491,11 +28926,11 @@
             </a:avLst>
           </a:prstGeom>
           <a:solidFill>
-            <a:srgbClr val="DDD6FE"/>
+            <a:srgbClr val="CCFBF1"/>
           </a:solidFill>
           <a:ln w="19050">
             <a:solidFill>
-              <a:srgbClr val="7C3AED"/>
+              <a:srgbClr val="0D9488"/>
             </a:solidFill>
             <a:prstDash val="solid"/>
           </a:ln>
@@ -29535,13 +28970,13 @@
             <a:r>
               <a:rPr lang="en-US" sz="1300" b="1" dirty="0">
                 <a:solidFill>
-                  <a:srgbClr val="4C1D95"/>
+                  <a:srgbClr val="0F766E"/>
                 </a:solidFill>
                 <a:latin typeface="Trebuchet MS" pitchFamily="34" charset="0"/>
                 <a:ea typeface="Trebuchet MS" pitchFamily="34" charset="-122"/>
                 <a:cs typeface="Trebuchet MS" pitchFamily="34" charset="-120"/>
               </a:rPr>
-              <a:t>knee</a:t>
+              <a:t>deep</a:t>
             </a:r>
             <a:endParaRPr lang="en-US" sz="1300" dirty="0"/>
           </a:p>
@@ -29580,7 +29015,7 @@
                 <a:ea typeface="Calibri" pitchFamily="34" charset="-122"/>
                 <a:cs typeface="Calibri" pitchFamily="34" charset="-120"/>
               </a:rPr>
-              <a:t>the joint in the middle of your leg</a:t>
+              <a:t>far down, profound</a:t>
             </a:r>
             <a:endParaRPr lang="en-US" sz="850" dirty="0"/>
           </a:p>
@@ -29603,11 +29038,11 @@
             </a:avLst>
           </a:prstGeom>
           <a:solidFill>
-            <a:srgbClr val="CCFBF1"/>
+            <a:srgbClr val="FCE7F3"/>
           </a:solidFill>
           <a:ln w="19050">
             <a:solidFill>
-              <a:srgbClr val="0D9488"/>
+              <a:srgbClr val="DB2777"/>
             </a:solidFill>
             <a:prstDash val="solid"/>
           </a:ln>
@@ -29647,13 +29082,13 @@
             <a:r>
               <a:rPr lang="en-US" sz="1300" b="1" dirty="0">
                 <a:solidFill>
-                  <a:srgbClr val="0F766E"/>
+                  <a:srgbClr val="9D174D"/>
                 </a:solidFill>
                 <a:latin typeface="Trebuchet MS" pitchFamily="34" charset="0"/>
                 <a:ea typeface="Trebuchet MS" pitchFamily="34" charset="-122"/>
                 <a:cs typeface="Trebuchet MS" pitchFamily="34" charset="-120"/>
               </a:rPr>
-              <a:t>deep</a:t>
+              <a:t>ness</a:t>
             </a:r>
             <a:endParaRPr lang="en-US" sz="1300" dirty="0"/>
           </a:p>
@@ -29692,7 +29127,7 @@
                 <a:ea typeface="Calibri" pitchFamily="34" charset="-122"/>
                 <a:cs typeface="Calibri" pitchFamily="34" charset="-120"/>
               </a:rPr>
-              <a:t>far down, intense</a:t>
+              <a:t>the quality or state of</a:t>
             </a:r>
             <a:endParaRPr lang="en-US" sz="850" dirty="0"/>
           </a:p>
@@ -29851,7 +29286,7 @@
                 <a:ea typeface="Trebuchet MS" pitchFamily="34" charset="-122"/>
                 <a:cs typeface="Trebuchet MS" pitchFamily="34" charset="-120"/>
               </a:rPr>
-              <a:t>knee</a:t>
+              <a:t>deep</a:t>
             </a:r>
             <a:endParaRPr lang="en-US" sz="1400" dirty="0"/>
           </a:p>
@@ -29956,7 +29391,7 @@
                 <a:ea typeface="Trebuchet MS" pitchFamily="34" charset="-122"/>
                 <a:cs typeface="Trebuchet MS" pitchFamily="34" charset="-120"/>
               </a:rPr>
-              <a:t>deep</a:t>
+              <a:t>ness</a:t>
             </a:r>
             <a:endParaRPr lang="en-US" sz="1400" dirty="0"/>
           </a:p>
@@ -30380,7 +29815,7 @@
                 <a:ea typeface="Calibri" pitchFamily="34" charset="-122"/>
                 <a:cs typeface="Calibri" pitchFamily="34" charset="-120"/>
               </a:rPr>
-              <a:t>Word Labs  •  wordlabs.app  •  Root: 'deep' = far down, intense, profound</a:t>
+              <a:t>Word Labs  •  wordlabs.app  •  Root: 'deep' = far down, profound distance</a:t>
             </a:r>
             <a:endParaRPr lang="en-US" sz="800" dirty="0"/>
           </a:p>
@@ -30519,7 +29954,7 @@
                 <a:ea typeface="Trebuchet MS" pitchFamily="34" charset="-122"/>
                 <a:cs typeface="Trebuchet MS" pitchFamily="34" charset="-120"/>
               </a:rPr>
-              <a:t>knee-deep</a:t>
+              <a:t>deepness</a:t>
             </a:r>
             <a:endParaRPr lang="en-US" sz="2800" dirty="0"/>
           </a:p>
@@ -30608,11 +30043,11 @@
             </a:avLst>
           </a:prstGeom>
           <a:solidFill>
-            <a:srgbClr val="DDD6FE"/>
+            <a:srgbClr val="CCFBF1"/>
           </a:solidFill>
           <a:ln w="19050">
             <a:solidFill>
-              <a:srgbClr val="7C3AED"/>
+              <a:srgbClr val="0D9488"/>
             </a:solidFill>
             <a:prstDash val="solid"/>
           </a:ln>
@@ -30652,13 +30087,13 @@
             <a:r>
               <a:rPr lang="en-US" sz="1300" b="1" dirty="0">
                 <a:solidFill>
-                  <a:srgbClr val="4C1D95"/>
+                  <a:srgbClr val="0F766E"/>
                 </a:solidFill>
                 <a:latin typeface="Trebuchet MS" pitchFamily="34" charset="0"/>
                 <a:ea typeface="Trebuchet MS" pitchFamily="34" charset="-122"/>
                 <a:cs typeface="Trebuchet MS" pitchFamily="34" charset="-120"/>
               </a:rPr>
-              <a:t>knee</a:t>
+              <a:t>deep</a:t>
             </a:r>
             <a:endParaRPr lang="en-US" sz="1300" dirty="0"/>
           </a:p>
@@ -30697,7 +30132,7 @@
                 <a:ea typeface="Calibri" pitchFamily="34" charset="-122"/>
                 <a:cs typeface="Calibri" pitchFamily="34" charset="-120"/>
               </a:rPr>
-              <a:t>the joint in the middle of your leg</a:t>
+              <a:t>far down, profound</a:t>
             </a:r>
             <a:endParaRPr lang="en-US" sz="850" dirty="0"/>
           </a:p>
@@ -30720,11 +30155,11 @@
             </a:avLst>
           </a:prstGeom>
           <a:solidFill>
-            <a:srgbClr val="CCFBF1"/>
+            <a:srgbClr val="FCE7F3"/>
           </a:solidFill>
           <a:ln w="19050">
             <a:solidFill>
-              <a:srgbClr val="0D9488"/>
+              <a:srgbClr val="DB2777"/>
             </a:solidFill>
             <a:prstDash val="solid"/>
           </a:ln>
@@ -30764,13 +30199,13 @@
             <a:r>
               <a:rPr lang="en-US" sz="1300" b="1" dirty="0">
                 <a:solidFill>
-                  <a:srgbClr val="0F766E"/>
+                  <a:srgbClr val="9D174D"/>
                 </a:solidFill>
                 <a:latin typeface="Trebuchet MS" pitchFamily="34" charset="0"/>
                 <a:ea typeface="Trebuchet MS" pitchFamily="34" charset="-122"/>
                 <a:cs typeface="Trebuchet MS" pitchFamily="34" charset="-120"/>
               </a:rPr>
-              <a:t>deep</a:t>
+              <a:t>ness</a:t>
             </a:r>
             <a:endParaRPr lang="en-US" sz="1300" dirty="0"/>
           </a:p>
@@ -30809,7 +30244,7 @@
                 <a:ea typeface="Calibri" pitchFamily="34" charset="-122"/>
                 <a:cs typeface="Calibri" pitchFamily="34" charset="-120"/>
               </a:rPr>
-              <a:t>far down, intense</a:t>
+              <a:t>the quality or state of</a:t>
             </a:r>
             <a:endParaRPr lang="en-US" sz="850" dirty="0"/>
           </a:p>
@@ -30968,7 +30403,7 @@
                 <a:ea typeface="Trebuchet MS" pitchFamily="34" charset="-122"/>
                 <a:cs typeface="Trebuchet MS" pitchFamily="34" charset="-120"/>
               </a:rPr>
-              <a:t>knee</a:t>
+              <a:t>deep</a:t>
             </a:r>
             <a:endParaRPr lang="en-US" sz="1400" dirty="0"/>
           </a:p>
@@ -31073,7 +30508,7 @@
                 <a:ea typeface="Trebuchet MS" pitchFamily="34" charset="-122"/>
                 <a:cs typeface="Trebuchet MS" pitchFamily="34" charset="-120"/>
               </a:rPr>
-              <a:t>deep</a:t>
+              <a:t>ness</a:t>
             </a:r>
             <a:endParaRPr lang="en-US" sz="1400" dirty="0"/>
           </a:p>
@@ -31154,11 +30589,11 @@
         <p:spPr>
           <a:xfrm>
             <a:off x="1874520" y="4096512"/>
-            <a:ext cx="6903720" cy="804672"/>
+            <a:ext cx="6903720" cy="658368"/>
           </a:xfrm>
           <a:prstGeom prst="rect">
             <a:avLst>
-              <a:gd name="adj" fmla="val 6818"/>
+              <a:gd name="adj" fmla="val 8333"/>
             </a:avLst>
           </a:prstGeom>
           <a:solidFill>
@@ -31180,12 +30615,12 @@
         </p:nvSpPr>
         <p:spPr>
           <a:xfrm>
-            <a:off x="2427732" y="4169664"/>
-            <a:ext cx="685800" cy="384048"/>
+            <a:off x="2254649" y="4169664"/>
+            <a:ext cx="685800" cy="475488"/>
           </a:xfrm>
           <a:prstGeom prst="rect">
             <a:avLst>
-              <a:gd name="adj" fmla="val 9524"/>
+              <a:gd name="adj" fmla="val 7692"/>
             </a:avLst>
           </a:prstGeom>
           <a:solidFill>
@@ -31207,8 +30642,8 @@
         </p:nvSpPr>
         <p:spPr>
           <a:xfrm>
-            <a:off x="2427732" y="4169664"/>
-            <a:ext cx="685800" cy="384048"/>
+            <a:off x="2254649" y="4169664"/>
+            <a:ext cx="685800" cy="475488"/>
           </a:xfrm>
           <a:prstGeom prst="rect">
             <a:avLst/>
@@ -31232,7 +30667,7 @@
                 <a:ea typeface="Trebuchet MS" pitchFamily="34" charset="-122"/>
                 <a:cs typeface="Trebuchet MS" pitchFamily="34" charset="-120"/>
               </a:rPr>
-              <a:t>kn</a:t>
+              <a:t>d</a:t>
             </a:r>
             <a:endParaRPr lang="en-US" sz="900" dirty="0"/>
           </a:p>
@@ -31240,57 +30675,18 @@
       </p:sp>
       <p:sp>
         <p:nvSpPr>
-          <p:cNvPr id="35" name="Text 33"/>
-          <p:cNvSpPr/>
-          <p:nvPr/>
-        </p:nvSpPr>
-        <p:spPr>
-          <a:xfrm>
-            <a:off x="2427732" y="4572000"/>
-            <a:ext cx="685800" cy="219456"/>
-          </a:xfrm>
-          <a:prstGeom prst="rect">
-            <a:avLst/>
-          </a:prstGeom>
-          <a:noFill/>
-          <a:ln/>
-        </p:spPr>
-        <p:txBody>
-          <a:bodyPr wrap="square" lIns="0" tIns="0" rIns="0" bIns="0" rtlCol="0" anchor="t"/>
-          <a:lstStyle/>
-          <a:p>
-            <a:pPr algn="ctr" indent="0" marL="0">
-              <a:buNone/>
-            </a:pPr>
-            <a:r>
-              <a:rPr lang="en-US" sz="750" i="1" dirty="0">
-                <a:solidFill>
-                  <a:srgbClr val="94A3B8"/>
-                </a:solidFill>
-                <a:latin typeface="Calibri" pitchFamily="34" charset="0"/>
-                <a:ea typeface="Calibri" pitchFamily="34" charset="-122"/>
-                <a:cs typeface="Calibri" pitchFamily="34" charset="-120"/>
-              </a:rPr>
-              <a:t>/n/</a:t>
-            </a:r>
-            <a:endParaRPr lang="en-US" sz="750" dirty="0"/>
-          </a:p>
-        </p:txBody>
-      </p:sp>
-      <p:sp>
-        <p:nvSpPr>
-          <p:cNvPr id="36" name="Shape 34"/>
-          <p:cNvSpPr/>
-          <p:nvPr/>
-        </p:nvSpPr>
-        <p:spPr>
-          <a:xfrm>
-            <a:off x="3639312" y="4169664"/>
-            <a:ext cx="685800" cy="384048"/>
+          <p:cNvPr id="35" name="Shape 33"/>
+          <p:cNvSpPr/>
+          <p:nvPr/>
+        </p:nvSpPr>
+        <p:spPr>
+          <a:xfrm>
+            <a:off x="3293146" y="4169664"/>
+            <a:ext cx="685800" cy="475488"/>
           </a:xfrm>
           <a:prstGeom prst="rect">
             <a:avLst>
-              <a:gd name="adj" fmla="val 9524"/>
+              <a:gd name="adj" fmla="val 7692"/>
             </a:avLst>
           </a:prstGeom>
           <a:solidFill>
@@ -31306,14 +30702,14 @@
       </p:sp>
       <p:sp>
         <p:nvSpPr>
-          <p:cNvPr id="37" name="Text 35"/>
-          <p:cNvSpPr/>
-          <p:nvPr/>
-        </p:nvSpPr>
-        <p:spPr>
-          <a:xfrm>
-            <a:off x="3639312" y="4169664"/>
-            <a:ext cx="685800" cy="384048"/>
+          <p:cNvPr id="36" name="Text 34"/>
+          <p:cNvSpPr/>
+          <p:nvPr/>
+        </p:nvSpPr>
+        <p:spPr>
+          <a:xfrm>
+            <a:off x="3293146" y="4169664"/>
+            <a:ext cx="685800" cy="475488"/>
           </a:xfrm>
           <a:prstGeom prst="rect">
             <a:avLst/>
@@ -31345,18 +30741,18 @@
       </p:sp>
       <p:sp>
         <p:nvSpPr>
-          <p:cNvPr id="38" name="Shape 36"/>
-          <p:cNvSpPr/>
-          <p:nvPr/>
-        </p:nvSpPr>
-        <p:spPr>
-          <a:xfrm>
-            <a:off x="4850892" y="4169664"/>
-            <a:ext cx="685800" cy="384048"/>
+          <p:cNvPr id="37" name="Shape 35"/>
+          <p:cNvSpPr/>
+          <p:nvPr/>
+        </p:nvSpPr>
+        <p:spPr>
+          <a:xfrm>
+            <a:off x="4331643" y="4169664"/>
+            <a:ext cx="685800" cy="475488"/>
           </a:xfrm>
           <a:prstGeom prst="rect">
             <a:avLst>
-              <a:gd name="adj" fmla="val 9524"/>
+              <a:gd name="adj" fmla="val 7692"/>
             </a:avLst>
           </a:prstGeom>
           <a:solidFill>
@@ -31372,14 +30768,14 @@
       </p:sp>
       <p:sp>
         <p:nvSpPr>
-          <p:cNvPr id="39" name="Text 37"/>
-          <p:cNvSpPr/>
-          <p:nvPr/>
-        </p:nvSpPr>
-        <p:spPr>
-          <a:xfrm>
-            <a:off x="4850892" y="4169664"/>
-            <a:ext cx="685800" cy="384048"/>
+          <p:cNvPr id="38" name="Text 36"/>
+          <p:cNvSpPr/>
+          <p:nvPr/>
+        </p:nvSpPr>
+        <p:spPr>
+          <a:xfrm>
+            <a:off x="4331643" y="4169664"/>
+            <a:ext cx="685800" cy="475488"/>
           </a:xfrm>
           <a:prstGeom prst="rect">
             <a:avLst/>
@@ -31403,7 +30799,7 @@
                 <a:ea typeface="Trebuchet MS" pitchFamily="34" charset="-122"/>
                 <a:cs typeface="Trebuchet MS" pitchFamily="34" charset="-120"/>
               </a:rPr>
-              <a:t>d</a:t>
+              <a:t>p</a:t>
             </a:r>
             <a:endParaRPr lang="en-US" sz="900" dirty="0"/>
           </a:p>
@@ -31411,18 +30807,18 @@
       </p:sp>
       <p:sp>
         <p:nvSpPr>
-          <p:cNvPr id="40" name="Shape 38"/>
-          <p:cNvSpPr/>
-          <p:nvPr/>
-        </p:nvSpPr>
-        <p:spPr>
-          <a:xfrm>
-            <a:off x="6062472" y="4169664"/>
-            <a:ext cx="685800" cy="384048"/>
+          <p:cNvPr id="39" name="Shape 37"/>
+          <p:cNvSpPr/>
+          <p:nvPr/>
+        </p:nvSpPr>
+        <p:spPr>
+          <a:xfrm>
+            <a:off x="5370141" y="4169664"/>
+            <a:ext cx="685800" cy="475488"/>
           </a:xfrm>
           <a:prstGeom prst="rect">
             <a:avLst>
-              <a:gd name="adj" fmla="val 9524"/>
+              <a:gd name="adj" fmla="val 7692"/>
             </a:avLst>
           </a:prstGeom>
           <a:solidFill>
@@ -31438,14 +30834,14 @@
       </p:sp>
       <p:sp>
         <p:nvSpPr>
-          <p:cNvPr id="41" name="Text 39"/>
-          <p:cNvSpPr/>
-          <p:nvPr/>
-        </p:nvSpPr>
-        <p:spPr>
-          <a:xfrm>
-            <a:off x="6062472" y="4169664"/>
-            <a:ext cx="685800" cy="384048"/>
+          <p:cNvPr id="40" name="Text 38"/>
+          <p:cNvSpPr/>
+          <p:nvPr/>
+        </p:nvSpPr>
+        <p:spPr>
+          <a:xfrm>
+            <a:off x="5370141" y="4169664"/>
+            <a:ext cx="685800" cy="475488"/>
           </a:xfrm>
           <a:prstGeom prst="rect">
             <a:avLst/>
@@ -31469,7 +30865,7 @@
                 <a:ea typeface="Trebuchet MS" pitchFamily="34" charset="-122"/>
                 <a:cs typeface="Trebuchet MS" pitchFamily="34" charset="-120"/>
               </a:rPr>
-              <a:t>ee</a:t>
+              <a:t>n</a:t>
             </a:r>
             <a:endParaRPr lang="en-US" sz="900" dirty="0"/>
           </a:p>
@@ -31477,18 +30873,18 @@
       </p:sp>
       <p:sp>
         <p:nvSpPr>
-          <p:cNvPr id="42" name="Shape 40"/>
-          <p:cNvSpPr/>
-          <p:nvPr/>
-        </p:nvSpPr>
-        <p:spPr>
-          <a:xfrm>
-            <a:off x="7274052" y="4169664"/>
-            <a:ext cx="685800" cy="384048"/>
+          <p:cNvPr id="41" name="Shape 39"/>
+          <p:cNvSpPr/>
+          <p:nvPr/>
+        </p:nvSpPr>
+        <p:spPr>
+          <a:xfrm>
+            <a:off x="6408638" y="4169664"/>
+            <a:ext cx="685800" cy="475488"/>
           </a:xfrm>
           <a:prstGeom prst="rect">
             <a:avLst>
-              <a:gd name="adj" fmla="val 9524"/>
+              <a:gd name="adj" fmla="val 7692"/>
             </a:avLst>
           </a:prstGeom>
           <a:solidFill>
@@ -31504,14 +30900,14 @@
       </p:sp>
       <p:sp>
         <p:nvSpPr>
-          <p:cNvPr id="43" name="Text 41"/>
-          <p:cNvSpPr/>
-          <p:nvPr/>
-        </p:nvSpPr>
-        <p:spPr>
-          <a:xfrm>
-            <a:off x="7274052" y="4169664"/>
-            <a:ext cx="685800" cy="384048"/>
+          <p:cNvPr id="42" name="Text 40"/>
+          <p:cNvSpPr/>
+          <p:nvPr/>
+        </p:nvSpPr>
+        <p:spPr>
+          <a:xfrm>
+            <a:off x="6408638" y="4169664"/>
+            <a:ext cx="685800" cy="475488"/>
           </a:xfrm>
           <a:prstGeom prst="rect">
             <a:avLst/>
@@ -31535,7 +30931,73 @@
                 <a:ea typeface="Trebuchet MS" pitchFamily="34" charset="-122"/>
                 <a:cs typeface="Trebuchet MS" pitchFamily="34" charset="-120"/>
               </a:rPr>
-              <a:t>p</a:t>
+              <a:t>e</a:t>
+            </a:r>
+            <a:endParaRPr lang="en-US" sz="900" dirty="0"/>
+          </a:p>
+        </p:txBody>
+      </p:sp>
+      <p:sp>
+        <p:nvSpPr>
+          <p:cNvPr id="43" name="Shape 41"/>
+          <p:cNvSpPr/>
+          <p:nvPr/>
+        </p:nvSpPr>
+        <p:spPr>
+          <a:xfrm>
+            <a:off x="7447135" y="4169664"/>
+            <a:ext cx="685800" cy="475488"/>
+          </a:xfrm>
+          <a:prstGeom prst="rect">
+            <a:avLst>
+              <a:gd name="adj" fmla="val 7692"/>
+            </a:avLst>
+          </a:prstGeom>
+          <a:solidFill>
+            <a:srgbClr val="FFFFFF"/>
+          </a:solidFill>
+          <a:ln w="12700">
+            <a:solidFill>
+              <a:srgbClr val="DB2777"/>
+            </a:solidFill>
+            <a:prstDash val="solid"/>
+          </a:ln>
+        </p:spPr>
+      </p:sp>
+      <p:sp>
+        <p:nvSpPr>
+          <p:cNvPr id="44" name="Text 42"/>
+          <p:cNvSpPr/>
+          <p:nvPr/>
+        </p:nvSpPr>
+        <p:spPr>
+          <a:xfrm>
+            <a:off x="7447135" y="4169664"/>
+            <a:ext cx="685800" cy="475488"/>
+          </a:xfrm>
+          <a:prstGeom prst="rect">
+            <a:avLst/>
+          </a:prstGeom>
+          <a:noFill/>
+          <a:ln/>
+        </p:spPr>
+        <p:txBody>
+          <a:bodyPr wrap="square" lIns="0" tIns="0" rIns="0" bIns="0" rtlCol="0" anchor="ctr"/>
+          <a:lstStyle/>
+          <a:p>
+            <a:pPr algn="ctr" indent="0" marL="0">
+              <a:buNone/>
+            </a:pPr>
+            <a:r>
+              <a:rPr lang="en-US" sz="900" b="1" dirty="0">
+                <a:solidFill>
+                  <a:srgbClr val="9D174D"/>
+                </a:solidFill>
+                <a:latin typeface="Trebuchet MS" pitchFamily="34" charset="0"/>
+                <a:ea typeface="Trebuchet MS" pitchFamily="34" charset="-122"/>
+                <a:cs typeface="Trebuchet MS" pitchFamily="34" charset="-120"/>
+              </a:rPr>
+              <a:t>ss</a:t>
             </a:r>
             <a:endParaRPr lang="en-US" sz="900" dirty="0"/>
           </a:p>
@@ -31827,7 +31289,7 @@
                 <a:ea typeface="Calibri" pitchFamily="34" charset="-122"/>
                 <a:cs typeface="Calibri" pitchFamily="34" charset="-120"/>
               </a:rPr>
-              <a:t>Word Labs  •  wordlabs.app  •  Root: 'deep' = far down, intense, profound</a:t>
+              <a:t>Word Labs  •  wordlabs.app  •  Root: 'deep' = far down, profound distance</a:t>
             </a:r>
             <a:endParaRPr lang="en-US" sz="800" dirty="0"/>
           </a:p>
@@ -32996,7 +32458,7 @@
                 <a:ea typeface="Calibri" pitchFamily="34" charset="-122"/>
                 <a:cs typeface="Calibri" pitchFamily="34" charset="-120"/>
               </a:rPr>
-              <a:t>Word Labs  •  wordlabs.app  •  Root: 'deep' = far down, intense, profound</a:t>
+              <a:t>Word Labs  •  wordlabs.app  •  Root: 'deep' = far down, profound distance</a:t>
             </a:r>
             <a:endParaRPr lang="en-US" sz="800" dirty="0"/>
           </a:p>
@@ -33425,7 +32887,7 @@
                 <a:ea typeface="Trebuchet MS" pitchFamily="34" charset="-122"/>
                 <a:cs typeface="Trebuchet MS" pitchFamily="34" charset="-120"/>
               </a:rPr>
-              <a:t>--er</a:t>
+              <a:t>--en</a:t>
             </a:r>
             <a:endParaRPr lang="en-US" sz="1300" dirty="0"/>
           </a:p>
@@ -33489,7 +32951,7 @@
                 <a:ea typeface="Trebuchet MS" pitchFamily="34" charset="-122"/>
                 <a:cs typeface="Trebuchet MS" pitchFamily="34" charset="-120"/>
               </a:rPr>
-              <a:t>waist--</a:t>
+              <a:t>waste--</a:t>
             </a:r>
             <a:endParaRPr lang="en-US" sz="1300" dirty="0"/>
           </a:p>
@@ -33578,7 +33040,7 @@
                 <a:ea typeface="Trebuchet MS" pitchFamily="34" charset="-122"/>
                 <a:cs typeface="Trebuchet MS" pitchFamily="34" charset="-120"/>
               </a:rPr>
-              <a:t>--est</a:t>
+              <a:t>--er</a:t>
             </a:r>
             <a:endParaRPr lang="en-US" sz="1300" dirty="0"/>
           </a:p>
@@ -33731,7 +33193,7 @@
                 <a:ea typeface="Trebuchet MS" pitchFamily="34" charset="-122"/>
                 <a:cs typeface="Trebuchet MS" pitchFamily="34" charset="-120"/>
               </a:rPr>
-              <a:t>--ly</a:t>
+              <a:t>--est</a:t>
             </a:r>
             <a:endParaRPr lang="en-US" sz="1300" dirty="0"/>
           </a:p>
@@ -33795,7 +33257,7 @@
                 <a:ea typeface="Trebuchet MS" pitchFamily="34" charset="-122"/>
                 <a:cs typeface="Trebuchet MS" pitchFamily="34" charset="-120"/>
               </a:rPr>
-              <a:t>ankle--</a:t>
+              <a:t>shoulder--</a:t>
             </a:r>
             <a:endParaRPr lang="en-US" sz="1300" dirty="0"/>
           </a:p>
@@ -33884,7 +33346,7 @@
                 <a:ea typeface="Trebuchet MS" pitchFamily="34" charset="-122"/>
                 <a:cs typeface="Trebuchet MS" pitchFamily="34" charset="-120"/>
               </a:rPr>
-              <a:t>--en</a:t>
+              <a:t>--ly</a:t>
             </a:r>
             <a:endParaRPr lang="en-US" sz="1300" dirty="0"/>
           </a:p>
@@ -33948,7 +33410,7 @@
                 <a:ea typeface="Trebuchet MS" pitchFamily="34" charset="-122"/>
                 <a:cs typeface="Trebuchet MS" pitchFamily="34" charset="-120"/>
               </a:rPr>
-              <a:t>elbow--</a:t>
+              <a:t>ankle--</a:t>
             </a:r>
             <a:endParaRPr lang="en-US" sz="1300" dirty="0"/>
           </a:p>
@@ -34142,7 +33604,7 @@
                 <a:ea typeface="Trebuchet MS" pitchFamily="34" charset="-122"/>
                 <a:cs typeface="Trebuchet MS" pitchFamily="34" charset="-120"/>
               </a:rPr>
-              <a:t>deeper</a:t>
+              <a:t>deepen</a:t>
             </a:r>
             <a:endParaRPr lang="en-US" sz="1200" dirty="0"/>
           </a:p>
@@ -34208,7 +33670,7 @@
                 <a:ea typeface="Trebuchet MS" pitchFamily="34" charset="-122"/>
                 <a:cs typeface="Trebuchet MS" pitchFamily="34" charset="-120"/>
               </a:rPr>
-              <a:t>deepest</a:t>
+              <a:t>deeper</a:t>
             </a:r>
             <a:endParaRPr lang="en-US" sz="1200" dirty="0"/>
           </a:p>
@@ -34274,7 +33736,7 @@
                 <a:ea typeface="Trebuchet MS" pitchFamily="34" charset="-122"/>
                 <a:cs typeface="Trebuchet MS" pitchFamily="34" charset="-120"/>
               </a:rPr>
-              <a:t>deeply</a:t>
+              <a:t>deepest</a:t>
             </a:r>
             <a:endParaRPr lang="en-US" sz="1200" dirty="0"/>
           </a:p>
@@ -34340,7 +33802,7 @@
                 <a:ea typeface="Trebuchet MS" pitchFamily="34" charset="-122"/>
                 <a:cs typeface="Trebuchet MS" pitchFamily="34" charset="-120"/>
               </a:rPr>
-              <a:t>deepen</a:t>
+              <a:t>deeply</a:t>
             </a:r>
             <a:endParaRPr lang="en-US" sz="1200" dirty="0"/>
           </a:p>
@@ -34538,7 +34000,7 @@
                 <a:ea typeface="Trebuchet MS" pitchFamily="34" charset="-122"/>
                 <a:cs typeface="Trebuchet MS" pitchFamily="34" charset="-120"/>
               </a:rPr>
-              <a:t>knee-deep</a:t>
+              <a:t>deep-set</a:t>
             </a:r>
             <a:endParaRPr lang="en-US" sz="1200" dirty="0"/>
           </a:p>
@@ -34896,7 +34358,7 @@
                 <a:ea typeface="Calibri" pitchFamily="34" charset="-122"/>
                 <a:cs typeface="Calibri" pitchFamily="34" charset="-120"/>
               </a:rPr>
-              <a:t>Word Labs  •  wordlabs.app  •  Root: 'deep' = far down, intense, profound</a:t>
+              <a:t>Word Labs  •  wordlabs.app  •  Root: 'deep' = far down, profound distance</a:t>
             </a:r>
             <a:endParaRPr lang="en-US" sz="800" dirty="0"/>
           </a:p>
@@ -35060,7 +34522,7 @@
                 <a:ea typeface="Calibri" pitchFamily="34" charset="-122"/>
                 <a:cs typeface="Calibri" pitchFamily="34" charset="-120"/>
               </a:rPr>
-              <a:t>The core part of a word carrying its basic meaning. For example, 'deep' means 'far down, intense, profound'.</a:t>
+              <a:t>The core part of a word carrying its basic meaning. For example, 'deep' means 'far down, profound distance'.</a:t>
             </a:r>
             <a:endParaRPr lang="en-US" sz="1350" dirty="0"/>
           </a:p>
@@ -35680,7 +35142,7 @@
                 <a:ea typeface="Calibri" pitchFamily="34" charset="-122"/>
                 <a:cs typeface="Calibri" pitchFamily="34" charset="-120"/>
               </a:rPr>
-              <a:t>Word Labs  •  wordlabs.app  •  Root: 'deep' = far down, intense, profound</a:t>
+              <a:t>Word Labs  •  wordlabs.app  •  Root: 'deep' = far down, profound distance</a:t>
             </a:r>
             <a:endParaRPr lang="en-US" sz="800" dirty="0"/>
           </a:p>
@@ -35792,7 +35254,7 @@
                 <a:ea typeface="Calibri" pitchFamily="34" charset="-122"/>
                 <a:cs typeface="Calibri" pitchFamily="34" charset="-120"/>
               </a:rPr>
-              <a:t>1.  The word 'deeply' uses the suffix '-ly' to turn 'deep' into an adverb.</a:t>
+              <a:t>1.  The morpheme 'deep' comes from ancient Greek.</a:t>
             </a:r>
             <a:endParaRPr lang="en-US" sz="1300" dirty="0"/>
           </a:p>
@@ -35815,11 +35277,11 @@
             </a:avLst>
           </a:prstGeom>
           <a:solidFill>
-            <a:srgbClr val="DCFCE7"/>
-          </a:solidFill>
-          <a:ln w="12700">
-            <a:solidFill>
-              <a:srgbClr val="16A34A"/>
+            <a:srgbClr val="FEE2E2"/>
+          </a:solidFill>
+          <a:ln w="12700">
+            <a:solidFill>
+              <a:srgbClr val="DC2626"/>
             </a:solidFill>
             <a:prstDash val="solid"/>
           </a:ln>
@@ -35852,13 +35314,13 @@
             <a:r>
               <a:rPr lang="en-US" sz="1100" b="1" dirty="0">
                 <a:solidFill>
-                  <a:srgbClr val="16A34A"/>
+                  <a:srgbClr val="DC2626"/>
                 </a:solidFill>
                 <a:latin typeface="Trebuchet MS" pitchFamily="34" charset="0"/>
                 <a:ea typeface="Trebuchet MS" pitchFamily="34" charset="-122"/>
                 <a:cs typeface="Trebuchet MS" pitchFamily="34" charset="-120"/>
               </a:rPr>
-              <a:t>TRUE</a:t>
+              <a:t>FALSE</a:t>
             </a:r>
             <a:endParaRPr lang="en-US" sz="1100" dirty="0"/>
           </a:p>
@@ -35931,7 +35393,7 @@
                 <a:ea typeface="Calibri" pitchFamily="34" charset="-122"/>
                 <a:cs typeface="Calibri" pitchFamily="34" charset="-120"/>
               </a:rPr>
-              <a:t>2.  The root 'deep' comes from the Latin language.</a:t>
+              <a:t>2.  The word 'deepest' uses the suffix '-est' to mean the most deep.</a:t>
             </a:r>
             <a:endParaRPr lang="en-US" sz="1300" dirty="0"/>
           </a:p>
@@ -35954,11 +35416,11 @@
             </a:avLst>
           </a:prstGeom>
           <a:solidFill>
-            <a:srgbClr val="FEE2E2"/>
-          </a:solidFill>
-          <a:ln w="12700">
-            <a:solidFill>
-              <a:srgbClr val="DC2626"/>
+            <a:srgbClr val="DCFCE7"/>
+          </a:solidFill>
+          <a:ln w="12700">
+            <a:solidFill>
+              <a:srgbClr val="16A34A"/>
             </a:solidFill>
             <a:prstDash val="solid"/>
           </a:ln>
@@ -35991,13 +35453,13 @@
             <a:r>
               <a:rPr lang="en-US" sz="1100" b="1" dirty="0">
                 <a:solidFill>
-                  <a:srgbClr val="DC2626"/>
+                  <a:srgbClr val="16A34A"/>
                 </a:solidFill>
                 <a:latin typeface="Trebuchet MS" pitchFamily="34" charset="0"/>
                 <a:ea typeface="Trebuchet MS" pitchFamily="34" charset="-122"/>
                 <a:cs typeface="Trebuchet MS" pitchFamily="34" charset="-120"/>
               </a:rPr>
-              <a:t>FALSE</a:t>
+              <a:t>TRUE</a:t>
             </a:r>
             <a:endParaRPr lang="en-US" sz="1100" dirty="0"/>
           </a:p>
@@ -36070,7 +35532,7 @@
                 <a:ea typeface="Calibri" pitchFamily="34" charset="-122"/>
                 <a:cs typeface="Calibri" pitchFamily="34" charset="-120"/>
               </a:rPr>
-              <a:t>3.  Adding '-en' to 'deep' makes the word 'deepen', meaning to make something deeper.</a:t>
+              <a:t>3.  Adding '-en' to 'deep' makes the word 'deepen', meaning to make deeper.</a:t>
             </a:r>
             <a:endParaRPr lang="en-US" sz="1300" dirty="0"/>
           </a:p>
@@ -36209,7 +35671,7 @@
                 <a:ea typeface="Calibri" pitchFamily="34" charset="-122"/>
                 <a:cs typeface="Calibri" pitchFamily="34" charset="-120"/>
               </a:rPr>
-              <a:t>4.  The word 'deepest' means something is the most far down or most intense of all.</a:t>
+              <a:t>4.  The word 'deeply' is formed by adding the suffix '-ly' to 'deep'.</a:t>
             </a:r>
             <a:endParaRPr lang="en-US" sz="1300" dirty="0"/>
           </a:p>
@@ -36348,7 +35810,7 @@
                 <a:ea typeface="Calibri" pitchFamily="34" charset="-122"/>
                 <a:cs typeface="Calibri" pitchFamily="34" charset="-120"/>
               </a:rPr>
-              <a:t>5.  The word 'deeper' has three syllables.</a:t>
+              <a:t>5.  The morpheme 'deep' means something that is very wide.</a:t>
             </a:r>
             <a:endParaRPr lang="en-US" sz="1300" dirty="0"/>
           </a:p>
@@ -36706,7 +36168,7 @@
                 <a:ea typeface="Calibri" pitchFamily="34" charset="-122"/>
                 <a:cs typeface="Calibri" pitchFamily="34" charset="-120"/>
               </a:rPr>
-              <a:t>Word Labs  •  wordlabs.app  •  Root: 'deep' = far down, intense, profound</a:t>
+              <a:t>Word Labs  •  wordlabs.app  •  Root: 'deep' = far down, profound distance</a:t>
             </a:r>
             <a:endParaRPr lang="en-US" sz="800" dirty="0"/>
           </a:p>
@@ -36843,7 +36305,7 @@
                 <a:ea typeface="Trebuchet MS" pitchFamily="34" charset="-122"/>
                 <a:cs typeface="Trebuchet MS" pitchFamily="34" charset="-120"/>
               </a:rPr>
-              <a:t>far down, intense, profound</a:t>
+              <a:t>far down, profound distance</a:t>
             </a:r>
             <a:endParaRPr lang="en-US" sz="2000" dirty="0"/>
           </a:p>
@@ -36882,7 +36344,7 @@
                 <a:ea typeface="Calibri" pitchFamily="34" charset="-122"/>
                 <a:cs typeface="Calibri" pitchFamily="34" charset="-120"/>
               </a:rPr>
-              <a:t>Origin: Old English: deop</a:t>
+              <a:t>Origin: Latin: deepaz</a:t>
             </a:r>
             <a:endParaRPr lang="en-US" sz="1100" dirty="0"/>
           </a:p>
@@ -36987,7 +36449,7 @@
                 <a:ea typeface="Trebuchet MS" pitchFamily="34" charset="-122"/>
                 <a:cs typeface="Trebuchet MS" pitchFamily="34" charset="-120"/>
               </a:rPr>
-              <a:t>deeper</a:t>
+              <a:t>deepen</a:t>
             </a:r>
             <a:endParaRPr lang="en-US" sz="1300" dirty="0"/>
           </a:p>
@@ -37053,7 +36515,7 @@
                 <a:ea typeface="Trebuchet MS" pitchFamily="34" charset="-122"/>
                 <a:cs typeface="Trebuchet MS" pitchFamily="34" charset="-120"/>
               </a:rPr>
-              <a:t>deepest</a:t>
+              <a:t>deeper</a:t>
             </a:r>
             <a:endParaRPr lang="en-US" sz="1300" dirty="0"/>
           </a:p>
@@ -37119,7 +36581,7 @@
                 <a:ea typeface="Trebuchet MS" pitchFamily="34" charset="-122"/>
                 <a:cs typeface="Trebuchet MS" pitchFamily="34" charset="-120"/>
               </a:rPr>
-              <a:t>deeply</a:t>
+              <a:t>deepest</a:t>
             </a:r>
             <a:endParaRPr lang="en-US" sz="1300" dirty="0"/>
           </a:p>
@@ -37185,7 +36647,7 @@
                 <a:ea typeface="Trebuchet MS" pitchFamily="34" charset="-122"/>
                 <a:cs typeface="Trebuchet MS" pitchFamily="34" charset="-120"/>
               </a:rPr>
-              <a:t>deepen</a:t>
+              <a:t>deeply</a:t>
             </a:r>
             <a:endParaRPr lang="en-US" sz="1300" dirty="0"/>
           </a:p>
@@ -37383,7 +36845,7 @@
                 <a:ea typeface="Trebuchet MS" pitchFamily="34" charset="-122"/>
                 <a:cs typeface="Trebuchet MS" pitchFamily="34" charset="-120"/>
               </a:rPr>
-              <a:t>knee-deep</a:t>
+              <a:t>deep-set</a:t>
             </a:r>
             <a:endParaRPr lang="en-US" sz="1300" dirty="0"/>
           </a:p>
@@ -37675,7 +37137,7 @@
                 <a:ea typeface="Calibri" pitchFamily="34" charset="-122"/>
                 <a:cs typeface="Calibri" pitchFamily="34" charset="-120"/>
               </a:rPr>
-              <a:t>Word Labs  •  wordlabs.app  •  Root: 'deep' = far down, intense, profound</a:t>
+              <a:t>Word Labs  •  wordlabs.app  •  Root: 'deep' = far down, profound distance</a:t>
             </a:r>
             <a:endParaRPr lang="en-US" sz="800" dirty="0"/>
           </a:p>
@@ -38104,7 +37566,7 @@
                 <a:ea typeface="Trebuchet MS" pitchFamily="34" charset="-122"/>
                 <a:cs typeface="Trebuchet MS" pitchFamily="34" charset="-120"/>
               </a:rPr>
-              <a:t>--er</a:t>
+              <a:t>--en</a:t>
             </a:r>
             <a:endParaRPr lang="en-US" sz="1300" dirty="0"/>
           </a:p>
@@ -38168,7 +37630,7 @@
                 <a:ea typeface="Trebuchet MS" pitchFamily="34" charset="-122"/>
                 <a:cs typeface="Trebuchet MS" pitchFamily="34" charset="-120"/>
               </a:rPr>
-              <a:t>waist--</a:t>
+              <a:t>waste--</a:t>
             </a:r>
             <a:endParaRPr lang="en-US" sz="1300" dirty="0"/>
           </a:p>
@@ -38257,7 +37719,7 @@
                 <a:ea typeface="Trebuchet MS" pitchFamily="34" charset="-122"/>
                 <a:cs typeface="Trebuchet MS" pitchFamily="34" charset="-120"/>
               </a:rPr>
-              <a:t>--est</a:t>
+              <a:t>--er</a:t>
             </a:r>
             <a:endParaRPr lang="en-US" sz="1300" dirty="0"/>
           </a:p>
@@ -38410,7 +37872,7 @@
                 <a:ea typeface="Trebuchet MS" pitchFamily="34" charset="-122"/>
                 <a:cs typeface="Trebuchet MS" pitchFamily="34" charset="-120"/>
               </a:rPr>
-              <a:t>--ly</a:t>
+              <a:t>--est</a:t>
             </a:r>
             <a:endParaRPr lang="en-US" sz="1300" dirty="0"/>
           </a:p>
@@ -38474,7 +37936,7 @@
                 <a:ea typeface="Trebuchet MS" pitchFamily="34" charset="-122"/>
                 <a:cs typeface="Trebuchet MS" pitchFamily="34" charset="-120"/>
               </a:rPr>
-              <a:t>ankle--</a:t>
+              <a:t>shoulder--</a:t>
             </a:r>
             <a:endParaRPr lang="en-US" sz="1300" dirty="0"/>
           </a:p>
@@ -38563,7 +38025,7 @@
                 <a:ea typeface="Trebuchet MS" pitchFamily="34" charset="-122"/>
                 <a:cs typeface="Trebuchet MS" pitchFamily="34" charset="-120"/>
               </a:rPr>
-              <a:t>--en</a:t>
+              <a:t>--ly</a:t>
             </a:r>
             <a:endParaRPr lang="en-US" sz="1300" dirty="0"/>
           </a:p>
@@ -38627,7 +38089,7 @@
                 <a:ea typeface="Trebuchet MS" pitchFamily="34" charset="-122"/>
                 <a:cs typeface="Trebuchet MS" pitchFamily="34" charset="-120"/>
               </a:rPr>
-              <a:t>elbow--</a:t>
+              <a:t>ankle--</a:t>
             </a:r>
             <a:endParaRPr lang="en-US" sz="1300" dirty="0"/>
           </a:p>
@@ -39052,7 +38514,7 @@
                 <a:ea typeface="Trebuchet MS" pitchFamily="34" charset="-122"/>
                 <a:cs typeface="Trebuchet MS" pitchFamily="34" charset="-120"/>
               </a:rPr>
-              <a:t>--er</a:t>
+              <a:t>--en</a:t>
             </a:r>
             <a:endParaRPr lang="en-US" sz="1300" dirty="0"/>
           </a:p>
@@ -39157,7 +38619,7 @@
                 <a:ea typeface="Trebuchet MS" pitchFamily="34" charset="-122"/>
                 <a:cs typeface="Trebuchet MS" pitchFamily="34" charset="-120"/>
               </a:rPr>
-              <a:t>deeper</a:t>
+              <a:t>deepen</a:t>
             </a:r>
             <a:endParaRPr lang="en-US" sz="1400" dirty="0"/>
           </a:p>
@@ -39449,7 +38911,7 @@
                 <a:ea typeface="Calibri" pitchFamily="34" charset="-122"/>
                 <a:cs typeface="Calibri" pitchFamily="34" charset="-120"/>
               </a:rPr>
-              <a:t>Word Labs  •  wordlabs.app  •  Root: 'deep' = far down, intense, profound</a:t>
+              <a:t>Word Labs  •  wordlabs.app  •  Root: 'deep' = far down, profound distance</a:t>
             </a:r>
             <a:endParaRPr lang="en-US" sz="800" dirty="0"/>
           </a:p>
@@ -39561,7 +39023,7 @@
                 <a:ea typeface="Trebuchet MS" pitchFamily="34" charset="-122"/>
                 <a:cs typeface="Trebuchet MS" pitchFamily="34" charset="-120"/>
               </a:rPr>
-              <a:t>deeper</a:t>
+              <a:t>deepen</a:t>
             </a:r>
             <a:endParaRPr lang="en-US" sz="1200" dirty="0"/>
           </a:p>
@@ -39627,7 +39089,7 @@
                 <a:ea typeface="Calibri" pitchFamily="34" charset="-122"/>
                 <a:cs typeface="Calibri" pitchFamily="34" charset="-120"/>
               </a:rPr>
-              <a:t>The quality of being very far down or very intense.</a:t>
+              <a:t>The quality of being deep or having great depth.</a:t>
             </a:r>
             <a:endParaRPr lang="en-US" sz="1200" dirty="0"/>
           </a:p>
@@ -39700,7 +39162,7 @@
                 <a:ea typeface="Trebuchet MS" pitchFamily="34" charset="-122"/>
                 <a:cs typeface="Trebuchet MS" pitchFamily="34" charset="-120"/>
               </a:rPr>
-              <a:t>deepest</a:t>
+              <a:t>deeper</a:t>
             </a:r>
             <a:endParaRPr lang="en-US" sz="1200" dirty="0"/>
           </a:p>
@@ -39766,7 +39228,7 @@
                 <a:ea typeface="Calibri" pitchFamily="34" charset="-122"/>
                 <a:cs typeface="Calibri" pitchFamily="34" charset="-120"/>
               </a:rPr>
-              <a:t>So deep that it reaches up to your knees.</a:t>
+              <a:t>Fixed firmly into something, far back from the surface.</a:t>
             </a:r>
             <a:endParaRPr lang="en-US" sz="1200" dirty="0"/>
           </a:p>
@@ -39839,7 +39301,7 @@
                 <a:ea typeface="Trebuchet MS" pitchFamily="34" charset="-122"/>
                 <a:cs typeface="Trebuchet MS" pitchFamily="34" charset="-120"/>
               </a:rPr>
-              <a:t>deeply</a:t>
+              <a:t>deepest</a:t>
             </a:r>
             <a:endParaRPr lang="en-US" sz="1200" dirty="0"/>
           </a:p>
@@ -39905,7 +39367,7 @@
                 <a:ea typeface="Calibri" pitchFamily="34" charset="-122"/>
                 <a:cs typeface="Calibri" pitchFamily="34" charset="-120"/>
               </a:rPr>
-              <a:t>Going further down or further into something than before.</a:t>
+              <a:t>To make something deeper or more intense.</a:t>
             </a:r>
             <a:endParaRPr lang="en-US" sz="1200" dirty="0"/>
           </a:p>
@@ -39978,7 +39440,7 @@
                 <a:ea typeface="Trebuchet MS" pitchFamily="34" charset="-122"/>
                 <a:cs typeface="Trebuchet MS" pitchFamily="34" charset="-120"/>
               </a:rPr>
-              <a:t>deepen</a:t>
+              <a:t>deeply</a:t>
             </a:r>
             <a:endParaRPr lang="en-US" sz="1200" dirty="0"/>
           </a:p>
@@ -40044,7 +39506,7 @@
                 <a:ea typeface="Calibri" pitchFamily="34" charset="-122"/>
                 <a:cs typeface="Calibri" pitchFamily="34" charset="-120"/>
               </a:rPr>
-              <a:t>Found or happening very far down in the ocean.</a:t>
+              <a:t>Relating to the very deep parts of the ocean.</a:t>
             </a:r>
             <a:endParaRPr lang="en-US" sz="1200" dirty="0"/>
           </a:p>
@@ -40183,7 +39645,7 @@
                 <a:ea typeface="Calibri" pitchFamily="34" charset="-122"/>
                 <a:cs typeface="Calibri" pitchFamily="34" charset="-120"/>
               </a:rPr>
-              <a:t>In a very strong or serious way, like feeling deeply sad.</a:t>
+              <a:t>The most far down or most intense of all.</a:t>
             </a:r>
             <a:endParaRPr lang="en-US" sz="1200" dirty="0"/>
           </a:p>
@@ -40322,7 +39784,7 @@
                 <a:ea typeface="Calibri" pitchFamily="34" charset="-122"/>
                 <a:cs typeface="Calibri" pitchFamily="34" charset="-120"/>
               </a:rPr>
-              <a:t>To make something go further down or become more serious.</a:t>
+              <a:t>In a way that goes far down or feels very strong.</a:t>
             </a:r>
             <a:endParaRPr lang="en-US" sz="1200" dirty="0"/>
           </a:p>
@@ -40395,7 +39857,7 @@
                 <a:ea typeface="Trebuchet MS" pitchFamily="34" charset="-122"/>
                 <a:cs typeface="Trebuchet MS" pitchFamily="34" charset="-120"/>
               </a:rPr>
-              <a:t>knee-deep</a:t>
+              <a:t>deep-set</a:t>
             </a:r>
             <a:endParaRPr lang="en-US" sz="1200" dirty="0"/>
           </a:p>
@@ -40461,7 +39923,7 @@
                 <a:ea typeface="Calibri" pitchFamily="34" charset="-122"/>
                 <a:cs typeface="Calibri" pitchFamily="34" charset="-120"/>
               </a:rPr>
-              <a:t>The most far down or most intense of all — nothing goes further.</a:t>
+              <a:t>Further down or more intense than something else.</a:t>
             </a:r>
             <a:endParaRPr lang="en-US" sz="1200" dirty="0"/>
           </a:p>
@@ -40753,7 +40215,7 @@
                 <a:ea typeface="Calibri" pitchFamily="34" charset="-122"/>
                 <a:cs typeface="Calibri" pitchFamily="34" charset="-120"/>
               </a:rPr>
-              <a:t>Word Labs  •  wordlabs.app  •  Root: 'deep' = far down, intense, profound</a:t>
+              <a:t>Word Labs  •  wordlabs.app  •  Root: 'deep' = far down, profound distance</a:t>
             </a:r>
             <a:endParaRPr lang="en-US" sz="800" dirty="0"/>
           </a:p>
@@ -40956,7 +40418,7 @@
                 <a:ea typeface="Calibri" pitchFamily="34" charset="-122"/>
                 <a:cs typeface="Calibri" pitchFamily="34" charset="-120"/>
               </a:rPr>
-              <a:t>The divers explored the deepest part of the ocean, where strange glowing creatures live.</a:t>
+              <a:t>The divers explored the deepest part of the ocean where no sunlight reaches.</a:t>
             </a:r>
             <a:endParaRPr lang="en-US" sz="1500" dirty="0"/>
           </a:p>
@@ -41120,7 +40582,7 @@
                 <a:ea typeface="Calibri" pitchFamily="34" charset="-122"/>
                 <a:cs typeface="Calibri" pitchFamily="34" charset="-120"/>
               </a:rPr>
-              <a:t>After the heavy rain, the puddle on the oval had deepened so much that students had to walk around it.</a:t>
+              <a:t>After the heavy rain, the river began to deepen and flow much faster than before.</a:t>
             </a:r>
             <a:endParaRPr lang="en-US" sz="1500" dirty="0"/>
           </a:p>
@@ -41284,7 +40746,7 @@
                 <a:ea typeface="Calibri" pitchFamily="34" charset="-122"/>
                 <a:cs typeface="Calibri" pitchFamily="34" charset="-120"/>
               </a:rPr>
-              <a:t>She felt deeply proud of her artwork when it was chosen to hang in the school hall.</a:t>
+              <a:t>She felt deeply grateful for the help her classmates gave her during the science project.</a:t>
             </a:r>
             <a:endParaRPr lang="en-US" sz="1500" dirty="0"/>
           </a:p>

--- a/output/wordlabs-deep-3day.pptx
+++ b/output/wordlabs-deep-3day.pptx
@@ -4240,7 +4240,7 @@
                 <a:ea typeface="Calibri" pitchFamily="34" charset="-122"/>
                 <a:cs typeface="Calibri" pitchFamily="34" charset="-120"/>
               </a:rPr>
-              <a:t>"far down, profound distance"</a:t>
+              <a:t>"going far down or in"</a:t>
             </a:r>
             <a:endParaRPr lang="en-US" sz="2200" dirty="0"/>
           </a:p>
@@ -4279,7 +4279,7 @@
                 <a:ea typeface="Calibri" pitchFamily="34" charset="-122"/>
                 <a:cs typeface="Calibri" pitchFamily="34" charset="-120"/>
               </a:rPr>
-              <a:t>Origin: Latin: deepaz</a:t>
+              <a:t>Origin: Anglo-Saxon (Old English) root</a:t>
             </a:r>
             <a:endParaRPr lang="en-US" sz="1300" dirty="0"/>
           </a:p>
@@ -5288,7 +5288,7 @@
                 <a:ea typeface="Calibri" pitchFamily="34" charset="-122"/>
                 <a:cs typeface="Calibri" pitchFamily="34" charset="-120"/>
               </a:rPr>
-              <a:t>Word Labs  •  wordlabs.app  •  Root: 'deep' = far down, profound distance</a:t>
+              <a:t>Word Labs  •  wordlabs.app  •  Root: 'deep' = going far down or in</a:t>
             </a:r>
             <a:endParaRPr lang="en-US" sz="800" dirty="0"/>
           </a:p>
@@ -5622,7 +5622,7 @@
                 <a:ea typeface="Trebuchet MS" pitchFamily="34" charset="-122"/>
                 <a:cs typeface="Trebuchet MS" pitchFamily="34" charset="-120"/>
               </a:rPr>
-              <a:t>1</a:t>
+              <a:t>0</a:t>
             </a:r>
             <a:pPr algn="ctr" indent="0" marL="0">
               <a:buNone/>
@@ -5928,7 +5928,7 @@
                 <a:ea typeface="Calibri" pitchFamily="34" charset="-122"/>
                 <a:cs typeface="Calibri" pitchFamily="34" charset="-120"/>
               </a:rPr>
-              <a:t>Word Labs  •  wordlabs.app  •  Root: 'deep' = far down, profound distance</a:t>
+              <a:t>Word Labs  •  wordlabs.app  •  Root: 'deep' = going far down or in</a:t>
             </a:r>
             <a:endParaRPr lang="en-US" sz="800" dirty="0"/>
           </a:p>
@@ -6040,7 +6040,7 @@
                 <a:ea typeface="Calibri" pitchFamily="34" charset="-122"/>
                 <a:cs typeface="Calibri" pitchFamily="34" charset="-120"/>
               </a:rPr>
-              <a:t>The scientist studied the </a:t>
+              <a:t>She breathed </a:t>
             </a:r>
             <a:pPr algn="l" indent="0" marL="0">
               <a:buNone/>
@@ -6057,7 +6057,7 @@
                 <a:ea typeface="Calibri" pitchFamily="34" charset="-122"/>
                 <a:cs typeface="Calibri" pitchFamily="34" charset="-120"/>
               </a:rPr>
-              <a:t>deepest</a:t>
+              <a:t>deeply</a:t>
             </a:r>
             <a:pPr algn="l" indent="0" marL="0">
               <a:buNone/>
@@ -6071,7 +6071,7 @@
                 <a:ea typeface="Calibri" pitchFamily="34" charset="-122"/>
                 <a:cs typeface="Calibri" pitchFamily="34" charset="-120"/>
               </a:rPr>
-              <a:t> trench carefully, and her findings helped </a:t>
+              <a:t> before starting the race. This is the </a:t>
             </a:r>
             <a:pPr algn="l" indent="0" marL="0">
               <a:buNone/>
@@ -6088,7 +6088,7 @@
                 <a:ea typeface="Calibri" pitchFamily="34" charset="-122"/>
                 <a:cs typeface="Calibri" pitchFamily="34" charset="-120"/>
               </a:rPr>
-              <a:t>deepen</a:t>
+              <a:t>deepest</a:t>
             </a:r>
             <a:pPr algn="l" indent="0" marL="0">
               <a:buNone/>
@@ -6102,7 +6102,7 @@
                 <a:ea typeface="Calibri" pitchFamily="34" charset="-122"/>
                 <a:cs typeface="Calibri" pitchFamily="34" charset="-120"/>
               </a:rPr>
-              <a:t> our understanding of the ocean.</a:t>
+              <a:t> part of the swimming pool.</a:t>
             </a:r>
             <a:endParaRPr lang="en-US" sz="1800" dirty="0"/>
           </a:p>
@@ -6257,7 +6257,7 @@
                 <a:ea typeface="Trebuchet MS" pitchFamily="34" charset="-122"/>
                 <a:cs typeface="Trebuchet MS" pitchFamily="34" charset="-120"/>
               </a:rPr>
-              <a:t>deepest</a:t>
+              <a:t>deeply</a:t>
             </a:r>
             <a:endParaRPr lang="en-US" sz="1400" dirty="0"/>
           </a:p>
@@ -6385,7 +6385,7 @@
                 <a:ea typeface="Trebuchet MS" pitchFamily="34" charset="-122"/>
                 <a:cs typeface="Trebuchet MS" pitchFamily="34" charset="-120"/>
               </a:rPr>
-              <a:t>deepen</a:t>
+              <a:t>deepest</a:t>
             </a:r>
             <a:endParaRPr lang="en-US" sz="1400" dirty="0"/>
           </a:p>
@@ -6716,7 +6716,7 @@
                 <a:ea typeface="Calibri" pitchFamily="34" charset="-122"/>
                 <a:cs typeface="Calibri" pitchFamily="34" charset="-120"/>
               </a:rPr>
-              <a:t>Word Labs  •  wordlabs.app  •  Root: 'deep' = far down, profound distance</a:t>
+              <a:t>Word Labs  •  wordlabs.app  •  Root: 'deep' = going far down or in</a:t>
             </a:r>
             <a:endParaRPr lang="en-US" sz="800" dirty="0"/>
           </a:p>
@@ -6855,7 +6855,7 @@
                 <a:ea typeface="Trebuchet MS" pitchFamily="34" charset="-122"/>
                 <a:cs typeface="Trebuchet MS" pitchFamily="34" charset="-120"/>
               </a:rPr>
-              <a:t>deepest</a:t>
+              <a:t>deeply</a:t>
             </a:r>
             <a:endParaRPr lang="en-US" sz="2800" dirty="0"/>
           </a:p>
@@ -7543,7 +7543,7 @@
                 <a:ea typeface="Calibri" pitchFamily="34" charset="-122"/>
                 <a:cs typeface="Calibri" pitchFamily="34" charset="-120"/>
               </a:rPr>
-              <a:t>Word Labs  •  wordlabs.app  •  Root: 'deep' = far down, profound distance</a:t>
+              <a:t>Word Labs  •  wordlabs.app  •  Root: 'deep' = going far down or in</a:t>
             </a:r>
             <a:endParaRPr lang="en-US" sz="800" dirty="0"/>
           </a:p>
@@ -7682,7 +7682,7 @@
                 <a:ea typeface="Trebuchet MS" pitchFamily="34" charset="-122"/>
                 <a:cs typeface="Trebuchet MS" pitchFamily="34" charset="-120"/>
               </a:rPr>
-              <a:t>deepest</a:t>
+              <a:t>deeply</a:t>
             </a:r>
             <a:endParaRPr lang="en-US" sz="2800" dirty="0"/>
           </a:p>
@@ -7860,7 +7860,7 @@
                 <a:ea typeface="Calibri" pitchFamily="34" charset="-122"/>
                 <a:cs typeface="Calibri" pitchFamily="34" charset="-120"/>
               </a:rPr>
-              <a:t>far down, profound</a:t>
+              <a:t>going far down or in</a:t>
             </a:r>
             <a:endParaRPr lang="en-US" sz="850" dirty="0"/>
           </a:p>
@@ -7933,7 +7933,7 @@
                 <a:ea typeface="Trebuchet MS" pitchFamily="34" charset="-122"/>
                 <a:cs typeface="Trebuchet MS" pitchFamily="34" charset="-120"/>
               </a:rPr>
-              <a:t>est</a:t>
+              <a:t>ly</a:t>
             </a:r>
             <a:endParaRPr lang="en-US" sz="1300" dirty="0"/>
           </a:p>
@@ -7972,7 +7972,7 @@
                 <a:ea typeface="Calibri" pitchFamily="34" charset="-122"/>
                 <a:cs typeface="Calibri" pitchFamily="34" charset="-120"/>
               </a:rPr>
-              <a:t>the most</a:t>
+              <a:t>in a way</a:t>
             </a:r>
             <a:endParaRPr lang="en-US" sz="850" dirty="0"/>
           </a:p>
@@ -8528,7 +8528,7 @@
                 <a:ea typeface="Calibri" pitchFamily="34" charset="-122"/>
                 <a:cs typeface="Calibri" pitchFamily="34" charset="-120"/>
               </a:rPr>
-              <a:t>Word Labs  •  wordlabs.app  •  Root: 'deep' = far down, profound distance</a:t>
+              <a:t>Word Labs  •  wordlabs.app  •  Root: 'deep' = going far down or in</a:t>
             </a:r>
             <a:endParaRPr lang="en-US" sz="800" dirty="0"/>
           </a:p>
@@ -8667,7 +8667,7 @@
                 <a:ea typeface="Trebuchet MS" pitchFamily="34" charset="-122"/>
                 <a:cs typeface="Trebuchet MS" pitchFamily="34" charset="-120"/>
               </a:rPr>
-              <a:t>deepest</a:t>
+              <a:t>deeply</a:t>
             </a:r>
             <a:endParaRPr lang="en-US" sz="2800" dirty="0"/>
           </a:p>
@@ -8845,7 +8845,7 @@
                 <a:ea typeface="Calibri" pitchFamily="34" charset="-122"/>
                 <a:cs typeface="Calibri" pitchFamily="34" charset="-120"/>
               </a:rPr>
-              <a:t>far down, profound</a:t>
+              <a:t>going far down or in</a:t>
             </a:r>
             <a:endParaRPr lang="en-US" sz="850" dirty="0"/>
           </a:p>
@@ -8918,7 +8918,7 @@
                 <a:ea typeface="Trebuchet MS" pitchFamily="34" charset="-122"/>
                 <a:cs typeface="Trebuchet MS" pitchFamily="34" charset="-120"/>
               </a:rPr>
-              <a:t>est</a:t>
+              <a:t>ly</a:t>
             </a:r>
             <a:endParaRPr lang="en-US" sz="1300" dirty="0"/>
           </a:p>
@@ -8957,7 +8957,7 @@
                 <a:ea typeface="Calibri" pitchFamily="34" charset="-122"/>
                 <a:cs typeface="Calibri" pitchFamily="34" charset="-120"/>
               </a:rPr>
-              <a:t>the most</a:t>
+              <a:t>in a way</a:t>
             </a:r>
             <a:endParaRPr lang="en-US" sz="850" dirty="0"/>
           </a:p>
@@ -9221,7 +9221,7 @@
                 <a:ea typeface="Trebuchet MS" pitchFamily="34" charset="-122"/>
                 <a:cs typeface="Trebuchet MS" pitchFamily="34" charset="-120"/>
               </a:rPr>
-              <a:t>est</a:t>
+              <a:t>ly</a:t>
             </a:r>
             <a:endParaRPr lang="en-US" sz="1400" dirty="0"/>
           </a:p>
@@ -9645,7 +9645,7 @@
                 <a:ea typeface="Calibri" pitchFamily="34" charset="-122"/>
                 <a:cs typeface="Calibri" pitchFamily="34" charset="-120"/>
               </a:rPr>
-              <a:t>Word Labs  •  wordlabs.app  •  Root: 'deep' = far down, profound distance</a:t>
+              <a:t>Word Labs  •  wordlabs.app  •  Root: 'deep' = going far down or in</a:t>
             </a:r>
             <a:endParaRPr lang="en-US" sz="800" dirty="0"/>
           </a:p>
@@ -9784,7 +9784,7 @@
                 <a:ea typeface="Trebuchet MS" pitchFamily="34" charset="-122"/>
                 <a:cs typeface="Trebuchet MS" pitchFamily="34" charset="-120"/>
               </a:rPr>
-              <a:t>deepest</a:t>
+              <a:t>deeply</a:t>
             </a:r>
             <a:endParaRPr lang="en-US" sz="2800" dirty="0"/>
           </a:p>
@@ -9962,7 +9962,7 @@
                 <a:ea typeface="Calibri" pitchFamily="34" charset="-122"/>
                 <a:cs typeface="Calibri" pitchFamily="34" charset="-120"/>
               </a:rPr>
-              <a:t>far down, profound</a:t>
+              <a:t>going far down or in</a:t>
             </a:r>
             <a:endParaRPr lang="en-US" sz="850" dirty="0"/>
           </a:p>
@@ -10035,7 +10035,7 @@
                 <a:ea typeface="Trebuchet MS" pitchFamily="34" charset="-122"/>
                 <a:cs typeface="Trebuchet MS" pitchFamily="34" charset="-120"/>
               </a:rPr>
-              <a:t>est</a:t>
+              <a:t>ly</a:t>
             </a:r>
             <a:endParaRPr lang="en-US" sz="1300" dirty="0"/>
           </a:p>
@@ -10074,7 +10074,7 @@
                 <a:ea typeface="Calibri" pitchFamily="34" charset="-122"/>
                 <a:cs typeface="Calibri" pitchFamily="34" charset="-120"/>
               </a:rPr>
-              <a:t>the most</a:t>
+              <a:t>in a way</a:t>
             </a:r>
             <a:endParaRPr lang="en-US" sz="850" dirty="0"/>
           </a:p>
@@ -10338,7 +10338,7 @@
                 <a:ea typeface="Trebuchet MS" pitchFamily="34" charset="-122"/>
                 <a:cs typeface="Trebuchet MS" pitchFamily="34" charset="-120"/>
               </a:rPr>
-              <a:t>est</a:t>
+              <a:t>ly</a:t>
             </a:r>
             <a:endParaRPr lang="en-US" sz="1400" dirty="0"/>
           </a:p>
@@ -10445,7 +10445,7 @@
         </p:nvSpPr>
         <p:spPr>
           <a:xfrm>
-            <a:off x="2254649" y="4169664"/>
+            <a:off x="2427732" y="4169664"/>
             <a:ext cx="685800" cy="475488"/>
           </a:xfrm>
           <a:prstGeom prst="rect">
@@ -10472,7 +10472,7 @@
         </p:nvSpPr>
         <p:spPr>
           <a:xfrm>
-            <a:off x="2254649" y="4169664"/>
+            <a:off x="2427732" y="4169664"/>
             <a:ext cx="685800" cy="475488"/>
           </a:xfrm>
           <a:prstGeom prst="rect">
@@ -10511,7 +10511,7 @@
         </p:nvSpPr>
         <p:spPr>
           <a:xfrm>
-            <a:off x="3293146" y="4169664"/>
+            <a:off x="3639312" y="4169664"/>
             <a:ext cx="685800" cy="475488"/>
           </a:xfrm>
           <a:prstGeom prst="rect">
@@ -10538,7 +10538,7 @@
         </p:nvSpPr>
         <p:spPr>
           <a:xfrm>
-            <a:off x="3293146" y="4169664"/>
+            <a:off x="3639312" y="4169664"/>
             <a:ext cx="685800" cy="475488"/>
           </a:xfrm>
           <a:prstGeom prst="rect">
@@ -10577,7 +10577,7 @@
         </p:nvSpPr>
         <p:spPr>
           <a:xfrm>
-            <a:off x="4331643" y="4169664"/>
+            <a:off x="4850892" y="4169664"/>
             <a:ext cx="685800" cy="475488"/>
           </a:xfrm>
           <a:prstGeom prst="rect">
@@ -10604,7 +10604,7 @@
         </p:nvSpPr>
         <p:spPr>
           <a:xfrm>
-            <a:off x="4331643" y="4169664"/>
+            <a:off x="4850892" y="4169664"/>
             <a:ext cx="685800" cy="475488"/>
           </a:xfrm>
           <a:prstGeom prst="rect">
@@ -10643,7 +10643,7 @@
         </p:nvSpPr>
         <p:spPr>
           <a:xfrm>
-            <a:off x="5370141" y="4169664"/>
+            <a:off x="6062472" y="4169664"/>
             <a:ext cx="685800" cy="475488"/>
           </a:xfrm>
           <a:prstGeom prst="rect">
@@ -10670,7 +10670,7 @@
         </p:nvSpPr>
         <p:spPr>
           <a:xfrm>
-            <a:off x="5370141" y="4169664"/>
+            <a:off x="6062472" y="4169664"/>
             <a:ext cx="685800" cy="475488"/>
           </a:xfrm>
           <a:prstGeom prst="rect">
@@ -10695,7 +10695,7 @@
                 <a:ea typeface="Trebuchet MS" pitchFamily="34" charset="-122"/>
                 <a:cs typeface="Trebuchet MS" pitchFamily="34" charset="-120"/>
               </a:rPr>
-              <a:t>e</a:t>
+              <a:t>l</a:t>
             </a:r>
             <a:endParaRPr lang="en-US" sz="900" dirty="0"/>
           </a:p>
@@ -10709,7 +10709,7 @@
         </p:nvSpPr>
         <p:spPr>
           <a:xfrm>
-            <a:off x="6408638" y="4169664"/>
+            <a:off x="7274052" y="4169664"/>
             <a:ext cx="685800" cy="475488"/>
           </a:xfrm>
           <a:prstGeom prst="rect">
@@ -10736,7 +10736,7 @@
         </p:nvSpPr>
         <p:spPr>
           <a:xfrm>
-            <a:off x="6408638" y="4169664"/>
+            <a:off x="7274052" y="4169664"/>
             <a:ext cx="685800" cy="475488"/>
           </a:xfrm>
           <a:prstGeom prst="rect">
@@ -10761,73 +10761,7 @@
                 <a:ea typeface="Trebuchet MS" pitchFamily="34" charset="-122"/>
                 <a:cs typeface="Trebuchet MS" pitchFamily="34" charset="-120"/>
               </a:rPr>
-              <a:t>s</a:t>
-            </a:r>
-            <a:endParaRPr lang="en-US" sz="900" dirty="0"/>
-          </a:p>
-        </p:txBody>
-      </p:sp>
-      <p:sp>
-        <p:nvSpPr>
-          <p:cNvPr id="43" name="Shape 41"/>
-          <p:cNvSpPr/>
-          <p:nvPr/>
-        </p:nvSpPr>
-        <p:spPr>
-          <a:xfrm>
-            <a:off x="7447135" y="4169664"/>
-            <a:ext cx="685800" cy="475488"/>
-          </a:xfrm>
-          <a:prstGeom prst="rect">
-            <a:avLst>
-              <a:gd name="adj" fmla="val 7692"/>
-            </a:avLst>
-          </a:prstGeom>
-          <a:solidFill>
-            <a:srgbClr val="FFFFFF"/>
-          </a:solidFill>
-          <a:ln w="12700">
-            <a:solidFill>
-              <a:srgbClr val="DB2777"/>
-            </a:solidFill>
-            <a:prstDash val="solid"/>
-          </a:ln>
-        </p:spPr>
-      </p:sp>
-      <p:sp>
-        <p:nvSpPr>
-          <p:cNvPr id="44" name="Text 42"/>
-          <p:cNvSpPr/>
-          <p:nvPr/>
-        </p:nvSpPr>
-        <p:spPr>
-          <a:xfrm>
-            <a:off x="7447135" y="4169664"/>
-            <a:ext cx="685800" cy="475488"/>
-          </a:xfrm>
-          <a:prstGeom prst="rect">
-            <a:avLst/>
-          </a:prstGeom>
-          <a:noFill/>
-          <a:ln/>
-        </p:spPr>
-        <p:txBody>
-          <a:bodyPr wrap="square" lIns="0" tIns="0" rIns="0" bIns="0" rtlCol="0" anchor="ctr"/>
-          <a:lstStyle/>
-          <a:p>
-            <a:pPr algn="ctr" indent="0" marL="0">
-              <a:buNone/>
-            </a:pPr>
-            <a:r>
-              <a:rPr lang="en-US" sz="900" b="1" dirty="0">
-                <a:solidFill>
-                  <a:srgbClr val="9D174D"/>
-                </a:solidFill>
-                <a:latin typeface="Trebuchet MS" pitchFamily="34" charset="0"/>
-                <a:ea typeface="Trebuchet MS" pitchFamily="34" charset="-122"/>
-                <a:cs typeface="Trebuchet MS" pitchFamily="34" charset="-120"/>
-              </a:rPr>
-              <a:t>t</a:t>
+              <a:t>y</a:t>
             </a:r>
             <a:endParaRPr lang="en-US" sz="900" dirty="0"/>
           </a:p>
@@ -11119,7 +11053,7 @@
                 <a:ea typeface="Calibri" pitchFamily="34" charset="-122"/>
                 <a:cs typeface="Calibri" pitchFamily="34" charset="-120"/>
               </a:rPr>
-              <a:t>Word Labs  •  wordlabs.app  •  Root: 'deep' = far down, profound distance</a:t>
+              <a:t>Word Labs  •  wordlabs.app  •  Root: 'deep' = going far down or in</a:t>
             </a:r>
             <a:endParaRPr lang="en-US" sz="800" dirty="0"/>
           </a:p>
@@ -11258,7 +11192,7 @@
                 <a:ea typeface="Trebuchet MS" pitchFamily="34" charset="-122"/>
                 <a:cs typeface="Trebuchet MS" pitchFamily="34" charset="-120"/>
               </a:rPr>
-              <a:t>deepen</a:t>
+              <a:t>deepest</a:t>
             </a:r>
             <a:endParaRPr lang="en-US" sz="2800" dirty="0"/>
           </a:p>
@@ -11946,7 +11880,7 @@
                 <a:ea typeface="Calibri" pitchFamily="34" charset="-122"/>
                 <a:cs typeface="Calibri" pitchFamily="34" charset="-120"/>
               </a:rPr>
-              <a:t>Word Labs  •  wordlabs.app  •  Root: 'deep' = far down, profound distance</a:t>
+              <a:t>Word Labs  •  wordlabs.app  •  Root: 'deep' = going far down or in</a:t>
             </a:r>
             <a:endParaRPr lang="en-US" sz="800" dirty="0"/>
           </a:p>
@@ -12085,7 +12019,7 @@
                 <a:ea typeface="Trebuchet MS" pitchFamily="34" charset="-122"/>
                 <a:cs typeface="Trebuchet MS" pitchFamily="34" charset="-120"/>
               </a:rPr>
-              <a:t>deepen</a:t>
+              <a:t>deepest</a:t>
             </a:r>
             <a:endParaRPr lang="en-US" sz="2800" dirty="0"/>
           </a:p>
@@ -12263,7 +12197,7 @@
                 <a:ea typeface="Calibri" pitchFamily="34" charset="-122"/>
                 <a:cs typeface="Calibri" pitchFamily="34" charset="-120"/>
               </a:rPr>
-              <a:t>far down, profound</a:t>
+              <a:t>going far down or in</a:t>
             </a:r>
             <a:endParaRPr lang="en-US" sz="850" dirty="0"/>
           </a:p>
@@ -12336,7 +12270,7 @@
                 <a:ea typeface="Trebuchet MS" pitchFamily="34" charset="-122"/>
                 <a:cs typeface="Trebuchet MS" pitchFamily="34" charset="-120"/>
               </a:rPr>
-              <a:t>en</a:t>
+              <a:t>est</a:t>
             </a:r>
             <a:endParaRPr lang="en-US" sz="1300" dirty="0"/>
           </a:p>
@@ -12375,7 +12309,7 @@
                 <a:ea typeface="Calibri" pitchFamily="34" charset="-122"/>
                 <a:cs typeface="Calibri" pitchFamily="34" charset="-120"/>
               </a:rPr>
-              <a:t>to make or become</a:t>
+              <a:t>most</a:t>
             </a:r>
             <a:endParaRPr lang="en-US" sz="850" dirty="0"/>
           </a:p>
@@ -12931,7 +12865,7 @@
                 <a:ea typeface="Calibri" pitchFamily="34" charset="-122"/>
                 <a:cs typeface="Calibri" pitchFamily="34" charset="-120"/>
               </a:rPr>
-              <a:t>Word Labs  •  wordlabs.app  •  Root: 'deep' = far down, profound distance</a:t>
+              <a:t>Word Labs  •  wordlabs.app  •  Root: 'deep' = going far down or in</a:t>
             </a:r>
             <a:endParaRPr lang="en-US" sz="800" dirty="0"/>
           </a:p>
@@ -13070,7 +13004,7 @@
                 <a:ea typeface="Trebuchet MS" pitchFamily="34" charset="-122"/>
                 <a:cs typeface="Trebuchet MS" pitchFamily="34" charset="-120"/>
               </a:rPr>
-              <a:t>deepen</a:t>
+              <a:t>deepest</a:t>
             </a:r>
             <a:endParaRPr lang="en-US" sz="2800" dirty="0"/>
           </a:p>
@@ -13248,7 +13182,7 @@
                 <a:ea typeface="Calibri" pitchFamily="34" charset="-122"/>
                 <a:cs typeface="Calibri" pitchFamily="34" charset="-120"/>
               </a:rPr>
-              <a:t>far down, profound</a:t>
+              <a:t>going far down or in</a:t>
             </a:r>
             <a:endParaRPr lang="en-US" sz="850" dirty="0"/>
           </a:p>
@@ -13321,7 +13255,7 @@
                 <a:ea typeface="Trebuchet MS" pitchFamily="34" charset="-122"/>
                 <a:cs typeface="Trebuchet MS" pitchFamily="34" charset="-120"/>
               </a:rPr>
-              <a:t>en</a:t>
+              <a:t>est</a:t>
             </a:r>
             <a:endParaRPr lang="en-US" sz="1300" dirty="0"/>
           </a:p>
@@ -13360,7 +13294,7 @@
                 <a:ea typeface="Calibri" pitchFamily="34" charset="-122"/>
                 <a:cs typeface="Calibri" pitchFamily="34" charset="-120"/>
               </a:rPr>
-              <a:t>to make or become</a:t>
+              <a:t>most</a:t>
             </a:r>
             <a:endParaRPr lang="en-US" sz="850" dirty="0"/>
           </a:p>
@@ -13624,7 +13558,7 @@
                 <a:ea typeface="Trebuchet MS" pitchFamily="34" charset="-122"/>
                 <a:cs typeface="Trebuchet MS" pitchFamily="34" charset="-120"/>
               </a:rPr>
-              <a:t>en</a:t>
+              <a:t>est</a:t>
             </a:r>
             <a:endParaRPr lang="en-US" sz="1400" dirty="0"/>
           </a:p>
@@ -13957,7 +13891,7 @@
                 <a:ea typeface="Calibri" pitchFamily="34" charset="-122"/>
                 <a:cs typeface="Calibri" pitchFamily="34" charset="-120"/>
               </a:rPr>
-              <a:t>Root 'deep' — far down, profound distance</a:t>
+              <a:t>Root 'deep' — going far down or in</a:t>
             </a:r>
             <a:endParaRPr lang="en-US" sz="1600" dirty="0"/>
           </a:p>
@@ -14313,7 +14247,7 @@
                 <a:ea typeface="Calibri" pitchFamily="34" charset="-122"/>
                 <a:cs typeface="Calibri" pitchFamily="34" charset="-120"/>
               </a:rPr>
-              <a:t>Word Labs  •  wordlabs.app  •  Root: 'deep' = far down, profound distance</a:t>
+              <a:t>Word Labs  •  wordlabs.app  •  Root: 'deep' = going far down or in</a:t>
             </a:r>
             <a:endParaRPr lang="en-US" sz="800" dirty="0"/>
           </a:p>
@@ -14452,7 +14386,7 @@
                 <a:ea typeface="Trebuchet MS" pitchFamily="34" charset="-122"/>
                 <a:cs typeface="Trebuchet MS" pitchFamily="34" charset="-120"/>
               </a:rPr>
-              <a:t>deepen</a:t>
+              <a:t>deepest</a:t>
             </a:r>
             <a:endParaRPr lang="en-US" sz="2800" dirty="0"/>
           </a:p>
@@ -14630,7 +14564,7 @@
                 <a:ea typeface="Calibri" pitchFamily="34" charset="-122"/>
                 <a:cs typeface="Calibri" pitchFamily="34" charset="-120"/>
               </a:rPr>
-              <a:t>far down, profound</a:t>
+              <a:t>going far down or in</a:t>
             </a:r>
             <a:endParaRPr lang="en-US" sz="850" dirty="0"/>
           </a:p>
@@ -14703,7 +14637,7 @@
                 <a:ea typeface="Trebuchet MS" pitchFamily="34" charset="-122"/>
                 <a:cs typeface="Trebuchet MS" pitchFamily="34" charset="-120"/>
               </a:rPr>
-              <a:t>en</a:t>
+              <a:t>est</a:t>
             </a:r>
             <a:endParaRPr lang="en-US" sz="1300" dirty="0"/>
           </a:p>
@@ -14742,7 +14676,7 @@
                 <a:ea typeface="Calibri" pitchFamily="34" charset="-122"/>
                 <a:cs typeface="Calibri" pitchFamily="34" charset="-120"/>
               </a:rPr>
-              <a:t>to make or become</a:t>
+              <a:t>most</a:t>
             </a:r>
             <a:endParaRPr lang="en-US" sz="850" dirty="0"/>
           </a:p>
@@ -15006,7 +14940,7 @@
                 <a:ea typeface="Trebuchet MS" pitchFamily="34" charset="-122"/>
                 <a:cs typeface="Trebuchet MS" pitchFamily="34" charset="-120"/>
               </a:rPr>
-              <a:t>en</a:t>
+              <a:t>est</a:t>
             </a:r>
             <a:endParaRPr lang="en-US" sz="1400" dirty="0"/>
           </a:p>
@@ -15113,7 +15047,7 @@
         </p:nvSpPr>
         <p:spPr>
           <a:xfrm>
-            <a:off x="2427732" y="4169664"/>
+            <a:off x="2254649" y="4169664"/>
             <a:ext cx="685800" cy="475488"/>
           </a:xfrm>
           <a:prstGeom prst="rect">
@@ -15140,7 +15074,7 @@
         </p:nvSpPr>
         <p:spPr>
           <a:xfrm>
-            <a:off x="2427732" y="4169664"/>
+            <a:off x="2254649" y="4169664"/>
             <a:ext cx="685800" cy="475488"/>
           </a:xfrm>
           <a:prstGeom prst="rect">
@@ -15179,7 +15113,7 @@
         </p:nvSpPr>
         <p:spPr>
           <a:xfrm>
-            <a:off x="3639312" y="4169664"/>
+            <a:off x="3293146" y="4169664"/>
             <a:ext cx="685800" cy="475488"/>
           </a:xfrm>
           <a:prstGeom prst="rect">
@@ -15206,7 +15140,7 @@
         </p:nvSpPr>
         <p:spPr>
           <a:xfrm>
-            <a:off x="3639312" y="4169664"/>
+            <a:off x="3293146" y="4169664"/>
             <a:ext cx="685800" cy="475488"/>
           </a:xfrm>
           <a:prstGeom prst="rect">
@@ -15245,7 +15179,7 @@
         </p:nvSpPr>
         <p:spPr>
           <a:xfrm>
-            <a:off x="4850892" y="4169664"/>
+            <a:off x="4331643" y="4169664"/>
             <a:ext cx="685800" cy="475488"/>
           </a:xfrm>
           <a:prstGeom prst="rect">
@@ -15272,7 +15206,7 @@
         </p:nvSpPr>
         <p:spPr>
           <a:xfrm>
-            <a:off x="4850892" y="4169664"/>
+            <a:off x="4331643" y="4169664"/>
             <a:ext cx="685800" cy="475488"/>
           </a:xfrm>
           <a:prstGeom prst="rect">
@@ -15311,7 +15245,7 @@
         </p:nvSpPr>
         <p:spPr>
           <a:xfrm>
-            <a:off x="6062472" y="4169664"/>
+            <a:off x="5370141" y="4169664"/>
             <a:ext cx="685800" cy="475488"/>
           </a:xfrm>
           <a:prstGeom prst="rect">
@@ -15338,7 +15272,7 @@
         </p:nvSpPr>
         <p:spPr>
           <a:xfrm>
-            <a:off x="6062472" y="4169664"/>
+            <a:off x="5370141" y="4169664"/>
             <a:ext cx="685800" cy="475488"/>
           </a:xfrm>
           <a:prstGeom prst="rect">
@@ -15377,7 +15311,7 @@
         </p:nvSpPr>
         <p:spPr>
           <a:xfrm>
-            <a:off x="7274052" y="4169664"/>
+            <a:off x="6408638" y="4169664"/>
             <a:ext cx="685800" cy="475488"/>
           </a:xfrm>
           <a:prstGeom prst="rect">
@@ -15404,7 +15338,7 @@
         </p:nvSpPr>
         <p:spPr>
           <a:xfrm>
-            <a:off x="7274052" y="4169664"/>
+            <a:off x="6408638" y="4169664"/>
             <a:ext cx="685800" cy="475488"/>
           </a:xfrm>
           <a:prstGeom prst="rect">
@@ -15429,7 +15363,73 @@
                 <a:ea typeface="Trebuchet MS" pitchFamily="34" charset="-122"/>
                 <a:cs typeface="Trebuchet MS" pitchFamily="34" charset="-120"/>
               </a:rPr>
-              <a:t>n</a:t>
+              <a:t>s</a:t>
+            </a:r>
+            <a:endParaRPr lang="en-US" sz="900" dirty="0"/>
+          </a:p>
+        </p:txBody>
+      </p:sp>
+      <p:sp>
+        <p:nvSpPr>
+          <p:cNvPr id="43" name="Shape 41"/>
+          <p:cNvSpPr/>
+          <p:nvPr/>
+        </p:nvSpPr>
+        <p:spPr>
+          <a:xfrm>
+            <a:off x="7447135" y="4169664"/>
+            <a:ext cx="685800" cy="475488"/>
+          </a:xfrm>
+          <a:prstGeom prst="rect">
+            <a:avLst>
+              <a:gd name="adj" fmla="val 7692"/>
+            </a:avLst>
+          </a:prstGeom>
+          <a:solidFill>
+            <a:srgbClr val="FFFFFF"/>
+          </a:solidFill>
+          <a:ln w="12700">
+            <a:solidFill>
+              <a:srgbClr val="DB2777"/>
+            </a:solidFill>
+            <a:prstDash val="solid"/>
+          </a:ln>
+        </p:spPr>
+      </p:sp>
+      <p:sp>
+        <p:nvSpPr>
+          <p:cNvPr id="44" name="Text 42"/>
+          <p:cNvSpPr/>
+          <p:nvPr/>
+        </p:nvSpPr>
+        <p:spPr>
+          <a:xfrm>
+            <a:off x="7447135" y="4169664"/>
+            <a:ext cx="685800" cy="475488"/>
+          </a:xfrm>
+          <a:prstGeom prst="rect">
+            <a:avLst/>
+          </a:prstGeom>
+          <a:noFill/>
+          <a:ln/>
+        </p:spPr>
+        <p:txBody>
+          <a:bodyPr wrap="square" lIns="0" tIns="0" rIns="0" bIns="0" rtlCol="0" anchor="ctr"/>
+          <a:lstStyle/>
+          <a:p>
+            <a:pPr algn="ctr" indent="0" marL="0">
+              <a:buNone/>
+            </a:pPr>
+            <a:r>
+              <a:rPr lang="en-US" sz="900" b="1" dirty="0">
+                <a:solidFill>
+                  <a:srgbClr val="9D174D"/>
+                </a:solidFill>
+                <a:latin typeface="Trebuchet MS" pitchFamily="34" charset="0"/>
+                <a:ea typeface="Trebuchet MS" pitchFamily="34" charset="-122"/>
+                <a:cs typeface="Trebuchet MS" pitchFamily="34" charset="-120"/>
+              </a:rPr>
+              <a:t>t</a:t>
             </a:r>
             <a:endParaRPr lang="en-US" sz="900" dirty="0"/>
           </a:p>
@@ -16003,7 +16003,7 @@
                 <a:ea typeface="Calibri" pitchFamily="34" charset="-122"/>
                 <a:cs typeface="Calibri" pitchFamily="34" charset="-120"/>
               </a:rPr>
-              <a:t>Word Labs  •  wordlabs.app  •  Root: 'deep' = far down, profound distance</a:t>
+              <a:t>Word Labs  •  wordlabs.app  •  Root: 'deep' = going far down or in</a:t>
             </a:r>
             <a:endParaRPr lang="en-US" sz="800" dirty="0"/>
           </a:p>
@@ -16337,7 +16337,7 @@
                 <a:ea typeface="Trebuchet MS" pitchFamily="34" charset="-122"/>
                 <a:cs typeface="Trebuchet MS" pitchFamily="34" charset="-120"/>
               </a:rPr>
-              <a:t>2</a:t>
+              <a:t>0</a:t>
             </a:r>
             <a:pPr algn="ctr" indent="0" marL="0">
               <a:buNone/>
@@ -16351,7 +16351,7 @@
                 <a:ea typeface="Trebuchet MS" pitchFamily="34" charset="-122"/>
                 <a:cs typeface="Trebuchet MS" pitchFamily="34" charset="-120"/>
               </a:rPr>
-              <a:t>  punctuation marks</a:t>
+              <a:t>  punctuation mark</a:t>
             </a:r>
             <a:endParaRPr lang="en-US" sz="2800" dirty="0"/>
           </a:p>
@@ -16643,7 +16643,7 @@
                 <a:ea typeface="Calibri" pitchFamily="34" charset="-122"/>
                 <a:cs typeface="Calibri" pitchFamily="34" charset="-120"/>
               </a:rPr>
-              <a:t>Word Labs  •  wordlabs.app  •  Root: 'deep' = far down, profound distance</a:t>
+              <a:t>Word Labs  •  wordlabs.app  •  Root: 'deep' = going far down or in</a:t>
             </a:r>
             <a:endParaRPr lang="en-US" sz="800" dirty="0"/>
           </a:p>
@@ -16755,7 +16755,7 @@
                 <a:ea typeface="Calibri" pitchFamily="34" charset="-122"/>
                 <a:cs typeface="Calibri" pitchFamily="34" charset="-120"/>
               </a:rPr>
-              <a:t>The </a:t>
+              <a:t>The mystery </a:t>
             </a:r>
             <a:pPr algn="l" indent="0" marL="0">
               <a:buNone/>
@@ -16772,7 +16772,7 @@
                 <a:ea typeface="Calibri" pitchFamily="34" charset="-122"/>
                 <a:cs typeface="Calibri" pitchFamily="34" charset="-120"/>
               </a:rPr>
-              <a:t>deeply</a:t>
+              <a:t>deepened</a:t>
             </a:r>
             <a:pPr algn="l" indent="0" marL="0">
               <a:buNone/>
@@ -16786,7 +16786,7 @@
                 <a:ea typeface="Calibri" pitchFamily="34" charset="-122"/>
                 <a:cs typeface="Calibri" pitchFamily="34" charset="-120"/>
               </a:rPr>
-              <a:t> rooted tree stood firmly at the edge of the cliff, its branches reaching over the </a:t>
+              <a:t> as more clues appeared. The </a:t>
             </a:r>
             <a:pPr algn="l" indent="0" marL="0">
               <a:buNone/>
@@ -16803,7 +16803,7 @@
                 <a:ea typeface="Calibri" pitchFamily="34" charset="-122"/>
                 <a:cs typeface="Calibri" pitchFamily="34" charset="-120"/>
               </a:rPr>
-              <a:t>deeper</a:t>
+              <a:t>deepness</a:t>
             </a:r>
             <a:pPr algn="l" indent="0" marL="0">
               <a:buNone/>
@@ -16817,7 +16817,38 @@
                 <a:ea typeface="Calibri" pitchFamily="34" charset="-122"/>
                 <a:cs typeface="Calibri" pitchFamily="34" charset="-120"/>
               </a:rPr>
-              <a:t>, darker water below.</a:t>
+              <a:t> of the cave amazed the explorers. There is a </a:t>
+            </a:r>
+            <a:pPr algn="l" indent="0" marL="0">
+              <a:buNone/>
+            </a:pPr>
+            <a:r>
+              <a:rPr lang="en-US" sz="1800" b="1" dirty="0">
+                <a:solidFill>
+                  <a:srgbClr val="0D9488"/>
+                </a:solidFill>
+                <a:highlight>
+                  <a:srgbClr val="CCFBF1"/>
+                </a:highlight>
+                <a:latin typeface="Calibri" pitchFamily="34" charset="0"/>
+                <a:ea typeface="Calibri" pitchFamily="34" charset="-122"/>
+                <a:cs typeface="Calibri" pitchFamily="34" charset="-120"/>
+              </a:rPr>
+              <a:t>deepening</a:t>
+            </a:r>
+            <a:pPr algn="l" indent="0" marL="0">
+              <a:buNone/>
+            </a:pPr>
+            <a:r>
+              <a:rPr lang="en-US" sz="1800" dirty="0">
+                <a:solidFill>
+                  <a:srgbClr val="0F172A"/>
+                </a:solidFill>
+                <a:latin typeface="Calibri" pitchFamily="34" charset="0"/>
+                <a:ea typeface="Calibri" pitchFamily="34" charset="-122"/>
+                <a:cs typeface="Calibri" pitchFamily="34" charset="-120"/>
+              </a:rPr>
+              <a:t> concern about the weather.</a:t>
             </a:r>
             <a:endParaRPr lang="en-US" sz="1800" dirty="0"/>
           </a:p>
@@ -16972,7 +17003,7 @@
                 <a:ea typeface="Trebuchet MS" pitchFamily="34" charset="-122"/>
                 <a:cs typeface="Trebuchet MS" pitchFamily="34" charset="-120"/>
               </a:rPr>
-              <a:t>deeply</a:t>
+              <a:t>deepened</a:t>
             </a:r>
             <a:endParaRPr lang="en-US" sz="1400" dirty="0"/>
           </a:p>
@@ -17100,7 +17131,7 @@
                 <a:ea typeface="Trebuchet MS" pitchFamily="34" charset="-122"/>
                 <a:cs typeface="Trebuchet MS" pitchFamily="34" charset="-120"/>
               </a:rPr>
-              <a:t>deeper</a:t>
+              <a:t>deepness</a:t>
             </a:r>
             <a:endParaRPr lang="en-US" sz="1400" dirty="0"/>
           </a:p>
@@ -17228,7 +17259,7 @@
                 <a:ea typeface="Trebuchet MS" pitchFamily="34" charset="-122"/>
                 <a:cs typeface="Trebuchet MS" pitchFamily="34" charset="-120"/>
               </a:rPr>
-              <a:t>deepness</a:t>
+              <a:t>deepening</a:t>
             </a:r>
             <a:endParaRPr lang="en-US" sz="1400" dirty="0"/>
           </a:p>
@@ -17559,7 +17590,7 @@
                 <a:ea typeface="Calibri" pitchFamily="34" charset="-122"/>
                 <a:cs typeface="Calibri" pitchFamily="34" charset="-120"/>
               </a:rPr>
-              <a:t>Word Labs  •  wordlabs.app  •  Root: 'deep' = far down, profound distance</a:t>
+              <a:t>Word Labs  •  wordlabs.app  •  Root: 'deep' = going far down or in</a:t>
             </a:r>
             <a:endParaRPr lang="en-US" sz="800" dirty="0"/>
           </a:p>
@@ -17698,7 +17729,7 @@
                 <a:ea typeface="Trebuchet MS" pitchFamily="34" charset="-122"/>
                 <a:cs typeface="Trebuchet MS" pitchFamily="34" charset="-120"/>
               </a:rPr>
-              <a:t>deeply</a:t>
+              <a:t>deepened</a:t>
             </a:r>
             <a:endParaRPr lang="en-US" sz="2800" dirty="0"/>
           </a:p>
@@ -18386,7 +18417,7 @@
                 <a:ea typeface="Calibri" pitchFamily="34" charset="-122"/>
                 <a:cs typeface="Calibri" pitchFamily="34" charset="-120"/>
               </a:rPr>
-              <a:t>Word Labs  •  wordlabs.app  •  Root: 'deep' = far down, profound distance</a:t>
+              <a:t>Word Labs  •  wordlabs.app  •  Root: 'deep' = going far down or in</a:t>
             </a:r>
             <a:endParaRPr lang="en-US" sz="800" dirty="0"/>
           </a:p>
@@ -18525,7 +18556,7 @@
                 <a:ea typeface="Trebuchet MS" pitchFamily="34" charset="-122"/>
                 <a:cs typeface="Trebuchet MS" pitchFamily="34" charset="-120"/>
               </a:rPr>
-              <a:t>deeply</a:t>
+              <a:t>deepened</a:t>
             </a:r>
             <a:endParaRPr lang="en-US" sz="2800" dirty="0"/>
           </a:p>
@@ -18605,7 +18636,7 @@
         </p:nvSpPr>
         <p:spPr>
           <a:xfrm>
-            <a:off x="2938272" y="2258568"/>
+            <a:off x="2221992" y="2258568"/>
             <a:ext cx="1828800" cy="292608"/>
           </a:xfrm>
           <a:prstGeom prst="rect">
@@ -18639,7 +18670,7 @@
         </p:nvSpPr>
         <p:spPr>
           <a:xfrm>
-            <a:off x="2938272" y="2258568"/>
+            <a:off x="2221992" y="2258568"/>
             <a:ext cx="1828800" cy="292608"/>
           </a:xfrm>
           <a:prstGeom prst="rect">
@@ -18678,7 +18709,7 @@
         </p:nvSpPr>
         <p:spPr>
           <a:xfrm>
-            <a:off x="2938272" y="2569464"/>
+            <a:off x="2221992" y="2569464"/>
             <a:ext cx="1828800" cy="201168"/>
           </a:xfrm>
           <a:prstGeom prst="rect">
@@ -18703,7 +18734,7 @@
                 <a:ea typeface="Calibri" pitchFamily="34" charset="-122"/>
                 <a:cs typeface="Calibri" pitchFamily="34" charset="-120"/>
               </a:rPr>
-              <a:t>far down, profound</a:t>
+              <a:t>going far down or in</a:t>
             </a:r>
             <a:endParaRPr lang="en-US" sz="850" dirty="0"/>
           </a:p>
@@ -18717,7 +18748,7 @@
         </p:nvSpPr>
         <p:spPr>
           <a:xfrm>
-            <a:off x="5803392" y="2258568"/>
+            <a:off x="4370832" y="2258568"/>
             <a:ext cx="1828800" cy="292608"/>
           </a:xfrm>
           <a:prstGeom prst="rect">
@@ -18751,7 +18782,7 @@
         </p:nvSpPr>
         <p:spPr>
           <a:xfrm>
-            <a:off x="5803392" y="2258568"/>
+            <a:off x="4370832" y="2258568"/>
             <a:ext cx="1828800" cy="292608"/>
           </a:xfrm>
           <a:prstGeom prst="rect">
@@ -18776,7 +18807,7 @@
                 <a:ea typeface="Trebuchet MS" pitchFamily="34" charset="-122"/>
                 <a:cs typeface="Trebuchet MS" pitchFamily="34" charset="-120"/>
               </a:rPr>
-              <a:t>ly</a:t>
+              <a:t>en</a:t>
             </a:r>
             <a:endParaRPr lang="en-US" sz="1300" dirty="0"/>
           </a:p>
@@ -18790,7 +18821,7 @@
         </p:nvSpPr>
         <p:spPr>
           <a:xfrm>
-            <a:off x="5803392" y="2569464"/>
+            <a:off x="4370832" y="2569464"/>
             <a:ext cx="1828800" cy="201168"/>
           </a:xfrm>
           <a:prstGeom prst="rect">
@@ -18815,7 +18846,7 @@
                 <a:ea typeface="Calibri" pitchFamily="34" charset="-122"/>
                 <a:cs typeface="Calibri" pitchFamily="34" charset="-120"/>
               </a:rPr>
-              <a:t>in a way that is</a:t>
+              <a:t>made of; to make</a:t>
             </a:r>
             <a:endParaRPr lang="en-US" sz="850" dirty="0"/>
           </a:p>
@@ -18824,6 +18855,118 @@
       <p:sp>
         <p:nvSpPr>
           <p:cNvPr id="22" name="Shape 20"/>
+          <p:cNvSpPr/>
+          <p:nvPr/>
+        </p:nvSpPr>
+        <p:spPr>
+          <a:xfrm>
+            <a:off x="6519672" y="2258568"/>
+            <a:ext cx="1828800" cy="292608"/>
+          </a:xfrm>
+          <a:prstGeom prst="rect">
+            <a:avLst>
+              <a:gd name="adj" fmla="val 25000"/>
+            </a:avLst>
+          </a:prstGeom>
+          <a:solidFill>
+            <a:srgbClr val="FCE7F3"/>
+          </a:solidFill>
+          <a:ln w="19050">
+            <a:solidFill>
+              <a:srgbClr val="DB2777"/>
+            </a:solidFill>
+            <a:prstDash val="solid"/>
+          </a:ln>
+          <a:effectLst>
+            <a:outerShdw sx="100000" sy="100000" kx="0" ky="0" algn="bl" rotWithShape="0" blurRad="101600" dist="38100" dir="8100000">
+              <a:srgbClr val="000000">
+                <a:alpha val="12000"/>
+              </a:srgbClr>
+            </a:outerShdw>
+          </a:effectLst>
+        </p:spPr>
+      </p:sp>
+      <p:sp>
+        <p:nvSpPr>
+          <p:cNvPr id="23" name="Text 21"/>
+          <p:cNvSpPr/>
+          <p:nvPr/>
+        </p:nvSpPr>
+        <p:spPr>
+          <a:xfrm>
+            <a:off x="6519672" y="2258568"/>
+            <a:ext cx="1828800" cy="292608"/>
+          </a:xfrm>
+          <a:prstGeom prst="rect">
+            <a:avLst/>
+          </a:prstGeom>
+          <a:noFill/>
+          <a:ln/>
+        </p:spPr>
+        <p:txBody>
+          <a:bodyPr wrap="square" lIns="0" tIns="0" rIns="0" bIns="0" rtlCol="0" anchor="ctr"/>
+          <a:lstStyle/>
+          <a:p>
+            <a:pPr algn="ctr" indent="0" marL="0">
+              <a:buNone/>
+            </a:pPr>
+            <a:r>
+              <a:rPr lang="en-US" sz="1300" b="1" dirty="0">
+                <a:solidFill>
+                  <a:srgbClr val="9D174D"/>
+                </a:solidFill>
+                <a:latin typeface="Trebuchet MS" pitchFamily="34" charset="0"/>
+                <a:ea typeface="Trebuchet MS" pitchFamily="34" charset="-122"/>
+                <a:cs typeface="Trebuchet MS" pitchFamily="34" charset="-120"/>
+              </a:rPr>
+              <a:t>ed</a:t>
+            </a:r>
+            <a:endParaRPr lang="en-US" sz="1300" dirty="0"/>
+          </a:p>
+        </p:txBody>
+      </p:sp>
+      <p:sp>
+        <p:nvSpPr>
+          <p:cNvPr id="24" name="Text 22"/>
+          <p:cNvSpPr/>
+          <p:nvPr/>
+        </p:nvSpPr>
+        <p:spPr>
+          <a:xfrm>
+            <a:off x="6519672" y="2569464"/>
+            <a:ext cx="1828800" cy="201168"/>
+          </a:xfrm>
+          <a:prstGeom prst="rect">
+            <a:avLst/>
+          </a:prstGeom>
+          <a:noFill/>
+          <a:ln/>
+        </p:spPr>
+        <p:txBody>
+          <a:bodyPr wrap="square" lIns="0" tIns="0" rIns="0" bIns="0" rtlCol="0" anchor="t"/>
+          <a:lstStyle/>
+          <a:p>
+            <a:pPr algn="ctr" indent="0" marL="0">
+              <a:buNone/>
+            </a:pPr>
+            <a:r>
+              <a:rPr lang="en-US" sz="850" dirty="0">
+                <a:solidFill>
+                  <a:srgbClr val="475569"/>
+                </a:solidFill>
+                <a:latin typeface="Calibri" pitchFamily="34" charset="0"/>
+                <a:ea typeface="Calibri" pitchFamily="34" charset="-122"/>
+                <a:cs typeface="Calibri" pitchFamily="34" charset="-120"/>
+              </a:rPr>
+              <a:t>past tense</a:t>
+            </a:r>
+            <a:endParaRPr lang="en-US" sz="850" dirty="0"/>
+          </a:p>
+        </p:txBody>
+      </p:sp>
+      <p:sp>
+        <p:nvSpPr>
+          <p:cNvPr id="25" name="Shape 23"/>
           <p:cNvSpPr/>
           <p:nvPr/>
         </p:nvSpPr>
@@ -18850,7 +18993,7 @@
       </p:sp>
       <p:sp>
         <p:nvSpPr>
-          <p:cNvPr id="23" name="Text 21"/>
+          <p:cNvPr id="26" name="Text 24"/>
           <p:cNvSpPr/>
           <p:nvPr/>
         </p:nvSpPr>
@@ -18889,7 +19032,7 @@
       </p:sp>
       <p:sp>
         <p:nvSpPr>
-          <p:cNvPr id="24" name="Shape 22"/>
+          <p:cNvPr id="27" name="Shape 25"/>
           <p:cNvSpPr/>
           <p:nvPr/>
         </p:nvSpPr>
@@ -18916,7 +19059,7 @@
       </p:sp>
       <p:sp>
         <p:nvSpPr>
-          <p:cNvPr id="25" name="Text 23"/>
+          <p:cNvPr id="28" name="Text 26"/>
           <p:cNvSpPr/>
           <p:nvPr/>
         </p:nvSpPr>
@@ -18955,7 +19098,7 @@
       </p:sp>
       <p:sp>
         <p:nvSpPr>
-          <p:cNvPr id="26" name="Shape 24"/>
+          <p:cNvPr id="29" name="Shape 27"/>
           <p:cNvSpPr/>
           <p:nvPr/>
         </p:nvSpPr>
@@ -18982,7 +19125,7 @@
       </p:sp>
       <p:sp>
         <p:nvSpPr>
-          <p:cNvPr id="27" name="Text 25"/>
+          <p:cNvPr id="30" name="Text 28"/>
           <p:cNvSpPr/>
           <p:nvPr/>
         </p:nvSpPr>
@@ -19021,7 +19164,7 @@
       </p:sp>
       <p:sp>
         <p:nvSpPr>
-          <p:cNvPr id="28" name="Shape 26"/>
+          <p:cNvPr id="31" name="Shape 29"/>
           <p:cNvSpPr/>
           <p:nvPr/>
         </p:nvSpPr>
@@ -19048,7 +19191,7 @@
       </p:sp>
       <p:sp>
         <p:nvSpPr>
-          <p:cNvPr id="29" name="Text 27"/>
+          <p:cNvPr id="32" name="Text 30"/>
           <p:cNvSpPr/>
           <p:nvPr/>
         </p:nvSpPr>
@@ -19371,7 +19514,7 @@
                 <a:ea typeface="Calibri" pitchFamily="34" charset="-122"/>
                 <a:cs typeface="Calibri" pitchFamily="34" charset="-120"/>
               </a:rPr>
-              <a:t>Word Labs  •  wordlabs.app  •  Root: 'deep' = far down, profound distance</a:t>
+              <a:t>Word Labs  •  wordlabs.app  •  Root: 'deep' = going far down or in</a:t>
             </a:r>
             <a:endParaRPr lang="en-US" sz="800" dirty="0"/>
           </a:p>
@@ -19510,7 +19653,7 @@
                 <a:ea typeface="Trebuchet MS" pitchFamily="34" charset="-122"/>
                 <a:cs typeface="Trebuchet MS" pitchFamily="34" charset="-120"/>
               </a:rPr>
-              <a:t>deeply</a:t>
+              <a:t>deepened</a:t>
             </a:r>
             <a:endParaRPr lang="en-US" sz="2800" dirty="0"/>
           </a:p>
@@ -19590,7 +19733,7 @@
         </p:nvSpPr>
         <p:spPr>
           <a:xfrm>
-            <a:off x="2938272" y="2258568"/>
+            <a:off x="2221992" y="2258568"/>
             <a:ext cx="1828800" cy="292608"/>
           </a:xfrm>
           <a:prstGeom prst="rect">
@@ -19624,7 +19767,7 @@
         </p:nvSpPr>
         <p:spPr>
           <a:xfrm>
-            <a:off x="2938272" y="2258568"/>
+            <a:off x="2221992" y="2258568"/>
             <a:ext cx="1828800" cy="292608"/>
           </a:xfrm>
           <a:prstGeom prst="rect">
@@ -19663,7 +19806,7 @@
         </p:nvSpPr>
         <p:spPr>
           <a:xfrm>
-            <a:off x="2938272" y="2569464"/>
+            <a:off x="2221992" y="2569464"/>
             <a:ext cx="1828800" cy="201168"/>
           </a:xfrm>
           <a:prstGeom prst="rect">
@@ -19688,7 +19831,7 @@
                 <a:ea typeface="Calibri" pitchFamily="34" charset="-122"/>
                 <a:cs typeface="Calibri" pitchFamily="34" charset="-120"/>
               </a:rPr>
-              <a:t>far down, profound</a:t>
+              <a:t>going far down or in</a:t>
             </a:r>
             <a:endParaRPr lang="en-US" sz="850" dirty="0"/>
           </a:p>
@@ -19702,7 +19845,7 @@
         </p:nvSpPr>
         <p:spPr>
           <a:xfrm>
-            <a:off x="5803392" y="2258568"/>
+            <a:off x="4370832" y="2258568"/>
             <a:ext cx="1828800" cy="292608"/>
           </a:xfrm>
           <a:prstGeom prst="rect">
@@ -19736,7 +19879,7 @@
         </p:nvSpPr>
         <p:spPr>
           <a:xfrm>
-            <a:off x="5803392" y="2258568"/>
+            <a:off x="4370832" y="2258568"/>
             <a:ext cx="1828800" cy="292608"/>
           </a:xfrm>
           <a:prstGeom prst="rect">
@@ -19761,7 +19904,7 @@
                 <a:ea typeface="Trebuchet MS" pitchFamily="34" charset="-122"/>
                 <a:cs typeface="Trebuchet MS" pitchFamily="34" charset="-120"/>
               </a:rPr>
-              <a:t>ly</a:t>
+              <a:t>en</a:t>
             </a:r>
             <a:endParaRPr lang="en-US" sz="1300" dirty="0"/>
           </a:p>
@@ -19775,7 +19918,7 @@
         </p:nvSpPr>
         <p:spPr>
           <a:xfrm>
-            <a:off x="5803392" y="2569464"/>
+            <a:off x="4370832" y="2569464"/>
             <a:ext cx="1828800" cy="201168"/>
           </a:xfrm>
           <a:prstGeom prst="rect">
@@ -19800,7 +19943,7 @@
                 <a:ea typeface="Calibri" pitchFamily="34" charset="-122"/>
                 <a:cs typeface="Calibri" pitchFamily="34" charset="-120"/>
               </a:rPr>
-              <a:t>in a way that is</a:t>
+              <a:t>made of; to make</a:t>
             </a:r>
             <a:endParaRPr lang="en-US" sz="850" dirty="0"/>
           </a:p>
@@ -19809,6 +19952,118 @@
       <p:sp>
         <p:nvSpPr>
           <p:cNvPr id="22" name="Shape 20"/>
+          <p:cNvSpPr/>
+          <p:nvPr/>
+        </p:nvSpPr>
+        <p:spPr>
+          <a:xfrm>
+            <a:off x="6519672" y="2258568"/>
+            <a:ext cx="1828800" cy="292608"/>
+          </a:xfrm>
+          <a:prstGeom prst="rect">
+            <a:avLst>
+              <a:gd name="adj" fmla="val 25000"/>
+            </a:avLst>
+          </a:prstGeom>
+          <a:solidFill>
+            <a:srgbClr val="FCE7F3"/>
+          </a:solidFill>
+          <a:ln w="19050">
+            <a:solidFill>
+              <a:srgbClr val="DB2777"/>
+            </a:solidFill>
+            <a:prstDash val="solid"/>
+          </a:ln>
+          <a:effectLst>
+            <a:outerShdw sx="100000" sy="100000" kx="0" ky="0" algn="bl" rotWithShape="0" blurRad="101600" dist="38100" dir="8100000">
+              <a:srgbClr val="000000">
+                <a:alpha val="12000"/>
+              </a:srgbClr>
+            </a:outerShdw>
+          </a:effectLst>
+        </p:spPr>
+      </p:sp>
+      <p:sp>
+        <p:nvSpPr>
+          <p:cNvPr id="23" name="Text 21"/>
+          <p:cNvSpPr/>
+          <p:nvPr/>
+        </p:nvSpPr>
+        <p:spPr>
+          <a:xfrm>
+            <a:off x="6519672" y="2258568"/>
+            <a:ext cx="1828800" cy="292608"/>
+          </a:xfrm>
+          <a:prstGeom prst="rect">
+            <a:avLst/>
+          </a:prstGeom>
+          <a:noFill/>
+          <a:ln/>
+        </p:spPr>
+        <p:txBody>
+          <a:bodyPr wrap="square" lIns="0" tIns="0" rIns="0" bIns="0" rtlCol="0" anchor="ctr"/>
+          <a:lstStyle/>
+          <a:p>
+            <a:pPr algn="ctr" indent="0" marL="0">
+              <a:buNone/>
+            </a:pPr>
+            <a:r>
+              <a:rPr lang="en-US" sz="1300" b="1" dirty="0">
+                <a:solidFill>
+                  <a:srgbClr val="9D174D"/>
+                </a:solidFill>
+                <a:latin typeface="Trebuchet MS" pitchFamily="34" charset="0"/>
+                <a:ea typeface="Trebuchet MS" pitchFamily="34" charset="-122"/>
+                <a:cs typeface="Trebuchet MS" pitchFamily="34" charset="-120"/>
+              </a:rPr>
+              <a:t>ed</a:t>
+            </a:r>
+            <a:endParaRPr lang="en-US" sz="1300" dirty="0"/>
+          </a:p>
+        </p:txBody>
+      </p:sp>
+      <p:sp>
+        <p:nvSpPr>
+          <p:cNvPr id="24" name="Text 22"/>
+          <p:cNvSpPr/>
+          <p:nvPr/>
+        </p:nvSpPr>
+        <p:spPr>
+          <a:xfrm>
+            <a:off x="6519672" y="2569464"/>
+            <a:ext cx="1828800" cy="201168"/>
+          </a:xfrm>
+          <a:prstGeom prst="rect">
+            <a:avLst/>
+          </a:prstGeom>
+          <a:noFill/>
+          <a:ln/>
+        </p:spPr>
+        <p:txBody>
+          <a:bodyPr wrap="square" lIns="0" tIns="0" rIns="0" bIns="0" rtlCol="0" anchor="t"/>
+          <a:lstStyle/>
+          <a:p>
+            <a:pPr algn="ctr" indent="0" marL="0">
+              <a:buNone/>
+            </a:pPr>
+            <a:r>
+              <a:rPr lang="en-US" sz="850" dirty="0">
+                <a:solidFill>
+                  <a:srgbClr val="475569"/>
+                </a:solidFill>
+                <a:latin typeface="Calibri" pitchFamily="34" charset="0"/>
+                <a:ea typeface="Calibri" pitchFamily="34" charset="-122"/>
+                <a:cs typeface="Calibri" pitchFamily="34" charset="-120"/>
+              </a:rPr>
+              <a:t>past tense</a:t>
+            </a:r>
+            <a:endParaRPr lang="en-US" sz="850" dirty="0"/>
+          </a:p>
+        </p:txBody>
+      </p:sp>
+      <p:sp>
+        <p:nvSpPr>
+          <p:cNvPr id="25" name="Shape 23"/>
           <p:cNvSpPr/>
           <p:nvPr/>
         </p:nvSpPr>
@@ -19835,7 +20090,7 @@
       </p:sp>
       <p:sp>
         <p:nvSpPr>
-          <p:cNvPr id="23" name="Text 21"/>
+          <p:cNvPr id="26" name="Text 24"/>
           <p:cNvSpPr/>
           <p:nvPr/>
         </p:nvSpPr>
@@ -19874,7 +20129,7 @@
       </p:sp>
       <p:sp>
         <p:nvSpPr>
-          <p:cNvPr id="24" name="Shape 22"/>
+          <p:cNvPr id="27" name="Shape 25"/>
           <p:cNvSpPr/>
           <p:nvPr/>
         </p:nvSpPr>
@@ -19901,7 +20156,7 @@
       </p:sp>
       <p:sp>
         <p:nvSpPr>
-          <p:cNvPr id="25" name="Shape 23"/>
+          <p:cNvPr id="28" name="Shape 26"/>
           <p:cNvSpPr/>
           <p:nvPr/>
         </p:nvSpPr>
@@ -19928,7 +20183,7 @@
       </p:sp>
       <p:sp>
         <p:nvSpPr>
-          <p:cNvPr id="26" name="Text 24"/>
+          <p:cNvPr id="29" name="Text 27"/>
           <p:cNvSpPr/>
           <p:nvPr/>
         </p:nvSpPr>
@@ -19967,7 +20222,7 @@
       </p:sp>
       <p:sp>
         <p:nvSpPr>
-          <p:cNvPr id="27" name="Text 25"/>
+          <p:cNvPr id="30" name="Text 28"/>
           <p:cNvSpPr/>
           <p:nvPr/>
         </p:nvSpPr>
@@ -20006,7 +20261,7 @@
       </p:sp>
       <p:sp>
         <p:nvSpPr>
-          <p:cNvPr id="28" name="Shape 26"/>
+          <p:cNvPr id="31" name="Shape 29"/>
           <p:cNvSpPr/>
           <p:nvPr/>
         </p:nvSpPr>
@@ -20033,7 +20288,7 @@
       </p:sp>
       <p:sp>
         <p:nvSpPr>
-          <p:cNvPr id="29" name="Text 27"/>
+          <p:cNvPr id="32" name="Text 30"/>
           <p:cNvSpPr/>
           <p:nvPr/>
         </p:nvSpPr>
@@ -20064,7 +20319,7 @@
                 <a:ea typeface="Trebuchet MS" pitchFamily="34" charset="-122"/>
                 <a:cs typeface="Trebuchet MS" pitchFamily="34" charset="-120"/>
               </a:rPr>
-              <a:t>ly</a:t>
+              <a:t>ened</a:t>
             </a:r>
             <a:endParaRPr lang="en-US" sz="1400" dirty="0"/>
           </a:p>
@@ -20072,7 +20327,7 @@
       </p:sp>
       <p:sp>
         <p:nvSpPr>
-          <p:cNvPr id="30" name="Shape 28"/>
+          <p:cNvPr id="33" name="Shape 31"/>
           <p:cNvSpPr/>
           <p:nvPr/>
         </p:nvSpPr>
@@ -20099,7 +20354,7 @@
       </p:sp>
       <p:sp>
         <p:nvSpPr>
-          <p:cNvPr id="31" name="Text 29"/>
+          <p:cNvPr id="34" name="Text 32"/>
           <p:cNvSpPr/>
           <p:nvPr/>
         </p:nvSpPr>
@@ -20138,7 +20393,7 @@
       </p:sp>
       <p:sp>
         <p:nvSpPr>
-          <p:cNvPr id="32" name="Shape 30"/>
+          <p:cNvPr id="35" name="Shape 33"/>
           <p:cNvSpPr/>
           <p:nvPr/>
         </p:nvSpPr>
@@ -20165,7 +20420,7 @@
       </p:sp>
       <p:sp>
         <p:nvSpPr>
-          <p:cNvPr id="33" name="Text 31"/>
+          <p:cNvPr id="36" name="Text 34"/>
           <p:cNvSpPr/>
           <p:nvPr/>
         </p:nvSpPr>
@@ -20488,7 +20743,7 @@
                 <a:ea typeface="Calibri" pitchFamily="34" charset="-122"/>
                 <a:cs typeface="Calibri" pitchFamily="34" charset="-120"/>
               </a:rPr>
-              <a:t>Word Labs  •  wordlabs.app  •  Root: 'deep' = far down, profound distance</a:t>
+              <a:t>Word Labs  •  wordlabs.app  •  Root: 'deep' = going far down or in</a:t>
             </a:r>
             <a:endParaRPr lang="en-US" sz="800" dirty="0"/>
           </a:p>
@@ -20627,7 +20882,7 @@
                 <a:ea typeface="Trebuchet MS" pitchFamily="34" charset="-122"/>
                 <a:cs typeface="Trebuchet MS" pitchFamily="34" charset="-120"/>
               </a:rPr>
-              <a:t>deeply</a:t>
+              <a:t>deepened</a:t>
             </a:r>
             <a:endParaRPr lang="en-US" sz="2800" dirty="0"/>
           </a:p>
@@ -20707,7 +20962,7 @@
         </p:nvSpPr>
         <p:spPr>
           <a:xfrm>
-            <a:off x="2938272" y="2258568"/>
+            <a:off x="2221992" y="2258568"/>
             <a:ext cx="1828800" cy="292608"/>
           </a:xfrm>
           <a:prstGeom prst="rect">
@@ -20741,7 +20996,7 @@
         </p:nvSpPr>
         <p:spPr>
           <a:xfrm>
-            <a:off x="2938272" y="2258568"/>
+            <a:off x="2221992" y="2258568"/>
             <a:ext cx="1828800" cy="292608"/>
           </a:xfrm>
           <a:prstGeom prst="rect">
@@ -20780,7 +21035,7 @@
         </p:nvSpPr>
         <p:spPr>
           <a:xfrm>
-            <a:off x="2938272" y="2569464"/>
+            <a:off x="2221992" y="2569464"/>
             <a:ext cx="1828800" cy="201168"/>
           </a:xfrm>
           <a:prstGeom prst="rect">
@@ -20805,7 +21060,7 @@
                 <a:ea typeface="Calibri" pitchFamily="34" charset="-122"/>
                 <a:cs typeface="Calibri" pitchFamily="34" charset="-120"/>
               </a:rPr>
-              <a:t>far down, profound</a:t>
+              <a:t>going far down or in</a:t>
             </a:r>
             <a:endParaRPr lang="en-US" sz="850" dirty="0"/>
           </a:p>
@@ -20819,7 +21074,7 @@
         </p:nvSpPr>
         <p:spPr>
           <a:xfrm>
-            <a:off x="5803392" y="2258568"/>
+            <a:off x="4370832" y="2258568"/>
             <a:ext cx="1828800" cy="292608"/>
           </a:xfrm>
           <a:prstGeom prst="rect">
@@ -20853,7 +21108,7 @@
         </p:nvSpPr>
         <p:spPr>
           <a:xfrm>
-            <a:off x="5803392" y="2258568"/>
+            <a:off x="4370832" y="2258568"/>
             <a:ext cx="1828800" cy="292608"/>
           </a:xfrm>
           <a:prstGeom prst="rect">
@@ -20878,7 +21133,7 @@
                 <a:ea typeface="Trebuchet MS" pitchFamily="34" charset="-122"/>
                 <a:cs typeface="Trebuchet MS" pitchFamily="34" charset="-120"/>
               </a:rPr>
-              <a:t>ly</a:t>
+              <a:t>en</a:t>
             </a:r>
             <a:endParaRPr lang="en-US" sz="1300" dirty="0"/>
           </a:p>
@@ -20892,7 +21147,7 @@
         </p:nvSpPr>
         <p:spPr>
           <a:xfrm>
-            <a:off x="5803392" y="2569464"/>
+            <a:off x="4370832" y="2569464"/>
             <a:ext cx="1828800" cy="201168"/>
           </a:xfrm>
           <a:prstGeom prst="rect">
@@ -20917,7 +21172,7 @@
                 <a:ea typeface="Calibri" pitchFamily="34" charset="-122"/>
                 <a:cs typeface="Calibri" pitchFamily="34" charset="-120"/>
               </a:rPr>
-              <a:t>in a way that is</a:t>
+              <a:t>made of; to make</a:t>
             </a:r>
             <a:endParaRPr lang="en-US" sz="850" dirty="0"/>
           </a:p>
@@ -20926,6 +21181,118 @@
       <p:sp>
         <p:nvSpPr>
           <p:cNvPr id="22" name="Shape 20"/>
+          <p:cNvSpPr/>
+          <p:nvPr/>
+        </p:nvSpPr>
+        <p:spPr>
+          <a:xfrm>
+            <a:off x="6519672" y="2258568"/>
+            <a:ext cx="1828800" cy="292608"/>
+          </a:xfrm>
+          <a:prstGeom prst="rect">
+            <a:avLst>
+              <a:gd name="adj" fmla="val 25000"/>
+            </a:avLst>
+          </a:prstGeom>
+          <a:solidFill>
+            <a:srgbClr val="FCE7F3"/>
+          </a:solidFill>
+          <a:ln w="19050">
+            <a:solidFill>
+              <a:srgbClr val="DB2777"/>
+            </a:solidFill>
+            <a:prstDash val="solid"/>
+          </a:ln>
+          <a:effectLst>
+            <a:outerShdw sx="100000" sy="100000" kx="0" ky="0" algn="bl" rotWithShape="0" blurRad="101600" dist="38100" dir="8100000">
+              <a:srgbClr val="000000">
+                <a:alpha val="12000"/>
+              </a:srgbClr>
+            </a:outerShdw>
+          </a:effectLst>
+        </p:spPr>
+      </p:sp>
+      <p:sp>
+        <p:nvSpPr>
+          <p:cNvPr id="23" name="Text 21"/>
+          <p:cNvSpPr/>
+          <p:nvPr/>
+        </p:nvSpPr>
+        <p:spPr>
+          <a:xfrm>
+            <a:off x="6519672" y="2258568"/>
+            <a:ext cx="1828800" cy="292608"/>
+          </a:xfrm>
+          <a:prstGeom prst="rect">
+            <a:avLst/>
+          </a:prstGeom>
+          <a:noFill/>
+          <a:ln/>
+        </p:spPr>
+        <p:txBody>
+          <a:bodyPr wrap="square" lIns="0" tIns="0" rIns="0" bIns="0" rtlCol="0" anchor="ctr"/>
+          <a:lstStyle/>
+          <a:p>
+            <a:pPr algn="ctr" indent="0" marL="0">
+              <a:buNone/>
+            </a:pPr>
+            <a:r>
+              <a:rPr lang="en-US" sz="1300" b="1" dirty="0">
+                <a:solidFill>
+                  <a:srgbClr val="9D174D"/>
+                </a:solidFill>
+                <a:latin typeface="Trebuchet MS" pitchFamily="34" charset="0"/>
+                <a:ea typeface="Trebuchet MS" pitchFamily="34" charset="-122"/>
+                <a:cs typeface="Trebuchet MS" pitchFamily="34" charset="-120"/>
+              </a:rPr>
+              <a:t>ed</a:t>
+            </a:r>
+            <a:endParaRPr lang="en-US" sz="1300" dirty="0"/>
+          </a:p>
+        </p:txBody>
+      </p:sp>
+      <p:sp>
+        <p:nvSpPr>
+          <p:cNvPr id="24" name="Text 22"/>
+          <p:cNvSpPr/>
+          <p:nvPr/>
+        </p:nvSpPr>
+        <p:spPr>
+          <a:xfrm>
+            <a:off x="6519672" y="2569464"/>
+            <a:ext cx="1828800" cy="201168"/>
+          </a:xfrm>
+          <a:prstGeom prst="rect">
+            <a:avLst/>
+          </a:prstGeom>
+          <a:noFill/>
+          <a:ln/>
+        </p:spPr>
+        <p:txBody>
+          <a:bodyPr wrap="square" lIns="0" tIns="0" rIns="0" bIns="0" rtlCol="0" anchor="t"/>
+          <a:lstStyle/>
+          <a:p>
+            <a:pPr algn="ctr" indent="0" marL="0">
+              <a:buNone/>
+            </a:pPr>
+            <a:r>
+              <a:rPr lang="en-US" sz="850" dirty="0">
+                <a:solidFill>
+                  <a:srgbClr val="475569"/>
+                </a:solidFill>
+                <a:latin typeface="Calibri" pitchFamily="34" charset="0"/>
+                <a:ea typeface="Calibri" pitchFamily="34" charset="-122"/>
+                <a:cs typeface="Calibri" pitchFamily="34" charset="-120"/>
+              </a:rPr>
+              <a:t>past tense</a:t>
+            </a:r>
+            <a:endParaRPr lang="en-US" sz="850" dirty="0"/>
+          </a:p>
+        </p:txBody>
+      </p:sp>
+      <p:sp>
+        <p:nvSpPr>
+          <p:cNvPr id="25" name="Shape 23"/>
           <p:cNvSpPr/>
           <p:nvPr/>
         </p:nvSpPr>
@@ -20952,7 +21319,7 @@
       </p:sp>
       <p:sp>
         <p:nvSpPr>
-          <p:cNvPr id="23" name="Text 21"/>
+          <p:cNvPr id="26" name="Text 24"/>
           <p:cNvSpPr/>
           <p:nvPr/>
         </p:nvSpPr>
@@ -20991,7 +21358,7 @@
       </p:sp>
       <p:sp>
         <p:nvSpPr>
-          <p:cNvPr id="24" name="Shape 22"/>
+          <p:cNvPr id="27" name="Shape 25"/>
           <p:cNvSpPr/>
           <p:nvPr/>
         </p:nvSpPr>
@@ -21018,7 +21385,7 @@
       </p:sp>
       <p:sp>
         <p:nvSpPr>
-          <p:cNvPr id="25" name="Shape 23"/>
+          <p:cNvPr id="28" name="Shape 26"/>
           <p:cNvSpPr/>
           <p:nvPr/>
         </p:nvSpPr>
@@ -21045,7 +21412,7 @@
       </p:sp>
       <p:sp>
         <p:nvSpPr>
-          <p:cNvPr id="26" name="Text 24"/>
+          <p:cNvPr id="29" name="Text 27"/>
           <p:cNvSpPr/>
           <p:nvPr/>
         </p:nvSpPr>
@@ -21084,7 +21451,7 @@
       </p:sp>
       <p:sp>
         <p:nvSpPr>
-          <p:cNvPr id="27" name="Text 25"/>
+          <p:cNvPr id="30" name="Text 28"/>
           <p:cNvSpPr/>
           <p:nvPr/>
         </p:nvSpPr>
@@ -21123,7 +21490,7 @@
       </p:sp>
       <p:sp>
         <p:nvSpPr>
-          <p:cNvPr id="28" name="Shape 26"/>
+          <p:cNvPr id="31" name="Shape 29"/>
           <p:cNvSpPr/>
           <p:nvPr/>
         </p:nvSpPr>
@@ -21150,7 +21517,7 @@
       </p:sp>
       <p:sp>
         <p:nvSpPr>
-          <p:cNvPr id="29" name="Text 27"/>
+          <p:cNvPr id="32" name="Text 30"/>
           <p:cNvSpPr/>
           <p:nvPr/>
         </p:nvSpPr>
@@ -21181,7 +21548,7 @@
                 <a:ea typeface="Trebuchet MS" pitchFamily="34" charset="-122"/>
                 <a:cs typeface="Trebuchet MS" pitchFamily="34" charset="-120"/>
               </a:rPr>
-              <a:t>ly</a:t>
+              <a:t>ened</a:t>
             </a:r>
             <a:endParaRPr lang="en-US" sz="1400" dirty="0"/>
           </a:p>
@@ -21189,7 +21556,7 @@
       </p:sp>
       <p:sp>
         <p:nvSpPr>
-          <p:cNvPr id="30" name="Shape 28"/>
+          <p:cNvPr id="33" name="Shape 31"/>
           <p:cNvSpPr/>
           <p:nvPr/>
         </p:nvSpPr>
@@ -21216,7 +21583,7 @@
       </p:sp>
       <p:sp>
         <p:nvSpPr>
-          <p:cNvPr id="31" name="Text 29"/>
+          <p:cNvPr id="34" name="Text 32"/>
           <p:cNvSpPr/>
           <p:nvPr/>
         </p:nvSpPr>
@@ -21255,7 +21622,7 @@
       </p:sp>
       <p:sp>
         <p:nvSpPr>
-          <p:cNvPr id="32" name="Shape 30"/>
+          <p:cNvPr id="35" name="Shape 33"/>
           <p:cNvSpPr/>
           <p:nvPr/>
         </p:nvSpPr>
@@ -21282,13 +21649,13 @@
       </p:sp>
       <p:sp>
         <p:nvSpPr>
-          <p:cNvPr id="33" name="Shape 31"/>
-          <p:cNvSpPr/>
-          <p:nvPr/>
-        </p:nvSpPr>
-        <p:spPr>
-          <a:xfrm>
-            <a:off x="2427732" y="4169664"/>
+          <p:cNvPr id="36" name="Shape 34"/>
+          <p:cNvSpPr/>
+          <p:nvPr/>
+        </p:nvSpPr>
+        <p:spPr>
+          <a:xfrm>
+            <a:off x="2124837" y="4169664"/>
             <a:ext cx="685800" cy="475488"/>
           </a:xfrm>
           <a:prstGeom prst="rect">
@@ -21309,13 +21676,13 @@
       </p:sp>
       <p:sp>
         <p:nvSpPr>
-          <p:cNvPr id="34" name="Text 32"/>
-          <p:cNvSpPr/>
-          <p:nvPr/>
-        </p:nvSpPr>
-        <p:spPr>
-          <a:xfrm>
-            <a:off x="2427732" y="4169664"/>
+          <p:cNvPr id="37" name="Text 35"/>
+          <p:cNvSpPr/>
+          <p:nvPr/>
+        </p:nvSpPr>
+        <p:spPr>
+          <a:xfrm>
+            <a:off x="2124837" y="4169664"/>
             <a:ext cx="685800" cy="475488"/>
           </a:xfrm>
           <a:prstGeom prst="rect">
@@ -21348,13 +21715,13 @@
       </p:sp>
       <p:sp>
         <p:nvSpPr>
-          <p:cNvPr id="35" name="Shape 33"/>
-          <p:cNvSpPr/>
-          <p:nvPr/>
-        </p:nvSpPr>
-        <p:spPr>
-          <a:xfrm>
-            <a:off x="3639312" y="4169664"/>
+          <p:cNvPr id="38" name="Shape 36"/>
+          <p:cNvSpPr/>
+          <p:nvPr/>
+        </p:nvSpPr>
+        <p:spPr>
+          <a:xfrm>
+            <a:off x="3033522" y="4169664"/>
             <a:ext cx="685800" cy="475488"/>
           </a:xfrm>
           <a:prstGeom prst="rect">
@@ -21375,13 +21742,13 @@
       </p:sp>
       <p:sp>
         <p:nvSpPr>
-          <p:cNvPr id="36" name="Text 34"/>
-          <p:cNvSpPr/>
-          <p:nvPr/>
-        </p:nvSpPr>
-        <p:spPr>
-          <a:xfrm>
-            <a:off x="3639312" y="4169664"/>
+          <p:cNvPr id="39" name="Text 37"/>
+          <p:cNvSpPr/>
+          <p:nvPr/>
+        </p:nvSpPr>
+        <p:spPr>
+          <a:xfrm>
+            <a:off x="3033522" y="4169664"/>
             <a:ext cx="685800" cy="475488"/>
           </a:xfrm>
           <a:prstGeom prst="rect">
@@ -21414,13 +21781,13 @@
       </p:sp>
       <p:sp>
         <p:nvSpPr>
-          <p:cNvPr id="37" name="Shape 35"/>
-          <p:cNvSpPr/>
-          <p:nvPr/>
-        </p:nvSpPr>
-        <p:spPr>
-          <a:xfrm>
-            <a:off x="4850892" y="4169664"/>
+          <p:cNvPr id="40" name="Shape 38"/>
+          <p:cNvSpPr/>
+          <p:nvPr/>
+        </p:nvSpPr>
+        <p:spPr>
+          <a:xfrm>
+            <a:off x="3942207" y="4169664"/>
             <a:ext cx="685800" cy="475488"/>
           </a:xfrm>
           <a:prstGeom prst="rect">
@@ -21441,13 +21808,13 @@
       </p:sp>
       <p:sp>
         <p:nvSpPr>
-          <p:cNvPr id="38" name="Text 36"/>
-          <p:cNvSpPr/>
-          <p:nvPr/>
-        </p:nvSpPr>
-        <p:spPr>
-          <a:xfrm>
-            <a:off x="4850892" y="4169664"/>
+          <p:cNvPr id="41" name="Text 39"/>
+          <p:cNvSpPr/>
+          <p:nvPr/>
+        </p:nvSpPr>
+        <p:spPr>
+          <a:xfrm>
+            <a:off x="3942207" y="4169664"/>
             <a:ext cx="685800" cy="475488"/>
           </a:xfrm>
           <a:prstGeom prst="rect">
@@ -21480,13 +21847,13 @@
       </p:sp>
       <p:sp>
         <p:nvSpPr>
-          <p:cNvPr id="39" name="Shape 37"/>
-          <p:cNvSpPr/>
-          <p:nvPr/>
-        </p:nvSpPr>
-        <p:spPr>
-          <a:xfrm>
-            <a:off x="6062472" y="4169664"/>
+          <p:cNvPr id="42" name="Shape 40"/>
+          <p:cNvSpPr/>
+          <p:nvPr/>
+        </p:nvSpPr>
+        <p:spPr>
+          <a:xfrm>
+            <a:off x="4850892" y="4169664"/>
             <a:ext cx="685800" cy="475488"/>
           </a:xfrm>
           <a:prstGeom prst="rect">
@@ -21507,13 +21874,13 @@
       </p:sp>
       <p:sp>
         <p:nvSpPr>
-          <p:cNvPr id="40" name="Text 38"/>
-          <p:cNvSpPr/>
-          <p:nvPr/>
-        </p:nvSpPr>
-        <p:spPr>
-          <a:xfrm>
-            <a:off x="6062472" y="4169664"/>
+          <p:cNvPr id="43" name="Text 41"/>
+          <p:cNvSpPr/>
+          <p:nvPr/>
+        </p:nvSpPr>
+        <p:spPr>
+          <a:xfrm>
+            <a:off x="4850892" y="4169664"/>
             <a:ext cx="685800" cy="475488"/>
           </a:xfrm>
           <a:prstGeom prst="rect">
@@ -21538,7 +21905,7 @@
                 <a:ea typeface="Trebuchet MS" pitchFamily="34" charset="-122"/>
                 <a:cs typeface="Trebuchet MS" pitchFamily="34" charset="-120"/>
               </a:rPr>
-              <a:t>l</a:t>
+              <a:t>e</a:t>
             </a:r>
             <a:endParaRPr lang="en-US" sz="900" dirty="0"/>
           </a:p>
@@ -21546,13 +21913,13 @@
       </p:sp>
       <p:sp>
         <p:nvSpPr>
-          <p:cNvPr id="41" name="Shape 39"/>
-          <p:cNvSpPr/>
-          <p:nvPr/>
-        </p:nvSpPr>
-        <p:spPr>
-          <a:xfrm>
-            <a:off x="7274052" y="4169664"/>
+          <p:cNvPr id="44" name="Shape 42"/>
+          <p:cNvSpPr/>
+          <p:nvPr/>
+        </p:nvSpPr>
+        <p:spPr>
+          <a:xfrm>
+            <a:off x="5759577" y="4169664"/>
             <a:ext cx="685800" cy="475488"/>
           </a:xfrm>
           <a:prstGeom prst="rect">
@@ -21573,13 +21940,13 @@
       </p:sp>
       <p:sp>
         <p:nvSpPr>
-          <p:cNvPr id="42" name="Text 40"/>
-          <p:cNvSpPr/>
-          <p:nvPr/>
-        </p:nvSpPr>
-        <p:spPr>
-          <a:xfrm>
-            <a:off x="7274052" y="4169664"/>
+          <p:cNvPr id="45" name="Text 43"/>
+          <p:cNvSpPr/>
+          <p:nvPr/>
+        </p:nvSpPr>
+        <p:spPr>
+          <a:xfrm>
+            <a:off x="5759577" y="4169664"/>
             <a:ext cx="685800" cy="475488"/>
           </a:xfrm>
           <a:prstGeom prst="rect">
@@ -21604,7 +21971,139 @@
                 <a:ea typeface="Trebuchet MS" pitchFamily="34" charset="-122"/>
                 <a:cs typeface="Trebuchet MS" pitchFamily="34" charset="-120"/>
               </a:rPr>
-              <a:t>y</a:t>
+              <a:t>n</a:t>
+            </a:r>
+            <a:endParaRPr lang="en-US" sz="900" dirty="0"/>
+          </a:p>
+        </p:txBody>
+      </p:sp>
+      <p:sp>
+        <p:nvSpPr>
+          <p:cNvPr id="46" name="Shape 44"/>
+          <p:cNvSpPr/>
+          <p:nvPr/>
+        </p:nvSpPr>
+        <p:spPr>
+          <a:xfrm>
+            <a:off x="6668262" y="4169664"/>
+            <a:ext cx="685800" cy="475488"/>
+          </a:xfrm>
+          <a:prstGeom prst="rect">
+            <a:avLst>
+              <a:gd name="adj" fmla="val 7692"/>
+            </a:avLst>
+          </a:prstGeom>
+          <a:solidFill>
+            <a:srgbClr val="FFFFFF"/>
+          </a:solidFill>
+          <a:ln w="12700">
+            <a:solidFill>
+              <a:srgbClr val="DB2777"/>
+            </a:solidFill>
+            <a:prstDash val="solid"/>
+          </a:ln>
+        </p:spPr>
+      </p:sp>
+      <p:sp>
+        <p:nvSpPr>
+          <p:cNvPr id="47" name="Text 45"/>
+          <p:cNvSpPr/>
+          <p:nvPr/>
+        </p:nvSpPr>
+        <p:spPr>
+          <a:xfrm>
+            <a:off x="6668262" y="4169664"/>
+            <a:ext cx="685800" cy="475488"/>
+          </a:xfrm>
+          <a:prstGeom prst="rect">
+            <a:avLst/>
+          </a:prstGeom>
+          <a:noFill/>
+          <a:ln/>
+        </p:spPr>
+        <p:txBody>
+          <a:bodyPr wrap="square" lIns="0" tIns="0" rIns="0" bIns="0" rtlCol="0" anchor="ctr"/>
+          <a:lstStyle/>
+          <a:p>
+            <a:pPr algn="ctr" indent="0" marL="0">
+              <a:buNone/>
+            </a:pPr>
+            <a:r>
+              <a:rPr lang="en-US" sz="900" b="1" dirty="0">
+                <a:solidFill>
+                  <a:srgbClr val="9D174D"/>
+                </a:solidFill>
+                <a:latin typeface="Trebuchet MS" pitchFamily="34" charset="0"/>
+                <a:ea typeface="Trebuchet MS" pitchFamily="34" charset="-122"/>
+                <a:cs typeface="Trebuchet MS" pitchFamily="34" charset="-120"/>
+              </a:rPr>
+              <a:t>e</a:t>
+            </a:r>
+            <a:endParaRPr lang="en-US" sz="900" dirty="0"/>
+          </a:p>
+        </p:txBody>
+      </p:sp>
+      <p:sp>
+        <p:nvSpPr>
+          <p:cNvPr id="48" name="Shape 46"/>
+          <p:cNvSpPr/>
+          <p:nvPr/>
+        </p:nvSpPr>
+        <p:spPr>
+          <a:xfrm>
+            <a:off x="7576947" y="4169664"/>
+            <a:ext cx="685800" cy="475488"/>
+          </a:xfrm>
+          <a:prstGeom prst="rect">
+            <a:avLst>
+              <a:gd name="adj" fmla="val 7692"/>
+            </a:avLst>
+          </a:prstGeom>
+          <a:solidFill>
+            <a:srgbClr val="FFFFFF"/>
+          </a:solidFill>
+          <a:ln w="12700">
+            <a:solidFill>
+              <a:srgbClr val="DB2777"/>
+            </a:solidFill>
+            <a:prstDash val="solid"/>
+          </a:ln>
+        </p:spPr>
+      </p:sp>
+      <p:sp>
+        <p:nvSpPr>
+          <p:cNvPr id="49" name="Text 47"/>
+          <p:cNvSpPr/>
+          <p:nvPr/>
+        </p:nvSpPr>
+        <p:spPr>
+          <a:xfrm>
+            <a:off x="7576947" y="4169664"/>
+            <a:ext cx="685800" cy="475488"/>
+          </a:xfrm>
+          <a:prstGeom prst="rect">
+            <a:avLst/>
+          </a:prstGeom>
+          <a:noFill/>
+          <a:ln/>
+        </p:spPr>
+        <p:txBody>
+          <a:bodyPr wrap="square" lIns="0" tIns="0" rIns="0" bIns="0" rtlCol="0" anchor="ctr"/>
+          <a:lstStyle/>
+          <a:p>
+            <a:pPr algn="ctr" indent="0" marL="0">
+              <a:buNone/>
+            </a:pPr>
+            <a:r>
+              <a:rPr lang="en-US" sz="900" b="1" dirty="0">
+                <a:solidFill>
+                  <a:srgbClr val="9D174D"/>
+                </a:solidFill>
+                <a:latin typeface="Trebuchet MS" pitchFamily="34" charset="0"/>
+                <a:ea typeface="Trebuchet MS" pitchFamily="34" charset="-122"/>
+                <a:cs typeface="Trebuchet MS" pitchFamily="34" charset="-120"/>
+              </a:rPr>
+              <a:t>d</a:t>
             </a:r>
             <a:endParaRPr lang="en-US" sz="900" dirty="0"/>
           </a:p>
@@ -21896,7 +22395,7 @@
                 <a:ea typeface="Calibri" pitchFamily="34" charset="-122"/>
                 <a:cs typeface="Calibri" pitchFamily="34" charset="-120"/>
               </a:rPr>
-              <a:t>Word Labs  •  wordlabs.app  •  Root: 'deep' = far down, profound distance</a:t>
+              <a:t>Word Labs  •  wordlabs.app  •  Root: 'deep' = going far down or in</a:t>
             </a:r>
             <a:endParaRPr lang="en-US" sz="800" dirty="0"/>
           </a:p>
@@ -22035,7 +22534,7 @@
                 <a:ea typeface="Trebuchet MS" pitchFamily="34" charset="-122"/>
                 <a:cs typeface="Trebuchet MS" pitchFamily="34" charset="-120"/>
               </a:rPr>
-              <a:t>deeper</a:t>
+              <a:t>deepness</a:t>
             </a:r>
             <a:endParaRPr lang="en-US" sz="2800" dirty="0"/>
           </a:p>
@@ -22723,7 +23222,7 @@
                 <a:ea typeface="Calibri" pitchFamily="34" charset="-122"/>
                 <a:cs typeface="Calibri" pitchFamily="34" charset="-120"/>
               </a:rPr>
-              <a:t>Word Labs  •  wordlabs.app  •  Root: 'deep' = far down, profound distance</a:t>
+              <a:t>Word Labs  •  wordlabs.app  •  Root: 'deep' = going far down or in</a:t>
             </a:r>
             <a:endParaRPr lang="en-US" sz="800" dirty="0"/>
           </a:p>
@@ -22862,7 +23361,7 @@
                 <a:ea typeface="Trebuchet MS" pitchFamily="34" charset="-122"/>
                 <a:cs typeface="Trebuchet MS" pitchFamily="34" charset="-120"/>
               </a:rPr>
-              <a:t>deeper</a:t>
+              <a:t>deepness</a:t>
             </a:r>
             <a:endParaRPr lang="en-US" sz="2800" dirty="0"/>
           </a:p>
@@ -23040,7 +23539,7 @@
                 <a:ea typeface="Calibri" pitchFamily="34" charset="-122"/>
                 <a:cs typeface="Calibri" pitchFamily="34" charset="-120"/>
               </a:rPr>
-              <a:t>far down, profound</a:t>
+              <a:t>going far down or in</a:t>
             </a:r>
             <a:endParaRPr lang="en-US" sz="850" dirty="0"/>
           </a:p>
@@ -23113,7 +23612,7 @@
                 <a:ea typeface="Trebuchet MS" pitchFamily="34" charset="-122"/>
                 <a:cs typeface="Trebuchet MS" pitchFamily="34" charset="-120"/>
               </a:rPr>
-              <a:t>er</a:t>
+              <a:t>ness</a:t>
             </a:r>
             <a:endParaRPr lang="en-US" sz="1300" dirty="0"/>
           </a:p>
@@ -23152,7 +23651,7 @@
                 <a:ea typeface="Calibri" pitchFamily="34" charset="-122"/>
                 <a:cs typeface="Calibri" pitchFamily="34" charset="-120"/>
               </a:rPr>
-              <a:t>more than</a:t>
+              <a:t>state of</a:t>
             </a:r>
             <a:endParaRPr lang="en-US" sz="850" dirty="0"/>
           </a:p>
@@ -23708,7 +24207,7 @@
                 <a:ea typeface="Calibri" pitchFamily="34" charset="-122"/>
                 <a:cs typeface="Calibri" pitchFamily="34" charset="-120"/>
               </a:rPr>
-              <a:t>Word Labs  •  wordlabs.app  •  Root: 'deep' = far down, profound distance</a:t>
+              <a:t>Word Labs  •  wordlabs.app  •  Root: 'deep' = going far down or in</a:t>
             </a:r>
             <a:endParaRPr lang="en-US" sz="800" dirty="0"/>
           </a:p>
@@ -23781,7 +24280,7 @@
                 <a:ea typeface="Trebuchet MS" pitchFamily="34" charset="-122"/>
                 <a:cs typeface="Trebuchet MS" pitchFamily="34" charset="-120"/>
               </a:rPr>
-              <a:t>We are learning that the root 'deep' means 'far down, profound distance'.</a:t>
+              <a:t>We are learning that the root 'deep' means 'going far down or in'.</a:t>
             </a:r>
             <a:endParaRPr lang="en-US" sz="2000" dirty="0"/>
           </a:p>
@@ -24427,7 +24926,7 @@
                 <a:ea typeface="Calibri" pitchFamily="34" charset="-122"/>
                 <a:cs typeface="Calibri" pitchFamily="34" charset="-120"/>
               </a:rPr>
-              <a:t>Word Labs  •  wordlabs.app  •  Root: 'deep' = far down, profound distance</a:t>
+              <a:t>Word Labs  •  wordlabs.app  •  Root: 'deep' = going far down or in</a:t>
             </a:r>
             <a:endParaRPr lang="en-US" sz="800" dirty="0"/>
           </a:p>
@@ -24566,7 +25065,7 @@
                 <a:ea typeface="Trebuchet MS" pitchFamily="34" charset="-122"/>
                 <a:cs typeface="Trebuchet MS" pitchFamily="34" charset="-120"/>
               </a:rPr>
-              <a:t>deeper</a:t>
+              <a:t>deepness</a:t>
             </a:r>
             <a:endParaRPr lang="en-US" sz="2800" dirty="0"/>
           </a:p>
@@ -24744,7 +25243,7 @@
                 <a:ea typeface="Calibri" pitchFamily="34" charset="-122"/>
                 <a:cs typeface="Calibri" pitchFamily="34" charset="-120"/>
               </a:rPr>
-              <a:t>far down, profound</a:t>
+              <a:t>going far down or in</a:t>
             </a:r>
             <a:endParaRPr lang="en-US" sz="850" dirty="0"/>
           </a:p>
@@ -24817,7 +25316,7 @@
                 <a:ea typeface="Trebuchet MS" pitchFamily="34" charset="-122"/>
                 <a:cs typeface="Trebuchet MS" pitchFamily="34" charset="-120"/>
               </a:rPr>
-              <a:t>er</a:t>
+              <a:t>ness</a:t>
             </a:r>
             <a:endParaRPr lang="en-US" sz="1300" dirty="0"/>
           </a:p>
@@ -24856,7 +25355,7 @@
                 <a:ea typeface="Calibri" pitchFamily="34" charset="-122"/>
                 <a:cs typeface="Calibri" pitchFamily="34" charset="-120"/>
               </a:rPr>
-              <a:t>more than</a:t>
+              <a:t>state of</a:t>
             </a:r>
             <a:endParaRPr lang="en-US" sz="850" dirty="0"/>
           </a:p>
@@ -25120,7 +25619,7 @@
                 <a:ea typeface="Trebuchet MS" pitchFamily="34" charset="-122"/>
                 <a:cs typeface="Trebuchet MS" pitchFamily="34" charset="-120"/>
               </a:rPr>
-              <a:t>er</a:t>
+              <a:t>ness</a:t>
             </a:r>
             <a:endParaRPr lang="en-US" sz="1400" dirty="0"/>
           </a:p>
@@ -25544,7 +26043,7 @@
                 <a:ea typeface="Calibri" pitchFamily="34" charset="-122"/>
                 <a:cs typeface="Calibri" pitchFamily="34" charset="-120"/>
               </a:rPr>
-              <a:t>Word Labs  •  wordlabs.app  •  Root: 'deep' = far down, profound distance</a:t>
+              <a:t>Word Labs  •  wordlabs.app  •  Root: 'deep' = going far down or in</a:t>
             </a:r>
             <a:endParaRPr lang="en-US" sz="800" dirty="0"/>
           </a:p>
@@ -25683,7 +26182,7 @@
                 <a:ea typeface="Trebuchet MS" pitchFamily="34" charset="-122"/>
                 <a:cs typeface="Trebuchet MS" pitchFamily="34" charset="-120"/>
               </a:rPr>
-              <a:t>deeper</a:t>
+              <a:t>deepness</a:t>
             </a:r>
             <a:endParaRPr lang="en-US" sz="2800" dirty="0"/>
           </a:p>
@@ -25861,7 +26360,7 @@
                 <a:ea typeface="Calibri" pitchFamily="34" charset="-122"/>
                 <a:cs typeface="Calibri" pitchFamily="34" charset="-120"/>
               </a:rPr>
-              <a:t>far down, profound</a:t>
+              <a:t>going far down or in</a:t>
             </a:r>
             <a:endParaRPr lang="en-US" sz="850" dirty="0"/>
           </a:p>
@@ -25934,7 +26433,7 @@
                 <a:ea typeface="Trebuchet MS" pitchFamily="34" charset="-122"/>
                 <a:cs typeface="Trebuchet MS" pitchFamily="34" charset="-120"/>
               </a:rPr>
-              <a:t>er</a:t>
+              <a:t>ness</a:t>
             </a:r>
             <a:endParaRPr lang="en-US" sz="1300" dirty="0"/>
           </a:p>
@@ -25973,7 +26472,7 @@
                 <a:ea typeface="Calibri" pitchFamily="34" charset="-122"/>
                 <a:cs typeface="Calibri" pitchFamily="34" charset="-120"/>
               </a:rPr>
-              <a:t>more than</a:t>
+              <a:t>state of</a:t>
             </a:r>
             <a:endParaRPr lang="en-US" sz="850" dirty="0"/>
           </a:p>
@@ -26237,7 +26736,7 @@
                 <a:ea typeface="Trebuchet MS" pitchFamily="34" charset="-122"/>
                 <a:cs typeface="Trebuchet MS" pitchFamily="34" charset="-120"/>
               </a:rPr>
-              <a:t>er</a:t>
+              <a:t>ness</a:t>
             </a:r>
             <a:endParaRPr lang="en-US" sz="1400" dirty="0"/>
           </a:p>
@@ -26344,7 +26843,7 @@
         </p:nvSpPr>
         <p:spPr>
           <a:xfrm>
-            <a:off x="2670048" y="4169664"/>
+            <a:off x="2124837" y="4169664"/>
             <a:ext cx="685800" cy="475488"/>
           </a:xfrm>
           <a:prstGeom prst="rect">
@@ -26371,7 +26870,7 @@
         </p:nvSpPr>
         <p:spPr>
           <a:xfrm>
-            <a:off x="2670048" y="4169664"/>
+            <a:off x="2124837" y="4169664"/>
             <a:ext cx="685800" cy="475488"/>
           </a:xfrm>
           <a:prstGeom prst="rect">
@@ -26410,7 +26909,7 @@
         </p:nvSpPr>
         <p:spPr>
           <a:xfrm>
-            <a:off x="4123944" y="4169664"/>
+            <a:off x="3033522" y="4169664"/>
             <a:ext cx="685800" cy="475488"/>
           </a:xfrm>
           <a:prstGeom prst="rect">
@@ -26437,7 +26936,7 @@
         </p:nvSpPr>
         <p:spPr>
           <a:xfrm>
-            <a:off x="4123944" y="4169664"/>
+            <a:off x="3033522" y="4169664"/>
             <a:ext cx="685800" cy="475488"/>
           </a:xfrm>
           <a:prstGeom prst="rect">
@@ -26476,7 +26975,7 @@
         </p:nvSpPr>
         <p:spPr>
           <a:xfrm>
-            <a:off x="5577840" y="4169664"/>
+            <a:off x="3942207" y="4169664"/>
             <a:ext cx="685800" cy="475488"/>
           </a:xfrm>
           <a:prstGeom prst="rect">
@@ -26503,7 +27002,7 @@
         </p:nvSpPr>
         <p:spPr>
           <a:xfrm>
-            <a:off x="5577840" y="4169664"/>
+            <a:off x="3942207" y="4169664"/>
             <a:ext cx="685800" cy="475488"/>
           </a:xfrm>
           <a:prstGeom prst="rect">
@@ -26542,7 +27041,7 @@
         </p:nvSpPr>
         <p:spPr>
           <a:xfrm>
-            <a:off x="7031736" y="4169664"/>
+            <a:off x="4850892" y="4169664"/>
             <a:ext cx="685800" cy="475488"/>
           </a:xfrm>
           <a:prstGeom prst="rect">
@@ -26569,7 +27068,7 @@
         </p:nvSpPr>
         <p:spPr>
           <a:xfrm>
-            <a:off x="7031736" y="4169664"/>
+            <a:off x="4850892" y="4169664"/>
             <a:ext cx="685800" cy="475488"/>
           </a:xfrm>
           <a:prstGeom prst="rect">
@@ -26594,7 +27093,205 @@
                 <a:ea typeface="Trebuchet MS" pitchFamily="34" charset="-122"/>
                 <a:cs typeface="Trebuchet MS" pitchFamily="34" charset="-120"/>
               </a:rPr>
-              <a:t>er</a:t>
+              <a:t>n</a:t>
+            </a:r>
+            <a:endParaRPr lang="en-US" sz="900" dirty="0"/>
+          </a:p>
+        </p:txBody>
+      </p:sp>
+      <p:sp>
+        <p:nvSpPr>
+          <p:cNvPr id="41" name="Shape 39"/>
+          <p:cNvSpPr/>
+          <p:nvPr/>
+        </p:nvSpPr>
+        <p:spPr>
+          <a:xfrm>
+            <a:off x="5759577" y="4169664"/>
+            <a:ext cx="685800" cy="475488"/>
+          </a:xfrm>
+          <a:prstGeom prst="rect">
+            <a:avLst>
+              <a:gd name="adj" fmla="val 7692"/>
+            </a:avLst>
+          </a:prstGeom>
+          <a:solidFill>
+            <a:srgbClr val="FFFFFF"/>
+          </a:solidFill>
+          <a:ln w="12700">
+            <a:solidFill>
+              <a:srgbClr val="DB2777"/>
+            </a:solidFill>
+            <a:prstDash val="solid"/>
+          </a:ln>
+        </p:spPr>
+      </p:sp>
+      <p:sp>
+        <p:nvSpPr>
+          <p:cNvPr id="42" name="Text 40"/>
+          <p:cNvSpPr/>
+          <p:nvPr/>
+        </p:nvSpPr>
+        <p:spPr>
+          <a:xfrm>
+            <a:off x="5759577" y="4169664"/>
+            <a:ext cx="685800" cy="475488"/>
+          </a:xfrm>
+          <a:prstGeom prst="rect">
+            <a:avLst/>
+          </a:prstGeom>
+          <a:noFill/>
+          <a:ln/>
+        </p:spPr>
+        <p:txBody>
+          <a:bodyPr wrap="square" lIns="0" tIns="0" rIns="0" bIns="0" rtlCol="0" anchor="ctr"/>
+          <a:lstStyle/>
+          <a:p>
+            <a:pPr algn="ctr" indent="0" marL="0">
+              <a:buNone/>
+            </a:pPr>
+            <a:r>
+              <a:rPr lang="en-US" sz="900" b="1" dirty="0">
+                <a:solidFill>
+                  <a:srgbClr val="9D174D"/>
+                </a:solidFill>
+                <a:latin typeface="Trebuchet MS" pitchFamily="34" charset="0"/>
+                <a:ea typeface="Trebuchet MS" pitchFamily="34" charset="-122"/>
+                <a:cs typeface="Trebuchet MS" pitchFamily="34" charset="-120"/>
+              </a:rPr>
+              <a:t>e</a:t>
+            </a:r>
+            <a:endParaRPr lang="en-US" sz="900" dirty="0"/>
+          </a:p>
+        </p:txBody>
+      </p:sp>
+      <p:sp>
+        <p:nvSpPr>
+          <p:cNvPr id="43" name="Shape 41"/>
+          <p:cNvSpPr/>
+          <p:nvPr/>
+        </p:nvSpPr>
+        <p:spPr>
+          <a:xfrm>
+            <a:off x="6668262" y="4169664"/>
+            <a:ext cx="685800" cy="475488"/>
+          </a:xfrm>
+          <a:prstGeom prst="rect">
+            <a:avLst>
+              <a:gd name="adj" fmla="val 7692"/>
+            </a:avLst>
+          </a:prstGeom>
+          <a:solidFill>
+            <a:srgbClr val="FFFFFF"/>
+          </a:solidFill>
+          <a:ln w="12700">
+            <a:solidFill>
+              <a:srgbClr val="DB2777"/>
+            </a:solidFill>
+            <a:prstDash val="solid"/>
+          </a:ln>
+        </p:spPr>
+      </p:sp>
+      <p:sp>
+        <p:nvSpPr>
+          <p:cNvPr id="44" name="Text 42"/>
+          <p:cNvSpPr/>
+          <p:nvPr/>
+        </p:nvSpPr>
+        <p:spPr>
+          <a:xfrm>
+            <a:off x="6668262" y="4169664"/>
+            <a:ext cx="685800" cy="475488"/>
+          </a:xfrm>
+          <a:prstGeom prst="rect">
+            <a:avLst/>
+          </a:prstGeom>
+          <a:noFill/>
+          <a:ln/>
+        </p:spPr>
+        <p:txBody>
+          <a:bodyPr wrap="square" lIns="0" tIns="0" rIns="0" bIns="0" rtlCol="0" anchor="ctr"/>
+          <a:lstStyle/>
+          <a:p>
+            <a:pPr algn="ctr" indent="0" marL="0">
+              <a:buNone/>
+            </a:pPr>
+            <a:r>
+              <a:rPr lang="en-US" sz="900" b="1" dirty="0">
+                <a:solidFill>
+                  <a:srgbClr val="9D174D"/>
+                </a:solidFill>
+                <a:latin typeface="Trebuchet MS" pitchFamily="34" charset="0"/>
+                <a:ea typeface="Trebuchet MS" pitchFamily="34" charset="-122"/>
+                <a:cs typeface="Trebuchet MS" pitchFamily="34" charset="-120"/>
+              </a:rPr>
+              <a:t>s</a:t>
+            </a:r>
+            <a:endParaRPr lang="en-US" sz="900" dirty="0"/>
+          </a:p>
+        </p:txBody>
+      </p:sp>
+      <p:sp>
+        <p:nvSpPr>
+          <p:cNvPr id="45" name="Shape 43"/>
+          <p:cNvSpPr/>
+          <p:nvPr/>
+        </p:nvSpPr>
+        <p:spPr>
+          <a:xfrm>
+            <a:off x="7576947" y="4169664"/>
+            <a:ext cx="685800" cy="475488"/>
+          </a:xfrm>
+          <a:prstGeom prst="rect">
+            <a:avLst>
+              <a:gd name="adj" fmla="val 7692"/>
+            </a:avLst>
+          </a:prstGeom>
+          <a:solidFill>
+            <a:srgbClr val="FFFFFF"/>
+          </a:solidFill>
+          <a:ln w="12700">
+            <a:solidFill>
+              <a:srgbClr val="DB2777"/>
+            </a:solidFill>
+            <a:prstDash val="solid"/>
+          </a:ln>
+        </p:spPr>
+      </p:sp>
+      <p:sp>
+        <p:nvSpPr>
+          <p:cNvPr id="46" name="Text 44"/>
+          <p:cNvSpPr/>
+          <p:nvPr/>
+        </p:nvSpPr>
+        <p:spPr>
+          <a:xfrm>
+            <a:off x="7576947" y="4169664"/>
+            <a:ext cx="685800" cy="475488"/>
+          </a:xfrm>
+          <a:prstGeom prst="rect">
+            <a:avLst/>
+          </a:prstGeom>
+          <a:noFill/>
+          <a:ln/>
+        </p:spPr>
+        <p:txBody>
+          <a:bodyPr wrap="square" lIns="0" tIns="0" rIns="0" bIns="0" rtlCol="0" anchor="ctr"/>
+          <a:lstStyle/>
+          <a:p>
+            <a:pPr algn="ctr" indent="0" marL="0">
+              <a:buNone/>
+            </a:pPr>
+            <a:r>
+              <a:rPr lang="en-US" sz="900" b="1" dirty="0">
+                <a:solidFill>
+                  <a:srgbClr val="9D174D"/>
+                </a:solidFill>
+                <a:latin typeface="Trebuchet MS" pitchFamily="34" charset="0"/>
+                <a:ea typeface="Trebuchet MS" pitchFamily="34" charset="-122"/>
+                <a:cs typeface="Trebuchet MS" pitchFamily="34" charset="-120"/>
+              </a:rPr>
+              <a:t>s</a:t>
             </a:r>
             <a:endParaRPr lang="en-US" sz="900" dirty="0"/>
           </a:p>
@@ -26886,7 +27583,7 @@
                 <a:ea typeface="Calibri" pitchFamily="34" charset="-122"/>
                 <a:cs typeface="Calibri" pitchFamily="34" charset="-120"/>
               </a:rPr>
-              <a:t>Word Labs  •  wordlabs.app  •  Root: 'deep' = far down, profound distance</a:t>
+              <a:t>Word Labs  •  wordlabs.app  •  Root: 'deep' = going far down or in</a:t>
             </a:r>
             <a:endParaRPr lang="en-US" sz="800" dirty="0"/>
           </a:p>
@@ -27025,7 +27722,7 @@
                 <a:ea typeface="Trebuchet MS" pitchFamily="34" charset="-122"/>
                 <a:cs typeface="Trebuchet MS" pitchFamily="34" charset="-120"/>
               </a:rPr>
-              <a:t>deepness</a:t>
+              <a:t>deepening</a:t>
             </a:r>
             <a:endParaRPr lang="en-US" sz="2800" dirty="0"/>
           </a:p>
@@ -27713,7 +28410,7 @@
                 <a:ea typeface="Calibri" pitchFamily="34" charset="-122"/>
                 <a:cs typeface="Calibri" pitchFamily="34" charset="-120"/>
               </a:rPr>
-              <a:t>Word Labs  •  wordlabs.app  •  Root: 'deep' = far down, profound distance</a:t>
+              <a:t>Word Labs  •  wordlabs.app  •  Root: 'deep' = going far down or in</a:t>
             </a:r>
             <a:endParaRPr lang="en-US" sz="800" dirty="0"/>
           </a:p>
@@ -27852,7 +28549,7 @@
                 <a:ea typeface="Trebuchet MS" pitchFamily="34" charset="-122"/>
                 <a:cs typeface="Trebuchet MS" pitchFamily="34" charset="-120"/>
               </a:rPr>
-              <a:t>deepness</a:t>
+              <a:t>deepening</a:t>
             </a:r>
             <a:endParaRPr lang="en-US" sz="2800" dirty="0"/>
           </a:p>
@@ -27932,7 +28629,7 @@
         </p:nvSpPr>
         <p:spPr>
           <a:xfrm>
-            <a:off x="2938272" y="2258568"/>
+            <a:off x="2221992" y="2258568"/>
             <a:ext cx="1828800" cy="292608"/>
           </a:xfrm>
           <a:prstGeom prst="rect">
@@ -27966,7 +28663,7 @@
         </p:nvSpPr>
         <p:spPr>
           <a:xfrm>
-            <a:off x="2938272" y="2258568"/>
+            <a:off x="2221992" y="2258568"/>
             <a:ext cx="1828800" cy="292608"/>
           </a:xfrm>
           <a:prstGeom prst="rect">
@@ -28005,7 +28702,7 @@
         </p:nvSpPr>
         <p:spPr>
           <a:xfrm>
-            <a:off x="2938272" y="2569464"/>
+            <a:off x="2221992" y="2569464"/>
             <a:ext cx="1828800" cy="201168"/>
           </a:xfrm>
           <a:prstGeom prst="rect">
@@ -28030,7 +28727,7 @@
                 <a:ea typeface="Calibri" pitchFamily="34" charset="-122"/>
                 <a:cs typeface="Calibri" pitchFamily="34" charset="-120"/>
               </a:rPr>
-              <a:t>far down, profound</a:t>
+              <a:t>going far down or in</a:t>
             </a:r>
             <a:endParaRPr lang="en-US" sz="850" dirty="0"/>
           </a:p>
@@ -28044,7 +28741,7 @@
         </p:nvSpPr>
         <p:spPr>
           <a:xfrm>
-            <a:off x="5803392" y="2258568"/>
+            <a:off x="4370832" y="2258568"/>
             <a:ext cx="1828800" cy="292608"/>
           </a:xfrm>
           <a:prstGeom prst="rect">
@@ -28078,7 +28775,7 @@
         </p:nvSpPr>
         <p:spPr>
           <a:xfrm>
-            <a:off x="5803392" y="2258568"/>
+            <a:off x="4370832" y="2258568"/>
             <a:ext cx="1828800" cy="292608"/>
           </a:xfrm>
           <a:prstGeom prst="rect">
@@ -28103,7 +28800,7 @@
                 <a:ea typeface="Trebuchet MS" pitchFamily="34" charset="-122"/>
                 <a:cs typeface="Trebuchet MS" pitchFamily="34" charset="-120"/>
               </a:rPr>
-              <a:t>ness</a:t>
+              <a:t>en</a:t>
             </a:r>
             <a:endParaRPr lang="en-US" sz="1300" dirty="0"/>
           </a:p>
@@ -28117,7 +28814,7 @@
         </p:nvSpPr>
         <p:spPr>
           <a:xfrm>
-            <a:off x="5803392" y="2569464"/>
+            <a:off x="4370832" y="2569464"/>
             <a:ext cx="1828800" cy="201168"/>
           </a:xfrm>
           <a:prstGeom prst="rect">
@@ -28142,7 +28839,7 @@
                 <a:ea typeface="Calibri" pitchFamily="34" charset="-122"/>
                 <a:cs typeface="Calibri" pitchFamily="34" charset="-120"/>
               </a:rPr>
-              <a:t>the quality or state of</a:t>
+              <a:t>made of; to make</a:t>
             </a:r>
             <a:endParaRPr lang="en-US" sz="850" dirty="0"/>
           </a:p>
@@ -28151,6 +28848,118 @@
       <p:sp>
         <p:nvSpPr>
           <p:cNvPr id="22" name="Shape 20"/>
+          <p:cNvSpPr/>
+          <p:nvPr/>
+        </p:nvSpPr>
+        <p:spPr>
+          <a:xfrm>
+            <a:off x="6519672" y="2258568"/>
+            <a:ext cx="1828800" cy="292608"/>
+          </a:xfrm>
+          <a:prstGeom prst="rect">
+            <a:avLst>
+              <a:gd name="adj" fmla="val 25000"/>
+            </a:avLst>
+          </a:prstGeom>
+          <a:solidFill>
+            <a:srgbClr val="FCE7F3"/>
+          </a:solidFill>
+          <a:ln w="19050">
+            <a:solidFill>
+              <a:srgbClr val="DB2777"/>
+            </a:solidFill>
+            <a:prstDash val="solid"/>
+          </a:ln>
+          <a:effectLst>
+            <a:outerShdw sx="100000" sy="100000" kx="0" ky="0" algn="bl" rotWithShape="0" blurRad="101600" dist="38100" dir="8100000">
+              <a:srgbClr val="000000">
+                <a:alpha val="12000"/>
+              </a:srgbClr>
+            </a:outerShdw>
+          </a:effectLst>
+        </p:spPr>
+      </p:sp>
+      <p:sp>
+        <p:nvSpPr>
+          <p:cNvPr id="23" name="Text 21"/>
+          <p:cNvSpPr/>
+          <p:nvPr/>
+        </p:nvSpPr>
+        <p:spPr>
+          <a:xfrm>
+            <a:off x="6519672" y="2258568"/>
+            <a:ext cx="1828800" cy="292608"/>
+          </a:xfrm>
+          <a:prstGeom prst="rect">
+            <a:avLst/>
+          </a:prstGeom>
+          <a:noFill/>
+          <a:ln/>
+        </p:spPr>
+        <p:txBody>
+          <a:bodyPr wrap="square" lIns="0" tIns="0" rIns="0" bIns="0" rtlCol="0" anchor="ctr"/>
+          <a:lstStyle/>
+          <a:p>
+            <a:pPr algn="ctr" indent="0" marL="0">
+              <a:buNone/>
+            </a:pPr>
+            <a:r>
+              <a:rPr lang="en-US" sz="1300" b="1" dirty="0">
+                <a:solidFill>
+                  <a:srgbClr val="9D174D"/>
+                </a:solidFill>
+                <a:latin typeface="Trebuchet MS" pitchFamily="34" charset="0"/>
+                <a:ea typeface="Trebuchet MS" pitchFamily="34" charset="-122"/>
+                <a:cs typeface="Trebuchet MS" pitchFamily="34" charset="-120"/>
+              </a:rPr>
+              <a:t>ing</a:t>
+            </a:r>
+            <a:endParaRPr lang="en-US" sz="1300" dirty="0"/>
+          </a:p>
+        </p:txBody>
+      </p:sp>
+      <p:sp>
+        <p:nvSpPr>
+          <p:cNvPr id="24" name="Text 22"/>
+          <p:cNvSpPr/>
+          <p:nvPr/>
+        </p:nvSpPr>
+        <p:spPr>
+          <a:xfrm>
+            <a:off x="6519672" y="2569464"/>
+            <a:ext cx="1828800" cy="201168"/>
+          </a:xfrm>
+          <a:prstGeom prst="rect">
+            <a:avLst/>
+          </a:prstGeom>
+          <a:noFill/>
+          <a:ln/>
+        </p:spPr>
+        <p:txBody>
+          <a:bodyPr wrap="square" lIns="0" tIns="0" rIns="0" bIns="0" rtlCol="0" anchor="t"/>
+          <a:lstStyle/>
+          <a:p>
+            <a:pPr algn="ctr" indent="0" marL="0">
+              <a:buNone/>
+            </a:pPr>
+            <a:r>
+              <a:rPr lang="en-US" sz="850" dirty="0">
+                <a:solidFill>
+                  <a:srgbClr val="475569"/>
+                </a:solidFill>
+                <a:latin typeface="Calibri" pitchFamily="34" charset="0"/>
+                <a:ea typeface="Calibri" pitchFamily="34" charset="-122"/>
+                <a:cs typeface="Calibri" pitchFamily="34" charset="-120"/>
+              </a:rPr>
+              <a:t>happening now</a:t>
+            </a:r>
+            <a:endParaRPr lang="en-US" sz="850" dirty="0"/>
+          </a:p>
+        </p:txBody>
+      </p:sp>
+      <p:sp>
+        <p:nvSpPr>
+          <p:cNvPr id="25" name="Shape 23"/>
           <p:cNvSpPr/>
           <p:nvPr/>
         </p:nvSpPr>
@@ -28177,7 +28986,7 @@
       </p:sp>
       <p:sp>
         <p:nvSpPr>
-          <p:cNvPr id="23" name="Text 21"/>
+          <p:cNvPr id="26" name="Text 24"/>
           <p:cNvSpPr/>
           <p:nvPr/>
         </p:nvSpPr>
@@ -28216,7 +29025,7 @@
       </p:sp>
       <p:sp>
         <p:nvSpPr>
-          <p:cNvPr id="24" name="Shape 22"/>
+          <p:cNvPr id="27" name="Shape 25"/>
           <p:cNvSpPr/>
           <p:nvPr/>
         </p:nvSpPr>
@@ -28243,7 +29052,7 @@
       </p:sp>
       <p:sp>
         <p:nvSpPr>
-          <p:cNvPr id="25" name="Text 23"/>
+          <p:cNvPr id="28" name="Text 26"/>
           <p:cNvSpPr/>
           <p:nvPr/>
         </p:nvSpPr>
@@ -28282,7 +29091,7 @@
       </p:sp>
       <p:sp>
         <p:nvSpPr>
-          <p:cNvPr id="26" name="Shape 24"/>
+          <p:cNvPr id="29" name="Shape 27"/>
           <p:cNvSpPr/>
           <p:nvPr/>
         </p:nvSpPr>
@@ -28309,7 +29118,7 @@
       </p:sp>
       <p:sp>
         <p:nvSpPr>
-          <p:cNvPr id="27" name="Text 25"/>
+          <p:cNvPr id="30" name="Text 28"/>
           <p:cNvSpPr/>
           <p:nvPr/>
         </p:nvSpPr>
@@ -28348,7 +29157,7 @@
       </p:sp>
       <p:sp>
         <p:nvSpPr>
-          <p:cNvPr id="28" name="Shape 26"/>
+          <p:cNvPr id="31" name="Shape 29"/>
           <p:cNvSpPr/>
           <p:nvPr/>
         </p:nvSpPr>
@@ -28375,7 +29184,7 @@
       </p:sp>
       <p:sp>
         <p:nvSpPr>
-          <p:cNvPr id="29" name="Text 27"/>
+          <p:cNvPr id="32" name="Text 30"/>
           <p:cNvSpPr/>
           <p:nvPr/>
         </p:nvSpPr>
@@ -28698,7 +29507,7 @@
                 <a:ea typeface="Calibri" pitchFamily="34" charset="-122"/>
                 <a:cs typeface="Calibri" pitchFamily="34" charset="-120"/>
               </a:rPr>
-              <a:t>Word Labs  •  wordlabs.app  •  Root: 'deep' = far down, profound distance</a:t>
+              <a:t>Word Labs  •  wordlabs.app  •  Root: 'deep' = going far down or in</a:t>
             </a:r>
             <a:endParaRPr lang="en-US" sz="800" dirty="0"/>
           </a:p>
@@ -28837,7 +29646,7 @@
                 <a:ea typeface="Trebuchet MS" pitchFamily="34" charset="-122"/>
                 <a:cs typeface="Trebuchet MS" pitchFamily="34" charset="-120"/>
               </a:rPr>
-              <a:t>deepness</a:t>
+              <a:t>deepening</a:t>
             </a:r>
             <a:endParaRPr lang="en-US" sz="2800" dirty="0"/>
           </a:p>
@@ -28917,7 +29726,7 @@
         </p:nvSpPr>
         <p:spPr>
           <a:xfrm>
-            <a:off x="2938272" y="2258568"/>
+            <a:off x="2221992" y="2258568"/>
             <a:ext cx="1828800" cy="292608"/>
           </a:xfrm>
           <a:prstGeom prst="rect">
@@ -28951,7 +29760,7 @@
         </p:nvSpPr>
         <p:spPr>
           <a:xfrm>
-            <a:off x="2938272" y="2258568"/>
+            <a:off x="2221992" y="2258568"/>
             <a:ext cx="1828800" cy="292608"/>
           </a:xfrm>
           <a:prstGeom prst="rect">
@@ -28990,7 +29799,7 @@
         </p:nvSpPr>
         <p:spPr>
           <a:xfrm>
-            <a:off x="2938272" y="2569464"/>
+            <a:off x="2221992" y="2569464"/>
             <a:ext cx="1828800" cy="201168"/>
           </a:xfrm>
           <a:prstGeom prst="rect">
@@ -29015,7 +29824,7 @@
                 <a:ea typeface="Calibri" pitchFamily="34" charset="-122"/>
                 <a:cs typeface="Calibri" pitchFamily="34" charset="-120"/>
               </a:rPr>
-              <a:t>far down, profound</a:t>
+              <a:t>going far down or in</a:t>
             </a:r>
             <a:endParaRPr lang="en-US" sz="850" dirty="0"/>
           </a:p>
@@ -29029,7 +29838,7 @@
         </p:nvSpPr>
         <p:spPr>
           <a:xfrm>
-            <a:off x="5803392" y="2258568"/>
+            <a:off x="4370832" y="2258568"/>
             <a:ext cx="1828800" cy="292608"/>
           </a:xfrm>
           <a:prstGeom prst="rect">
@@ -29063,7 +29872,7 @@
         </p:nvSpPr>
         <p:spPr>
           <a:xfrm>
-            <a:off x="5803392" y="2258568"/>
+            <a:off x="4370832" y="2258568"/>
             <a:ext cx="1828800" cy="292608"/>
           </a:xfrm>
           <a:prstGeom prst="rect">
@@ -29088,7 +29897,7 @@
                 <a:ea typeface="Trebuchet MS" pitchFamily="34" charset="-122"/>
                 <a:cs typeface="Trebuchet MS" pitchFamily="34" charset="-120"/>
               </a:rPr>
-              <a:t>ness</a:t>
+              <a:t>en</a:t>
             </a:r>
             <a:endParaRPr lang="en-US" sz="1300" dirty="0"/>
           </a:p>
@@ -29102,7 +29911,7 @@
         </p:nvSpPr>
         <p:spPr>
           <a:xfrm>
-            <a:off x="5803392" y="2569464"/>
+            <a:off x="4370832" y="2569464"/>
             <a:ext cx="1828800" cy="201168"/>
           </a:xfrm>
           <a:prstGeom prst="rect">
@@ -29127,7 +29936,7 @@
                 <a:ea typeface="Calibri" pitchFamily="34" charset="-122"/>
                 <a:cs typeface="Calibri" pitchFamily="34" charset="-120"/>
               </a:rPr>
-              <a:t>the quality or state of</a:t>
+              <a:t>made of; to make</a:t>
             </a:r>
             <a:endParaRPr lang="en-US" sz="850" dirty="0"/>
           </a:p>
@@ -29136,6 +29945,118 @@
       <p:sp>
         <p:nvSpPr>
           <p:cNvPr id="22" name="Shape 20"/>
+          <p:cNvSpPr/>
+          <p:nvPr/>
+        </p:nvSpPr>
+        <p:spPr>
+          <a:xfrm>
+            <a:off x="6519672" y="2258568"/>
+            <a:ext cx="1828800" cy="292608"/>
+          </a:xfrm>
+          <a:prstGeom prst="rect">
+            <a:avLst>
+              <a:gd name="adj" fmla="val 25000"/>
+            </a:avLst>
+          </a:prstGeom>
+          <a:solidFill>
+            <a:srgbClr val="FCE7F3"/>
+          </a:solidFill>
+          <a:ln w="19050">
+            <a:solidFill>
+              <a:srgbClr val="DB2777"/>
+            </a:solidFill>
+            <a:prstDash val="solid"/>
+          </a:ln>
+          <a:effectLst>
+            <a:outerShdw sx="100000" sy="100000" kx="0" ky="0" algn="bl" rotWithShape="0" blurRad="101600" dist="38100" dir="8100000">
+              <a:srgbClr val="000000">
+                <a:alpha val="12000"/>
+              </a:srgbClr>
+            </a:outerShdw>
+          </a:effectLst>
+        </p:spPr>
+      </p:sp>
+      <p:sp>
+        <p:nvSpPr>
+          <p:cNvPr id="23" name="Text 21"/>
+          <p:cNvSpPr/>
+          <p:nvPr/>
+        </p:nvSpPr>
+        <p:spPr>
+          <a:xfrm>
+            <a:off x="6519672" y="2258568"/>
+            <a:ext cx="1828800" cy="292608"/>
+          </a:xfrm>
+          <a:prstGeom prst="rect">
+            <a:avLst/>
+          </a:prstGeom>
+          <a:noFill/>
+          <a:ln/>
+        </p:spPr>
+        <p:txBody>
+          <a:bodyPr wrap="square" lIns="0" tIns="0" rIns="0" bIns="0" rtlCol="0" anchor="ctr"/>
+          <a:lstStyle/>
+          <a:p>
+            <a:pPr algn="ctr" indent="0" marL="0">
+              <a:buNone/>
+            </a:pPr>
+            <a:r>
+              <a:rPr lang="en-US" sz="1300" b="1" dirty="0">
+                <a:solidFill>
+                  <a:srgbClr val="9D174D"/>
+                </a:solidFill>
+                <a:latin typeface="Trebuchet MS" pitchFamily="34" charset="0"/>
+                <a:ea typeface="Trebuchet MS" pitchFamily="34" charset="-122"/>
+                <a:cs typeface="Trebuchet MS" pitchFamily="34" charset="-120"/>
+              </a:rPr>
+              <a:t>ing</a:t>
+            </a:r>
+            <a:endParaRPr lang="en-US" sz="1300" dirty="0"/>
+          </a:p>
+        </p:txBody>
+      </p:sp>
+      <p:sp>
+        <p:nvSpPr>
+          <p:cNvPr id="24" name="Text 22"/>
+          <p:cNvSpPr/>
+          <p:nvPr/>
+        </p:nvSpPr>
+        <p:spPr>
+          <a:xfrm>
+            <a:off x="6519672" y="2569464"/>
+            <a:ext cx="1828800" cy="201168"/>
+          </a:xfrm>
+          <a:prstGeom prst="rect">
+            <a:avLst/>
+          </a:prstGeom>
+          <a:noFill/>
+          <a:ln/>
+        </p:spPr>
+        <p:txBody>
+          <a:bodyPr wrap="square" lIns="0" tIns="0" rIns="0" bIns="0" rtlCol="0" anchor="t"/>
+          <a:lstStyle/>
+          <a:p>
+            <a:pPr algn="ctr" indent="0" marL="0">
+              <a:buNone/>
+            </a:pPr>
+            <a:r>
+              <a:rPr lang="en-US" sz="850" dirty="0">
+                <a:solidFill>
+                  <a:srgbClr val="475569"/>
+                </a:solidFill>
+                <a:latin typeface="Calibri" pitchFamily="34" charset="0"/>
+                <a:ea typeface="Calibri" pitchFamily="34" charset="-122"/>
+                <a:cs typeface="Calibri" pitchFamily="34" charset="-120"/>
+              </a:rPr>
+              <a:t>happening now</a:t>
+            </a:r>
+            <a:endParaRPr lang="en-US" sz="850" dirty="0"/>
+          </a:p>
+        </p:txBody>
+      </p:sp>
+      <p:sp>
+        <p:nvSpPr>
+          <p:cNvPr id="25" name="Shape 23"/>
           <p:cNvSpPr/>
           <p:nvPr/>
         </p:nvSpPr>
@@ -29162,7 +30083,7 @@
       </p:sp>
       <p:sp>
         <p:nvSpPr>
-          <p:cNvPr id="23" name="Text 21"/>
+          <p:cNvPr id="26" name="Text 24"/>
           <p:cNvSpPr/>
           <p:nvPr/>
         </p:nvSpPr>
@@ -29201,7 +30122,7 @@
       </p:sp>
       <p:sp>
         <p:nvSpPr>
-          <p:cNvPr id="24" name="Shape 22"/>
+          <p:cNvPr id="27" name="Shape 25"/>
           <p:cNvSpPr/>
           <p:nvPr/>
         </p:nvSpPr>
@@ -29228,13 +30149,13 @@
       </p:sp>
       <p:sp>
         <p:nvSpPr>
-          <p:cNvPr id="25" name="Shape 23"/>
-          <p:cNvSpPr/>
-          <p:nvPr/>
-        </p:nvSpPr>
-        <p:spPr>
-          <a:xfrm>
-            <a:off x="2999232" y="3364992"/>
+          <p:cNvPr id="28" name="Shape 26"/>
+          <p:cNvSpPr/>
+          <p:nvPr/>
+        </p:nvSpPr>
+        <p:spPr>
+          <a:xfrm>
+            <a:off x="2313432" y="3364992"/>
             <a:ext cx="1645920" cy="475488"/>
           </a:xfrm>
           <a:prstGeom prst="rect">
@@ -29255,13 +30176,13 @@
       </p:sp>
       <p:sp>
         <p:nvSpPr>
-          <p:cNvPr id="26" name="Text 24"/>
-          <p:cNvSpPr/>
-          <p:nvPr/>
-        </p:nvSpPr>
-        <p:spPr>
-          <a:xfrm>
-            <a:off x="2999232" y="3364992"/>
+          <p:cNvPr id="29" name="Text 27"/>
+          <p:cNvSpPr/>
+          <p:nvPr/>
+        </p:nvSpPr>
+        <p:spPr>
+          <a:xfrm>
+            <a:off x="2313432" y="3364992"/>
             <a:ext cx="1645920" cy="475488"/>
           </a:xfrm>
           <a:prstGeom prst="rect">
@@ -29294,14 +30215,14 @@
       </p:sp>
       <p:sp>
         <p:nvSpPr>
-          <p:cNvPr id="27" name="Text 25"/>
-          <p:cNvSpPr/>
-          <p:nvPr/>
-        </p:nvSpPr>
-        <p:spPr>
-          <a:xfrm>
-            <a:off x="4645152" y="3364992"/>
-            <a:ext cx="1097280" cy="475488"/>
+          <p:cNvPr id="30" name="Text 28"/>
+          <p:cNvSpPr/>
+          <p:nvPr/>
+        </p:nvSpPr>
+        <p:spPr>
+          <a:xfrm>
+            <a:off x="3959352" y="3364992"/>
+            <a:ext cx="411480" cy="475488"/>
           </a:xfrm>
           <a:prstGeom prst="rect">
             <a:avLst/>
@@ -29333,13 +30254,13 @@
       </p:sp>
       <p:sp>
         <p:nvSpPr>
-          <p:cNvPr id="28" name="Shape 26"/>
-          <p:cNvSpPr/>
-          <p:nvPr/>
-        </p:nvSpPr>
-        <p:spPr>
-          <a:xfrm>
-            <a:off x="5742432" y="3364992"/>
+          <p:cNvPr id="31" name="Shape 29"/>
+          <p:cNvSpPr/>
+          <p:nvPr/>
+        </p:nvSpPr>
+        <p:spPr>
+          <a:xfrm>
+            <a:off x="4370832" y="3364992"/>
             <a:ext cx="1645920" cy="475488"/>
           </a:xfrm>
           <a:prstGeom prst="rect">
@@ -29360,13 +30281,13 @@
       </p:sp>
       <p:sp>
         <p:nvSpPr>
-          <p:cNvPr id="29" name="Text 27"/>
-          <p:cNvSpPr/>
-          <p:nvPr/>
-        </p:nvSpPr>
-        <p:spPr>
-          <a:xfrm>
-            <a:off x="5742432" y="3364992"/>
+          <p:cNvPr id="32" name="Text 30"/>
+          <p:cNvSpPr/>
+          <p:nvPr/>
+        </p:nvSpPr>
+        <p:spPr>
+          <a:xfrm>
+            <a:off x="4370832" y="3364992"/>
             <a:ext cx="1645920" cy="475488"/>
           </a:xfrm>
           <a:prstGeom prst="rect">
@@ -29391,7 +30312,7 @@
                 <a:ea typeface="Trebuchet MS" pitchFamily="34" charset="-122"/>
                 <a:cs typeface="Trebuchet MS" pitchFamily="34" charset="-120"/>
               </a:rPr>
-              <a:t>ness</a:t>
+              <a:t>en</a:t>
             </a:r>
             <a:endParaRPr lang="en-US" sz="1400" dirty="0"/>
           </a:p>
@@ -29399,7 +30320,112 @@
       </p:sp>
       <p:sp>
         <p:nvSpPr>
-          <p:cNvPr id="30" name="Shape 28"/>
+          <p:cNvPr id="33" name="Text 31"/>
+          <p:cNvSpPr/>
+          <p:nvPr/>
+        </p:nvSpPr>
+        <p:spPr>
+          <a:xfrm>
+            <a:off x="6016752" y="3364992"/>
+            <a:ext cx="411480" cy="475488"/>
+          </a:xfrm>
+          <a:prstGeom prst="rect">
+            <a:avLst/>
+          </a:prstGeom>
+          <a:noFill/>
+          <a:ln/>
+        </p:spPr>
+        <p:txBody>
+          <a:bodyPr wrap="square" lIns="0" tIns="0" rIns="0" bIns="0" rtlCol="0" anchor="ctr"/>
+          <a:lstStyle/>
+          <a:p>
+            <a:pPr algn="ctr" indent="0" marL="0">
+              <a:buNone/>
+            </a:pPr>
+            <a:r>
+              <a:rPr lang="en-US" sz="1600" b="1" dirty="0">
+                <a:solidFill>
+                  <a:srgbClr val="0D9488"/>
+                </a:solidFill>
+                <a:latin typeface="Trebuchet MS" pitchFamily="34" charset="0"/>
+                <a:ea typeface="Trebuchet MS" pitchFamily="34" charset="-122"/>
+                <a:cs typeface="Trebuchet MS" pitchFamily="34" charset="-120"/>
+              </a:rPr>
+              <a:t>·</a:t>
+            </a:r>
+            <a:endParaRPr lang="en-US" sz="1600" dirty="0"/>
+          </a:p>
+        </p:txBody>
+      </p:sp>
+      <p:sp>
+        <p:nvSpPr>
+          <p:cNvPr id="34" name="Shape 32"/>
+          <p:cNvSpPr/>
+          <p:nvPr/>
+        </p:nvSpPr>
+        <p:spPr>
+          <a:xfrm>
+            <a:off x="6428232" y="3364992"/>
+            <a:ext cx="1645920" cy="475488"/>
+          </a:xfrm>
+          <a:prstGeom prst="rect">
+            <a:avLst>
+              <a:gd name="adj" fmla="val 9615"/>
+            </a:avLst>
+          </a:prstGeom>
+          <a:solidFill>
+            <a:srgbClr val="FFFFFF"/>
+          </a:solidFill>
+          <a:ln w="12700">
+            <a:solidFill>
+              <a:srgbClr val="0D9488"/>
+            </a:solidFill>
+            <a:prstDash val="solid"/>
+          </a:ln>
+        </p:spPr>
+      </p:sp>
+      <p:sp>
+        <p:nvSpPr>
+          <p:cNvPr id="35" name="Text 33"/>
+          <p:cNvSpPr/>
+          <p:nvPr/>
+        </p:nvSpPr>
+        <p:spPr>
+          <a:xfrm>
+            <a:off x="6428232" y="3364992"/>
+            <a:ext cx="1645920" cy="475488"/>
+          </a:xfrm>
+          <a:prstGeom prst="rect">
+            <a:avLst/>
+          </a:prstGeom>
+          <a:noFill/>
+          <a:ln/>
+        </p:spPr>
+        <p:txBody>
+          <a:bodyPr wrap="square" lIns="0" tIns="0" rIns="0" bIns="0" rtlCol="0" anchor="ctr"/>
+          <a:lstStyle/>
+          <a:p>
+            <a:pPr algn="ctr" indent="0" marL="0">
+              <a:buNone/>
+            </a:pPr>
+            <a:r>
+              <a:rPr lang="en-US" sz="1400" b="1" dirty="0">
+                <a:solidFill>
+                  <a:srgbClr val="0D9488"/>
+                </a:solidFill>
+                <a:latin typeface="Trebuchet MS" pitchFamily="34" charset="0"/>
+                <a:ea typeface="Trebuchet MS" pitchFamily="34" charset="-122"/>
+                <a:cs typeface="Trebuchet MS" pitchFamily="34" charset="-120"/>
+              </a:rPr>
+              <a:t>ing</a:t>
+            </a:r>
+            <a:endParaRPr lang="en-US" sz="1400" dirty="0"/>
+          </a:p>
+        </p:txBody>
+      </p:sp>
+      <p:sp>
+        <p:nvSpPr>
+          <p:cNvPr id="36" name="Shape 34"/>
           <p:cNvSpPr/>
           <p:nvPr/>
         </p:nvSpPr>
@@ -29426,7 +30452,7 @@
       </p:sp>
       <p:sp>
         <p:nvSpPr>
-          <p:cNvPr id="31" name="Text 29"/>
+          <p:cNvPr id="37" name="Text 35"/>
           <p:cNvSpPr/>
           <p:nvPr/>
         </p:nvSpPr>
@@ -29465,7 +30491,7 @@
       </p:sp>
       <p:sp>
         <p:nvSpPr>
-          <p:cNvPr id="32" name="Shape 30"/>
+          <p:cNvPr id="38" name="Shape 36"/>
           <p:cNvSpPr/>
           <p:nvPr/>
         </p:nvSpPr>
@@ -29492,7 +30518,7 @@
       </p:sp>
       <p:sp>
         <p:nvSpPr>
-          <p:cNvPr id="33" name="Text 31"/>
+          <p:cNvPr id="39" name="Text 37"/>
           <p:cNvSpPr/>
           <p:nvPr/>
         </p:nvSpPr>
@@ -29815,7 +30841,7 @@
                 <a:ea typeface="Calibri" pitchFamily="34" charset="-122"/>
                 <a:cs typeface="Calibri" pitchFamily="34" charset="-120"/>
               </a:rPr>
-              <a:t>Word Labs  •  wordlabs.app  •  Root: 'deep' = far down, profound distance</a:t>
+              <a:t>Word Labs  •  wordlabs.app  •  Root: 'deep' = going far down or in</a:t>
             </a:r>
             <a:endParaRPr lang="en-US" sz="800" dirty="0"/>
           </a:p>
@@ -29954,7 +30980,7 @@
                 <a:ea typeface="Trebuchet MS" pitchFamily="34" charset="-122"/>
                 <a:cs typeface="Trebuchet MS" pitchFamily="34" charset="-120"/>
               </a:rPr>
-              <a:t>deepness</a:t>
+              <a:t>deepening</a:t>
             </a:r>
             <a:endParaRPr lang="en-US" sz="2800" dirty="0"/>
           </a:p>
@@ -30034,7 +31060,7 @@
         </p:nvSpPr>
         <p:spPr>
           <a:xfrm>
-            <a:off x="2938272" y="2258568"/>
+            <a:off x="2221992" y="2258568"/>
             <a:ext cx="1828800" cy="292608"/>
           </a:xfrm>
           <a:prstGeom prst="rect">
@@ -30068,7 +31094,7 @@
         </p:nvSpPr>
         <p:spPr>
           <a:xfrm>
-            <a:off x="2938272" y="2258568"/>
+            <a:off x="2221992" y="2258568"/>
             <a:ext cx="1828800" cy="292608"/>
           </a:xfrm>
           <a:prstGeom prst="rect">
@@ -30107,7 +31133,7 @@
         </p:nvSpPr>
         <p:spPr>
           <a:xfrm>
-            <a:off x="2938272" y="2569464"/>
+            <a:off x="2221992" y="2569464"/>
             <a:ext cx="1828800" cy="201168"/>
           </a:xfrm>
           <a:prstGeom prst="rect">
@@ -30132,7 +31158,7 @@
                 <a:ea typeface="Calibri" pitchFamily="34" charset="-122"/>
                 <a:cs typeface="Calibri" pitchFamily="34" charset="-120"/>
               </a:rPr>
-              <a:t>far down, profound</a:t>
+              <a:t>going far down or in</a:t>
             </a:r>
             <a:endParaRPr lang="en-US" sz="850" dirty="0"/>
           </a:p>
@@ -30146,7 +31172,7 @@
         </p:nvSpPr>
         <p:spPr>
           <a:xfrm>
-            <a:off x="5803392" y="2258568"/>
+            <a:off x="4370832" y="2258568"/>
             <a:ext cx="1828800" cy="292608"/>
           </a:xfrm>
           <a:prstGeom prst="rect">
@@ -30180,7 +31206,7 @@
         </p:nvSpPr>
         <p:spPr>
           <a:xfrm>
-            <a:off x="5803392" y="2258568"/>
+            <a:off x="4370832" y="2258568"/>
             <a:ext cx="1828800" cy="292608"/>
           </a:xfrm>
           <a:prstGeom prst="rect">
@@ -30205,7 +31231,7 @@
                 <a:ea typeface="Trebuchet MS" pitchFamily="34" charset="-122"/>
                 <a:cs typeface="Trebuchet MS" pitchFamily="34" charset="-120"/>
               </a:rPr>
-              <a:t>ness</a:t>
+              <a:t>en</a:t>
             </a:r>
             <a:endParaRPr lang="en-US" sz="1300" dirty="0"/>
           </a:p>
@@ -30219,7 +31245,7 @@
         </p:nvSpPr>
         <p:spPr>
           <a:xfrm>
-            <a:off x="5803392" y="2569464"/>
+            <a:off x="4370832" y="2569464"/>
             <a:ext cx="1828800" cy="201168"/>
           </a:xfrm>
           <a:prstGeom prst="rect">
@@ -30244,7 +31270,7 @@
                 <a:ea typeface="Calibri" pitchFamily="34" charset="-122"/>
                 <a:cs typeface="Calibri" pitchFamily="34" charset="-120"/>
               </a:rPr>
-              <a:t>the quality or state of</a:t>
+              <a:t>made of; to make</a:t>
             </a:r>
             <a:endParaRPr lang="en-US" sz="850" dirty="0"/>
           </a:p>
@@ -30253,6 +31279,118 @@
       <p:sp>
         <p:nvSpPr>
           <p:cNvPr id="22" name="Shape 20"/>
+          <p:cNvSpPr/>
+          <p:nvPr/>
+        </p:nvSpPr>
+        <p:spPr>
+          <a:xfrm>
+            <a:off x="6519672" y="2258568"/>
+            <a:ext cx="1828800" cy="292608"/>
+          </a:xfrm>
+          <a:prstGeom prst="rect">
+            <a:avLst>
+              <a:gd name="adj" fmla="val 25000"/>
+            </a:avLst>
+          </a:prstGeom>
+          <a:solidFill>
+            <a:srgbClr val="FCE7F3"/>
+          </a:solidFill>
+          <a:ln w="19050">
+            <a:solidFill>
+              <a:srgbClr val="DB2777"/>
+            </a:solidFill>
+            <a:prstDash val="solid"/>
+          </a:ln>
+          <a:effectLst>
+            <a:outerShdw sx="100000" sy="100000" kx="0" ky="0" algn="bl" rotWithShape="0" blurRad="101600" dist="38100" dir="8100000">
+              <a:srgbClr val="000000">
+                <a:alpha val="12000"/>
+              </a:srgbClr>
+            </a:outerShdw>
+          </a:effectLst>
+        </p:spPr>
+      </p:sp>
+      <p:sp>
+        <p:nvSpPr>
+          <p:cNvPr id="23" name="Text 21"/>
+          <p:cNvSpPr/>
+          <p:nvPr/>
+        </p:nvSpPr>
+        <p:spPr>
+          <a:xfrm>
+            <a:off x="6519672" y="2258568"/>
+            <a:ext cx="1828800" cy="292608"/>
+          </a:xfrm>
+          <a:prstGeom prst="rect">
+            <a:avLst/>
+          </a:prstGeom>
+          <a:noFill/>
+          <a:ln/>
+        </p:spPr>
+        <p:txBody>
+          <a:bodyPr wrap="square" lIns="0" tIns="0" rIns="0" bIns="0" rtlCol="0" anchor="ctr"/>
+          <a:lstStyle/>
+          <a:p>
+            <a:pPr algn="ctr" indent="0" marL="0">
+              <a:buNone/>
+            </a:pPr>
+            <a:r>
+              <a:rPr lang="en-US" sz="1300" b="1" dirty="0">
+                <a:solidFill>
+                  <a:srgbClr val="9D174D"/>
+                </a:solidFill>
+                <a:latin typeface="Trebuchet MS" pitchFamily="34" charset="0"/>
+                <a:ea typeface="Trebuchet MS" pitchFamily="34" charset="-122"/>
+                <a:cs typeface="Trebuchet MS" pitchFamily="34" charset="-120"/>
+              </a:rPr>
+              <a:t>ing</a:t>
+            </a:r>
+            <a:endParaRPr lang="en-US" sz="1300" dirty="0"/>
+          </a:p>
+        </p:txBody>
+      </p:sp>
+      <p:sp>
+        <p:nvSpPr>
+          <p:cNvPr id="24" name="Text 22"/>
+          <p:cNvSpPr/>
+          <p:nvPr/>
+        </p:nvSpPr>
+        <p:spPr>
+          <a:xfrm>
+            <a:off x="6519672" y="2569464"/>
+            <a:ext cx="1828800" cy="201168"/>
+          </a:xfrm>
+          <a:prstGeom prst="rect">
+            <a:avLst/>
+          </a:prstGeom>
+          <a:noFill/>
+          <a:ln/>
+        </p:spPr>
+        <p:txBody>
+          <a:bodyPr wrap="square" lIns="0" tIns="0" rIns="0" bIns="0" rtlCol="0" anchor="t"/>
+          <a:lstStyle/>
+          <a:p>
+            <a:pPr algn="ctr" indent="0" marL="0">
+              <a:buNone/>
+            </a:pPr>
+            <a:r>
+              <a:rPr lang="en-US" sz="850" dirty="0">
+                <a:solidFill>
+                  <a:srgbClr val="475569"/>
+                </a:solidFill>
+                <a:latin typeface="Calibri" pitchFamily="34" charset="0"/>
+                <a:ea typeface="Calibri" pitchFamily="34" charset="-122"/>
+                <a:cs typeface="Calibri" pitchFamily="34" charset="-120"/>
+              </a:rPr>
+              <a:t>happening now</a:t>
+            </a:r>
+            <a:endParaRPr lang="en-US" sz="850" dirty="0"/>
+          </a:p>
+        </p:txBody>
+      </p:sp>
+      <p:sp>
+        <p:nvSpPr>
+          <p:cNvPr id="25" name="Shape 23"/>
           <p:cNvSpPr/>
           <p:nvPr/>
         </p:nvSpPr>
@@ -30279,7 +31417,7 @@
       </p:sp>
       <p:sp>
         <p:nvSpPr>
-          <p:cNvPr id="23" name="Text 21"/>
+          <p:cNvPr id="26" name="Text 24"/>
           <p:cNvSpPr/>
           <p:nvPr/>
         </p:nvSpPr>
@@ -30318,7 +31456,7 @@
       </p:sp>
       <p:sp>
         <p:nvSpPr>
-          <p:cNvPr id="24" name="Shape 22"/>
+          <p:cNvPr id="27" name="Shape 25"/>
           <p:cNvSpPr/>
           <p:nvPr/>
         </p:nvSpPr>
@@ -30345,13 +31483,13 @@
       </p:sp>
       <p:sp>
         <p:nvSpPr>
-          <p:cNvPr id="25" name="Shape 23"/>
-          <p:cNvSpPr/>
-          <p:nvPr/>
-        </p:nvSpPr>
-        <p:spPr>
-          <a:xfrm>
-            <a:off x="2999232" y="3364992"/>
+          <p:cNvPr id="28" name="Shape 26"/>
+          <p:cNvSpPr/>
+          <p:nvPr/>
+        </p:nvSpPr>
+        <p:spPr>
+          <a:xfrm>
+            <a:off x="2313432" y="3364992"/>
             <a:ext cx="1645920" cy="475488"/>
           </a:xfrm>
           <a:prstGeom prst="rect">
@@ -30372,13 +31510,13 @@
       </p:sp>
       <p:sp>
         <p:nvSpPr>
-          <p:cNvPr id="26" name="Text 24"/>
-          <p:cNvSpPr/>
-          <p:nvPr/>
-        </p:nvSpPr>
-        <p:spPr>
-          <a:xfrm>
-            <a:off x="2999232" y="3364992"/>
+          <p:cNvPr id="29" name="Text 27"/>
+          <p:cNvSpPr/>
+          <p:nvPr/>
+        </p:nvSpPr>
+        <p:spPr>
+          <a:xfrm>
+            <a:off x="2313432" y="3364992"/>
             <a:ext cx="1645920" cy="475488"/>
           </a:xfrm>
           <a:prstGeom prst="rect">
@@ -30411,14 +31549,14 @@
       </p:sp>
       <p:sp>
         <p:nvSpPr>
-          <p:cNvPr id="27" name="Text 25"/>
-          <p:cNvSpPr/>
-          <p:nvPr/>
-        </p:nvSpPr>
-        <p:spPr>
-          <a:xfrm>
-            <a:off x="4645152" y="3364992"/>
-            <a:ext cx="1097280" cy="475488"/>
+          <p:cNvPr id="30" name="Text 28"/>
+          <p:cNvSpPr/>
+          <p:nvPr/>
+        </p:nvSpPr>
+        <p:spPr>
+          <a:xfrm>
+            <a:off x="3959352" y="3364992"/>
+            <a:ext cx="411480" cy="475488"/>
           </a:xfrm>
           <a:prstGeom prst="rect">
             <a:avLst/>
@@ -30450,13 +31588,13 @@
       </p:sp>
       <p:sp>
         <p:nvSpPr>
-          <p:cNvPr id="28" name="Shape 26"/>
-          <p:cNvSpPr/>
-          <p:nvPr/>
-        </p:nvSpPr>
-        <p:spPr>
-          <a:xfrm>
-            <a:off x="5742432" y="3364992"/>
+          <p:cNvPr id="31" name="Shape 29"/>
+          <p:cNvSpPr/>
+          <p:nvPr/>
+        </p:nvSpPr>
+        <p:spPr>
+          <a:xfrm>
+            <a:off x="4370832" y="3364992"/>
             <a:ext cx="1645920" cy="475488"/>
           </a:xfrm>
           <a:prstGeom prst="rect">
@@ -30477,13 +31615,13 @@
       </p:sp>
       <p:sp>
         <p:nvSpPr>
-          <p:cNvPr id="29" name="Text 27"/>
-          <p:cNvSpPr/>
-          <p:nvPr/>
-        </p:nvSpPr>
-        <p:spPr>
-          <a:xfrm>
-            <a:off x="5742432" y="3364992"/>
+          <p:cNvPr id="32" name="Text 30"/>
+          <p:cNvSpPr/>
+          <p:nvPr/>
+        </p:nvSpPr>
+        <p:spPr>
+          <a:xfrm>
+            <a:off x="4370832" y="3364992"/>
             <a:ext cx="1645920" cy="475488"/>
           </a:xfrm>
           <a:prstGeom prst="rect">
@@ -30508,7 +31646,7 @@
                 <a:ea typeface="Trebuchet MS" pitchFamily="34" charset="-122"/>
                 <a:cs typeface="Trebuchet MS" pitchFamily="34" charset="-120"/>
               </a:rPr>
-              <a:t>ness</a:t>
+              <a:t>en</a:t>
             </a:r>
             <a:endParaRPr lang="en-US" sz="1400" dirty="0"/>
           </a:p>
@@ -30516,7 +31654,112 @@
       </p:sp>
       <p:sp>
         <p:nvSpPr>
-          <p:cNvPr id="30" name="Shape 28"/>
+          <p:cNvPr id="33" name="Text 31"/>
+          <p:cNvSpPr/>
+          <p:nvPr/>
+        </p:nvSpPr>
+        <p:spPr>
+          <a:xfrm>
+            <a:off x="6016752" y="3364992"/>
+            <a:ext cx="411480" cy="475488"/>
+          </a:xfrm>
+          <a:prstGeom prst="rect">
+            <a:avLst/>
+          </a:prstGeom>
+          <a:noFill/>
+          <a:ln/>
+        </p:spPr>
+        <p:txBody>
+          <a:bodyPr wrap="square" lIns="0" tIns="0" rIns="0" bIns="0" rtlCol="0" anchor="ctr"/>
+          <a:lstStyle/>
+          <a:p>
+            <a:pPr algn="ctr" indent="0" marL="0">
+              <a:buNone/>
+            </a:pPr>
+            <a:r>
+              <a:rPr lang="en-US" sz="1600" b="1" dirty="0">
+                <a:solidFill>
+                  <a:srgbClr val="0D9488"/>
+                </a:solidFill>
+                <a:latin typeface="Trebuchet MS" pitchFamily="34" charset="0"/>
+                <a:ea typeface="Trebuchet MS" pitchFamily="34" charset="-122"/>
+                <a:cs typeface="Trebuchet MS" pitchFamily="34" charset="-120"/>
+              </a:rPr>
+              <a:t>·</a:t>
+            </a:r>
+            <a:endParaRPr lang="en-US" sz="1600" dirty="0"/>
+          </a:p>
+        </p:txBody>
+      </p:sp>
+      <p:sp>
+        <p:nvSpPr>
+          <p:cNvPr id="34" name="Shape 32"/>
+          <p:cNvSpPr/>
+          <p:nvPr/>
+        </p:nvSpPr>
+        <p:spPr>
+          <a:xfrm>
+            <a:off x="6428232" y="3364992"/>
+            <a:ext cx="1645920" cy="475488"/>
+          </a:xfrm>
+          <a:prstGeom prst="rect">
+            <a:avLst>
+              <a:gd name="adj" fmla="val 9615"/>
+            </a:avLst>
+          </a:prstGeom>
+          <a:solidFill>
+            <a:srgbClr val="FFFFFF"/>
+          </a:solidFill>
+          <a:ln w="12700">
+            <a:solidFill>
+              <a:srgbClr val="0D9488"/>
+            </a:solidFill>
+            <a:prstDash val="solid"/>
+          </a:ln>
+        </p:spPr>
+      </p:sp>
+      <p:sp>
+        <p:nvSpPr>
+          <p:cNvPr id="35" name="Text 33"/>
+          <p:cNvSpPr/>
+          <p:nvPr/>
+        </p:nvSpPr>
+        <p:spPr>
+          <a:xfrm>
+            <a:off x="6428232" y="3364992"/>
+            <a:ext cx="1645920" cy="475488"/>
+          </a:xfrm>
+          <a:prstGeom prst="rect">
+            <a:avLst/>
+          </a:prstGeom>
+          <a:noFill/>
+          <a:ln/>
+        </p:spPr>
+        <p:txBody>
+          <a:bodyPr wrap="square" lIns="0" tIns="0" rIns="0" bIns="0" rtlCol="0" anchor="ctr"/>
+          <a:lstStyle/>
+          <a:p>
+            <a:pPr algn="ctr" indent="0" marL="0">
+              <a:buNone/>
+            </a:pPr>
+            <a:r>
+              <a:rPr lang="en-US" sz="1400" b="1" dirty="0">
+                <a:solidFill>
+                  <a:srgbClr val="0D9488"/>
+                </a:solidFill>
+                <a:latin typeface="Trebuchet MS" pitchFamily="34" charset="0"/>
+                <a:ea typeface="Trebuchet MS" pitchFamily="34" charset="-122"/>
+                <a:cs typeface="Trebuchet MS" pitchFamily="34" charset="-120"/>
+              </a:rPr>
+              <a:t>ing</a:t>
+            </a:r>
+            <a:endParaRPr lang="en-US" sz="1400" dirty="0"/>
+          </a:p>
+        </p:txBody>
+      </p:sp>
+      <p:sp>
+        <p:nvSpPr>
+          <p:cNvPr id="36" name="Shape 34"/>
           <p:cNvSpPr/>
           <p:nvPr/>
         </p:nvSpPr>
@@ -30543,7 +31786,7 @@
       </p:sp>
       <p:sp>
         <p:nvSpPr>
-          <p:cNvPr id="31" name="Text 29"/>
+          <p:cNvPr id="37" name="Text 35"/>
           <p:cNvSpPr/>
           <p:nvPr/>
         </p:nvSpPr>
@@ -30582,7 +31825,7 @@
       </p:sp>
       <p:sp>
         <p:nvSpPr>
-          <p:cNvPr id="32" name="Shape 30"/>
+          <p:cNvPr id="38" name="Shape 36"/>
           <p:cNvSpPr/>
           <p:nvPr/>
         </p:nvSpPr>
@@ -30609,13 +31852,13 @@
       </p:sp>
       <p:sp>
         <p:nvSpPr>
-          <p:cNvPr id="33" name="Shape 31"/>
-          <p:cNvSpPr/>
-          <p:nvPr/>
-        </p:nvSpPr>
-        <p:spPr>
-          <a:xfrm>
-            <a:off x="2254649" y="4169664"/>
+          <p:cNvPr id="39" name="Shape 37"/>
+          <p:cNvSpPr/>
+          <p:nvPr/>
+        </p:nvSpPr>
+        <p:spPr>
+          <a:xfrm>
+            <a:off x="2124837" y="4169664"/>
             <a:ext cx="685800" cy="475488"/>
           </a:xfrm>
           <a:prstGeom prst="rect">
@@ -30636,13 +31879,13 @@
       </p:sp>
       <p:sp>
         <p:nvSpPr>
-          <p:cNvPr id="34" name="Text 32"/>
-          <p:cNvSpPr/>
-          <p:nvPr/>
-        </p:nvSpPr>
-        <p:spPr>
-          <a:xfrm>
-            <a:off x="2254649" y="4169664"/>
+          <p:cNvPr id="40" name="Text 38"/>
+          <p:cNvSpPr/>
+          <p:nvPr/>
+        </p:nvSpPr>
+        <p:spPr>
+          <a:xfrm>
+            <a:off x="2124837" y="4169664"/>
             <a:ext cx="685800" cy="475488"/>
           </a:xfrm>
           <a:prstGeom prst="rect">
@@ -30675,13 +31918,13 @@
       </p:sp>
       <p:sp>
         <p:nvSpPr>
-          <p:cNvPr id="35" name="Shape 33"/>
-          <p:cNvSpPr/>
-          <p:nvPr/>
-        </p:nvSpPr>
-        <p:spPr>
-          <a:xfrm>
-            <a:off x="3293146" y="4169664"/>
+          <p:cNvPr id="41" name="Shape 39"/>
+          <p:cNvSpPr/>
+          <p:nvPr/>
+        </p:nvSpPr>
+        <p:spPr>
+          <a:xfrm>
+            <a:off x="3033522" y="4169664"/>
             <a:ext cx="685800" cy="475488"/>
           </a:xfrm>
           <a:prstGeom prst="rect">
@@ -30702,13 +31945,13 @@
       </p:sp>
       <p:sp>
         <p:nvSpPr>
-          <p:cNvPr id="36" name="Text 34"/>
-          <p:cNvSpPr/>
-          <p:nvPr/>
-        </p:nvSpPr>
-        <p:spPr>
-          <a:xfrm>
-            <a:off x="3293146" y="4169664"/>
+          <p:cNvPr id="42" name="Text 40"/>
+          <p:cNvSpPr/>
+          <p:nvPr/>
+        </p:nvSpPr>
+        <p:spPr>
+          <a:xfrm>
+            <a:off x="3033522" y="4169664"/>
             <a:ext cx="685800" cy="475488"/>
           </a:xfrm>
           <a:prstGeom prst="rect">
@@ -30741,13 +31984,13 @@
       </p:sp>
       <p:sp>
         <p:nvSpPr>
-          <p:cNvPr id="37" name="Shape 35"/>
-          <p:cNvSpPr/>
-          <p:nvPr/>
-        </p:nvSpPr>
-        <p:spPr>
-          <a:xfrm>
-            <a:off x="4331643" y="4169664"/>
+          <p:cNvPr id="43" name="Shape 41"/>
+          <p:cNvSpPr/>
+          <p:nvPr/>
+        </p:nvSpPr>
+        <p:spPr>
+          <a:xfrm>
+            <a:off x="3942207" y="4169664"/>
             <a:ext cx="685800" cy="475488"/>
           </a:xfrm>
           <a:prstGeom prst="rect">
@@ -30768,13 +32011,13 @@
       </p:sp>
       <p:sp>
         <p:nvSpPr>
-          <p:cNvPr id="38" name="Text 36"/>
-          <p:cNvSpPr/>
-          <p:nvPr/>
-        </p:nvSpPr>
-        <p:spPr>
-          <a:xfrm>
-            <a:off x="4331643" y="4169664"/>
+          <p:cNvPr id="44" name="Text 42"/>
+          <p:cNvSpPr/>
+          <p:nvPr/>
+        </p:nvSpPr>
+        <p:spPr>
+          <a:xfrm>
+            <a:off x="3942207" y="4169664"/>
             <a:ext cx="685800" cy="475488"/>
           </a:xfrm>
           <a:prstGeom prst="rect">
@@ -30807,13 +32050,13 @@
       </p:sp>
       <p:sp>
         <p:nvSpPr>
-          <p:cNvPr id="39" name="Shape 37"/>
-          <p:cNvSpPr/>
-          <p:nvPr/>
-        </p:nvSpPr>
-        <p:spPr>
-          <a:xfrm>
-            <a:off x="5370141" y="4169664"/>
+          <p:cNvPr id="45" name="Shape 43"/>
+          <p:cNvSpPr/>
+          <p:nvPr/>
+        </p:nvSpPr>
+        <p:spPr>
+          <a:xfrm>
+            <a:off x="4850892" y="4169664"/>
             <a:ext cx="685800" cy="475488"/>
           </a:xfrm>
           <a:prstGeom prst="rect">
@@ -30834,13 +32077,13 @@
       </p:sp>
       <p:sp>
         <p:nvSpPr>
-          <p:cNvPr id="40" name="Text 38"/>
-          <p:cNvSpPr/>
-          <p:nvPr/>
-        </p:nvSpPr>
-        <p:spPr>
-          <a:xfrm>
-            <a:off x="5370141" y="4169664"/>
+          <p:cNvPr id="46" name="Text 44"/>
+          <p:cNvSpPr/>
+          <p:nvPr/>
+        </p:nvSpPr>
+        <p:spPr>
+          <a:xfrm>
+            <a:off x="4850892" y="4169664"/>
             <a:ext cx="685800" cy="475488"/>
           </a:xfrm>
           <a:prstGeom prst="rect">
@@ -30865,7 +32108,7 @@
                 <a:ea typeface="Trebuchet MS" pitchFamily="34" charset="-122"/>
                 <a:cs typeface="Trebuchet MS" pitchFamily="34" charset="-120"/>
               </a:rPr>
-              <a:t>n</a:t>
+              <a:t>e</a:t>
             </a:r>
             <a:endParaRPr lang="en-US" sz="900" dirty="0"/>
           </a:p>
@@ -30873,13 +32116,13 @@
       </p:sp>
       <p:sp>
         <p:nvSpPr>
-          <p:cNvPr id="41" name="Shape 39"/>
-          <p:cNvSpPr/>
-          <p:nvPr/>
-        </p:nvSpPr>
-        <p:spPr>
-          <a:xfrm>
-            <a:off x="6408638" y="4169664"/>
+          <p:cNvPr id="47" name="Shape 45"/>
+          <p:cNvSpPr/>
+          <p:nvPr/>
+        </p:nvSpPr>
+        <p:spPr>
+          <a:xfrm>
+            <a:off x="5759577" y="4169664"/>
             <a:ext cx="685800" cy="475488"/>
           </a:xfrm>
           <a:prstGeom prst="rect">
@@ -30900,13 +32143,13 @@
       </p:sp>
       <p:sp>
         <p:nvSpPr>
-          <p:cNvPr id="42" name="Text 40"/>
-          <p:cNvSpPr/>
-          <p:nvPr/>
-        </p:nvSpPr>
-        <p:spPr>
-          <a:xfrm>
-            <a:off x="6408638" y="4169664"/>
+          <p:cNvPr id="48" name="Text 46"/>
+          <p:cNvSpPr/>
+          <p:nvPr/>
+        </p:nvSpPr>
+        <p:spPr>
+          <a:xfrm>
+            <a:off x="5759577" y="4169664"/>
             <a:ext cx="685800" cy="475488"/>
           </a:xfrm>
           <a:prstGeom prst="rect">
@@ -30931,7 +32174,7 @@
                 <a:ea typeface="Trebuchet MS" pitchFamily="34" charset="-122"/>
                 <a:cs typeface="Trebuchet MS" pitchFamily="34" charset="-120"/>
               </a:rPr>
-              <a:t>e</a:t>
+              <a:t>n</a:t>
             </a:r>
             <a:endParaRPr lang="en-US" sz="900" dirty="0"/>
           </a:p>
@@ -30939,13 +32182,13 @@
       </p:sp>
       <p:sp>
         <p:nvSpPr>
-          <p:cNvPr id="43" name="Shape 41"/>
-          <p:cNvSpPr/>
-          <p:nvPr/>
-        </p:nvSpPr>
-        <p:spPr>
-          <a:xfrm>
-            <a:off x="7447135" y="4169664"/>
+          <p:cNvPr id="49" name="Shape 47"/>
+          <p:cNvSpPr/>
+          <p:nvPr/>
+        </p:nvSpPr>
+        <p:spPr>
+          <a:xfrm>
+            <a:off x="6668262" y="4169664"/>
             <a:ext cx="685800" cy="475488"/>
           </a:xfrm>
           <a:prstGeom prst="rect">
@@ -30966,13 +32209,13 @@
       </p:sp>
       <p:sp>
         <p:nvSpPr>
-          <p:cNvPr id="44" name="Text 42"/>
-          <p:cNvSpPr/>
-          <p:nvPr/>
-        </p:nvSpPr>
-        <p:spPr>
-          <a:xfrm>
-            <a:off x="7447135" y="4169664"/>
+          <p:cNvPr id="50" name="Text 48"/>
+          <p:cNvSpPr/>
+          <p:nvPr/>
+        </p:nvSpPr>
+        <p:spPr>
+          <a:xfrm>
+            <a:off x="6668262" y="4169664"/>
             <a:ext cx="685800" cy="475488"/>
           </a:xfrm>
           <a:prstGeom prst="rect">
@@ -30997,7 +32240,73 @@
                 <a:ea typeface="Trebuchet MS" pitchFamily="34" charset="-122"/>
                 <a:cs typeface="Trebuchet MS" pitchFamily="34" charset="-120"/>
               </a:rPr>
-              <a:t>ss</a:t>
+              <a:t>i</a:t>
+            </a:r>
+            <a:endParaRPr lang="en-US" sz="900" dirty="0"/>
+          </a:p>
+        </p:txBody>
+      </p:sp>
+      <p:sp>
+        <p:nvSpPr>
+          <p:cNvPr id="51" name="Shape 49"/>
+          <p:cNvSpPr/>
+          <p:nvPr/>
+        </p:nvSpPr>
+        <p:spPr>
+          <a:xfrm>
+            <a:off x="7576947" y="4169664"/>
+            <a:ext cx="685800" cy="475488"/>
+          </a:xfrm>
+          <a:prstGeom prst="rect">
+            <a:avLst>
+              <a:gd name="adj" fmla="val 7692"/>
+            </a:avLst>
+          </a:prstGeom>
+          <a:solidFill>
+            <a:srgbClr val="FFFFFF"/>
+          </a:solidFill>
+          <a:ln w="12700">
+            <a:solidFill>
+              <a:srgbClr val="DB2777"/>
+            </a:solidFill>
+            <a:prstDash val="solid"/>
+          </a:ln>
+        </p:spPr>
+      </p:sp>
+      <p:sp>
+        <p:nvSpPr>
+          <p:cNvPr id="52" name="Text 50"/>
+          <p:cNvSpPr/>
+          <p:nvPr/>
+        </p:nvSpPr>
+        <p:spPr>
+          <a:xfrm>
+            <a:off x="7576947" y="4169664"/>
+            <a:ext cx="685800" cy="475488"/>
+          </a:xfrm>
+          <a:prstGeom prst="rect">
+            <a:avLst/>
+          </a:prstGeom>
+          <a:noFill/>
+          <a:ln/>
+        </p:spPr>
+        <p:txBody>
+          <a:bodyPr wrap="square" lIns="0" tIns="0" rIns="0" bIns="0" rtlCol="0" anchor="ctr"/>
+          <a:lstStyle/>
+          <a:p>
+            <a:pPr algn="ctr" indent="0" marL="0">
+              <a:buNone/>
+            </a:pPr>
+            <a:r>
+              <a:rPr lang="en-US" sz="900" b="1" dirty="0">
+                <a:solidFill>
+                  <a:srgbClr val="9D174D"/>
+                </a:solidFill>
+                <a:latin typeface="Trebuchet MS" pitchFamily="34" charset="0"/>
+                <a:ea typeface="Trebuchet MS" pitchFamily="34" charset="-122"/>
+                <a:cs typeface="Trebuchet MS" pitchFamily="34" charset="-120"/>
+              </a:rPr>
+              <a:t>ng</a:t>
             </a:r>
             <a:endParaRPr lang="en-US" sz="900" dirty="0"/>
           </a:p>
@@ -31289,7 +32598,7 @@
                 <a:ea typeface="Calibri" pitchFamily="34" charset="-122"/>
                 <a:cs typeface="Calibri" pitchFamily="34" charset="-120"/>
               </a:rPr>
-              <a:t>Word Labs  •  wordlabs.app  •  Root: 'deep' = far down, profound distance</a:t>
+              <a:t>Word Labs  •  wordlabs.app  •  Root: 'deep' = going far down or in</a:t>
             </a:r>
             <a:endParaRPr lang="en-US" sz="800" dirty="0"/>
           </a:p>
@@ -32458,7 +33767,7 @@
                 <a:ea typeface="Calibri" pitchFamily="34" charset="-122"/>
                 <a:cs typeface="Calibri" pitchFamily="34" charset="-120"/>
               </a:rPr>
-              <a:t>Word Labs  •  wordlabs.app  •  Root: 'deep' = far down, profound distance</a:t>
+              <a:t>Word Labs  •  wordlabs.app  •  Root: 'deep' = going far down or in</a:t>
             </a:r>
             <a:endParaRPr lang="en-US" sz="800" dirty="0"/>
           </a:p>
@@ -32716,7 +34025,7 @@
             <a:avLst/>
           </a:prstGeom>
           <a:solidFill>
-            <a:srgbClr val="DDD6FE"/>
+            <a:srgbClr val="F8FAFC"/>
           </a:solidFill>
           <a:ln w="12700">
             <a:solidFill>
@@ -32728,14 +34037,39 @@
       </p:sp>
       <p:sp>
         <p:nvSpPr>
-          <p:cNvPr id="18" name="Text 16"/>
-          <p:cNvSpPr/>
-          <p:nvPr/>
-        </p:nvSpPr>
-        <p:spPr>
-          <a:xfrm>
-            <a:off x="365760" y="1563624"/>
-            <a:ext cx="2468880" cy="402336"/>
+          <p:cNvPr id="18" name="Shape 16"/>
+          <p:cNvSpPr/>
+          <p:nvPr/>
+        </p:nvSpPr>
+        <p:spPr>
+          <a:xfrm>
+            <a:off x="2971800" y="1563624"/>
+            <a:ext cx="2834640" cy="402336"/>
+          </a:xfrm>
+          <a:prstGeom prst="rect">
+            <a:avLst/>
+          </a:prstGeom>
+          <a:solidFill>
+            <a:srgbClr val="CCFBF1"/>
+          </a:solidFill>
+          <a:ln w="12700">
+            <a:solidFill>
+              <a:srgbClr val="E2E8F0"/>
+            </a:solidFill>
+            <a:prstDash val="solid"/>
+          </a:ln>
+        </p:spPr>
+      </p:sp>
+      <p:sp>
+        <p:nvSpPr>
+          <p:cNvPr id="19" name="Text 17"/>
+          <p:cNvSpPr/>
+          <p:nvPr/>
+        </p:nvSpPr>
+        <p:spPr>
+          <a:xfrm>
+            <a:off x="2971800" y="1563624"/>
+            <a:ext cx="2834640" cy="402336"/>
           </a:xfrm>
           <a:prstGeom prst="rect">
             <a:avLst/>
@@ -32753,13 +34087,13 @@
             <a:r>
               <a:rPr lang="en-US" sz="1300" b="1" dirty="0">
                 <a:solidFill>
-                  <a:srgbClr val="4C1D95"/>
+                  <a:srgbClr val="0F766E"/>
                 </a:solidFill>
                 <a:latin typeface="Trebuchet MS" pitchFamily="34" charset="0"/>
                 <a:ea typeface="Trebuchet MS" pitchFamily="34" charset="-122"/>
                 <a:cs typeface="Trebuchet MS" pitchFamily="34" charset="-120"/>
               </a:rPr>
-              <a:t>knee--</a:t>
+              <a:t>deep</a:t>
             </a:r>
             <a:endParaRPr lang="en-US" sz="1300" dirty="0"/>
           </a:p>
@@ -32767,20 +34101,20 @@
       </p:sp>
       <p:sp>
         <p:nvSpPr>
-          <p:cNvPr id="19" name="Shape 17"/>
-          <p:cNvSpPr/>
-          <p:nvPr/>
-        </p:nvSpPr>
-        <p:spPr>
-          <a:xfrm>
-            <a:off x="2971800" y="1563624"/>
+          <p:cNvPr id="20" name="Shape 18"/>
+          <p:cNvSpPr/>
+          <p:nvPr/>
+        </p:nvSpPr>
+        <p:spPr>
+          <a:xfrm>
+            <a:off x="5943600" y="1563624"/>
             <a:ext cx="2834640" cy="402336"/>
           </a:xfrm>
           <a:prstGeom prst="rect">
             <a:avLst/>
           </a:prstGeom>
           <a:solidFill>
-            <a:srgbClr val="CCFBF1"/>
+            <a:srgbClr val="FCE7F3"/>
           </a:solidFill>
           <a:ln w="12700">
             <a:solidFill>
@@ -32792,13 +34126,13 @@
       </p:sp>
       <p:sp>
         <p:nvSpPr>
-          <p:cNvPr id="20" name="Text 18"/>
-          <p:cNvSpPr/>
-          <p:nvPr/>
-        </p:nvSpPr>
-        <p:spPr>
-          <a:xfrm>
-            <a:off x="2971800" y="1563624"/>
+          <p:cNvPr id="21" name="Text 19"/>
+          <p:cNvSpPr/>
+          <p:nvPr/>
+        </p:nvSpPr>
+        <p:spPr>
+          <a:xfrm>
+            <a:off x="5943600" y="1563624"/>
             <a:ext cx="2834640" cy="402336"/>
           </a:xfrm>
           <a:prstGeom prst="rect">
@@ -32817,13 +34151,13 @@
             <a:r>
               <a:rPr lang="en-US" sz="1300" b="1" dirty="0">
                 <a:solidFill>
-                  <a:srgbClr val="0F766E"/>
+                  <a:srgbClr val="9D174D"/>
                 </a:solidFill>
                 <a:latin typeface="Trebuchet MS" pitchFamily="34" charset="0"/>
                 <a:ea typeface="Trebuchet MS" pitchFamily="34" charset="-122"/>
                 <a:cs typeface="Trebuchet MS" pitchFamily="34" charset="-120"/>
               </a:rPr>
-              <a:t>deep</a:t>
+              <a:t>-en</a:t>
             </a:r>
             <a:endParaRPr lang="en-US" sz="1300" dirty="0"/>
           </a:p>
@@ -32831,19 +34165,69 @@
       </p:sp>
       <p:sp>
         <p:nvSpPr>
-          <p:cNvPr id="21" name="Shape 19"/>
-          <p:cNvSpPr/>
-          <p:nvPr/>
-        </p:nvSpPr>
-        <p:spPr>
-          <a:xfrm>
-            <a:off x="5943600" y="1563624"/>
+          <p:cNvPr id="22" name="Shape 20"/>
+          <p:cNvSpPr/>
+          <p:nvPr/>
+        </p:nvSpPr>
+        <p:spPr>
+          <a:xfrm>
+            <a:off x="365760" y="1984248"/>
+            <a:ext cx="2468880" cy="402336"/>
+          </a:xfrm>
+          <a:prstGeom prst="rect">
+            <a:avLst/>
+          </a:prstGeom>
+          <a:solidFill>
+            <a:srgbClr val="F1F5F9"/>
+          </a:solidFill>
+          <a:ln w="12700">
+            <a:solidFill>
+              <a:srgbClr val="E2E8F0"/>
+            </a:solidFill>
+            <a:prstDash val="solid"/>
+          </a:ln>
+        </p:spPr>
+      </p:sp>
+      <p:sp>
+        <p:nvSpPr>
+          <p:cNvPr id="23" name="Shape 21"/>
+          <p:cNvSpPr/>
+          <p:nvPr/>
+        </p:nvSpPr>
+        <p:spPr>
+          <a:xfrm>
+            <a:off x="2971800" y="1984248"/>
             <a:ext cx="2834640" cy="402336"/>
           </a:xfrm>
           <a:prstGeom prst="rect">
             <a:avLst/>
           </a:prstGeom>
           <a:solidFill>
+            <a:srgbClr val="F1F5F9"/>
+          </a:solidFill>
+          <a:ln w="12700">
+            <a:solidFill>
+              <a:srgbClr val="E2E8F0"/>
+            </a:solidFill>
+            <a:prstDash val="solid"/>
+          </a:ln>
+        </p:spPr>
+      </p:sp>
+      <p:sp>
+        <p:nvSpPr>
+          <p:cNvPr id="24" name="Shape 22"/>
+          <p:cNvSpPr/>
+          <p:nvPr/>
+        </p:nvSpPr>
+        <p:spPr>
+          <a:xfrm>
+            <a:off x="5943600" y="1984248"/>
+            <a:ext cx="2834640" cy="402336"/>
+          </a:xfrm>
+          <a:prstGeom prst="rect">
+            <a:avLst/>
+          </a:prstGeom>
+          <a:solidFill>
             <a:srgbClr val="FCE7F3"/>
           </a:solidFill>
           <a:ln w="12700">
@@ -32856,13 +34240,13 @@
       </p:sp>
       <p:sp>
         <p:nvSpPr>
-          <p:cNvPr id="22" name="Text 20"/>
-          <p:cNvSpPr/>
-          <p:nvPr/>
-        </p:nvSpPr>
-        <p:spPr>
-          <a:xfrm>
-            <a:off x="5943600" y="1563624"/>
+          <p:cNvPr id="25" name="Text 23"/>
+          <p:cNvSpPr/>
+          <p:nvPr/>
+        </p:nvSpPr>
+        <p:spPr>
+          <a:xfrm>
+            <a:off x="5943600" y="1984248"/>
             <a:ext cx="2834640" cy="402336"/>
           </a:xfrm>
           <a:prstGeom prst="rect">
@@ -32887,7 +34271,7 @@
                 <a:ea typeface="Trebuchet MS" pitchFamily="34" charset="-122"/>
                 <a:cs typeface="Trebuchet MS" pitchFamily="34" charset="-120"/>
               </a:rPr>
-              <a:t>--en</a:t>
+              <a:t>-er</a:t>
             </a:r>
             <a:endParaRPr lang="en-US" sz="1300" dirty="0"/>
           </a:p>
@@ -32895,20 +34279,20 @@
       </p:sp>
       <p:sp>
         <p:nvSpPr>
-          <p:cNvPr id="23" name="Shape 21"/>
-          <p:cNvSpPr/>
-          <p:nvPr/>
-        </p:nvSpPr>
-        <p:spPr>
-          <a:xfrm>
-            <a:off x="365760" y="1984248"/>
+          <p:cNvPr id="26" name="Shape 24"/>
+          <p:cNvSpPr/>
+          <p:nvPr/>
+        </p:nvSpPr>
+        <p:spPr>
+          <a:xfrm>
+            <a:off x="365760" y="2404872"/>
             <a:ext cx="2468880" cy="402336"/>
           </a:xfrm>
           <a:prstGeom prst="rect">
             <a:avLst/>
           </a:prstGeom>
           <a:solidFill>
-            <a:srgbClr val="DDD6FE"/>
+            <a:srgbClr val="F8FAFC"/>
           </a:solidFill>
           <a:ln w="12700">
             <a:solidFill>
@@ -32920,14 +34304,64 @@
       </p:sp>
       <p:sp>
         <p:nvSpPr>
-          <p:cNvPr id="24" name="Text 22"/>
-          <p:cNvSpPr/>
-          <p:nvPr/>
-        </p:nvSpPr>
-        <p:spPr>
-          <a:xfrm>
-            <a:off x="365760" y="1984248"/>
-            <a:ext cx="2468880" cy="402336"/>
+          <p:cNvPr id="27" name="Shape 25"/>
+          <p:cNvSpPr/>
+          <p:nvPr/>
+        </p:nvSpPr>
+        <p:spPr>
+          <a:xfrm>
+            <a:off x="2971800" y="2404872"/>
+            <a:ext cx="2834640" cy="402336"/>
+          </a:xfrm>
+          <a:prstGeom prst="rect">
+            <a:avLst/>
+          </a:prstGeom>
+          <a:solidFill>
+            <a:srgbClr val="F8FAFC"/>
+          </a:solidFill>
+          <a:ln w="12700">
+            <a:solidFill>
+              <a:srgbClr val="E2E8F0"/>
+            </a:solidFill>
+            <a:prstDash val="solid"/>
+          </a:ln>
+        </p:spPr>
+      </p:sp>
+      <p:sp>
+        <p:nvSpPr>
+          <p:cNvPr id="28" name="Shape 26"/>
+          <p:cNvSpPr/>
+          <p:nvPr/>
+        </p:nvSpPr>
+        <p:spPr>
+          <a:xfrm>
+            <a:off x="5943600" y="2404872"/>
+            <a:ext cx="2834640" cy="402336"/>
+          </a:xfrm>
+          <a:prstGeom prst="rect">
+            <a:avLst/>
+          </a:prstGeom>
+          <a:solidFill>
+            <a:srgbClr val="FCE7F3"/>
+          </a:solidFill>
+          <a:ln w="12700">
+            <a:solidFill>
+              <a:srgbClr val="E2E8F0"/>
+            </a:solidFill>
+            <a:prstDash val="solid"/>
+          </a:ln>
+        </p:spPr>
+      </p:sp>
+      <p:sp>
+        <p:nvSpPr>
+          <p:cNvPr id="29" name="Text 27"/>
+          <p:cNvSpPr/>
+          <p:nvPr/>
+        </p:nvSpPr>
+        <p:spPr>
+          <a:xfrm>
+            <a:off x="5943600" y="2404872"/>
+            <a:ext cx="2834640" cy="402336"/>
           </a:xfrm>
           <a:prstGeom prst="rect">
             <a:avLst/>
@@ -32945,13 +34379,13 @@
             <a:r>
               <a:rPr lang="en-US" sz="1300" b="1" dirty="0">
                 <a:solidFill>
-                  <a:srgbClr val="4C1D95"/>
+                  <a:srgbClr val="9D174D"/>
                 </a:solidFill>
                 <a:latin typeface="Trebuchet MS" pitchFamily="34" charset="0"/>
                 <a:ea typeface="Trebuchet MS" pitchFamily="34" charset="-122"/>
                 <a:cs typeface="Trebuchet MS" pitchFamily="34" charset="-120"/>
               </a:rPr>
-              <a:t>waste--</a:t>
+              <a:t>-est</a:t>
             </a:r>
             <a:endParaRPr lang="en-US" sz="1300" dirty="0"/>
           </a:p>
@@ -32959,13 +34393,38 @@
       </p:sp>
       <p:sp>
         <p:nvSpPr>
-          <p:cNvPr id="25" name="Shape 23"/>
-          <p:cNvSpPr/>
-          <p:nvPr/>
-        </p:nvSpPr>
-        <p:spPr>
-          <a:xfrm>
-            <a:off x="2971800" y="1984248"/>
+          <p:cNvPr id="30" name="Shape 28"/>
+          <p:cNvSpPr/>
+          <p:nvPr/>
+        </p:nvSpPr>
+        <p:spPr>
+          <a:xfrm>
+            <a:off x="365760" y="2825496"/>
+            <a:ext cx="2468880" cy="402336"/>
+          </a:xfrm>
+          <a:prstGeom prst="rect">
+            <a:avLst/>
+          </a:prstGeom>
+          <a:solidFill>
+            <a:srgbClr val="F1F5F9"/>
+          </a:solidFill>
+          <a:ln w="12700">
+            <a:solidFill>
+              <a:srgbClr val="E2E8F0"/>
+            </a:solidFill>
+            <a:prstDash val="solid"/>
+          </a:ln>
+        </p:spPr>
+      </p:sp>
+      <p:sp>
+        <p:nvSpPr>
+          <p:cNvPr id="31" name="Shape 29"/>
+          <p:cNvSpPr/>
+          <p:nvPr/>
+        </p:nvSpPr>
+        <p:spPr>
+          <a:xfrm>
+            <a:off x="2971800" y="2825496"/>
             <a:ext cx="2834640" cy="402336"/>
           </a:xfrm>
           <a:prstGeom prst="rect">
@@ -32984,13 +34443,13 @@
       </p:sp>
       <p:sp>
         <p:nvSpPr>
-          <p:cNvPr id="26" name="Shape 24"/>
-          <p:cNvSpPr/>
-          <p:nvPr/>
-        </p:nvSpPr>
-        <p:spPr>
-          <a:xfrm>
-            <a:off x="5943600" y="1984248"/>
+          <p:cNvPr id="32" name="Shape 30"/>
+          <p:cNvSpPr/>
+          <p:nvPr/>
+        </p:nvSpPr>
+        <p:spPr>
+          <a:xfrm>
+            <a:off x="5943600" y="2825496"/>
             <a:ext cx="2834640" cy="402336"/>
           </a:xfrm>
           <a:prstGeom prst="rect">
@@ -33009,13 +34468,13 @@
       </p:sp>
       <p:sp>
         <p:nvSpPr>
-          <p:cNvPr id="27" name="Text 25"/>
-          <p:cNvSpPr/>
-          <p:nvPr/>
-        </p:nvSpPr>
-        <p:spPr>
-          <a:xfrm>
-            <a:off x="5943600" y="1984248"/>
+          <p:cNvPr id="33" name="Text 31"/>
+          <p:cNvSpPr/>
+          <p:nvPr/>
+        </p:nvSpPr>
+        <p:spPr>
+          <a:xfrm>
+            <a:off x="5943600" y="2825496"/>
             <a:ext cx="2834640" cy="402336"/>
           </a:xfrm>
           <a:prstGeom prst="rect">
@@ -33040,7 +34499,7 @@
                 <a:ea typeface="Trebuchet MS" pitchFamily="34" charset="-122"/>
                 <a:cs typeface="Trebuchet MS" pitchFamily="34" charset="-120"/>
               </a:rPr>
-              <a:t>--er</a:t>
+              <a:t>-ly</a:t>
             </a:r>
             <a:endParaRPr lang="en-US" sz="1300" dirty="0"/>
           </a:p>
@@ -33048,20 +34507,20 @@
       </p:sp>
       <p:sp>
         <p:nvSpPr>
-          <p:cNvPr id="28" name="Shape 26"/>
-          <p:cNvSpPr/>
-          <p:nvPr/>
-        </p:nvSpPr>
-        <p:spPr>
-          <a:xfrm>
-            <a:off x="365760" y="2404872"/>
+          <p:cNvPr id="34" name="Shape 32"/>
+          <p:cNvSpPr/>
+          <p:nvPr/>
+        </p:nvSpPr>
+        <p:spPr>
+          <a:xfrm>
+            <a:off x="365760" y="3246120"/>
             <a:ext cx="2468880" cy="402336"/>
           </a:xfrm>
           <a:prstGeom prst="rect">
             <a:avLst/>
           </a:prstGeom>
           <a:solidFill>
-            <a:srgbClr val="DDD6FE"/>
+            <a:srgbClr val="F8FAFC"/>
           </a:solidFill>
           <a:ln w="12700">
             <a:solidFill>
@@ -33073,14 +34532,64 @@
       </p:sp>
       <p:sp>
         <p:nvSpPr>
-          <p:cNvPr id="29" name="Text 27"/>
-          <p:cNvSpPr/>
-          <p:nvPr/>
-        </p:nvSpPr>
-        <p:spPr>
-          <a:xfrm>
-            <a:off x="365760" y="2404872"/>
-            <a:ext cx="2468880" cy="402336"/>
+          <p:cNvPr id="35" name="Shape 33"/>
+          <p:cNvSpPr/>
+          <p:nvPr/>
+        </p:nvSpPr>
+        <p:spPr>
+          <a:xfrm>
+            <a:off x="2971800" y="3246120"/>
+            <a:ext cx="2834640" cy="402336"/>
+          </a:xfrm>
+          <a:prstGeom prst="rect">
+            <a:avLst/>
+          </a:prstGeom>
+          <a:solidFill>
+            <a:srgbClr val="F8FAFC"/>
+          </a:solidFill>
+          <a:ln w="12700">
+            <a:solidFill>
+              <a:srgbClr val="E2E8F0"/>
+            </a:solidFill>
+            <a:prstDash val="solid"/>
+          </a:ln>
+        </p:spPr>
+      </p:sp>
+      <p:sp>
+        <p:nvSpPr>
+          <p:cNvPr id="36" name="Shape 34"/>
+          <p:cNvSpPr/>
+          <p:nvPr/>
+        </p:nvSpPr>
+        <p:spPr>
+          <a:xfrm>
+            <a:off x="5943600" y="3246120"/>
+            <a:ext cx="2834640" cy="402336"/>
+          </a:xfrm>
+          <a:prstGeom prst="rect">
+            <a:avLst/>
+          </a:prstGeom>
+          <a:solidFill>
+            <a:srgbClr val="FCE7F3"/>
+          </a:solidFill>
+          <a:ln w="12700">
+            <a:solidFill>
+              <a:srgbClr val="E2E8F0"/>
+            </a:solidFill>
+            <a:prstDash val="solid"/>
+          </a:ln>
+        </p:spPr>
+      </p:sp>
+      <p:sp>
+        <p:nvSpPr>
+          <p:cNvPr id="37" name="Text 35"/>
+          <p:cNvSpPr/>
+          <p:nvPr/>
+        </p:nvSpPr>
+        <p:spPr>
+          <a:xfrm>
+            <a:off x="5943600" y="3246120"/>
+            <a:ext cx="2834640" cy="402336"/>
           </a:xfrm>
           <a:prstGeom prst="rect">
             <a:avLst/>
@@ -33098,13 +34607,13 @@
             <a:r>
               <a:rPr lang="en-US" sz="1300" b="1" dirty="0">
                 <a:solidFill>
-                  <a:srgbClr val="4C1D95"/>
+                  <a:srgbClr val="9D174D"/>
                 </a:solidFill>
                 <a:latin typeface="Trebuchet MS" pitchFamily="34" charset="0"/>
                 <a:ea typeface="Trebuchet MS" pitchFamily="34" charset="-122"/>
                 <a:cs typeface="Trebuchet MS" pitchFamily="34" charset="-120"/>
               </a:rPr>
-              <a:t>chest--</a:t>
+              <a:t>-ness</a:t>
             </a:r>
             <a:endParaRPr lang="en-US" sz="1300" dirty="0"/>
           </a:p>
@@ -33112,64 +34621,14 @@
       </p:sp>
       <p:sp>
         <p:nvSpPr>
-          <p:cNvPr id="30" name="Shape 28"/>
-          <p:cNvSpPr/>
-          <p:nvPr/>
-        </p:nvSpPr>
-        <p:spPr>
-          <a:xfrm>
-            <a:off x="2971800" y="2404872"/>
-            <a:ext cx="2834640" cy="402336"/>
-          </a:xfrm>
-          <a:prstGeom prst="rect">
-            <a:avLst/>
-          </a:prstGeom>
-          <a:solidFill>
-            <a:srgbClr val="F8FAFC"/>
-          </a:solidFill>
-          <a:ln w="12700">
-            <a:solidFill>
-              <a:srgbClr val="E2E8F0"/>
-            </a:solidFill>
-            <a:prstDash val="solid"/>
-          </a:ln>
-        </p:spPr>
-      </p:sp>
-      <p:sp>
-        <p:nvSpPr>
-          <p:cNvPr id="31" name="Shape 29"/>
-          <p:cNvSpPr/>
-          <p:nvPr/>
-        </p:nvSpPr>
-        <p:spPr>
-          <a:xfrm>
-            <a:off x="5943600" y="2404872"/>
-            <a:ext cx="2834640" cy="402336"/>
-          </a:xfrm>
-          <a:prstGeom prst="rect">
-            <a:avLst/>
-          </a:prstGeom>
-          <a:solidFill>
-            <a:srgbClr val="FCE7F3"/>
-          </a:solidFill>
-          <a:ln w="12700">
-            <a:solidFill>
-              <a:srgbClr val="E2E8F0"/>
-            </a:solidFill>
-            <a:prstDash val="solid"/>
-          </a:ln>
-        </p:spPr>
-      </p:sp>
-      <p:sp>
-        <p:nvSpPr>
-          <p:cNvPr id="32" name="Text 30"/>
-          <p:cNvSpPr/>
-          <p:nvPr/>
-        </p:nvSpPr>
-        <p:spPr>
-          <a:xfrm>
-            <a:off x="5943600" y="2404872"/>
-            <a:ext cx="2834640" cy="402336"/>
+          <p:cNvPr id="38" name="Text 36"/>
+          <p:cNvSpPr/>
+          <p:nvPr/>
+        </p:nvSpPr>
+        <p:spPr>
+          <a:xfrm>
+            <a:off x="365760" y="3611880"/>
+            <a:ext cx="1828800" cy="347472"/>
           </a:xfrm>
           <a:prstGeom prst="rect">
             <a:avLst/>
@@ -33181,59 +34640,61 @@
           <a:bodyPr wrap="square" lIns="0" tIns="0" rIns="0" bIns="0" rtlCol="0" anchor="ctr"/>
           <a:lstStyle/>
           <a:p>
-            <a:pPr algn="ctr" indent="0" marL="0">
-              <a:buNone/>
-            </a:pPr>
-            <a:r>
-              <a:rPr lang="en-US" sz="1300" b="1" dirty="0">
-                <a:solidFill>
-                  <a:srgbClr val="9D174D"/>
+            <a:pPr algn="l" indent="0" marL="0">
+              <a:buNone/>
+            </a:pPr>
+            <a:r>
+              <a:rPr lang="en-US" sz="1200" b="1" dirty="0">
+                <a:solidFill>
+                  <a:srgbClr val="0F172A"/>
                 </a:solidFill>
                 <a:latin typeface="Trebuchet MS" pitchFamily="34" charset="0"/>
                 <a:ea typeface="Trebuchet MS" pitchFamily="34" charset="-122"/>
                 <a:cs typeface="Trebuchet MS" pitchFamily="34" charset="-120"/>
               </a:rPr>
-              <a:t>--est</a:t>
-            </a:r>
-            <a:endParaRPr lang="en-US" sz="1300" dirty="0"/>
-          </a:p>
-        </p:txBody>
-      </p:sp>
-      <p:sp>
-        <p:nvSpPr>
-          <p:cNvPr id="33" name="Shape 31"/>
-          <p:cNvSpPr/>
-          <p:nvPr/>
-        </p:nvSpPr>
-        <p:spPr>
-          <a:xfrm>
-            <a:off x="365760" y="2825496"/>
-            <a:ext cx="2468880" cy="402336"/>
-          </a:xfrm>
-          <a:prstGeom prst="rect">
-            <a:avLst/>
-          </a:prstGeom>
-          <a:solidFill>
-            <a:srgbClr val="DDD6FE"/>
-          </a:solidFill>
-          <a:ln w="12700">
-            <a:solidFill>
-              <a:srgbClr val="E2E8F0"/>
-            </a:solidFill>
-            <a:prstDash val="solid"/>
-          </a:ln>
-        </p:spPr>
-      </p:sp>
-      <p:sp>
-        <p:nvSpPr>
-          <p:cNvPr id="34" name="Text 32"/>
-          <p:cNvSpPr/>
-          <p:nvPr/>
-        </p:nvSpPr>
-        <p:spPr>
-          <a:xfrm>
-            <a:off x="365760" y="2825496"/>
-            <a:ext cx="2468880" cy="402336"/>
+              <a:t>Sample words:</a:t>
+            </a:r>
+            <a:endParaRPr lang="en-US" sz="1200" dirty="0"/>
+          </a:p>
+        </p:txBody>
+      </p:sp>
+      <p:sp>
+        <p:nvSpPr>
+          <p:cNvPr id="39" name="Shape 37"/>
+          <p:cNvSpPr/>
+          <p:nvPr/>
+        </p:nvSpPr>
+        <p:spPr>
+          <a:xfrm>
+            <a:off x="365760" y="4023360"/>
+            <a:ext cx="2011680" cy="402336"/>
+          </a:xfrm>
+          <a:prstGeom prst="rect">
+            <a:avLst>
+              <a:gd name="adj" fmla="val 13636"/>
+            </a:avLst>
+          </a:prstGeom>
+          <a:solidFill>
+            <a:srgbClr val="EEF2FF"/>
+          </a:solidFill>
+          <a:ln w="12700">
+            <a:solidFill>
+              <a:srgbClr val="6366F1"/>
+            </a:solidFill>
+            <a:prstDash val="solid"/>
+          </a:ln>
+        </p:spPr>
+      </p:sp>
+      <p:sp>
+        <p:nvSpPr>
+          <p:cNvPr id="40" name="Text 38"/>
+          <p:cNvSpPr/>
+          <p:nvPr/>
+        </p:nvSpPr>
+        <p:spPr>
+          <a:xfrm>
+            <a:off x="365760" y="4023360"/>
+            <a:ext cx="2011680" cy="402336"/>
           </a:xfrm>
           <a:prstGeom prst="rect">
             <a:avLst/>
@@ -33249,80 +34710,57 @@
               <a:buNone/>
             </a:pPr>
             <a:r>
-              <a:rPr lang="en-US" sz="1300" b="1" dirty="0">
-                <a:solidFill>
-                  <a:srgbClr val="4C1D95"/>
+              <a:rPr lang="en-US" sz="1200" b="1" dirty="0">
+                <a:solidFill>
+                  <a:srgbClr val="4338CA"/>
                 </a:solidFill>
                 <a:latin typeface="Trebuchet MS" pitchFamily="34" charset="0"/>
                 <a:ea typeface="Trebuchet MS" pitchFamily="34" charset="-122"/>
                 <a:cs typeface="Trebuchet MS" pitchFamily="34" charset="-120"/>
               </a:rPr>
-              <a:t>shoulder--</a:t>
-            </a:r>
-            <a:endParaRPr lang="en-US" sz="1300" dirty="0"/>
-          </a:p>
-        </p:txBody>
-      </p:sp>
-      <p:sp>
-        <p:nvSpPr>
-          <p:cNvPr id="35" name="Shape 33"/>
-          <p:cNvSpPr/>
-          <p:nvPr/>
-        </p:nvSpPr>
-        <p:spPr>
-          <a:xfrm>
-            <a:off x="2971800" y="2825496"/>
-            <a:ext cx="2834640" cy="402336"/>
-          </a:xfrm>
-          <a:prstGeom prst="rect">
-            <a:avLst/>
-          </a:prstGeom>
-          <a:solidFill>
-            <a:srgbClr val="F1F5F9"/>
-          </a:solidFill>
-          <a:ln w="12700">
-            <a:solidFill>
-              <a:srgbClr val="E2E8F0"/>
-            </a:solidFill>
-            <a:prstDash val="solid"/>
-          </a:ln>
-        </p:spPr>
-      </p:sp>
-      <p:sp>
-        <p:nvSpPr>
-          <p:cNvPr id="36" name="Shape 34"/>
-          <p:cNvSpPr/>
-          <p:nvPr/>
-        </p:nvSpPr>
-        <p:spPr>
-          <a:xfrm>
-            <a:off x="5943600" y="2825496"/>
-            <a:ext cx="2834640" cy="402336"/>
-          </a:xfrm>
-          <a:prstGeom prst="rect">
-            <a:avLst/>
-          </a:prstGeom>
-          <a:solidFill>
-            <a:srgbClr val="FCE7F3"/>
-          </a:solidFill>
-          <a:ln w="12700">
-            <a:solidFill>
-              <a:srgbClr val="E2E8F0"/>
-            </a:solidFill>
-            <a:prstDash val="solid"/>
-          </a:ln>
-        </p:spPr>
-      </p:sp>
-      <p:sp>
-        <p:nvSpPr>
-          <p:cNvPr id="37" name="Text 35"/>
-          <p:cNvSpPr/>
-          <p:nvPr/>
-        </p:nvSpPr>
-        <p:spPr>
-          <a:xfrm>
-            <a:off x="5943600" y="2825496"/>
-            <a:ext cx="2834640" cy="402336"/>
+              <a:t>deep</a:t>
+            </a:r>
+            <a:endParaRPr lang="en-US" sz="1200" dirty="0"/>
+          </a:p>
+        </p:txBody>
+      </p:sp>
+      <p:sp>
+        <p:nvSpPr>
+          <p:cNvPr id="41" name="Shape 39"/>
+          <p:cNvSpPr/>
+          <p:nvPr/>
+        </p:nvSpPr>
+        <p:spPr>
+          <a:xfrm>
+            <a:off x="2542032" y="4023360"/>
+            <a:ext cx="2011680" cy="402336"/>
+          </a:xfrm>
+          <a:prstGeom prst="rect">
+            <a:avLst>
+              <a:gd name="adj" fmla="val 13636"/>
+            </a:avLst>
+          </a:prstGeom>
+          <a:solidFill>
+            <a:srgbClr val="EEF2FF"/>
+          </a:solidFill>
+          <a:ln w="12700">
+            <a:solidFill>
+              <a:srgbClr val="6366F1"/>
+            </a:solidFill>
+            <a:prstDash val="solid"/>
+          </a:ln>
+        </p:spPr>
+      </p:sp>
+      <p:sp>
+        <p:nvSpPr>
+          <p:cNvPr id="42" name="Text 40"/>
+          <p:cNvSpPr/>
+          <p:nvPr/>
+        </p:nvSpPr>
+        <p:spPr>
+          <a:xfrm>
+            <a:off x="2542032" y="4023360"/>
+            <a:ext cx="2011680" cy="402336"/>
           </a:xfrm>
           <a:prstGeom prst="rect">
             <a:avLst/>
@@ -33338,55 +34776,57 @@
               <a:buNone/>
             </a:pPr>
             <a:r>
-              <a:rPr lang="en-US" sz="1300" b="1" dirty="0">
-                <a:solidFill>
-                  <a:srgbClr val="9D174D"/>
+              <a:rPr lang="en-US" sz="1200" b="1" dirty="0">
+                <a:solidFill>
+                  <a:srgbClr val="4338CA"/>
                 </a:solidFill>
                 <a:latin typeface="Trebuchet MS" pitchFamily="34" charset="0"/>
                 <a:ea typeface="Trebuchet MS" pitchFamily="34" charset="-122"/>
                 <a:cs typeface="Trebuchet MS" pitchFamily="34" charset="-120"/>
               </a:rPr>
-              <a:t>--ly</a:t>
-            </a:r>
-            <a:endParaRPr lang="en-US" sz="1300" dirty="0"/>
-          </a:p>
-        </p:txBody>
-      </p:sp>
-      <p:sp>
-        <p:nvSpPr>
-          <p:cNvPr id="38" name="Shape 36"/>
-          <p:cNvSpPr/>
-          <p:nvPr/>
-        </p:nvSpPr>
-        <p:spPr>
-          <a:xfrm>
-            <a:off x="365760" y="3246120"/>
-            <a:ext cx="2468880" cy="402336"/>
-          </a:xfrm>
-          <a:prstGeom prst="rect">
-            <a:avLst/>
-          </a:prstGeom>
-          <a:solidFill>
-            <a:srgbClr val="DDD6FE"/>
-          </a:solidFill>
-          <a:ln w="12700">
-            <a:solidFill>
-              <a:srgbClr val="E2E8F0"/>
-            </a:solidFill>
-            <a:prstDash val="solid"/>
-          </a:ln>
-        </p:spPr>
-      </p:sp>
-      <p:sp>
-        <p:nvSpPr>
-          <p:cNvPr id="39" name="Text 37"/>
-          <p:cNvSpPr/>
-          <p:nvPr/>
-        </p:nvSpPr>
-        <p:spPr>
-          <a:xfrm>
-            <a:off x="365760" y="3246120"/>
-            <a:ext cx="2468880" cy="402336"/>
+              <a:t>deepen</a:t>
+            </a:r>
+            <a:endParaRPr lang="en-US" sz="1200" dirty="0"/>
+          </a:p>
+        </p:txBody>
+      </p:sp>
+      <p:sp>
+        <p:nvSpPr>
+          <p:cNvPr id="43" name="Shape 41"/>
+          <p:cNvSpPr/>
+          <p:nvPr/>
+        </p:nvSpPr>
+        <p:spPr>
+          <a:xfrm>
+            <a:off x="4718304" y="4023360"/>
+            <a:ext cx="2011680" cy="402336"/>
+          </a:xfrm>
+          <a:prstGeom prst="rect">
+            <a:avLst>
+              <a:gd name="adj" fmla="val 13636"/>
+            </a:avLst>
+          </a:prstGeom>
+          <a:solidFill>
+            <a:srgbClr val="EEF2FF"/>
+          </a:solidFill>
+          <a:ln w="12700">
+            <a:solidFill>
+              <a:srgbClr val="6366F1"/>
+            </a:solidFill>
+            <a:prstDash val="solid"/>
+          </a:ln>
+        </p:spPr>
+      </p:sp>
+      <p:sp>
+        <p:nvSpPr>
+          <p:cNvPr id="44" name="Text 42"/>
+          <p:cNvSpPr/>
+          <p:nvPr/>
+        </p:nvSpPr>
+        <p:spPr>
+          <a:xfrm>
+            <a:off x="4718304" y="4023360"/>
+            <a:ext cx="2011680" cy="402336"/>
           </a:xfrm>
           <a:prstGeom prst="rect">
             <a:avLst/>
@@ -33402,671 +34842,15 @@
               <a:buNone/>
             </a:pPr>
             <a:r>
-              <a:rPr lang="en-US" sz="1300" b="1" dirty="0">
-                <a:solidFill>
-                  <a:srgbClr val="4C1D95"/>
+              <a:rPr lang="en-US" sz="1200" b="1" dirty="0">
+                <a:solidFill>
+                  <a:srgbClr val="4338CA"/>
                 </a:solidFill>
                 <a:latin typeface="Trebuchet MS" pitchFamily="34" charset="0"/>
                 <a:ea typeface="Trebuchet MS" pitchFamily="34" charset="-122"/>
                 <a:cs typeface="Trebuchet MS" pitchFamily="34" charset="-120"/>
               </a:rPr>
-              <a:t>ankle--</a:t>
-            </a:r>
-            <a:endParaRPr lang="en-US" sz="1300" dirty="0"/>
-          </a:p>
-        </p:txBody>
-      </p:sp>
-      <p:sp>
-        <p:nvSpPr>
-          <p:cNvPr id="40" name="Shape 38"/>
-          <p:cNvSpPr/>
-          <p:nvPr/>
-        </p:nvSpPr>
-        <p:spPr>
-          <a:xfrm>
-            <a:off x="2971800" y="3246120"/>
-            <a:ext cx="2834640" cy="402336"/>
-          </a:xfrm>
-          <a:prstGeom prst="rect">
-            <a:avLst/>
-          </a:prstGeom>
-          <a:solidFill>
-            <a:srgbClr val="F8FAFC"/>
-          </a:solidFill>
-          <a:ln w="12700">
-            <a:solidFill>
-              <a:srgbClr val="E2E8F0"/>
-            </a:solidFill>
-            <a:prstDash val="solid"/>
-          </a:ln>
-        </p:spPr>
-      </p:sp>
-      <p:sp>
-        <p:nvSpPr>
-          <p:cNvPr id="41" name="Shape 39"/>
-          <p:cNvSpPr/>
-          <p:nvPr/>
-        </p:nvSpPr>
-        <p:spPr>
-          <a:xfrm>
-            <a:off x="5943600" y="3246120"/>
-            <a:ext cx="2834640" cy="402336"/>
-          </a:xfrm>
-          <a:prstGeom prst="rect">
-            <a:avLst/>
-          </a:prstGeom>
-          <a:solidFill>
-            <a:srgbClr val="FCE7F3"/>
-          </a:solidFill>
-          <a:ln w="12700">
-            <a:solidFill>
-              <a:srgbClr val="E2E8F0"/>
-            </a:solidFill>
-            <a:prstDash val="solid"/>
-          </a:ln>
-        </p:spPr>
-      </p:sp>
-      <p:sp>
-        <p:nvSpPr>
-          <p:cNvPr id="42" name="Text 40"/>
-          <p:cNvSpPr/>
-          <p:nvPr/>
-        </p:nvSpPr>
-        <p:spPr>
-          <a:xfrm>
-            <a:off x="5943600" y="3246120"/>
-            <a:ext cx="2834640" cy="402336"/>
-          </a:xfrm>
-          <a:prstGeom prst="rect">
-            <a:avLst/>
-          </a:prstGeom>
-          <a:noFill/>
-          <a:ln/>
-        </p:spPr>
-        <p:txBody>
-          <a:bodyPr wrap="square" lIns="0" tIns="0" rIns="0" bIns="0" rtlCol="0" anchor="ctr"/>
-          <a:lstStyle/>
-          <a:p>
-            <a:pPr algn="ctr" indent="0" marL="0">
-              <a:buNone/>
-            </a:pPr>
-            <a:r>
-              <a:rPr lang="en-US" sz="1300" b="1" dirty="0">
-                <a:solidFill>
-                  <a:srgbClr val="9D174D"/>
-                </a:solidFill>
-                <a:latin typeface="Trebuchet MS" pitchFamily="34" charset="0"/>
-                <a:ea typeface="Trebuchet MS" pitchFamily="34" charset="-122"/>
-                <a:cs typeface="Trebuchet MS" pitchFamily="34" charset="-120"/>
-              </a:rPr>
-              <a:t>--ness</a:t>
-            </a:r>
-            <a:endParaRPr lang="en-US" sz="1300" dirty="0"/>
-          </a:p>
-        </p:txBody>
-      </p:sp>
-      <p:sp>
-        <p:nvSpPr>
-          <p:cNvPr id="43" name="Text 41"/>
-          <p:cNvSpPr/>
-          <p:nvPr/>
-        </p:nvSpPr>
-        <p:spPr>
-          <a:xfrm>
-            <a:off x="365760" y="3611880"/>
-            <a:ext cx="1828800" cy="347472"/>
-          </a:xfrm>
-          <a:prstGeom prst="rect">
-            <a:avLst/>
-          </a:prstGeom>
-          <a:noFill/>
-          <a:ln/>
-        </p:spPr>
-        <p:txBody>
-          <a:bodyPr wrap="square" lIns="0" tIns="0" rIns="0" bIns="0" rtlCol="0" anchor="ctr"/>
-          <a:lstStyle/>
-          <a:p>
-            <a:pPr algn="l" indent="0" marL="0">
-              <a:buNone/>
-            </a:pPr>
-            <a:r>
-              <a:rPr lang="en-US" sz="1200" b="1" dirty="0">
-                <a:solidFill>
-                  <a:srgbClr val="0F172A"/>
-                </a:solidFill>
-                <a:latin typeface="Trebuchet MS" pitchFamily="34" charset="0"/>
-                <a:ea typeface="Trebuchet MS" pitchFamily="34" charset="-122"/>
-                <a:cs typeface="Trebuchet MS" pitchFamily="34" charset="-120"/>
-              </a:rPr>
-              <a:t>Sample words:</a:t>
-            </a:r>
-            <a:endParaRPr lang="en-US" sz="1200" dirty="0"/>
-          </a:p>
-        </p:txBody>
-      </p:sp>
-      <p:sp>
-        <p:nvSpPr>
-          <p:cNvPr id="44" name="Shape 42"/>
-          <p:cNvSpPr/>
-          <p:nvPr/>
-        </p:nvSpPr>
-        <p:spPr>
-          <a:xfrm>
-            <a:off x="365760" y="4023360"/>
-            <a:ext cx="2011680" cy="402336"/>
-          </a:xfrm>
-          <a:prstGeom prst="rect">
-            <a:avLst>
-              <a:gd name="adj" fmla="val 13636"/>
-            </a:avLst>
-          </a:prstGeom>
-          <a:solidFill>
-            <a:srgbClr val="EEF2FF"/>
-          </a:solidFill>
-          <a:ln w="12700">
-            <a:solidFill>
-              <a:srgbClr val="6366F1"/>
-            </a:solidFill>
-            <a:prstDash val="solid"/>
-          </a:ln>
-        </p:spPr>
-      </p:sp>
-      <p:sp>
-        <p:nvSpPr>
-          <p:cNvPr id="45" name="Text 43"/>
-          <p:cNvSpPr/>
-          <p:nvPr/>
-        </p:nvSpPr>
-        <p:spPr>
-          <a:xfrm>
-            <a:off x="365760" y="4023360"/>
-            <a:ext cx="2011680" cy="402336"/>
-          </a:xfrm>
-          <a:prstGeom prst="rect">
-            <a:avLst/>
-          </a:prstGeom>
-          <a:noFill/>
-          <a:ln/>
-        </p:spPr>
-        <p:txBody>
-          <a:bodyPr wrap="square" lIns="0" tIns="0" rIns="0" bIns="0" rtlCol="0" anchor="ctr"/>
-          <a:lstStyle/>
-          <a:p>
-            <a:pPr algn="ctr" indent="0" marL="0">
-              <a:buNone/>
-            </a:pPr>
-            <a:r>
-              <a:rPr lang="en-US" sz="1200" b="1" dirty="0">
-                <a:solidFill>
-                  <a:srgbClr val="4338CA"/>
-                </a:solidFill>
-                <a:latin typeface="Trebuchet MS" pitchFamily="34" charset="0"/>
-                <a:ea typeface="Trebuchet MS" pitchFamily="34" charset="-122"/>
-                <a:cs typeface="Trebuchet MS" pitchFamily="34" charset="-120"/>
-              </a:rPr>
-              <a:t>deepen</a:t>
-            </a:r>
-            <a:endParaRPr lang="en-US" sz="1200" dirty="0"/>
-          </a:p>
-        </p:txBody>
-      </p:sp>
-      <p:sp>
-        <p:nvSpPr>
-          <p:cNvPr id="46" name="Shape 44"/>
-          <p:cNvSpPr/>
-          <p:nvPr/>
-        </p:nvSpPr>
-        <p:spPr>
-          <a:xfrm>
-            <a:off x="2542032" y="4023360"/>
-            <a:ext cx="2011680" cy="402336"/>
-          </a:xfrm>
-          <a:prstGeom prst="rect">
-            <a:avLst>
-              <a:gd name="adj" fmla="val 13636"/>
-            </a:avLst>
-          </a:prstGeom>
-          <a:solidFill>
-            <a:srgbClr val="EEF2FF"/>
-          </a:solidFill>
-          <a:ln w="12700">
-            <a:solidFill>
-              <a:srgbClr val="6366F1"/>
-            </a:solidFill>
-            <a:prstDash val="solid"/>
-          </a:ln>
-        </p:spPr>
-      </p:sp>
-      <p:sp>
-        <p:nvSpPr>
-          <p:cNvPr id="47" name="Text 45"/>
-          <p:cNvSpPr/>
-          <p:nvPr/>
-        </p:nvSpPr>
-        <p:spPr>
-          <a:xfrm>
-            <a:off x="2542032" y="4023360"/>
-            <a:ext cx="2011680" cy="402336"/>
-          </a:xfrm>
-          <a:prstGeom prst="rect">
-            <a:avLst/>
-          </a:prstGeom>
-          <a:noFill/>
-          <a:ln/>
-        </p:spPr>
-        <p:txBody>
-          <a:bodyPr wrap="square" lIns="0" tIns="0" rIns="0" bIns="0" rtlCol="0" anchor="ctr"/>
-          <a:lstStyle/>
-          <a:p>
-            <a:pPr algn="ctr" indent="0" marL="0">
-              <a:buNone/>
-            </a:pPr>
-            <a:r>
-              <a:rPr lang="en-US" sz="1200" b="1" dirty="0">
-                <a:solidFill>
-                  <a:srgbClr val="4338CA"/>
-                </a:solidFill>
-                <a:latin typeface="Trebuchet MS" pitchFamily="34" charset="0"/>
-                <a:ea typeface="Trebuchet MS" pitchFamily="34" charset="-122"/>
-                <a:cs typeface="Trebuchet MS" pitchFamily="34" charset="-120"/>
-              </a:rPr>
               <a:t>deeper</a:t>
-            </a:r>
-            <a:endParaRPr lang="en-US" sz="1200" dirty="0"/>
-          </a:p>
-        </p:txBody>
-      </p:sp>
-      <p:sp>
-        <p:nvSpPr>
-          <p:cNvPr id="48" name="Shape 46"/>
-          <p:cNvSpPr/>
-          <p:nvPr/>
-        </p:nvSpPr>
-        <p:spPr>
-          <a:xfrm>
-            <a:off x="4718304" y="4023360"/>
-            <a:ext cx="2011680" cy="402336"/>
-          </a:xfrm>
-          <a:prstGeom prst="rect">
-            <a:avLst>
-              <a:gd name="adj" fmla="val 13636"/>
-            </a:avLst>
-          </a:prstGeom>
-          <a:solidFill>
-            <a:srgbClr val="EEF2FF"/>
-          </a:solidFill>
-          <a:ln w="12700">
-            <a:solidFill>
-              <a:srgbClr val="6366F1"/>
-            </a:solidFill>
-            <a:prstDash val="solid"/>
-          </a:ln>
-        </p:spPr>
-      </p:sp>
-      <p:sp>
-        <p:nvSpPr>
-          <p:cNvPr id="49" name="Text 47"/>
-          <p:cNvSpPr/>
-          <p:nvPr/>
-        </p:nvSpPr>
-        <p:spPr>
-          <a:xfrm>
-            <a:off x="4718304" y="4023360"/>
-            <a:ext cx="2011680" cy="402336"/>
-          </a:xfrm>
-          <a:prstGeom prst="rect">
-            <a:avLst/>
-          </a:prstGeom>
-          <a:noFill/>
-          <a:ln/>
-        </p:spPr>
-        <p:txBody>
-          <a:bodyPr wrap="square" lIns="0" tIns="0" rIns="0" bIns="0" rtlCol="0" anchor="ctr"/>
-          <a:lstStyle/>
-          <a:p>
-            <a:pPr algn="ctr" indent="0" marL="0">
-              <a:buNone/>
-            </a:pPr>
-            <a:r>
-              <a:rPr lang="en-US" sz="1200" b="1" dirty="0">
-                <a:solidFill>
-                  <a:srgbClr val="4338CA"/>
-                </a:solidFill>
-                <a:latin typeface="Trebuchet MS" pitchFamily="34" charset="0"/>
-                <a:ea typeface="Trebuchet MS" pitchFamily="34" charset="-122"/>
-                <a:cs typeface="Trebuchet MS" pitchFamily="34" charset="-120"/>
-              </a:rPr>
-              <a:t>deepest</a:t>
-            </a:r>
-            <a:endParaRPr lang="en-US" sz="1200" dirty="0"/>
-          </a:p>
-        </p:txBody>
-      </p:sp>
-      <p:sp>
-        <p:nvSpPr>
-          <p:cNvPr id="50" name="Shape 48"/>
-          <p:cNvSpPr/>
-          <p:nvPr/>
-        </p:nvSpPr>
-        <p:spPr>
-          <a:xfrm>
-            <a:off x="6894576" y="4023360"/>
-            <a:ext cx="2011680" cy="402336"/>
-          </a:xfrm>
-          <a:prstGeom prst="rect">
-            <a:avLst>
-              <a:gd name="adj" fmla="val 13636"/>
-            </a:avLst>
-          </a:prstGeom>
-          <a:solidFill>
-            <a:srgbClr val="EEF2FF"/>
-          </a:solidFill>
-          <a:ln w="12700">
-            <a:solidFill>
-              <a:srgbClr val="6366F1"/>
-            </a:solidFill>
-            <a:prstDash val="solid"/>
-          </a:ln>
-        </p:spPr>
-      </p:sp>
-      <p:sp>
-        <p:nvSpPr>
-          <p:cNvPr id="51" name="Text 49"/>
-          <p:cNvSpPr/>
-          <p:nvPr/>
-        </p:nvSpPr>
-        <p:spPr>
-          <a:xfrm>
-            <a:off x="6894576" y="4023360"/>
-            <a:ext cx="2011680" cy="402336"/>
-          </a:xfrm>
-          <a:prstGeom prst="rect">
-            <a:avLst/>
-          </a:prstGeom>
-          <a:noFill/>
-          <a:ln/>
-        </p:spPr>
-        <p:txBody>
-          <a:bodyPr wrap="square" lIns="0" tIns="0" rIns="0" bIns="0" rtlCol="0" anchor="ctr"/>
-          <a:lstStyle/>
-          <a:p>
-            <a:pPr algn="ctr" indent="0" marL="0">
-              <a:buNone/>
-            </a:pPr>
-            <a:r>
-              <a:rPr lang="en-US" sz="1200" b="1" dirty="0">
-                <a:solidFill>
-                  <a:srgbClr val="4338CA"/>
-                </a:solidFill>
-                <a:latin typeface="Trebuchet MS" pitchFamily="34" charset="0"/>
-                <a:ea typeface="Trebuchet MS" pitchFamily="34" charset="-122"/>
-                <a:cs typeface="Trebuchet MS" pitchFamily="34" charset="-120"/>
-              </a:rPr>
-              <a:t>deeply</a:t>
-            </a:r>
-            <a:endParaRPr lang="en-US" sz="1200" dirty="0"/>
-          </a:p>
-        </p:txBody>
-      </p:sp>
-      <p:sp>
-        <p:nvSpPr>
-          <p:cNvPr id="52" name="Shape 50"/>
-          <p:cNvSpPr/>
-          <p:nvPr/>
-        </p:nvSpPr>
-        <p:spPr>
-          <a:xfrm>
-            <a:off x="365760" y="4498848"/>
-            <a:ext cx="2011680" cy="402336"/>
-          </a:xfrm>
-          <a:prstGeom prst="rect">
-            <a:avLst>
-              <a:gd name="adj" fmla="val 13636"/>
-            </a:avLst>
-          </a:prstGeom>
-          <a:solidFill>
-            <a:srgbClr val="EEF2FF"/>
-          </a:solidFill>
-          <a:ln w="12700">
-            <a:solidFill>
-              <a:srgbClr val="6366F1"/>
-            </a:solidFill>
-            <a:prstDash val="solid"/>
-          </a:ln>
-        </p:spPr>
-      </p:sp>
-      <p:sp>
-        <p:nvSpPr>
-          <p:cNvPr id="53" name="Text 51"/>
-          <p:cNvSpPr/>
-          <p:nvPr/>
-        </p:nvSpPr>
-        <p:spPr>
-          <a:xfrm>
-            <a:off x="365760" y="4498848"/>
-            <a:ext cx="2011680" cy="402336"/>
-          </a:xfrm>
-          <a:prstGeom prst="rect">
-            <a:avLst/>
-          </a:prstGeom>
-          <a:noFill/>
-          <a:ln/>
-        </p:spPr>
-        <p:txBody>
-          <a:bodyPr wrap="square" lIns="0" tIns="0" rIns="0" bIns="0" rtlCol="0" anchor="ctr"/>
-          <a:lstStyle/>
-          <a:p>
-            <a:pPr algn="ctr" indent="0" marL="0">
-              <a:buNone/>
-            </a:pPr>
-            <a:r>
-              <a:rPr lang="en-US" sz="1200" b="1" dirty="0">
-                <a:solidFill>
-                  <a:srgbClr val="4338CA"/>
-                </a:solidFill>
-                <a:latin typeface="Trebuchet MS" pitchFamily="34" charset="0"/>
-                <a:ea typeface="Trebuchet MS" pitchFamily="34" charset="-122"/>
-                <a:cs typeface="Trebuchet MS" pitchFamily="34" charset="-120"/>
-              </a:rPr>
-              <a:t>deepness</a:t>
-            </a:r>
-            <a:endParaRPr lang="en-US" sz="1200" dirty="0"/>
-          </a:p>
-        </p:txBody>
-      </p:sp>
-      <p:sp>
-        <p:nvSpPr>
-          <p:cNvPr id="54" name="Shape 52"/>
-          <p:cNvSpPr/>
-          <p:nvPr/>
-        </p:nvSpPr>
-        <p:spPr>
-          <a:xfrm>
-            <a:off x="2542032" y="4498848"/>
-            <a:ext cx="2011680" cy="402336"/>
-          </a:xfrm>
-          <a:prstGeom prst="rect">
-            <a:avLst>
-              <a:gd name="adj" fmla="val 13636"/>
-            </a:avLst>
-          </a:prstGeom>
-          <a:solidFill>
-            <a:srgbClr val="EEF2FF"/>
-          </a:solidFill>
-          <a:ln w="12700">
-            <a:solidFill>
-              <a:srgbClr val="6366F1"/>
-            </a:solidFill>
-            <a:prstDash val="solid"/>
-          </a:ln>
-        </p:spPr>
-      </p:sp>
-      <p:sp>
-        <p:nvSpPr>
-          <p:cNvPr id="55" name="Text 53"/>
-          <p:cNvSpPr/>
-          <p:nvPr/>
-        </p:nvSpPr>
-        <p:spPr>
-          <a:xfrm>
-            <a:off x="2542032" y="4498848"/>
-            <a:ext cx="2011680" cy="402336"/>
-          </a:xfrm>
-          <a:prstGeom prst="rect">
-            <a:avLst/>
-          </a:prstGeom>
-          <a:noFill/>
-          <a:ln/>
-        </p:spPr>
-        <p:txBody>
-          <a:bodyPr wrap="square" lIns="0" tIns="0" rIns="0" bIns="0" rtlCol="0" anchor="ctr"/>
-          <a:lstStyle/>
-          <a:p>
-            <a:pPr algn="ctr" indent="0" marL="0">
-              <a:buNone/>
-            </a:pPr>
-            <a:r>
-              <a:rPr lang="en-US" sz="1200" b="1" dirty="0">
-                <a:solidFill>
-                  <a:srgbClr val="4338CA"/>
-                </a:solidFill>
-                <a:latin typeface="Trebuchet MS" pitchFamily="34" charset="0"/>
-                <a:ea typeface="Trebuchet MS" pitchFamily="34" charset="-122"/>
-                <a:cs typeface="Trebuchet MS" pitchFamily="34" charset="-120"/>
-              </a:rPr>
-              <a:t>deep-sea</a:t>
-            </a:r>
-            <a:endParaRPr lang="en-US" sz="1200" dirty="0"/>
-          </a:p>
-        </p:txBody>
-      </p:sp>
-      <p:sp>
-        <p:nvSpPr>
-          <p:cNvPr id="56" name="Shape 54"/>
-          <p:cNvSpPr/>
-          <p:nvPr/>
-        </p:nvSpPr>
-        <p:spPr>
-          <a:xfrm>
-            <a:off x="4718304" y="4498848"/>
-            <a:ext cx="2011680" cy="402336"/>
-          </a:xfrm>
-          <a:prstGeom prst="rect">
-            <a:avLst>
-              <a:gd name="adj" fmla="val 13636"/>
-            </a:avLst>
-          </a:prstGeom>
-          <a:solidFill>
-            <a:srgbClr val="EEF2FF"/>
-          </a:solidFill>
-          <a:ln w="12700">
-            <a:solidFill>
-              <a:srgbClr val="6366F1"/>
-            </a:solidFill>
-            <a:prstDash val="solid"/>
-          </a:ln>
-        </p:spPr>
-      </p:sp>
-      <p:sp>
-        <p:nvSpPr>
-          <p:cNvPr id="57" name="Text 55"/>
-          <p:cNvSpPr/>
-          <p:nvPr/>
-        </p:nvSpPr>
-        <p:spPr>
-          <a:xfrm>
-            <a:off x="4718304" y="4498848"/>
-            <a:ext cx="2011680" cy="402336"/>
-          </a:xfrm>
-          <a:prstGeom prst="rect">
-            <a:avLst/>
-          </a:prstGeom>
-          <a:noFill/>
-          <a:ln/>
-        </p:spPr>
-        <p:txBody>
-          <a:bodyPr wrap="square" lIns="0" tIns="0" rIns="0" bIns="0" rtlCol="0" anchor="ctr"/>
-          <a:lstStyle/>
-          <a:p>
-            <a:pPr algn="ctr" indent="0" marL="0">
-              <a:buNone/>
-            </a:pPr>
-            <a:r>
-              <a:rPr lang="en-US" sz="1200" b="1" dirty="0">
-                <a:solidFill>
-                  <a:srgbClr val="4338CA"/>
-                </a:solidFill>
-                <a:latin typeface="Trebuchet MS" pitchFamily="34" charset="0"/>
-                <a:ea typeface="Trebuchet MS" pitchFamily="34" charset="-122"/>
-                <a:cs typeface="Trebuchet MS" pitchFamily="34" charset="-120"/>
-              </a:rPr>
-              <a:t>deep-set</a:t>
-            </a:r>
-            <a:endParaRPr lang="en-US" sz="1200" dirty="0"/>
-          </a:p>
-        </p:txBody>
-      </p:sp>
-      <p:sp>
-        <p:nvSpPr>
-          <p:cNvPr id="58" name="Shape 56"/>
-          <p:cNvSpPr/>
-          <p:nvPr/>
-        </p:nvSpPr>
-        <p:spPr>
-          <a:xfrm>
-            <a:off x="6894576" y="4498848"/>
-            <a:ext cx="2011680" cy="402336"/>
-          </a:xfrm>
-          <a:prstGeom prst="rect">
-            <a:avLst>
-              <a:gd name="adj" fmla="val 13636"/>
-            </a:avLst>
-          </a:prstGeom>
-          <a:solidFill>
-            <a:srgbClr val="EEF2FF"/>
-          </a:solidFill>
-          <a:ln w="12700">
-            <a:solidFill>
-              <a:srgbClr val="6366F1"/>
-            </a:solidFill>
-            <a:prstDash val="solid"/>
-          </a:ln>
-        </p:spPr>
-      </p:sp>
-      <p:sp>
-        <p:nvSpPr>
-          <p:cNvPr id="59" name="Text 57"/>
-          <p:cNvSpPr/>
-          <p:nvPr/>
-        </p:nvSpPr>
-        <p:spPr>
-          <a:xfrm>
-            <a:off x="6894576" y="4498848"/>
-            <a:ext cx="2011680" cy="402336"/>
-          </a:xfrm>
-          <a:prstGeom prst="rect">
-            <a:avLst/>
-          </a:prstGeom>
-          <a:noFill/>
-          <a:ln/>
-        </p:spPr>
-        <p:txBody>
-          <a:bodyPr wrap="square" lIns="0" tIns="0" rIns="0" bIns="0" rtlCol="0" anchor="ctr"/>
-          <a:lstStyle/>
-          <a:p>
-            <a:pPr algn="ctr" indent="0" marL="0">
-              <a:buNone/>
-            </a:pPr>
-            <a:r>
-              <a:rPr lang="en-US" sz="1200" b="1" dirty="0">
-                <a:solidFill>
-                  <a:srgbClr val="4338CA"/>
-                </a:solidFill>
-                <a:latin typeface="Trebuchet MS" pitchFamily="34" charset="0"/>
-                <a:ea typeface="Trebuchet MS" pitchFamily="34" charset="-122"/>
-                <a:cs typeface="Trebuchet MS" pitchFamily="34" charset="-120"/>
-              </a:rPr>
-              <a:t>deep-rooted</a:t>
             </a:r>
             <a:endParaRPr lang="en-US" sz="1200" dirty="0"/>
           </a:p>
@@ -34358,7 +35142,7 @@
                 <a:ea typeface="Calibri" pitchFamily="34" charset="-122"/>
                 <a:cs typeface="Calibri" pitchFamily="34" charset="-120"/>
               </a:rPr>
-              <a:t>Word Labs  •  wordlabs.app  •  Root: 'deep' = far down, profound distance</a:t>
+              <a:t>Word Labs  •  wordlabs.app  •  Root: 'deep' = going far down or in</a:t>
             </a:r>
             <a:endParaRPr lang="en-US" sz="800" dirty="0"/>
           </a:p>
@@ -34522,7 +35306,7 @@
                 <a:ea typeface="Calibri" pitchFamily="34" charset="-122"/>
                 <a:cs typeface="Calibri" pitchFamily="34" charset="-120"/>
               </a:rPr>
-              <a:t>The core part of a word carrying its basic meaning. For example, 'deep' means 'far down, profound distance'.</a:t>
+              <a:t>The core part of a word carrying its basic meaning. For example, 'deep' means 'going far down or in'.</a:t>
             </a:r>
             <a:endParaRPr lang="en-US" sz="1350" dirty="0"/>
           </a:p>
@@ -35142,7 +35926,7 @@
                 <a:ea typeface="Calibri" pitchFamily="34" charset="-122"/>
                 <a:cs typeface="Calibri" pitchFamily="34" charset="-120"/>
               </a:rPr>
-              <a:t>Word Labs  •  wordlabs.app  •  Root: 'deep' = far down, profound distance</a:t>
+              <a:t>Word Labs  •  wordlabs.app  •  Root: 'deep' = going far down or in</a:t>
             </a:r>
             <a:endParaRPr lang="en-US" sz="800" dirty="0"/>
           </a:p>
@@ -35254,7 +36038,7 @@
                 <a:ea typeface="Calibri" pitchFamily="34" charset="-122"/>
                 <a:cs typeface="Calibri" pitchFamily="34" charset="-120"/>
               </a:rPr>
-              <a:t>1.  The morpheme 'deep' comes from ancient Greek.</a:t>
+              <a:t>1.  'deepen' means 'to make something shallower'.</a:t>
             </a:r>
             <a:endParaRPr lang="en-US" sz="1300" dirty="0"/>
           </a:p>
@@ -35393,7 +36177,7 @@
                 <a:ea typeface="Calibri" pitchFamily="34" charset="-122"/>
                 <a:cs typeface="Calibri" pitchFamily="34" charset="-120"/>
               </a:rPr>
-              <a:t>2.  The word 'deepest' uses the suffix '-est' to mean the most deep.</a:t>
+              <a:t>2.  'deep' means 'very shallow and near the surface'.</a:t>
             </a:r>
             <a:endParaRPr lang="en-US" sz="1300" dirty="0"/>
           </a:p>
@@ -35416,11 +36200,11 @@
             </a:avLst>
           </a:prstGeom>
           <a:solidFill>
-            <a:srgbClr val="DCFCE7"/>
-          </a:solidFill>
-          <a:ln w="12700">
-            <a:solidFill>
-              <a:srgbClr val="16A34A"/>
+            <a:srgbClr val="FEE2E2"/>
+          </a:solidFill>
+          <a:ln w="12700">
+            <a:solidFill>
+              <a:srgbClr val="DC2626"/>
             </a:solidFill>
             <a:prstDash val="solid"/>
           </a:ln>
@@ -35453,13 +36237,13 @@
             <a:r>
               <a:rPr lang="en-US" sz="1100" b="1" dirty="0">
                 <a:solidFill>
-                  <a:srgbClr val="16A34A"/>
+                  <a:srgbClr val="DC2626"/>
                 </a:solidFill>
                 <a:latin typeface="Trebuchet MS" pitchFamily="34" charset="0"/>
                 <a:ea typeface="Trebuchet MS" pitchFamily="34" charset="-122"/>
                 <a:cs typeface="Trebuchet MS" pitchFamily="34" charset="-120"/>
               </a:rPr>
-              <a:t>TRUE</a:t>
+              <a:t>FALSE</a:t>
             </a:r>
             <a:endParaRPr lang="en-US" sz="1100" dirty="0"/>
           </a:p>
@@ -35532,7 +36316,7 @@
                 <a:ea typeface="Calibri" pitchFamily="34" charset="-122"/>
                 <a:cs typeface="Calibri" pitchFamily="34" charset="-120"/>
               </a:rPr>
-              <a:t>3.  Adding '-en' to 'deep' makes the word 'deepen', meaning to make deeper.</a:t>
+              <a:t>3.  'deepen' means 'to make something deeper, or to become deeper'.</a:t>
             </a:r>
             <a:endParaRPr lang="en-US" sz="1300" dirty="0"/>
           </a:p>
@@ -35671,7 +36455,7 @@
                 <a:ea typeface="Calibri" pitchFamily="34" charset="-122"/>
                 <a:cs typeface="Calibri" pitchFamily="34" charset="-120"/>
               </a:rPr>
-              <a:t>4.  The word 'deeply' is formed by adding the suffix '-ly' to 'deep'.</a:t>
+              <a:t>4.  'deep' means 'going far down or in'.</a:t>
             </a:r>
             <a:endParaRPr lang="en-US" sz="1300" dirty="0"/>
           </a:p>
@@ -35810,7 +36594,7 @@
                 <a:ea typeface="Calibri" pitchFamily="34" charset="-122"/>
                 <a:cs typeface="Calibri" pitchFamily="34" charset="-120"/>
               </a:rPr>
-              <a:t>5.  The morpheme 'deep' means something that is very wide.</a:t>
+              <a:t>5.  'deep' means 'going a long way down or in from the top or surface'.</a:t>
             </a:r>
             <a:endParaRPr lang="en-US" sz="1300" dirty="0"/>
           </a:p>
@@ -35833,11 +36617,11 @@
             </a:avLst>
           </a:prstGeom>
           <a:solidFill>
-            <a:srgbClr val="FEE2E2"/>
-          </a:solidFill>
-          <a:ln w="12700">
-            <a:solidFill>
-              <a:srgbClr val="DC2626"/>
+            <a:srgbClr val="DCFCE7"/>
+          </a:solidFill>
+          <a:ln w="12700">
+            <a:solidFill>
+              <a:srgbClr val="16A34A"/>
             </a:solidFill>
             <a:prstDash val="solid"/>
           </a:ln>
@@ -35870,13 +36654,13 @@
             <a:r>
               <a:rPr lang="en-US" sz="1100" b="1" dirty="0">
                 <a:solidFill>
-                  <a:srgbClr val="DC2626"/>
+                  <a:srgbClr val="16A34A"/>
                 </a:solidFill>
                 <a:latin typeface="Trebuchet MS" pitchFamily="34" charset="0"/>
                 <a:ea typeface="Trebuchet MS" pitchFamily="34" charset="-122"/>
                 <a:cs typeface="Trebuchet MS" pitchFamily="34" charset="-120"/>
               </a:rPr>
-              <a:t>FALSE</a:t>
+              <a:t>TRUE</a:t>
             </a:r>
             <a:endParaRPr lang="en-US" sz="1100" dirty="0"/>
           </a:p>
@@ -36168,7 +36952,7 @@
                 <a:ea typeface="Calibri" pitchFamily="34" charset="-122"/>
                 <a:cs typeface="Calibri" pitchFamily="34" charset="-120"/>
               </a:rPr>
-              <a:t>Word Labs  •  wordlabs.app  •  Root: 'deep' = far down, profound distance</a:t>
+              <a:t>Word Labs  •  wordlabs.app  •  Root: 'deep' = going far down or in</a:t>
             </a:r>
             <a:endParaRPr lang="en-US" sz="800" dirty="0"/>
           </a:p>
@@ -36305,7 +37089,7 @@
                 <a:ea typeface="Trebuchet MS" pitchFamily="34" charset="-122"/>
                 <a:cs typeface="Trebuchet MS" pitchFamily="34" charset="-120"/>
               </a:rPr>
-              <a:t>far down, profound distance</a:t>
+              <a:t>going far down or in</a:t>
             </a:r>
             <a:endParaRPr lang="en-US" sz="2000" dirty="0"/>
           </a:p>
@@ -36344,7 +37128,7 @@
                 <a:ea typeface="Calibri" pitchFamily="34" charset="-122"/>
                 <a:cs typeface="Calibri" pitchFamily="34" charset="-120"/>
               </a:rPr>
-              <a:t>Origin: Latin: deepaz</a:t>
+              <a:t>Origin: Anglo-Saxon (Old English) root</a:t>
             </a:r>
             <a:endParaRPr lang="en-US" sz="1100" dirty="0"/>
           </a:p>
@@ -36449,7 +37233,7 @@
                 <a:ea typeface="Trebuchet MS" pitchFamily="34" charset="-122"/>
                 <a:cs typeface="Trebuchet MS" pitchFamily="34" charset="-120"/>
               </a:rPr>
-              <a:t>deepen</a:t>
+              <a:t>deep</a:t>
             </a:r>
             <a:endParaRPr lang="en-US" sz="1300" dirty="0"/>
           </a:p>
@@ -36515,7 +37299,7 @@
                 <a:ea typeface="Trebuchet MS" pitchFamily="34" charset="-122"/>
                 <a:cs typeface="Trebuchet MS" pitchFamily="34" charset="-120"/>
               </a:rPr>
-              <a:t>deeper</a:t>
+              <a:t>deepen</a:t>
             </a:r>
             <a:endParaRPr lang="en-US" sz="1300" dirty="0"/>
           </a:p>
@@ -36581,271 +37365,7 @@
                 <a:ea typeface="Trebuchet MS" pitchFamily="34" charset="-122"/>
                 <a:cs typeface="Trebuchet MS" pitchFamily="34" charset="-120"/>
               </a:rPr>
-              <a:t>deepest</a:t>
-            </a:r>
-            <a:endParaRPr lang="en-US" sz="1300" dirty="0"/>
-          </a:p>
-        </p:txBody>
-      </p:sp>
-      <p:sp>
-        <p:nvSpPr>
-          <p:cNvPr id="22" name="Shape 20"/>
-          <p:cNvSpPr/>
-          <p:nvPr/>
-        </p:nvSpPr>
-        <p:spPr>
-          <a:xfrm>
-            <a:off x="6812280" y="2743200"/>
-            <a:ext cx="2011680" cy="502920"/>
-          </a:xfrm>
-          <a:prstGeom prst="rect">
-            <a:avLst>
-              <a:gd name="adj" fmla="val 14545"/>
-            </a:avLst>
-          </a:prstGeom>
-          <a:solidFill>
-            <a:srgbClr val="EEF2FF"/>
-          </a:solidFill>
-          <a:ln w="12700">
-            <a:solidFill>
-              <a:srgbClr val="6366F1"/>
-            </a:solidFill>
-            <a:prstDash val="solid"/>
-          </a:ln>
-        </p:spPr>
-      </p:sp>
-      <p:sp>
-        <p:nvSpPr>
-          <p:cNvPr id="23" name="Text 21"/>
-          <p:cNvSpPr/>
-          <p:nvPr/>
-        </p:nvSpPr>
-        <p:spPr>
-          <a:xfrm>
-            <a:off x="6812280" y="2743200"/>
-            <a:ext cx="2011680" cy="502920"/>
-          </a:xfrm>
-          <a:prstGeom prst="rect">
-            <a:avLst/>
-          </a:prstGeom>
-          <a:noFill/>
-          <a:ln/>
-        </p:spPr>
-        <p:txBody>
-          <a:bodyPr wrap="square" lIns="0" tIns="0" rIns="0" bIns="0" rtlCol="0" anchor="ctr"/>
-          <a:lstStyle/>
-          <a:p>
-            <a:pPr algn="ctr" indent="0" marL="0">
-              <a:buNone/>
-            </a:pPr>
-            <a:r>
-              <a:rPr lang="en-US" sz="1300" b="1" dirty="0">
-                <a:solidFill>
-                  <a:srgbClr val="4338CA"/>
-                </a:solidFill>
-                <a:latin typeface="Trebuchet MS" pitchFamily="34" charset="0"/>
-                <a:ea typeface="Trebuchet MS" pitchFamily="34" charset="-122"/>
-                <a:cs typeface="Trebuchet MS" pitchFamily="34" charset="-120"/>
-              </a:rPr>
-              <a:t>deeply</a:t>
-            </a:r>
-            <a:endParaRPr lang="en-US" sz="1300" dirty="0"/>
-          </a:p>
-        </p:txBody>
-      </p:sp>
-      <p:sp>
-        <p:nvSpPr>
-          <p:cNvPr id="24" name="Shape 22"/>
-          <p:cNvSpPr/>
-          <p:nvPr/>
-        </p:nvSpPr>
-        <p:spPr>
-          <a:xfrm>
-            <a:off x="365760" y="3401568"/>
-            <a:ext cx="2011680" cy="502920"/>
-          </a:xfrm>
-          <a:prstGeom prst="rect">
-            <a:avLst>
-              <a:gd name="adj" fmla="val 14545"/>
-            </a:avLst>
-          </a:prstGeom>
-          <a:solidFill>
-            <a:srgbClr val="EEF2FF"/>
-          </a:solidFill>
-          <a:ln w="12700">
-            <a:solidFill>
-              <a:srgbClr val="6366F1"/>
-            </a:solidFill>
-            <a:prstDash val="solid"/>
-          </a:ln>
-        </p:spPr>
-      </p:sp>
-      <p:sp>
-        <p:nvSpPr>
-          <p:cNvPr id="25" name="Text 23"/>
-          <p:cNvSpPr/>
-          <p:nvPr/>
-        </p:nvSpPr>
-        <p:spPr>
-          <a:xfrm>
-            <a:off x="365760" y="3401568"/>
-            <a:ext cx="2011680" cy="502920"/>
-          </a:xfrm>
-          <a:prstGeom prst="rect">
-            <a:avLst/>
-          </a:prstGeom>
-          <a:noFill/>
-          <a:ln/>
-        </p:spPr>
-        <p:txBody>
-          <a:bodyPr wrap="square" lIns="0" tIns="0" rIns="0" bIns="0" rtlCol="0" anchor="ctr"/>
-          <a:lstStyle/>
-          <a:p>
-            <a:pPr algn="ctr" indent="0" marL="0">
-              <a:buNone/>
-            </a:pPr>
-            <a:r>
-              <a:rPr lang="en-US" sz="1300" b="1" dirty="0">
-                <a:solidFill>
-                  <a:srgbClr val="4338CA"/>
-                </a:solidFill>
-                <a:latin typeface="Trebuchet MS" pitchFamily="34" charset="0"/>
-                <a:ea typeface="Trebuchet MS" pitchFamily="34" charset="-122"/>
-                <a:cs typeface="Trebuchet MS" pitchFamily="34" charset="-120"/>
-              </a:rPr>
-              <a:t>deepness</a:t>
-            </a:r>
-            <a:endParaRPr lang="en-US" sz="1300" dirty="0"/>
-          </a:p>
-        </p:txBody>
-      </p:sp>
-      <p:sp>
-        <p:nvSpPr>
-          <p:cNvPr id="26" name="Shape 24"/>
-          <p:cNvSpPr/>
-          <p:nvPr/>
-        </p:nvSpPr>
-        <p:spPr>
-          <a:xfrm>
-            <a:off x="2514600" y="3401568"/>
-            <a:ext cx="2011680" cy="502920"/>
-          </a:xfrm>
-          <a:prstGeom prst="rect">
-            <a:avLst>
-              <a:gd name="adj" fmla="val 14545"/>
-            </a:avLst>
-          </a:prstGeom>
-          <a:solidFill>
-            <a:srgbClr val="EEF2FF"/>
-          </a:solidFill>
-          <a:ln w="12700">
-            <a:solidFill>
-              <a:srgbClr val="6366F1"/>
-            </a:solidFill>
-            <a:prstDash val="solid"/>
-          </a:ln>
-        </p:spPr>
-      </p:sp>
-      <p:sp>
-        <p:nvSpPr>
-          <p:cNvPr id="27" name="Text 25"/>
-          <p:cNvSpPr/>
-          <p:nvPr/>
-        </p:nvSpPr>
-        <p:spPr>
-          <a:xfrm>
-            <a:off x="2514600" y="3401568"/>
-            <a:ext cx="2011680" cy="502920"/>
-          </a:xfrm>
-          <a:prstGeom prst="rect">
-            <a:avLst/>
-          </a:prstGeom>
-          <a:noFill/>
-          <a:ln/>
-        </p:spPr>
-        <p:txBody>
-          <a:bodyPr wrap="square" lIns="0" tIns="0" rIns="0" bIns="0" rtlCol="0" anchor="ctr"/>
-          <a:lstStyle/>
-          <a:p>
-            <a:pPr algn="ctr" indent="0" marL="0">
-              <a:buNone/>
-            </a:pPr>
-            <a:r>
-              <a:rPr lang="en-US" sz="1300" b="1" dirty="0">
-                <a:solidFill>
-                  <a:srgbClr val="4338CA"/>
-                </a:solidFill>
-                <a:latin typeface="Trebuchet MS" pitchFamily="34" charset="0"/>
-                <a:ea typeface="Trebuchet MS" pitchFamily="34" charset="-122"/>
-                <a:cs typeface="Trebuchet MS" pitchFamily="34" charset="-120"/>
-              </a:rPr>
-              <a:t>deep-sea</a:t>
-            </a:r>
-            <a:endParaRPr lang="en-US" sz="1300" dirty="0"/>
-          </a:p>
-        </p:txBody>
-      </p:sp>
-      <p:sp>
-        <p:nvSpPr>
-          <p:cNvPr id="28" name="Shape 26"/>
-          <p:cNvSpPr/>
-          <p:nvPr/>
-        </p:nvSpPr>
-        <p:spPr>
-          <a:xfrm>
-            <a:off x="4663440" y="3401568"/>
-            <a:ext cx="2011680" cy="502920"/>
-          </a:xfrm>
-          <a:prstGeom prst="rect">
-            <a:avLst>
-              <a:gd name="adj" fmla="val 14545"/>
-            </a:avLst>
-          </a:prstGeom>
-          <a:solidFill>
-            <a:srgbClr val="EEF2FF"/>
-          </a:solidFill>
-          <a:ln w="12700">
-            <a:solidFill>
-              <a:srgbClr val="6366F1"/>
-            </a:solidFill>
-            <a:prstDash val="solid"/>
-          </a:ln>
-        </p:spPr>
-      </p:sp>
-      <p:sp>
-        <p:nvSpPr>
-          <p:cNvPr id="29" name="Text 27"/>
-          <p:cNvSpPr/>
-          <p:nvPr/>
-        </p:nvSpPr>
-        <p:spPr>
-          <a:xfrm>
-            <a:off x="4663440" y="3401568"/>
-            <a:ext cx="2011680" cy="502920"/>
-          </a:xfrm>
-          <a:prstGeom prst="rect">
-            <a:avLst/>
-          </a:prstGeom>
-          <a:noFill/>
-          <a:ln/>
-        </p:spPr>
-        <p:txBody>
-          <a:bodyPr wrap="square" lIns="0" tIns="0" rIns="0" bIns="0" rtlCol="0" anchor="ctr"/>
-          <a:lstStyle/>
-          <a:p>
-            <a:pPr algn="ctr" indent="0" marL="0">
-              <a:buNone/>
-            </a:pPr>
-            <a:r>
-              <a:rPr lang="en-US" sz="1300" b="1" dirty="0">
-                <a:solidFill>
-                  <a:srgbClr val="4338CA"/>
-                </a:solidFill>
-                <a:latin typeface="Trebuchet MS" pitchFamily="34" charset="0"/>
-                <a:ea typeface="Trebuchet MS" pitchFamily="34" charset="-122"/>
-                <a:cs typeface="Trebuchet MS" pitchFamily="34" charset="-120"/>
-              </a:rPr>
-              <a:t>deep-set</a:t>
+              <a:t>deeper</a:t>
             </a:r>
             <a:endParaRPr lang="en-US" sz="1300" dirty="0"/>
           </a:p>
@@ -37137,7 +37657,7 @@
                 <a:ea typeface="Calibri" pitchFamily="34" charset="-122"/>
                 <a:cs typeface="Calibri" pitchFamily="34" charset="-120"/>
               </a:rPr>
-              <a:t>Word Labs  •  wordlabs.app  •  Root: 'deep' = far down, profound distance</a:t>
+              <a:t>Word Labs  •  wordlabs.app  •  Root: 'deep' = going far down or in</a:t>
             </a:r>
             <a:endParaRPr lang="en-US" sz="800" dirty="0"/>
           </a:p>
@@ -37395,7 +37915,7 @@
             <a:avLst/>
           </a:prstGeom>
           <a:solidFill>
-            <a:srgbClr val="DDD6FE"/>
+            <a:srgbClr val="F8FAFC"/>
           </a:solidFill>
           <a:ln w="12700">
             <a:solidFill>
@@ -37407,14 +37927,39 @@
       </p:sp>
       <p:sp>
         <p:nvSpPr>
-          <p:cNvPr id="18" name="Text 16"/>
-          <p:cNvSpPr/>
-          <p:nvPr/>
-        </p:nvSpPr>
-        <p:spPr>
-          <a:xfrm>
-            <a:off x="640080" y="1755648"/>
-            <a:ext cx="1463040" cy="420624"/>
+          <p:cNvPr id="18" name="Shape 16"/>
+          <p:cNvSpPr/>
+          <p:nvPr/>
+        </p:nvSpPr>
+        <p:spPr>
+          <a:xfrm>
+            <a:off x="3291840" y="1755648"/>
+            <a:ext cx="1645920" cy="420624"/>
+          </a:xfrm>
+          <a:prstGeom prst="rect">
+            <a:avLst/>
+          </a:prstGeom>
+          <a:solidFill>
+            <a:srgbClr val="CCFBF1"/>
+          </a:solidFill>
+          <a:ln w="12700">
+            <a:solidFill>
+              <a:srgbClr val="E5E7EB"/>
+            </a:solidFill>
+            <a:prstDash val="solid"/>
+          </a:ln>
+        </p:spPr>
+      </p:sp>
+      <p:sp>
+        <p:nvSpPr>
+          <p:cNvPr id="19" name="Text 17"/>
+          <p:cNvSpPr/>
+          <p:nvPr/>
+        </p:nvSpPr>
+        <p:spPr>
+          <a:xfrm>
+            <a:off x="3291840" y="1755648"/>
+            <a:ext cx="1645920" cy="420624"/>
           </a:xfrm>
           <a:prstGeom prst="rect">
             <a:avLst/>
@@ -37432,13 +37977,13 @@
             <a:r>
               <a:rPr lang="en-US" sz="1300" b="1" dirty="0">
                 <a:solidFill>
-                  <a:srgbClr val="4C1D95"/>
+                  <a:srgbClr val="0F766E"/>
                 </a:solidFill>
                 <a:latin typeface="Trebuchet MS" pitchFamily="34" charset="0"/>
                 <a:ea typeface="Trebuchet MS" pitchFamily="34" charset="-122"/>
                 <a:cs typeface="Trebuchet MS" pitchFamily="34" charset="-120"/>
               </a:rPr>
-              <a:t>knee--</a:t>
+              <a:t>deep</a:t>
             </a:r>
             <a:endParaRPr lang="en-US" sz="1300" dirty="0"/>
           </a:p>
@@ -37446,20 +37991,20 @@
       </p:sp>
       <p:sp>
         <p:nvSpPr>
-          <p:cNvPr id="19" name="Shape 17"/>
-          <p:cNvSpPr/>
-          <p:nvPr/>
-        </p:nvSpPr>
-        <p:spPr>
-          <a:xfrm>
-            <a:off x="3291840" y="1755648"/>
-            <a:ext cx="1645920" cy="420624"/>
-          </a:xfrm>
-          <a:prstGeom prst="rect">
-            <a:avLst/>
-          </a:prstGeom>
-          <a:solidFill>
-            <a:srgbClr val="CCFBF1"/>
+          <p:cNvPr id="20" name="Shape 18"/>
+          <p:cNvSpPr/>
+          <p:nvPr/>
+        </p:nvSpPr>
+        <p:spPr>
+          <a:xfrm>
+            <a:off x="5943600" y="1755648"/>
+            <a:ext cx="1463040" cy="420624"/>
+          </a:xfrm>
+          <a:prstGeom prst="rect">
+            <a:avLst/>
+          </a:prstGeom>
+          <a:solidFill>
+            <a:srgbClr val="FCE7F3"/>
           </a:solidFill>
           <a:ln w="12700">
             <a:solidFill>
@@ -37471,14 +38016,14 @@
       </p:sp>
       <p:sp>
         <p:nvSpPr>
-          <p:cNvPr id="20" name="Text 18"/>
-          <p:cNvSpPr/>
-          <p:nvPr/>
-        </p:nvSpPr>
-        <p:spPr>
-          <a:xfrm>
-            <a:off x="3291840" y="1755648"/>
-            <a:ext cx="1645920" cy="420624"/>
+          <p:cNvPr id="21" name="Text 19"/>
+          <p:cNvSpPr/>
+          <p:nvPr/>
+        </p:nvSpPr>
+        <p:spPr>
+          <a:xfrm>
+            <a:off x="5943600" y="1755648"/>
+            <a:ext cx="1463040" cy="420624"/>
           </a:xfrm>
           <a:prstGeom prst="rect">
             <a:avLst/>
@@ -37496,13 +38041,13 @@
             <a:r>
               <a:rPr lang="en-US" sz="1300" b="1" dirty="0">
                 <a:solidFill>
-                  <a:srgbClr val="0F766E"/>
+                  <a:srgbClr val="9D174D"/>
                 </a:solidFill>
                 <a:latin typeface="Trebuchet MS" pitchFamily="34" charset="0"/>
                 <a:ea typeface="Trebuchet MS" pitchFamily="34" charset="-122"/>
                 <a:cs typeface="Trebuchet MS" pitchFamily="34" charset="-120"/>
               </a:rPr>
-              <a:t>deep</a:t>
+              <a:t>-en</a:t>
             </a:r>
             <a:endParaRPr lang="en-US" sz="1300" dirty="0"/>
           </a:p>
@@ -37510,19 +38055,69 @@
       </p:sp>
       <p:sp>
         <p:nvSpPr>
-          <p:cNvPr id="21" name="Shape 19"/>
-          <p:cNvSpPr/>
-          <p:nvPr/>
-        </p:nvSpPr>
-        <p:spPr>
-          <a:xfrm>
-            <a:off x="5943600" y="1755648"/>
+          <p:cNvPr id="22" name="Shape 20"/>
+          <p:cNvSpPr/>
+          <p:nvPr/>
+        </p:nvSpPr>
+        <p:spPr>
+          <a:xfrm>
+            <a:off x="640080" y="2212848"/>
             <a:ext cx="1463040" cy="420624"/>
           </a:xfrm>
           <a:prstGeom prst="rect">
             <a:avLst/>
           </a:prstGeom>
           <a:solidFill>
+            <a:srgbClr val="F1F5F9"/>
+          </a:solidFill>
+          <a:ln w="12700">
+            <a:solidFill>
+              <a:srgbClr val="E5E7EB"/>
+            </a:solidFill>
+            <a:prstDash val="solid"/>
+          </a:ln>
+        </p:spPr>
+      </p:sp>
+      <p:sp>
+        <p:nvSpPr>
+          <p:cNvPr id="23" name="Shape 21"/>
+          <p:cNvSpPr/>
+          <p:nvPr/>
+        </p:nvSpPr>
+        <p:spPr>
+          <a:xfrm>
+            <a:off x="3291840" y="2212848"/>
+            <a:ext cx="1645920" cy="420624"/>
+          </a:xfrm>
+          <a:prstGeom prst="rect">
+            <a:avLst/>
+          </a:prstGeom>
+          <a:solidFill>
+            <a:srgbClr val="F1F5F9"/>
+          </a:solidFill>
+          <a:ln w="12700">
+            <a:solidFill>
+              <a:srgbClr val="E5E7EB"/>
+            </a:solidFill>
+            <a:prstDash val="solid"/>
+          </a:ln>
+        </p:spPr>
+      </p:sp>
+      <p:sp>
+        <p:nvSpPr>
+          <p:cNvPr id="24" name="Shape 22"/>
+          <p:cNvSpPr/>
+          <p:nvPr/>
+        </p:nvSpPr>
+        <p:spPr>
+          <a:xfrm>
+            <a:off x="5943600" y="2212848"/>
+            <a:ext cx="1463040" cy="420624"/>
+          </a:xfrm>
+          <a:prstGeom prst="rect">
+            <a:avLst/>
+          </a:prstGeom>
+          <a:solidFill>
             <a:srgbClr val="FCE7F3"/>
           </a:solidFill>
           <a:ln w="12700">
@@ -37535,13 +38130,13 @@
       </p:sp>
       <p:sp>
         <p:nvSpPr>
-          <p:cNvPr id="22" name="Text 20"/>
-          <p:cNvSpPr/>
-          <p:nvPr/>
-        </p:nvSpPr>
-        <p:spPr>
-          <a:xfrm>
-            <a:off x="5943600" y="1755648"/>
+          <p:cNvPr id="25" name="Text 23"/>
+          <p:cNvSpPr/>
+          <p:nvPr/>
+        </p:nvSpPr>
+        <p:spPr>
+          <a:xfrm>
+            <a:off x="5943600" y="2212848"/>
             <a:ext cx="1463040" cy="420624"/>
           </a:xfrm>
           <a:prstGeom prst="rect">
@@ -37566,7 +38161,7 @@
                 <a:ea typeface="Trebuchet MS" pitchFamily="34" charset="-122"/>
                 <a:cs typeface="Trebuchet MS" pitchFamily="34" charset="-120"/>
               </a:rPr>
-              <a:t>--en</a:t>
+              <a:t>-er</a:t>
             </a:r>
             <a:endParaRPr lang="en-US" sz="1300" dirty="0"/>
           </a:p>
@@ -37574,20 +38169,20 @@
       </p:sp>
       <p:sp>
         <p:nvSpPr>
-          <p:cNvPr id="23" name="Shape 21"/>
-          <p:cNvSpPr/>
-          <p:nvPr/>
-        </p:nvSpPr>
-        <p:spPr>
-          <a:xfrm>
-            <a:off x="640080" y="2212848"/>
+          <p:cNvPr id="26" name="Shape 24"/>
+          <p:cNvSpPr/>
+          <p:nvPr/>
+        </p:nvSpPr>
+        <p:spPr>
+          <a:xfrm>
+            <a:off x="640080" y="2670048"/>
             <a:ext cx="1463040" cy="420624"/>
           </a:xfrm>
           <a:prstGeom prst="rect">
             <a:avLst/>
           </a:prstGeom>
           <a:solidFill>
-            <a:srgbClr val="DDD6FE"/>
+            <a:srgbClr val="F8FAFC"/>
           </a:solidFill>
           <a:ln w="12700">
             <a:solidFill>
@@ -37599,18 +38194,68 @@
       </p:sp>
       <p:sp>
         <p:nvSpPr>
-          <p:cNvPr id="24" name="Text 22"/>
-          <p:cNvSpPr/>
-          <p:nvPr/>
-        </p:nvSpPr>
-        <p:spPr>
-          <a:xfrm>
-            <a:off x="640080" y="2212848"/>
+          <p:cNvPr id="27" name="Shape 25"/>
+          <p:cNvSpPr/>
+          <p:nvPr/>
+        </p:nvSpPr>
+        <p:spPr>
+          <a:xfrm>
+            <a:off x="3291840" y="2670048"/>
+            <a:ext cx="1645920" cy="420624"/>
+          </a:xfrm>
+          <a:prstGeom prst="rect">
+            <a:avLst/>
+          </a:prstGeom>
+          <a:solidFill>
+            <a:srgbClr val="F8FAFC"/>
+          </a:solidFill>
+          <a:ln w="12700">
+            <a:solidFill>
+              <a:srgbClr val="E5E7EB"/>
+            </a:solidFill>
+            <a:prstDash val="solid"/>
+          </a:ln>
+        </p:spPr>
+      </p:sp>
+      <p:sp>
+        <p:nvSpPr>
+          <p:cNvPr id="28" name="Shape 26"/>
+          <p:cNvSpPr/>
+          <p:nvPr/>
+        </p:nvSpPr>
+        <p:spPr>
+          <a:xfrm>
+            <a:off x="5943600" y="2670048"/>
             <a:ext cx="1463040" cy="420624"/>
           </a:xfrm>
           <a:prstGeom prst="rect">
             <a:avLst/>
           </a:prstGeom>
+          <a:solidFill>
+            <a:srgbClr val="FCE7F3"/>
+          </a:solidFill>
+          <a:ln w="12700">
+            <a:solidFill>
+              <a:srgbClr val="E5E7EB"/>
+            </a:solidFill>
+            <a:prstDash val="solid"/>
+          </a:ln>
+        </p:spPr>
+      </p:sp>
+      <p:sp>
+        <p:nvSpPr>
+          <p:cNvPr id="29" name="Text 27"/>
+          <p:cNvSpPr/>
+          <p:nvPr/>
+        </p:nvSpPr>
+        <p:spPr>
+          <a:xfrm>
+            <a:off x="5943600" y="2670048"/>
+            <a:ext cx="1463040" cy="420624"/>
+          </a:xfrm>
+          <a:prstGeom prst="rect">
+            <a:avLst/>
+          </a:prstGeom>
           <a:noFill/>
           <a:ln/>
         </p:spPr>
@@ -37624,13 +38269,13 @@
             <a:r>
               <a:rPr lang="en-US" sz="1300" b="1" dirty="0">
                 <a:solidFill>
-                  <a:srgbClr val="4C1D95"/>
+                  <a:srgbClr val="9D174D"/>
                 </a:solidFill>
                 <a:latin typeface="Trebuchet MS" pitchFamily="34" charset="0"/>
                 <a:ea typeface="Trebuchet MS" pitchFamily="34" charset="-122"/>
                 <a:cs typeface="Trebuchet MS" pitchFamily="34" charset="-120"/>
               </a:rPr>
-              <a:t>waste--</a:t>
+              <a:t>-est</a:t>
             </a:r>
             <a:endParaRPr lang="en-US" sz="1300" dirty="0"/>
           </a:p>
@@ -37638,13 +38283,38 @@
       </p:sp>
       <p:sp>
         <p:nvSpPr>
-          <p:cNvPr id="25" name="Shape 23"/>
-          <p:cNvSpPr/>
-          <p:nvPr/>
-        </p:nvSpPr>
-        <p:spPr>
-          <a:xfrm>
-            <a:off x="3291840" y="2212848"/>
+          <p:cNvPr id="30" name="Shape 28"/>
+          <p:cNvSpPr/>
+          <p:nvPr/>
+        </p:nvSpPr>
+        <p:spPr>
+          <a:xfrm>
+            <a:off x="640080" y="3127248"/>
+            <a:ext cx="1463040" cy="420624"/>
+          </a:xfrm>
+          <a:prstGeom prst="rect">
+            <a:avLst/>
+          </a:prstGeom>
+          <a:solidFill>
+            <a:srgbClr val="F1F5F9"/>
+          </a:solidFill>
+          <a:ln w="12700">
+            <a:solidFill>
+              <a:srgbClr val="E5E7EB"/>
+            </a:solidFill>
+            <a:prstDash val="solid"/>
+          </a:ln>
+        </p:spPr>
+      </p:sp>
+      <p:sp>
+        <p:nvSpPr>
+          <p:cNvPr id="31" name="Shape 29"/>
+          <p:cNvSpPr/>
+          <p:nvPr/>
+        </p:nvSpPr>
+        <p:spPr>
+          <a:xfrm>
+            <a:off x="3291840" y="3127248"/>
             <a:ext cx="1645920" cy="420624"/>
           </a:xfrm>
           <a:prstGeom prst="rect">
@@ -37663,13 +38333,13 @@
       </p:sp>
       <p:sp>
         <p:nvSpPr>
-          <p:cNvPr id="26" name="Shape 24"/>
-          <p:cNvSpPr/>
-          <p:nvPr/>
-        </p:nvSpPr>
-        <p:spPr>
-          <a:xfrm>
-            <a:off x="5943600" y="2212848"/>
+          <p:cNvPr id="32" name="Shape 30"/>
+          <p:cNvSpPr/>
+          <p:nvPr/>
+        </p:nvSpPr>
+        <p:spPr>
+          <a:xfrm>
+            <a:off x="5943600" y="3127248"/>
             <a:ext cx="1463040" cy="420624"/>
           </a:xfrm>
           <a:prstGeom prst="rect">
@@ -37688,13 +38358,13 @@
       </p:sp>
       <p:sp>
         <p:nvSpPr>
-          <p:cNvPr id="27" name="Text 25"/>
-          <p:cNvSpPr/>
-          <p:nvPr/>
-        </p:nvSpPr>
-        <p:spPr>
-          <a:xfrm>
-            <a:off x="5943600" y="2212848"/>
+          <p:cNvPr id="33" name="Text 31"/>
+          <p:cNvSpPr/>
+          <p:nvPr/>
+        </p:nvSpPr>
+        <p:spPr>
+          <a:xfrm>
+            <a:off x="5943600" y="3127248"/>
             <a:ext cx="1463040" cy="420624"/>
           </a:xfrm>
           <a:prstGeom prst="rect">
@@ -37719,7 +38389,7 @@
                 <a:ea typeface="Trebuchet MS" pitchFamily="34" charset="-122"/>
                 <a:cs typeface="Trebuchet MS" pitchFamily="34" charset="-120"/>
               </a:rPr>
-              <a:t>--er</a:t>
+              <a:t>-ly</a:t>
             </a:r>
             <a:endParaRPr lang="en-US" sz="1300" dirty="0"/>
           </a:p>
@@ -37727,20 +38397,20 @@
       </p:sp>
       <p:sp>
         <p:nvSpPr>
-          <p:cNvPr id="28" name="Shape 26"/>
-          <p:cNvSpPr/>
-          <p:nvPr/>
-        </p:nvSpPr>
-        <p:spPr>
-          <a:xfrm>
-            <a:off x="640080" y="2670048"/>
+          <p:cNvPr id="34" name="Shape 32"/>
+          <p:cNvSpPr/>
+          <p:nvPr/>
+        </p:nvSpPr>
+        <p:spPr>
+          <a:xfrm>
+            <a:off x="640080" y="3584448"/>
             <a:ext cx="1463040" cy="420624"/>
           </a:xfrm>
           <a:prstGeom prst="rect">
             <a:avLst/>
           </a:prstGeom>
           <a:solidFill>
-            <a:srgbClr val="DDD6FE"/>
+            <a:srgbClr val="F8FAFC"/>
           </a:solidFill>
           <a:ln w="12700">
             <a:solidFill>
@@ -37752,18 +38422,68 @@
       </p:sp>
       <p:sp>
         <p:nvSpPr>
-          <p:cNvPr id="29" name="Text 27"/>
-          <p:cNvSpPr/>
-          <p:nvPr/>
-        </p:nvSpPr>
-        <p:spPr>
-          <a:xfrm>
-            <a:off x="640080" y="2670048"/>
+          <p:cNvPr id="35" name="Shape 33"/>
+          <p:cNvSpPr/>
+          <p:nvPr/>
+        </p:nvSpPr>
+        <p:spPr>
+          <a:xfrm>
+            <a:off x="3291840" y="3584448"/>
+            <a:ext cx="1645920" cy="420624"/>
+          </a:xfrm>
+          <a:prstGeom prst="rect">
+            <a:avLst/>
+          </a:prstGeom>
+          <a:solidFill>
+            <a:srgbClr val="F8FAFC"/>
+          </a:solidFill>
+          <a:ln w="12700">
+            <a:solidFill>
+              <a:srgbClr val="E5E7EB"/>
+            </a:solidFill>
+            <a:prstDash val="solid"/>
+          </a:ln>
+        </p:spPr>
+      </p:sp>
+      <p:sp>
+        <p:nvSpPr>
+          <p:cNvPr id="36" name="Shape 34"/>
+          <p:cNvSpPr/>
+          <p:nvPr/>
+        </p:nvSpPr>
+        <p:spPr>
+          <a:xfrm>
+            <a:off x="5943600" y="3584448"/>
             <a:ext cx="1463040" cy="420624"/>
           </a:xfrm>
           <a:prstGeom prst="rect">
             <a:avLst/>
           </a:prstGeom>
+          <a:solidFill>
+            <a:srgbClr val="FCE7F3"/>
+          </a:solidFill>
+          <a:ln w="12700">
+            <a:solidFill>
+              <a:srgbClr val="E5E7EB"/>
+            </a:solidFill>
+            <a:prstDash val="solid"/>
+          </a:ln>
+        </p:spPr>
+      </p:sp>
+      <p:sp>
+        <p:nvSpPr>
+          <p:cNvPr id="37" name="Text 35"/>
+          <p:cNvSpPr/>
+          <p:nvPr/>
+        </p:nvSpPr>
+        <p:spPr>
+          <a:xfrm>
+            <a:off x="5943600" y="3584448"/>
+            <a:ext cx="1463040" cy="420624"/>
+          </a:xfrm>
+          <a:prstGeom prst="rect">
+            <a:avLst/>
+          </a:prstGeom>
           <a:noFill/>
           <a:ln/>
         </p:spPr>
@@ -37777,13 +38497,13 @@
             <a:r>
               <a:rPr lang="en-US" sz="1300" b="1" dirty="0">
                 <a:solidFill>
-                  <a:srgbClr val="4C1D95"/>
+                  <a:srgbClr val="9D174D"/>
                 </a:solidFill>
                 <a:latin typeface="Trebuchet MS" pitchFamily="34" charset="0"/>
                 <a:ea typeface="Trebuchet MS" pitchFamily="34" charset="-122"/>
                 <a:cs typeface="Trebuchet MS" pitchFamily="34" charset="-120"/>
               </a:rPr>
-              <a:t>chest--</a:t>
+              <a:t>-ness</a:t>
             </a:r>
             <a:endParaRPr lang="en-US" sz="1300" dirty="0"/>
           </a:p>
@@ -37791,402 +38511,7 @@
       </p:sp>
       <p:sp>
         <p:nvSpPr>
-          <p:cNvPr id="30" name="Shape 28"/>
-          <p:cNvSpPr/>
-          <p:nvPr/>
-        </p:nvSpPr>
-        <p:spPr>
-          <a:xfrm>
-            <a:off x="3291840" y="2670048"/>
-            <a:ext cx="1645920" cy="420624"/>
-          </a:xfrm>
-          <a:prstGeom prst="rect">
-            <a:avLst/>
-          </a:prstGeom>
-          <a:solidFill>
-            <a:srgbClr val="F8FAFC"/>
-          </a:solidFill>
-          <a:ln w="12700">
-            <a:solidFill>
-              <a:srgbClr val="E5E7EB"/>
-            </a:solidFill>
-            <a:prstDash val="solid"/>
-          </a:ln>
-        </p:spPr>
-      </p:sp>
-      <p:sp>
-        <p:nvSpPr>
-          <p:cNvPr id="31" name="Shape 29"/>
-          <p:cNvSpPr/>
-          <p:nvPr/>
-        </p:nvSpPr>
-        <p:spPr>
-          <a:xfrm>
-            <a:off x="5943600" y="2670048"/>
-            <a:ext cx="1463040" cy="420624"/>
-          </a:xfrm>
-          <a:prstGeom prst="rect">
-            <a:avLst/>
-          </a:prstGeom>
-          <a:solidFill>
-            <a:srgbClr val="FCE7F3"/>
-          </a:solidFill>
-          <a:ln w="12700">
-            <a:solidFill>
-              <a:srgbClr val="E5E7EB"/>
-            </a:solidFill>
-            <a:prstDash val="solid"/>
-          </a:ln>
-        </p:spPr>
-      </p:sp>
-      <p:sp>
-        <p:nvSpPr>
-          <p:cNvPr id="32" name="Text 30"/>
-          <p:cNvSpPr/>
-          <p:nvPr/>
-        </p:nvSpPr>
-        <p:spPr>
-          <a:xfrm>
-            <a:off x="5943600" y="2670048"/>
-            <a:ext cx="1463040" cy="420624"/>
-          </a:xfrm>
-          <a:prstGeom prst="rect">
-            <a:avLst/>
-          </a:prstGeom>
-          <a:noFill/>
-          <a:ln/>
-        </p:spPr>
-        <p:txBody>
-          <a:bodyPr wrap="square" lIns="0" tIns="0" rIns="0" bIns="0" rtlCol="0" anchor="ctr"/>
-          <a:lstStyle/>
-          <a:p>
-            <a:pPr algn="ctr" indent="0" marL="0">
-              <a:buNone/>
-            </a:pPr>
-            <a:r>
-              <a:rPr lang="en-US" sz="1300" b="1" dirty="0">
-                <a:solidFill>
-                  <a:srgbClr val="9D174D"/>
-                </a:solidFill>
-                <a:latin typeface="Trebuchet MS" pitchFamily="34" charset="0"/>
-                <a:ea typeface="Trebuchet MS" pitchFamily="34" charset="-122"/>
-                <a:cs typeface="Trebuchet MS" pitchFamily="34" charset="-120"/>
-              </a:rPr>
-              <a:t>--est</a:t>
-            </a:r>
-            <a:endParaRPr lang="en-US" sz="1300" dirty="0"/>
-          </a:p>
-        </p:txBody>
-      </p:sp>
-      <p:sp>
-        <p:nvSpPr>
-          <p:cNvPr id="33" name="Shape 31"/>
-          <p:cNvSpPr/>
-          <p:nvPr/>
-        </p:nvSpPr>
-        <p:spPr>
-          <a:xfrm>
-            <a:off x="640080" y="3127248"/>
-            <a:ext cx="1463040" cy="420624"/>
-          </a:xfrm>
-          <a:prstGeom prst="rect">
-            <a:avLst/>
-          </a:prstGeom>
-          <a:solidFill>
-            <a:srgbClr val="DDD6FE"/>
-          </a:solidFill>
-          <a:ln w="12700">
-            <a:solidFill>
-              <a:srgbClr val="E5E7EB"/>
-            </a:solidFill>
-            <a:prstDash val="solid"/>
-          </a:ln>
-        </p:spPr>
-      </p:sp>
-      <p:sp>
-        <p:nvSpPr>
-          <p:cNvPr id="34" name="Text 32"/>
-          <p:cNvSpPr/>
-          <p:nvPr/>
-        </p:nvSpPr>
-        <p:spPr>
-          <a:xfrm>
-            <a:off x="640080" y="3127248"/>
-            <a:ext cx="1463040" cy="420624"/>
-          </a:xfrm>
-          <a:prstGeom prst="rect">
-            <a:avLst/>
-          </a:prstGeom>
-          <a:noFill/>
-          <a:ln/>
-        </p:spPr>
-        <p:txBody>
-          <a:bodyPr wrap="square" lIns="0" tIns="0" rIns="0" bIns="0" rtlCol="0" anchor="ctr"/>
-          <a:lstStyle/>
-          <a:p>
-            <a:pPr algn="ctr" indent="0" marL="0">
-              <a:buNone/>
-            </a:pPr>
-            <a:r>
-              <a:rPr lang="en-US" sz="1300" b="1" dirty="0">
-                <a:solidFill>
-                  <a:srgbClr val="4C1D95"/>
-                </a:solidFill>
-                <a:latin typeface="Trebuchet MS" pitchFamily="34" charset="0"/>
-                <a:ea typeface="Trebuchet MS" pitchFamily="34" charset="-122"/>
-                <a:cs typeface="Trebuchet MS" pitchFamily="34" charset="-120"/>
-              </a:rPr>
-              <a:t>shoulder--</a:t>
-            </a:r>
-            <a:endParaRPr lang="en-US" sz="1300" dirty="0"/>
-          </a:p>
-        </p:txBody>
-      </p:sp>
-      <p:sp>
-        <p:nvSpPr>
-          <p:cNvPr id="35" name="Shape 33"/>
-          <p:cNvSpPr/>
-          <p:nvPr/>
-        </p:nvSpPr>
-        <p:spPr>
-          <a:xfrm>
-            <a:off x="3291840" y="3127248"/>
-            <a:ext cx="1645920" cy="420624"/>
-          </a:xfrm>
-          <a:prstGeom prst="rect">
-            <a:avLst/>
-          </a:prstGeom>
-          <a:solidFill>
-            <a:srgbClr val="F1F5F9"/>
-          </a:solidFill>
-          <a:ln w="12700">
-            <a:solidFill>
-              <a:srgbClr val="E5E7EB"/>
-            </a:solidFill>
-            <a:prstDash val="solid"/>
-          </a:ln>
-        </p:spPr>
-      </p:sp>
-      <p:sp>
-        <p:nvSpPr>
-          <p:cNvPr id="36" name="Shape 34"/>
-          <p:cNvSpPr/>
-          <p:nvPr/>
-        </p:nvSpPr>
-        <p:spPr>
-          <a:xfrm>
-            <a:off x="5943600" y="3127248"/>
-            <a:ext cx="1463040" cy="420624"/>
-          </a:xfrm>
-          <a:prstGeom prst="rect">
-            <a:avLst/>
-          </a:prstGeom>
-          <a:solidFill>
-            <a:srgbClr val="FCE7F3"/>
-          </a:solidFill>
-          <a:ln w="12700">
-            <a:solidFill>
-              <a:srgbClr val="E5E7EB"/>
-            </a:solidFill>
-            <a:prstDash val="solid"/>
-          </a:ln>
-        </p:spPr>
-      </p:sp>
-      <p:sp>
-        <p:nvSpPr>
-          <p:cNvPr id="37" name="Text 35"/>
-          <p:cNvSpPr/>
-          <p:nvPr/>
-        </p:nvSpPr>
-        <p:spPr>
-          <a:xfrm>
-            <a:off x="5943600" y="3127248"/>
-            <a:ext cx="1463040" cy="420624"/>
-          </a:xfrm>
-          <a:prstGeom prst="rect">
-            <a:avLst/>
-          </a:prstGeom>
-          <a:noFill/>
-          <a:ln/>
-        </p:spPr>
-        <p:txBody>
-          <a:bodyPr wrap="square" lIns="0" tIns="0" rIns="0" bIns="0" rtlCol="0" anchor="ctr"/>
-          <a:lstStyle/>
-          <a:p>
-            <a:pPr algn="ctr" indent="0" marL="0">
-              <a:buNone/>
-            </a:pPr>
-            <a:r>
-              <a:rPr lang="en-US" sz="1300" b="1" dirty="0">
-                <a:solidFill>
-                  <a:srgbClr val="9D174D"/>
-                </a:solidFill>
-                <a:latin typeface="Trebuchet MS" pitchFamily="34" charset="0"/>
-                <a:ea typeface="Trebuchet MS" pitchFamily="34" charset="-122"/>
-                <a:cs typeface="Trebuchet MS" pitchFamily="34" charset="-120"/>
-              </a:rPr>
-              <a:t>--ly</a:t>
-            </a:r>
-            <a:endParaRPr lang="en-US" sz="1300" dirty="0"/>
-          </a:p>
-        </p:txBody>
-      </p:sp>
-      <p:sp>
-        <p:nvSpPr>
-          <p:cNvPr id="38" name="Shape 36"/>
-          <p:cNvSpPr/>
-          <p:nvPr/>
-        </p:nvSpPr>
-        <p:spPr>
-          <a:xfrm>
-            <a:off x="640080" y="3584448"/>
-            <a:ext cx="1463040" cy="420624"/>
-          </a:xfrm>
-          <a:prstGeom prst="rect">
-            <a:avLst/>
-          </a:prstGeom>
-          <a:solidFill>
-            <a:srgbClr val="DDD6FE"/>
-          </a:solidFill>
-          <a:ln w="12700">
-            <a:solidFill>
-              <a:srgbClr val="E5E7EB"/>
-            </a:solidFill>
-            <a:prstDash val="solid"/>
-          </a:ln>
-        </p:spPr>
-      </p:sp>
-      <p:sp>
-        <p:nvSpPr>
-          <p:cNvPr id="39" name="Text 37"/>
-          <p:cNvSpPr/>
-          <p:nvPr/>
-        </p:nvSpPr>
-        <p:spPr>
-          <a:xfrm>
-            <a:off x="640080" y="3584448"/>
-            <a:ext cx="1463040" cy="420624"/>
-          </a:xfrm>
-          <a:prstGeom prst="rect">
-            <a:avLst/>
-          </a:prstGeom>
-          <a:noFill/>
-          <a:ln/>
-        </p:spPr>
-        <p:txBody>
-          <a:bodyPr wrap="square" lIns="0" tIns="0" rIns="0" bIns="0" rtlCol="0" anchor="ctr"/>
-          <a:lstStyle/>
-          <a:p>
-            <a:pPr algn="ctr" indent="0" marL="0">
-              <a:buNone/>
-            </a:pPr>
-            <a:r>
-              <a:rPr lang="en-US" sz="1300" b="1" dirty="0">
-                <a:solidFill>
-                  <a:srgbClr val="4C1D95"/>
-                </a:solidFill>
-                <a:latin typeface="Trebuchet MS" pitchFamily="34" charset="0"/>
-                <a:ea typeface="Trebuchet MS" pitchFamily="34" charset="-122"/>
-                <a:cs typeface="Trebuchet MS" pitchFamily="34" charset="-120"/>
-              </a:rPr>
-              <a:t>ankle--</a:t>
-            </a:r>
-            <a:endParaRPr lang="en-US" sz="1300" dirty="0"/>
-          </a:p>
-        </p:txBody>
-      </p:sp>
-      <p:sp>
-        <p:nvSpPr>
-          <p:cNvPr id="40" name="Shape 38"/>
-          <p:cNvSpPr/>
-          <p:nvPr/>
-        </p:nvSpPr>
-        <p:spPr>
-          <a:xfrm>
-            <a:off x="3291840" y="3584448"/>
-            <a:ext cx="1645920" cy="420624"/>
-          </a:xfrm>
-          <a:prstGeom prst="rect">
-            <a:avLst/>
-          </a:prstGeom>
-          <a:solidFill>
-            <a:srgbClr val="F8FAFC"/>
-          </a:solidFill>
-          <a:ln w="12700">
-            <a:solidFill>
-              <a:srgbClr val="E5E7EB"/>
-            </a:solidFill>
-            <a:prstDash val="solid"/>
-          </a:ln>
-        </p:spPr>
-      </p:sp>
-      <p:sp>
-        <p:nvSpPr>
-          <p:cNvPr id="41" name="Shape 39"/>
-          <p:cNvSpPr/>
-          <p:nvPr/>
-        </p:nvSpPr>
-        <p:spPr>
-          <a:xfrm>
-            <a:off x="5943600" y="3584448"/>
-            <a:ext cx="1463040" cy="420624"/>
-          </a:xfrm>
-          <a:prstGeom prst="rect">
-            <a:avLst/>
-          </a:prstGeom>
-          <a:solidFill>
-            <a:srgbClr val="FCE7F3"/>
-          </a:solidFill>
-          <a:ln w="12700">
-            <a:solidFill>
-              <a:srgbClr val="E5E7EB"/>
-            </a:solidFill>
-            <a:prstDash val="solid"/>
-          </a:ln>
-        </p:spPr>
-      </p:sp>
-      <p:sp>
-        <p:nvSpPr>
-          <p:cNvPr id="42" name="Text 40"/>
-          <p:cNvSpPr/>
-          <p:nvPr/>
-        </p:nvSpPr>
-        <p:spPr>
-          <a:xfrm>
-            <a:off x="5943600" y="3584448"/>
-            <a:ext cx="1463040" cy="420624"/>
-          </a:xfrm>
-          <a:prstGeom prst="rect">
-            <a:avLst/>
-          </a:prstGeom>
-          <a:noFill/>
-          <a:ln/>
-        </p:spPr>
-        <p:txBody>
-          <a:bodyPr wrap="square" lIns="0" tIns="0" rIns="0" bIns="0" rtlCol="0" anchor="ctr"/>
-          <a:lstStyle/>
-          <a:p>
-            <a:pPr algn="ctr" indent="0" marL="0">
-              <a:buNone/>
-            </a:pPr>
-            <a:r>
-              <a:rPr lang="en-US" sz="1300" b="1" dirty="0">
-                <a:solidFill>
-                  <a:srgbClr val="9D174D"/>
-                </a:solidFill>
-                <a:latin typeface="Trebuchet MS" pitchFamily="34" charset="0"/>
-                <a:ea typeface="Trebuchet MS" pitchFamily="34" charset="-122"/>
-                <a:cs typeface="Trebuchet MS" pitchFamily="34" charset="-120"/>
-              </a:rPr>
-              <a:t>--ness</a:t>
-            </a:r>
-            <a:endParaRPr lang="en-US" sz="1300" dirty="0"/>
-          </a:p>
-        </p:txBody>
-      </p:sp>
-      <p:sp>
-        <p:nvSpPr>
-          <p:cNvPr id="43" name="Text 41"/>
+          <p:cNvPr id="38" name="Text 36"/>
           <p:cNvSpPr/>
           <p:nvPr/>
         </p:nvSpPr>
@@ -38225,7 +38550,7 @@
       </p:sp>
       <p:sp>
         <p:nvSpPr>
-          <p:cNvPr id="44" name="Shape 42"/>
+          <p:cNvPr id="39" name="Shape 37"/>
           <p:cNvSpPr/>
           <p:nvPr/>
         </p:nvSpPr>
@@ -38240,11 +38565,11 @@
             </a:avLst>
           </a:prstGeom>
           <a:solidFill>
-            <a:srgbClr val="DDD6FE"/>
+            <a:srgbClr val="CCFBF1"/>
           </a:solidFill>
           <a:ln w="19050">
             <a:solidFill>
-              <a:srgbClr val="7C3AED"/>
+              <a:srgbClr val="0D9488"/>
             </a:solidFill>
             <a:prstDash val="solid"/>
           </a:ln>
@@ -38259,7 +38584,7 @@
       </p:sp>
       <p:sp>
         <p:nvSpPr>
-          <p:cNvPr id="45" name="Text 43"/>
+          <p:cNvPr id="40" name="Text 38"/>
           <p:cNvSpPr/>
           <p:nvPr/>
         </p:nvSpPr>
@@ -38284,13 +38609,13 @@
             <a:r>
               <a:rPr lang="en-US" sz="1300" b="1" dirty="0">
                 <a:solidFill>
-                  <a:srgbClr val="4C1D95"/>
+                  <a:srgbClr val="0F766E"/>
                 </a:solidFill>
                 <a:latin typeface="Trebuchet MS" pitchFamily="34" charset="0"/>
                 <a:ea typeface="Trebuchet MS" pitchFamily="34" charset="-122"/>
                 <a:cs typeface="Trebuchet MS" pitchFamily="34" charset="-120"/>
               </a:rPr>
-              <a:t>knee--</a:t>
+              <a:t>'deep'</a:t>
             </a:r>
             <a:endParaRPr lang="en-US" sz="1300" dirty="0"/>
           </a:p>
@@ -38298,7 +38623,7 @@
       </p:sp>
       <p:sp>
         <p:nvSpPr>
-          <p:cNvPr id="46" name="Text 44"/>
+          <p:cNvPr id="41" name="Text 39"/>
           <p:cNvSpPr/>
           <p:nvPr/>
         </p:nvSpPr>
@@ -38337,14 +38662,14 @@
       </p:sp>
       <p:sp>
         <p:nvSpPr>
-          <p:cNvPr id="47" name="Shape 45"/>
+          <p:cNvPr id="42" name="Shape 40"/>
           <p:cNvSpPr/>
           <p:nvPr/>
         </p:nvSpPr>
         <p:spPr>
           <a:xfrm>
             <a:off x="3127248" y="4178808"/>
-            <a:ext cx="1243584" cy="420624"/>
+            <a:ext cx="822960" cy="420624"/>
           </a:xfrm>
           <a:prstGeom prst="rect">
             <a:avLst>
@@ -38352,11 +38677,11 @@
             </a:avLst>
           </a:prstGeom>
           <a:solidFill>
-            <a:srgbClr val="CCFBF1"/>
+            <a:srgbClr val="FCE7F3"/>
           </a:solidFill>
           <a:ln w="19050">
             <a:solidFill>
-              <a:srgbClr val="0D9488"/>
+              <a:srgbClr val="DB2777"/>
             </a:solidFill>
             <a:prstDash val="solid"/>
           </a:ln>
@@ -38371,14 +38696,14 @@
       </p:sp>
       <p:sp>
         <p:nvSpPr>
-          <p:cNvPr id="48" name="Text 46"/>
+          <p:cNvPr id="43" name="Text 41"/>
           <p:cNvSpPr/>
           <p:nvPr/>
         </p:nvSpPr>
         <p:spPr>
           <a:xfrm>
             <a:off x="3127248" y="4178808"/>
-            <a:ext cx="1243584" cy="420624"/>
+            <a:ext cx="822960" cy="420624"/>
           </a:xfrm>
           <a:prstGeom prst="rect">
             <a:avLst/>
@@ -38396,13 +38721,13 @@
             <a:r>
               <a:rPr lang="en-US" sz="1300" b="1" dirty="0">
                 <a:solidFill>
-                  <a:srgbClr val="0F766E"/>
+                  <a:srgbClr val="9D174D"/>
                 </a:solidFill>
                 <a:latin typeface="Trebuchet MS" pitchFamily="34" charset="0"/>
                 <a:ea typeface="Trebuchet MS" pitchFamily="34" charset="-122"/>
                 <a:cs typeface="Trebuchet MS" pitchFamily="34" charset="-120"/>
               </a:rPr>
-              <a:t>'deep'</a:t>
+              <a:t>-en</a:t>
             </a:r>
             <a:endParaRPr lang="en-US" sz="1300" dirty="0"/>
           </a:p>
@@ -38410,14 +38735,14 @@
       </p:sp>
       <p:sp>
         <p:nvSpPr>
-          <p:cNvPr id="49" name="Text 47"/>
-          <p:cNvSpPr/>
-          <p:nvPr/>
-        </p:nvSpPr>
-        <p:spPr>
-          <a:xfrm>
-            <a:off x="4398264" y="4178808"/>
-            <a:ext cx="320040" cy="420624"/>
+          <p:cNvPr id="44" name="Text 42"/>
+          <p:cNvSpPr/>
+          <p:nvPr/>
+        </p:nvSpPr>
+        <p:spPr>
+          <a:xfrm>
+            <a:off x="4023360" y="4178808"/>
+            <a:ext cx="365760" cy="420624"/>
           </a:xfrm>
           <a:prstGeom prst="rect">
             <a:avLst/>
@@ -38433,30 +38758,30 @@
               <a:buNone/>
             </a:pPr>
             <a:r>
-              <a:rPr lang="en-US" sz="1400" dirty="0">
-                <a:solidFill>
-                  <a:srgbClr val="475569"/>
+              <a:rPr lang="en-US" sz="1800" b="1" dirty="0">
+                <a:solidFill>
+                  <a:srgbClr val="0D9488"/>
                 </a:solidFill>
                 <a:latin typeface="Trebuchet MS" pitchFamily="34" charset="0"/>
                 <a:ea typeface="Trebuchet MS" pitchFamily="34" charset="-122"/>
                 <a:cs typeface="Trebuchet MS" pitchFamily="34" charset="-120"/>
               </a:rPr>
-              <a:t>+</a:t>
-            </a:r>
-            <a:endParaRPr lang="en-US" sz="1400" dirty="0"/>
-          </a:p>
-        </p:txBody>
-      </p:sp>
-      <p:sp>
-        <p:nvSpPr>
-          <p:cNvPr id="50" name="Shape 48"/>
-          <p:cNvSpPr/>
-          <p:nvPr/>
-        </p:nvSpPr>
-        <p:spPr>
-          <a:xfrm>
-            <a:off x="4745736" y="4178808"/>
-            <a:ext cx="950976" cy="420624"/>
+              <a:t>=</a:t>
+            </a:r>
+            <a:endParaRPr lang="en-US" sz="1800" dirty="0"/>
+          </a:p>
+        </p:txBody>
+      </p:sp>
+      <p:sp>
+        <p:nvSpPr>
+          <p:cNvPr id="45" name="Shape 43"/>
+          <p:cNvSpPr/>
+          <p:nvPr/>
+        </p:nvSpPr>
+        <p:spPr>
+          <a:xfrm>
+            <a:off x="4434840" y="4178808"/>
+            <a:ext cx="2194560" cy="420624"/>
           </a:xfrm>
           <a:prstGeom prst="rect">
             <a:avLst>
@@ -38464,33 +38789,26 @@
             </a:avLst>
           </a:prstGeom>
           <a:solidFill>
-            <a:srgbClr val="FCE7F3"/>
-          </a:solidFill>
-          <a:ln w="19050">
-            <a:solidFill>
-              <a:srgbClr val="DB2777"/>
-            </a:solidFill>
-            <a:prstDash val="solid"/>
-          </a:ln>
-          <a:effectLst>
-            <a:outerShdw sx="100000" sy="100000" kx="0" ky="0" algn="bl" rotWithShape="0" blurRad="101600" dist="38100" dir="8100000">
-              <a:srgbClr val="000000">
-                <a:alpha val="12000"/>
-              </a:srgbClr>
-            </a:outerShdw>
-          </a:effectLst>
-        </p:spPr>
-      </p:sp>
-      <p:sp>
-        <p:nvSpPr>
-          <p:cNvPr id="51" name="Text 49"/>
-          <p:cNvSpPr/>
-          <p:nvPr/>
-        </p:nvSpPr>
-        <p:spPr>
-          <a:xfrm>
-            <a:off x="4745736" y="4178808"/>
-            <a:ext cx="950976" cy="420624"/>
+            <a:srgbClr val="0D9488"/>
+          </a:solidFill>
+          <a:ln w="12700">
+            <a:solidFill>
+              <a:srgbClr val="0D9488"/>
+            </a:solidFill>
+            <a:prstDash val="solid"/>
+          </a:ln>
+        </p:spPr>
+      </p:sp>
+      <p:sp>
+        <p:nvSpPr>
+          <p:cNvPr id="46" name="Text 44"/>
+          <p:cNvSpPr/>
+          <p:nvPr/>
+        </p:nvSpPr>
+        <p:spPr>
+          <a:xfrm>
+            <a:off x="4434840" y="4178808"/>
+            <a:ext cx="2194560" cy="420624"/>
           </a:xfrm>
           <a:prstGeom prst="rect">
             <a:avLst/>
@@ -38506,120 +38824,15 @@
               <a:buNone/>
             </a:pPr>
             <a:r>
-              <a:rPr lang="en-US" sz="1300" b="1" dirty="0">
-                <a:solidFill>
-                  <a:srgbClr val="9D174D"/>
+              <a:rPr lang="en-US" sz="1400" b="1" dirty="0">
+                <a:solidFill>
+                  <a:srgbClr val="FFFFFF"/>
                 </a:solidFill>
                 <a:latin typeface="Trebuchet MS" pitchFamily="34" charset="0"/>
                 <a:ea typeface="Trebuchet MS" pitchFamily="34" charset="-122"/>
                 <a:cs typeface="Trebuchet MS" pitchFamily="34" charset="-120"/>
               </a:rPr>
-              <a:t>--en</a:t>
-            </a:r>
-            <a:endParaRPr lang="en-US" sz="1300" dirty="0"/>
-          </a:p>
-        </p:txBody>
-      </p:sp>
-      <p:sp>
-        <p:nvSpPr>
-          <p:cNvPr id="52" name="Text 50"/>
-          <p:cNvSpPr/>
-          <p:nvPr/>
-        </p:nvSpPr>
-        <p:spPr>
-          <a:xfrm>
-            <a:off x="5769864" y="4178808"/>
-            <a:ext cx="365760" cy="420624"/>
-          </a:xfrm>
-          <a:prstGeom prst="rect">
-            <a:avLst/>
-          </a:prstGeom>
-          <a:noFill/>
-          <a:ln/>
-        </p:spPr>
-        <p:txBody>
-          <a:bodyPr wrap="square" lIns="0" tIns="0" rIns="0" bIns="0" rtlCol="0" anchor="ctr"/>
-          <a:lstStyle/>
-          <a:p>
-            <a:pPr algn="ctr" indent="0" marL="0">
-              <a:buNone/>
-            </a:pPr>
-            <a:r>
-              <a:rPr lang="en-US" sz="1800" b="1" dirty="0">
-                <a:solidFill>
-                  <a:srgbClr val="0D9488"/>
-                </a:solidFill>
-                <a:latin typeface="Trebuchet MS" pitchFamily="34" charset="0"/>
-                <a:ea typeface="Trebuchet MS" pitchFamily="34" charset="-122"/>
-                <a:cs typeface="Trebuchet MS" pitchFamily="34" charset="-120"/>
-              </a:rPr>
-              <a:t>=</a:t>
-            </a:r>
-            <a:endParaRPr lang="en-US" sz="1800" dirty="0"/>
-          </a:p>
-        </p:txBody>
-      </p:sp>
-      <p:sp>
-        <p:nvSpPr>
-          <p:cNvPr id="53" name="Shape 51"/>
-          <p:cNvSpPr/>
-          <p:nvPr/>
-        </p:nvSpPr>
-        <p:spPr>
-          <a:xfrm>
-            <a:off x="6181344" y="4178808"/>
-            <a:ext cx="2194560" cy="420624"/>
-          </a:xfrm>
-          <a:prstGeom prst="rect">
-            <a:avLst>
-              <a:gd name="adj" fmla="val 17391"/>
-            </a:avLst>
-          </a:prstGeom>
-          <a:solidFill>
-            <a:srgbClr val="0D9488"/>
-          </a:solidFill>
-          <a:ln w="12700">
-            <a:solidFill>
-              <a:srgbClr val="0D9488"/>
-            </a:solidFill>
-            <a:prstDash val="solid"/>
-          </a:ln>
-        </p:spPr>
-      </p:sp>
-      <p:sp>
-        <p:nvSpPr>
-          <p:cNvPr id="54" name="Text 52"/>
-          <p:cNvSpPr/>
-          <p:nvPr/>
-        </p:nvSpPr>
-        <p:spPr>
-          <a:xfrm>
-            <a:off x="6181344" y="4178808"/>
-            <a:ext cx="2194560" cy="420624"/>
-          </a:xfrm>
-          <a:prstGeom prst="rect">
-            <a:avLst/>
-          </a:prstGeom>
-          <a:noFill/>
-          <a:ln/>
-        </p:spPr>
-        <p:txBody>
-          <a:bodyPr wrap="square" lIns="0" tIns="0" rIns="0" bIns="0" rtlCol="0" anchor="ctr"/>
-          <a:lstStyle/>
-          <a:p>
-            <a:pPr algn="ctr" indent="0" marL="0">
-              <a:buNone/>
-            </a:pPr>
-            <a:r>
-              <a:rPr lang="en-US" sz="1400" b="1" dirty="0">
-                <a:solidFill>
-                  <a:srgbClr val="FFFFFF"/>
-                </a:solidFill>
-                <a:latin typeface="Trebuchet MS" pitchFamily="34" charset="0"/>
-                <a:ea typeface="Trebuchet MS" pitchFamily="34" charset="-122"/>
-                <a:cs typeface="Trebuchet MS" pitchFamily="34" charset="-120"/>
-              </a:rPr>
-              <a:t>deepen</a:t>
+              <a:t>deep</a:t>
             </a:r>
             <a:endParaRPr lang="en-US" sz="1400" dirty="0"/>
           </a:p>
@@ -38911,7 +39124,7 @@
                 <a:ea typeface="Calibri" pitchFamily="34" charset="-122"/>
                 <a:cs typeface="Calibri" pitchFamily="34" charset="-120"/>
               </a:rPr>
-              <a:t>Word Labs  •  wordlabs.app  •  Root: 'deep' = far down, profound distance</a:t>
+              <a:t>Word Labs  •  wordlabs.app  •  Root: 'deep' = going far down or in</a:t>
             </a:r>
             <a:endParaRPr lang="en-US" sz="800" dirty="0"/>
           </a:p>
@@ -39023,7 +39236,7 @@
                 <a:ea typeface="Trebuchet MS" pitchFamily="34" charset="-122"/>
                 <a:cs typeface="Trebuchet MS" pitchFamily="34" charset="-120"/>
               </a:rPr>
-              <a:t>deepen</a:t>
+              <a:t>deep</a:t>
             </a:r>
             <a:endParaRPr lang="en-US" sz="1200" dirty="0"/>
           </a:p>
@@ -39089,7 +39302,7 @@
                 <a:ea typeface="Calibri" pitchFamily="34" charset="-122"/>
                 <a:cs typeface="Calibri" pitchFamily="34" charset="-120"/>
               </a:rPr>
-              <a:t>The quality of being deep or having great depth.</a:t>
+              <a:t>more deep; further down or in than something else</a:t>
             </a:r>
             <a:endParaRPr lang="en-US" sz="1200" dirty="0"/>
           </a:p>
@@ -39162,7 +39375,7 @@
                 <a:ea typeface="Trebuchet MS" pitchFamily="34" charset="-122"/>
                 <a:cs typeface="Trebuchet MS" pitchFamily="34" charset="-120"/>
               </a:rPr>
-              <a:t>deeper</a:t>
+              <a:t>deepen</a:t>
             </a:r>
             <a:endParaRPr lang="en-US" sz="1200" dirty="0"/>
           </a:p>
@@ -39228,7 +39441,7 @@
                 <a:ea typeface="Calibri" pitchFamily="34" charset="-122"/>
                 <a:cs typeface="Calibri" pitchFamily="34" charset="-120"/>
               </a:rPr>
-              <a:t>Fixed firmly into something, far back from the surface.</a:t>
+              <a:t>to make something deeper, or to become deeper</a:t>
             </a:r>
             <a:endParaRPr lang="en-US" sz="1200" dirty="0"/>
           </a:p>
@@ -39301,7 +39514,7 @@
                 <a:ea typeface="Trebuchet MS" pitchFamily="34" charset="-122"/>
                 <a:cs typeface="Trebuchet MS" pitchFamily="34" charset="-120"/>
               </a:rPr>
-              <a:t>deepest</a:t>
+              <a:t>deeper</a:t>
             </a:r>
             <a:endParaRPr lang="en-US" sz="1200" dirty="0"/>
           </a:p>
@@ -39367,563 +39580,7 @@
                 <a:ea typeface="Calibri" pitchFamily="34" charset="-122"/>
                 <a:cs typeface="Calibri" pitchFamily="34" charset="-120"/>
               </a:rPr>
-              <a:t>To make something deeper or more intense.</a:t>
-            </a:r>
-            <a:endParaRPr lang="en-US" sz="1200" dirty="0"/>
-          </a:p>
-        </p:txBody>
-      </p:sp>
-      <p:sp>
-        <p:nvSpPr>
-          <p:cNvPr id="23" name="Shape 21"/>
-          <p:cNvSpPr/>
-          <p:nvPr/>
-        </p:nvSpPr>
-        <p:spPr>
-          <a:xfrm>
-            <a:off x="365760" y="2779776"/>
-            <a:ext cx="2011680" cy="457200"/>
-          </a:xfrm>
-          <a:prstGeom prst="rect">
-            <a:avLst>
-              <a:gd name="adj" fmla="val 12000"/>
-            </a:avLst>
-          </a:prstGeom>
-          <a:solidFill>
-            <a:srgbClr val="EEF2FF"/>
-          </a:solidFill>
-          <a:ln w="12700">
-            <a:solidFill>
-              <a:srgbClr val="6366F1"/>
-            </a:solidFill>
-            <a:prstDash val="solid"/>
-          </a:ln>
-          <a:effectLst>
-            <a:outerShdw sx="100000" sy="100000" kx="0" ky="0" algn="bl" rotWithShape="0" blurRad="101600" dist="38100" dir="8100000">
-              <a:srgbClr val="000000">
-                <a:alpha val="12000"/>
-              </a:srgbClr>
-            </a:outerShdw>
-          </a:effectLst>
-        </p:spPr>
-      </p:sp>
-      <p:sp>
-        <p:nvSpPr>
-          <p:cNvPr id="24" name="Text 22"/>
-          <p:cNvSpPr/>
-          <p:nvPr/>
-        </p:nvSpPr>
-        <p:spPr>
-          <a:xfrm>
-            <a:off x="365760" y="2779776"/>
-            <a:ext cx="2011680" cy="457200"/>
-          </a:xfrm>
-          <a:prstGeom prst="rect">
-            <a:avLst/>
-          </a:prstGeom>
-          <a:noFill/>
-          <a:ln/>
-        </p:spPr>
-        <p:txBody>
-          <a:bodyPr wrap="square" lIns="0" tIns="0" rIns="0" bIns="0" rtlCol="0" anchor="ctr"/>
-          <a:lstStyle/>
-          <a:p>
-            <a:pPr algn="ctr" indent="0" marL="0">
-              <a:buNone/>
-            </a:pPr>
-            <a:r>
-              <a:rPr lang="en-US" sz="1200" b="1" dirty="0">
-                <a:solidFill>
-                  <a:srgbClr val="4338CA"/>
-                </a:solidFill>
-                <a:latin typeface="Trebuchet MS" pitchFamily="34" charset="0"/>
-                <a:ea typeface="Trebuchet MS" pitchFamily="34" charset="-122"/>
-                <a:cs typeface="Trebuchet MS" pitchFamily="34" charset="-120"/>
-              </a:rPr>
-              <a:t>deeply</a:t>
-            </a:r>
-            <a:endParaRPr lang="en-US" sz="1200" dirty="0"/>
-          </a:p>
-        </p:txBody>
-      </p:sp>
-      <p:sp>
-        <p:nvSpPr>
-          <p:cNvPr id="25" name="Shape 23"/>
-          <p:cNvSpPr/>
-          <p:nvPr/>
-        </p:nvSpPr>
-        <p:spPr>
-          <a:xfrm>
-            <a:off x="2514600" y="2779776"/>
-            <a:ext cx="6263640" cy="457200"/>
-          </a:xfrm>
-          <a:prstGeom prst="rect">
-            <a:avLst>
-              <a:gd name="adj" fmla="val 12000"/>
-            </a:avLst>
-          </a:prstGeom>
-          <a:solidFill>
-            <a:srgbClr val="F8FAFC"/>
-          </a:solidFill>
-          <a:ln w="12700">
-            <a:solidFill>
-              <a:srgbClr val="E2E8F0"/>
-            </a:solidFill>
-            <a:prstDash val="solid"/>
-          </a:ln>
-        </p:spPr>
-      </p:sp>
-      <p:sp>
-        <p:nvSpPr>
-          <p:cNvPr id="26" name="Text 24"/>
-          <p:cNvSpPr/>
-          <p:nvPr/>
-        </p:nvSpPr>
-        <p:spPr>
-          <a:xfrm>
-            <a:off x="2651760" y="2779776"/>
-            <a:ext cx="6035040" cy="457200"/>
-          </a:xfrm>
-          <a:prstGeom prst="rect">
-            <a:avLst/>
-          </a:prstGeom>
-          <a:noFill/>
-          <a:ln/>
-        </p:spPr>
-        <p:txBody>
-          <a:bodyPr wrap="square" rtlCol="0" anchor="ctr"/>
-          <a:lstStyle/>
-          <a:p>
-            <a:pPr algn="l" indent="0" marL="0">
-              <a:buNone/>
-            </a:pPr>
-            <a:r>
-              <a:rPr lang="en-US" sz="1200" dirty="0">
-                <a:solidFill>
-                  <a:srgbClr val="0F172A"/>
-                </a:solidFill>
-                <a:latin typeface="Calibri" pitchFamily="34" charset="0"/>
-                <a:ea typeface="Calibri" pitchFamily="34" charset="-122"/>
-                <a:cs typeface="Calibri" pitchFamily="34" charset="-120"/>
-              </a:rPr>
-              <a:t>Relating to the very deep parts of the ocean.</a:t>
-            </a:r>
-            <a:endParaRPr lang="en-US" sz="1200" dirty="0"/>
-          </a:p>
-        </p:txBody>
-      </p:sp>
-      <p:sp>
-        <p:nvSpPr>
-          <p:cNvPr id="27" name="Shape 25"/>
-          <p:cNvSpPr/>
-          <p:nvPr/>
-        </p:nvSpPr>
-        <p:spPr>
-          <a:xfrm>
-            <a:off x="365760" y="3310128"/>
-            <a:ext cx="2011680" cy="457200"/>
-          </a:xfrm>
-          <a:prstGeom prst="rect">
-            <a:avLst>
-              <a:gd name="adj" fmla="val 12000"/>
-            </a:avLst>
-          </a:prstGeom>
-          <a:solidFill>
-            <a:srgbClr val="EEF2FF"/>
-          </a:solidFill>
-          <a:ln w="12700">
-            <a:solidFill>
-              <a:srgbClr val="6366F1"/>
-            </a:solidFill>
-            <a:prstDash val="solid"/>
-          </a:ln>
-          <a:effectLst>
-            <a:outerShdw sx="100000" sy="100000" kx="0" ky="0" algn="bl" rotWithShape="0" blurRad="101600" dist="38100" dir="8100000">
-              <a:srgbClr val="000000">
-                <a:alpha val="12000"/>
-              </a:srgbClr>
-            </a:outerShdw>
-          </a:effectLst>
-        </p:spPr>
-      </p:sp>
-      <p:sp>
-        <p:nvSpPr>
-          <p:cNvPr id="28" name="Text 26"/>
-          <p:cNvSpPr/>
-          <p:nvPr/>
-        </p:nvSpPr>
-        <p:spPr>
-          <a:xfrm>
-            <a:off x="365760" y="3310128"/>
-            <a:ext cx="2011680" cy="457200"/>
-          </a:xfrm>
-          <a:prstGeom prst="rect">
-            <a:avLst/>
-          </a:prstGeom>
-          <a:noFill/>
-          <a:ln/>
-        </p:spPr>
-        <p:txBody>
-          <a:bodyPr wrap="square" lIns="0" tIns="0" rIns="0" bIns="0" rtlCol="0" anchor="ctr"/>
-          <a:lstStyle/>
-          <a:p>
-            <a:pPr algn="ctr" indent="0" marL="0">
-              <a:buNone/>
-            </a:pPr>
-            <a:r>
-              <a:rPr lang="en-US" sz="1200" b="1" dirty="0">
-                <a:solidFill>
-                  <a:srgbClr val="4338CA"/>
-                </a:solidFill>
-                <a:latin typeface="Trebuchet MS" pitchFamily="34" charset="0"/>
-                <a:ea typeface="Trebuchet MS" pitchFamily="34" charset="-122"/>
-                <a:cs typeface="Trebuchet MS" pitchFamily="34" charset="-120"/>
-              </a:rPr>
-              <a:t>deepness</a:t>
-            </a:r>
-            <a:endParaRPr lang="en-US" sz="1200" dirty="0"/>
-          </a:p>
-        </p:txBody>
-      </p:sp>
-      <p:sp>
-        <p:nvSpPr>
-          <p:cNvPr id="29" name="Shape 27"/>
-          <p:cNvSpPr/>
-          <p:nvPr/>
-        </p:nvSpPr>
-        <p:spPr>
-          <a:xfrm>
-            <a:off x="2514600" y="3310128"/>
-            <a:ext cx="6263640" cy="457200"/>
-          </a:xfrm>
-          <a:prstGeom prst="rect">
-            <a:avLst>
-              <a:gd name="adj" fmla="val 12000"/>
-            </a:avLst>
-          </a:prstGeom>
-          <a:solidFill>
-            <a:srgbClr val="F8FAFC"/>
-          </a:solidFill>
-          <a:ln w="12700">
-            <a:solidFill>
-              <a:srgbClr val="E2E8F0"/>
-            </a:solidFill>
-            <a:prstDash val="solid"/>
-          </a:ln>
-        </p:spPr>
-      </p:sp>
-      <p:sp>
-        <p:nvSpPr>
-          <p:cNvPr id="30" name="Text 28"/>
-          <p:cNvSpPr/>
-          <p:nvPr/>
-        </p:nvSpPr>
-        <p:spPr>
-          <a:xfrm>
-            <a:off x="2651760" y="3310128"/>
-            <a:ext cx="6035040" cy="457200"/>
-          </a:xfrm>
-          <a:prstGeom prst="rect">
-            <a:avLst/>
-          </a:prstGeom>
-          <a:noFill/>
-          <a:ln/>
-        </p:spPr>
-        <p:txBody>
-          <a:bodyPr wrap="square" rtlCol="0" anchor="ctr"/>
-          <a:lstStyle/>
-          <a:p>
-            <a:pPr algn="l" indent="0" marL="0">
-              <a:buNone/>
-            </a:pPr>
-            <a:r>
-              <a:rPr lang="en-US" sz="1200" dirty="0">
-                <a:solidFill>
-                  <a:srgbClr val="0F172A"/>
-                </a:solidFill>
-                <a:latin typeface="Calibri" pitchFamily="34" charset="0"/>
-                <a:ea typeface="Calibri" pitchFamily="34" charset="-122"/>
-                <a:cs typeface="Calibri" pitchFamily="34" charset="-120"/>
-              </a:rPr>
-              <a:t>The most far down or most intense of all.</a:t>
-            </a:r>
-            <a:endParaRPr lang="en-US" sz="1200" dirty="0"/>
-          </a:p>
-        </p:txBody>
-      </p:sp>
-      <p:sp>
-        <p:nvSpPr>
-          <p:cNvPr id="31" name="Shape 29"/>
-          <p:cNvSpPr/>
-          <p:nvPr/>
-        </p:nvSpPr>
-        <p:spPr>
-          <a:xfrm>
-            <a:off x="365760" y="3840480"/>
-            <a:ext cx="2011680" cy="457200"/>
-          </a:xfrm>
-          <a:prstGeom prst="rect">
-            <a:avLst>
-              <a:gd name="adj" fmla="val 12000"/>
-            </a:avLst>
-          </a:prstGeom>
-          <a:solidFill>
-            <a:srgbClr val="EEF2FF"/>
-          </a:solidFill>
-          <a:ln w="12700">
-            <a:solidFill>
-              <a:srgbClr val="6366F1"/>
-            </a:solidFill>
-            <a:prstDash val="solid"/>
-          </a:ln>
-          <a:effectLst>
-            <a:outerShdw sx="100000" sy="100000" kx="0" ky="0" algn="bl" rotWithShape="0" blurRad="101600" dist="38100" dir="8100000">
-              <a:srgbClr val="000000">
-                <a:alpha val="12000"/>
-              </a:srgbClr>
-            </a:outerShdw>
-          </a:effectLst>
-        </p:spPr>
-      </p:sp>
-      <p:sp>
-        <p:nvSpPr>
-          <p:cNvPr id="32" name="Text 30"/>
-          <p:cNvSpPr/>
-          <p:nvPr/>
-        </p:nvSpPr>
-        <p:spPr>
-          <a:xfrm>
-            <a:off x="365760" y="3840480"/>
-            <a:ext cx="2011680" cy="457200"/>
-          </a:xfrm>
-          <a:prstGeom prst="rect">
-            <a:avLst/>
-          </a:prstGeom>
-          <a:noFill/>
-          <a:ln/>
-        </p:spPr>
-        <p:txBody>
-          <a:bodyPr wrap="square" lIns="0" tIns="0" rIns="0" bIns="0" rtlCol="0" anchor="ctr"/>
-          <a:lstStyle/>
-          <a:p>
-            <a:pPr algn="ctr" indent="0" marL="0">
-              <a:buNone/>
-            </a:pPr>
-            <a:r>
-              <a:rPr lang="en-US" sz="1200" b="1" dirty="0">
-                <a:solidFill>
-                  <a:srgbClr val="4338CA"/>
-                </a:solidFill>
-                <a:latin typeface="Trebuchet MS" pitchFamily="34" charset="0"/>
-                <a:ea typeface="Trebuchet MS" pitchFamily="34" charset="-122"/>
-                <a:cs typeface="Trebuchet MS" pitchFamily="34" charset="-120"/>
-              </a:rPr>
-              <a:t>deep-sea</a:t>
-            </a:r>
-            <a:endParaRPr lang="en-US" sz="1200" dirty="0"/>
-          </a:p>
-        </p:txBody>
-      </p:sp>
-      <p:sp>
-        <p:nvSpPr>
-          <p:cNvPr id="33" name="Shape 31"/>
-          <p:cNvSpPr/>
-          <p:nvPr/>
-        </p:nvSpPr>
-        <p:spPr>
-          <a:xfrm>
-            <a:off x="2514600" y="3840480"/>
-            <a:ext cx="6263640" cy="457200"/>
-          </a:xfrm>
-          <a:prstGeom prst="rect">
-            <a:avLst>
-              <a:gd name="adj" fmla="val 12000"/>
-            </a:avLst>
-          </a:prstGeom>
-          <a:solidFill>
-            <a:srgbClr val="F8FAFC"/>
-          </a:solidFill>
-          <a:ln w="12700">
-            <a:solidFill>
-              <a:srgbClr val="E2E8F0"/>
-            </a:solidFill>
-            <a:prstDash val="solid"/>
-          </a:ln>
-        </p:spPr>
-      </p:sp>
-      <p:sp>
-        <p:nvSpPr>
-          <p:cNvPr id="34" name="Text 32"/>
-          <p:cNvSpPr/>
-          <p:nvPr/>
-        </p:nvSpPr>
-        <p:spPr>
-          <a:xfrm>
-            <a:off x="2651760" y="3840480"/>
-            <a:ext cx="6035040" cy="457200"/>
-          </a:xfrm>
-          <a:prstGeom prst="rect">
-            <a:avLst/>
-          </a:prstGeom>
-          <a:noFill/>
-          <a:ln/>
-        </p:spPr>
-        <p:txBody>
-          <a:bodyPr wrap="square" rtlCol="0" anchor="ctr"/>
-          <a:lstStyle/>
-          <a:p>
-            <a:pPr algn="l" indent="0" marL="0">
-              <a:buNone/>
-            </a:pPr>
-            <a:r>
-              <a:rPr lang="en-US" sz="1200" dirty="0">
-                <a:solidFill>
-                  <a:srgbClr val="0F172A"/>
-                </a:solidFill>
-                <a:latin typeface="Calibri" pitchFamily="34" charset="0"/>
-                <a:ea typeface="Calibri" pitchFamily="34" charset="-122"/>
-                <a:cs typeface="Calibri" pitchFamily="34" charset="-120"/>
-              </a:rPr>
-              <a:t>In a way that goes far down or feels very strong.</a:t>
-            </a:r>
-            <a:endParaRPr lang="en-US" sz="1200" dirty="0"/>
-          </a:p>
-        </p:txBody>
-      </p:sp>
-      <p:sp>
-        <p:nvSpPr>
-          <p:cNvPr id="35" name="Shape 33"/>
-          <p:cNvSpPr/>
-          <p:nvPr/>
-        </p:nvSpPr>
-        <p:spPr>
-          <a:xfrm>
-            <a:off x="365760" y="4370832"/>
-            <a:ext cx="2011680" cy="457200"/>
-          </a:xfrm>
-          <a:prstGeom prst="rect">
-            <a:avLst>
-              <a:gd name="adj" fmla="val 12000"/>
-            </a:avLst>
-          </a:prstGeom>
-          <a:solidFill>
-            <a:srgbClr val="EEF2FF"/>
-          </a:solidFill>
-          <a:ln w="12700">
-            <a:solidFill>
-              <a:srgbClr val="6366F1"/>
-            </a:solidFill>
-            <a:prstDash val="solid"/>
-          </a:ln>
-          <a:effectLst>
-            <a:outerShdw sx="100000" sy="100000" kx="0" ky="0" algn="bl" rotWithShape="0" blurRad="101600" dist="38100" dir="8100000">
-              <a:srgbClr val="000000">
-                <a:alpha val="12000"/>
-              </a:srgbClr>
-            </a:outerShdw>
-          </a:effectLst>
-        </p:spPr>
-      </p:sp>
-      <p:sp>
-        <p:nvSpPr>
-          <p:cNvPr id="36" name="Text 34"/>
-          <p:cNvSpPr/>
-          <p:nvPr/>
-        </p:nvSpPr>
-        <p:spPr>
-          <a:xfrm>
-            <a:off x="365760" y="4370832"/>
-            <a:ext cx="2011680" cy="457200"/>
-          </a:xfrm>
-          <a:prstGeom prst="rect">
-            <a:avLst/>
-          </a:prstGeom>
-          <a:noFill/>
-          <a:ln/>
-        </p:spPr>
-        <p:txBody>
-          <a:bodyPr wrap="square" lIns="0" tIns="0" rIns="0" bIns="0" rtlCol="0" anchor="ctr"/>
-          <a:lstStyle/>
-          <a:p>
-            <a:pPr algn="ctr" indent="0" marL="0">
-              <a:buNone/>
-            </a:pPr>
-            <a:r>
-              <a:rPr lang="en-US" sz="1200" b="1" dirty="0">
-                <a:solidFill>
-                  <a:srgbClr val="4338CA"/>
-                </a:solidFill>
-                <a:latin typeface="Trebuchet MS" pitchFamily="34" charset="0"/>
-                <a:ea typeface="Trebuchet MS" pitchFamily="34" charset="-122"/>
-                <a:cs typeface="Trebuchet MS" pitchFamily="34" charset="-120"/>
-              </a:rPr>
-              <a:t>deep-set</a:t>
-            </a:r>
-            <a:endParaRPr lang="en-US" sz="1200" dirty="0"/>
-          </a:p>
-        </p:txBody>
-      </p:sp>
-      <p:sp>
-        <p:nvSpPr>
-          <p:cNvPr id="37" name="Shape 35"/>
-          <p:cNvSpPr/>
-          <p:nvPr/>
-        </p:nvSpPr>
-        <p:spPr>
-          <a:xfrm>
-            <a:off x="2514600" y="4370832"/>
-            <a:ext cx="6263640" cy="457200"/>
-          </a:xfrm>
-          <a:prstGeom prst="rect">
-            <a:avLst>
-              <a:gd name="adj" fmla="val 12000"/>
-            </a:avLst>
-          </a:prstGeom>
-          <a:solidFill>
-            <a:srgbClr val="F8FAFC"/>
-          </a:solidFill>
-          <a:ln w="12700">
-            <a:solidFill>
-              <a:srgbClr val="E2E8F0"/>
-            </a:solidFill>
-            <a:prstDash val="solid"/>
-          </a:ln>
-        </p:spPr>
-      </p:sp>
-      <p:sp>
-        <p:nvSpPr>
-          <p:cNvPr id="38" name="Text 36"/>
-          <p:cNvSpPr/>
-          <p:nvPr/>
-        </p:nvSpPr>
-        <p:spPr>
-          <a:xfrm>
-            <a:off x="2651760" y="4370832"/>
-            <a:ext cx="6035040" cy="457200"/>
-          </a:xfrm>
-          <a:prstGeom prst="rect">
-            <a:avLst/>
-          </a:prstGeom>
-          <a:noFill/>
-          <a:ln/>
-        </p:spPr>
-        <p:txBody>
-          <a:bodyPr wrap="square" rtlCol="0" anchor="ctr"/>
-          <a:lstStyle/>
-          <a:p>
-            <a:pPr algn="l" indent="0" marL="0">
-              <a:buNone/>
-            </a:pPr>
-            <a:r>
-              <a:rPr lang="en-US" sz="1200" dirty="0">
-                <a:solidFill>
-                  <a:srgbClr val="0F172A"/>
-                </a:solidFill>
-                <a:latin typeface="Calibri" pitchFamily="34" charset="0"/>
-                <a:ea typeface="Calibri" pitchFamily="34" charset="-122"/>
-                <a:cs typeface="Calibri" pitchFamily="34" charset="-120"/>
-              </a:rPr>
-              <a:t>Further down or more intense than something else.</a:t>
+              <a:t>going a long way down or in from the top or surface</a:t>
             </a:r>
             <a:endParaRPr lang="en-US" sz="1200" dirty="0"/>
           </a:p>
@@ -40215,7 +39872,7 @@
                 <a:ea typeface="Calibri" pitchFamily="34" charset="-122"/>
                 <a:cs typeface="Calibri" pitchFamily="34" charset="-120"/>
               </a:rPr>
-              <a:t>Word Labs  •  wordlabs.app  •  Root: 'deep' = far down, profound distance</a:t>
+              <a:t>Word Labs  •  wordlabs.app  •  Root: 'deep' = going far down or in</a:t>
             </a:r>
             <a:endParaRPr lang="en-US" sz="800" dirty="0"/>
           </a:p>
@@ -40418,7 +40075,7 @@
                 <a:ea typeface="Calibri" pitchFamily="34" charset="-122"/>
                 <a:cs typeface="Calibri" pitchFamily="34" charset="-120"/>
               </a:rPr>
-              <a:t>The divers explored the deepest part of the ocean where no sunlight reaches.</a:t>
+              <a:t>The lake was so deep that no one could see the bottom.</a:t>
             </a:r>
             <a:endParaRPr lang="en-US" sz="1500" dirty="0"/>
           </a:p>
@@ -40582,7 +40239,7 @@
                 <a:ea typeface="Calibri" pitchFamily="34" charset="-122"/>
                 <a:cs typeface="Calibri" pitchFamily="34" charset="-120"/>
               </a:rPr>
-              <a:t>After the heavy rain, the river began to deepen and flow much faster than before.</a:t>
+              <a:t>The river will deepen after the rain.</a:t>
             </a:r>
             <a:endParaRPr lang="en-US" sz="1500" dirty="0"/>
           </a:p>
@@ -40746,7 +40403,7 @@
                 <a:ea typeface="Calibri" pitchFamily="34" charset="-122"/>
                 <a:cs typeface="Calibri" pitchFamily="34" charset="-120"/>
               </a:rPr>
-              <a:t>She felt deeply grateful for the help her classmates gave her during the science project.</a:t>
+              <a:t>The submarine went deeper into the ocean.</a:t>
             </a:r>
             <a:endParaRPr lang="en-US" sz="1500" dirty="0"/>
           </a:p>
